--- a/deck/output/RxRelay_Hackathon_Pitch.pptx
+++ b/deck/output/RxRelay_Hackathon_Pitch.pptx
@@ -2,22 +2,22 @@
 <file path=ppt/presentation.xml><?xml version="1.0" encoding="utf-8"?>
 <p:presentation xmlns:p="http://schemas.openxmlformats.org/presentationml/2006/main">
   <p:sldMasterIdLst>
-    <p:sldMasterId xmlns:r="http://schemas.openxmlformats.org/officeDocument/2006/relationships" id="2147483648" r:id="Rc0b9a91883cc4a47"/>
+    <p:sldMasterId xmlns:r="http://schemas.openxmlformats.org/officeDocument/2006/relationships" id="2147483648" r:id="Ref0f1dba41194fa2"/>
   </p:sldMasterIdLst>
   <p:notesMasterIdLst>
-    <p:notesMasterId xmlns:r="http://schemas.openxmlformats.org/officeDocument/2006/relationships" r:id="R9ceeb4dc726b4351"/>
+    <p:notesMasterId xmlns:r="http://schemas.openxmlformats.org/officeDocument/2006/relationships" r:id="R01af23654efa47e9"/>
   </p:notesMasterIdLst>
   <p:sldIdLst>
-    <p:sldId xmlns:r="http://schemas.openxmlformats.org/officeDocument/2006/relationships" id="256" r:id="Rbca8fa1eebf14b61"/>
-    <p:sldId xmlns:r="http://schemas.openxmlformats.org/officeDocument/2006/relationships" id="257" r:id="R783565269b384524"/>
-    <p:sldId xmlns:r="http://schemas.openxmlformats.org/officeDocument/2006/relationships" id="258" r:id="Ra27a2d5c5b364f53"/>
-    <p:sldId xmlns:r="http://schemas.openxmlformats.org/officeDocument/2006/relationships" id="259" r:id="Rfd9becf52f1f41e4"/>
-    <p:sldId xmlns:r="http://schemas.openxmlformats.org/officeDocument/2006/relationships" id="260" r:id="R10784f88a5354e97"/>
-    <p:sldId xmlns:r="http://schemas.openxmlformats.org/officeDocument/2006/relationships" id="261" r:id="R28b795a458e240ec"/>
-    <p:sldId xmlns:r="http://schemas.openxmlformats.org/officeDocument/2006/relationships" id="262" r:id="R308c895ff25e47c6"/>
-    <p:sldId xmlns:r="http://schemas.openxmlformats.org/officeDocument/2006/relationships" id="263" r:id="R673d4abe11024f78"/>
-    <p:sldId xmlns:r="http://schemas.openxmlformats.org/officeDocument/2006/relationships" id="264" r:id="R815b291babcc4278"/>
-    <p:sldId xmlns:r="http://schemas.openxmlformats.org/officeDocument/2006/relationships" id="265" r:id="Rdd8f831312944f89"/>
+    <p:sldId xmlns:r="http://schemas.openxmlformats.org/officeDocument/2006/relationships" id="256" r:id="R3d112226332c4541"/>
+    <p:sldId xmlns:r="http://schemas.openxmlformats.org/officeDocument/2006/relationships" id="257" r:id="R271f79e60ad14fe5"/>
+    <p:sldId xmlns:r="http://schemas.openxmlformats.org/officeDocument/2006/relationships" id="258" r:id="R66923060aa8449a5"/>
+    <p:sldId xmlns:r="http://schemas.openxmlformats.org/officeDocument/2006/relationships" id="259" r:id="R4dd8cffdfe3f445f"/>
+    <p:sldId xmlns:r="http://schemas.openxmlformats.org/officeDocument/2006/relationships" id="260" r:id="R3f7ef232dd424dc5"/>
+    <p:sldId xmlns:r="http://schemas.openxmlformats.org/officeDocument/2006/relationships" id="261" r:id="R5eb66c0c99584b72"/>
+    <p:sldId xmlns:r="http://schemas.openxmlformats.org/officeDocument/2006/relationships" id="262" r:id="Raad1ba555f1143c8"/>
+    <p:sldId xmlns:r="http://schemas.openxmlformats.org/officeDocument/2006/relationships" id="263" r:id="R7fc06b2d99b94d54"/>
+    <p:sldId xmlns:r="http://schemas.openxmlformats.org/officeDocument/2006/relationships" id="264" r:id="R5aafd4b683b84a2d"/>
+    <p:sldId xmlns:r="http://schemas.openxmlformats.org/officeDocument/2006/relationships" id="265" r:id="R1a3cf866bf7141bb"/>
   </p:sldIdLst>
   <p:sldSz cx="12192000" cy="6858000"/>
   <p:notesSz cx="6858000" cy="9144000"/>
@@ -521,7 +521,7 @@
           <a:lstStyle xmlns:a="http://schemas.openxmlformats.org/drawingml/2006/main"/>
           <a:p xmlns:a="http://schemas.openxmlformats.org/drawingml/2006/main">
             <a:r>
-              <a:t>End on the product conviction. Invite the judges to try the live board, then show the safety stop. The repo is deliberately documented like a product, not a hackathon code dump.</a:t>
+              <a:t>End on conviction. Invite judges to try the live board and the safety stop. Point to the website and the research lineage so this does not look like a one-weekend toy.</a:t>
             </a:r>
           </a:p>
           <a:p xmlns:a="http://schemas.openxmlformats.org/drawingml/2006/main">
@@ -536,12 +536,37 @@
           </a:p>
           <a:p xmlns:a="http://schemas.openxmlformats.org/drawingml/2006/main">
             <a:r>
-              <a:t>- https://github.com/vnmoorthy/pavo-bench (PAVO reference repository)</a:t>
-            </a:r>
-          </a:p>
-          <a:p xmlns:a="http://schemas.openxmlformats.org/drawingml/2006/main">
-            <a:r>
-              <a:t>- https://github.com/vnmoorthy/lifeline (evidence-gated voice safety patterns)</a:t>
+              <a:t>- https://github.com/vnmoorthy/rxrelay</a:t>
+            </a:r>
+          </a:p>
+          <a:p xmlns:a="http://schemas.openxmlformats.org/drawingml/2006/main">
+            <a:r>
+              <a:t>- https://vnmoorthy.github.io/rxrelay/</a:t>
+            </a:r>
+          </a:p>
+          <a:p xmlns:a="http://schemas.openxmlformats.org/drawingml/2006/main">
+            <a:r>
+              <a:t>- https://openreview.net/forum?id=zrneoIxlFx</a:t>
+            </a:r>
+          </a:p>
+          <a:p xmlns:a="http://schemas.openxmlformats.org/drawingml/2006/main">
+            <a:r>
+              <a:t>- https://github.com/vnmoorthy/pavo-bench</a:t>
+            </a:r>
+          </a:p>
+          <a:p xmlns:a="http://schemas.openxmlformats.org/drawingml/2006/main">
+            <a:r>
+              <a:t>- https://github.com/vnmoorthy/groundtruth</a:t>
+            </a:r>
+          </a:p>
+          <a:p xmlns:a="http://schemas.openxmlformats.org/drawingml/2006/main">
+            <a:r>
+              <a:t>- https://github.com/vnmoorthy/lifeline</a:t>
+            </a:r>
+          </a:p>
+          <a:p xmlns:a="http://schemas.openxmlformats.org/drawingml/2006/main">
+            <a:r>
+              <a:t>- https://github.com/vnmoorthy/mcpobservatory</a:t>
             </a:r>
           </a:p>
           <a:p xmlns:a="http://schemas.openxmlformats.org/drawingml/2006/main">
@@ -1086,7 +1111,37 @@
           <a:lstStyle xmlns:a="http://schemas.openxmlformats.org/drawingml/2006/main"/>
           <a:p xmlns:a="http://schemas.openxmlformats.org/drawingml/2006/main">
             <a:r>
-              <a:t>This is the technical credibility slide. Walk left to right, then call attention to the red bypass: unsafe language does not touch an action tool. The bottom return path is blocked until the deterministic proof gate is satisfied.</a:t>
+              <a:t>This is the wow technical slide. Walk left→right: public edge, isolated voice process, shared core, dashboard/MCP, counterparts. Emphasize the red safe-stop path never touches live outreach, and the amber telephony adapter fails closed.</a:t>
+            </a:r>
+          </a:p>
+          <a:p xmlns:a="http://schemas.openxmlformats.org/drawingml/2006/main">
+            <a:r>
+              <a:t/>
+            </a:r>
+          </a:p>
+          <a:p xmlns:a="http://schemas.openxmlformats.org/drawingml/2006/main">
+            <a:r>
+              <a:t>[Sources]</a:t>
+            </a:r>
+          </a:p>
+          <a:p xmlns:a="http://schemas.openxmlformats.org/drawingml/2006/main">
+            <a:r>
+              <a:t>- https://github.com/vnmoorthy/rxrelay</a:t>
+            </a:r>
+          </a:p>
+          <a:p xmlns:a="http://schemas.openxmlformats.org/drawingml/2006/main">
+            <a:r>
+              <a:t>- https://openreview.net/forum?id=zrneoIxlFx</a:t>
+            </a:r>
+          </a:p>
+          <a:p xmlns:a="http://schemas.openxmlformats.org/drawingml/2006/main">
+            <a:r>
+              <a:t>- https://github.com/vnmoorthy/pavo-bench</a:t>
+            </a:r>
+          </a:p>
+          <a:p xmlns:a="http://schemas.openxmlformats.org/drawingml/2006/main">
+            <a:r>
+              <a:t>[/Sources]</a:t>
             </a:r>
           </a:p>
         </p:txBody>
@@ -1224,7 +1279,7 @@
   </p:cSld>
   <p:clrMap bg1="lt1" tx1="dk1" bg2="lt2" tx2="dk2" accent1="accent1" accent2="accent2" accent3="accent3" accent4="accent4" accent5="accent5" accent6="accent6" hlink="hlink" folHlink="folHlink"/>
   <p:sldLayoutIdLst>
-    <p:sldLayoutId xmlns:r="http://schemas.openxmlformats.org/officeDocument/2006/relationships" id="2147483649" r:id="R615419ecf35a41cf"/>
+    <p:sldLayoutId xmlns:r="http://schemas.openxmlformats.org/officeDocument/2006/relationships" id="2147483649" r:id="R25d36ba51aae4582"/>
   </p:sldLayoutIdLst>
   <p:txStyles>
     <p:titleStyle>
@@ -1775,7 +1830,7 @@
           <p:cNvPr id="28" name="">
             <a:extLst xmlns:a="http://schemas.openxmlformats.org/drawingml/2006/main">
               <a:ext uri="{FF2B5EF4-FFF2-40B4-BE49-F238E27FC236}">
-                <a16:creationId xmlns:a16="http://schemas.microsoft.com/office/drawing/2014/main" id="{CA53C4D3-C7C9-44F6-A94F-7AC35F40EA00}"/>
+                <a16:creationId xmlns:a16="http://schemas.microsoft.com/office/drawing/2014/main" id="{EFE32F41-B3EF-4DAE-B872-A16AA30D468E}"/>
               </a:ext>
             </a:extLst>
           </p:cNvPr>
@@ -1825,7 +1880,7 @@
           <p:cNvPr id="2" name="">
             <a:extLst xmlns:a="http://schemas.openxmlformats.org/drawingml/2006/main">
               <a:ext uri="{FF2B5EF4-FFF2-40B4-BE49-F238E27FC236}">
-                <a16:creationId xmlns:a16="http://schemas.microsoft.com/office/drawing/2014/main" id="{2F980E29-FCEB-45F3-B32A-7F707CAD27FD}"/>
+                <a16:creationId xmlns:a16="http://schemas.microsoft.com/office/drawing/2014/main" id="{36B21E0C-C9FA-4D38-BAF1-FC922C160836}"/>
               </a:ext>
             </a:extLst>
           </p:cNvPr>
@@ -1875,7 +1930,7 @@
           <p:cNvPr id="3" name="">
             <a:extLst xmlns:a="http://schemas.openxmlformats.org/drawingml/2006/main">
               <a:ext uri="{FF2B5EF4-FFF2-40B4-BE49-F238E27FC236}">
-                <a16:creationId xmlns:a16="http://schemas.microsoft.com/office/drawing/2014/main" id="{CAB29D88-0707-4EA7-A59B-A199D97F8A16}"/>
+                <a16:creationId xmlns:a16="http://schemas.microsoft.com/office/drawing/2014/main" id="{43922B6A-FCB3-4F8F-9A56-EA6866C4C0C5}"/>
               </a:ext>
             </a:extLst>
           </p:cNvPr>
@@ -1925,7 +1980,7 @@
           <p:cNvPr id="4" name="">
             <a:extLst xmlns:a="http://schemas.openxmlformats.org/drawingml/2006/main">
               <a:ext uri="{FF2B5EF4-FFF2-40B4-BE49-F238E27FC236}">
-                <a16:creationId xmlns:a16="http://schemas.microsoft.com/office/drawing/2014/main" id="{FE7883FC-B979-4A10-9CB5-27970A8450A0}"/>
+                <a16:creationId xmlns:a16="http://schemas.microsoft.com/office/drawing/2014/main" id="{F65FEF37-0598-4F6C-B6D9-29CB8550E9BE}"/>
               </a:ext>
             </a:extLst>
           </p:cNvPr>
@@ -1975,7 +2030,7 @@
           <p:cNvPr id="5" name="">
             <a:extLst xmlns:a="http://schemas.openxmlformats.org/drawingml/2006/main">
               <a:ext uri="{FF2B5EF4-FFF2-40B4-BE49-F238E27FC236}">
-                <a16:creationId xmlns:a16="http://schemas.microsoft.com/office/drawing/2014/main" id="{C04C8650-C498-4107-9BB5-0099A39A6495}"/>
+                <a16:creationId xmlns:a16="http://schemas.microsoft.com/office/drawing/2014/main" id="{C9FA33F3-A47C-4174-8741-EBF4BFAA586D}"/>
               </a:ext>
             </a:extLst>
           </p:cNvPr>
@@ -2025,7 +2080,7 @@
           <p:cNvPr id="6" name="">
             <a:extLst xmlns:a="http://schemas.openxmlformats.org/drawingml/2006/main">
               <a:ext uri="{FF2B5EF4-FFF2-40B4-BE49-F238E27FC236}">
-                <a16:creationId xmlns:a16="http://schemas.microsoft.com/office/drawing/2014/main" id="{4512F937-2E70-4D07-98E7-95ED3E288525}"/>
+                <a16:creationId xmlns:a16="http://schemas.microsoft.com/office/drawing/2014/main" id="{FA46CDD3-3126-4DDF-B5BE-DF5CC19DA285}"/>
               </a:ext>
             </a:extLst>
           </p:cNvPr>
@@ -2060,7 +2115,7 @@
           <p:cNvPr id="7" name="">
             <a:extLst xmlns:a="http://schemas.openxmlformats.org/drawingml/2006/main">
               <a:ext uri="{FF2B5EF4-FFF2-40B4-BE49-F238E27FC236}">
-                <a16:creationId xmlns:a16="http://schemas.microsoft.com/office/drawing/2014/main" id="{F134360D-85FD-4B55-9AFE-2FB5680CA180}"/>
+                <a16:creationId xmlns:a16="http://schemas.microsoft.com/office/drawing/2014/main" id="{FA83FF17-D1D2-4AB2-AE97-652D4C8B31A4}"/>
               </a:ext>
             </a:extLst>
           </p:cNvPr>
@@ -2110,7 +2165,7 @@
           <p:cNvPr id="8" name="">
             <a:extLst xmlns:a="http://schemas.openxmlformats.org/drawingml/2006/main">
               <a:ext uri="{FF2B5EF4-FFF2-40B4-BE49-F238E27FC236}">
-                <a16:creationId xmlns:a16="http://schemas.microsoft.com/office/drawing/2014/main" id="{9C9D1901-6314-4F25-BF9C-2309E139A5F2}"/>
+                <a16:creationId xmlns:a16="http://schemas.microsoft.com/office/drawing/2014/main" id="{7038EB4B-73FD-4890-98A2-0D25787A7982}"/>
               </a:ext>
             </a:extLst>
           </p:cNvPr>
@@ -2145,7 +2200,7 @@
           <p:cNvPr id="9" name="">
             <a:extLst xmlns:a="http://schemas.openxmlformats.org/drawingml/2006/main">
               <a:ext uri="{FF2B5EF4-FFF2-40B4-BE49-F238E27FC236}">
-                <a16:creationId xmlns:a16="http://schemas.microsoft.com/office/drawing/2014/main" id="{72859D24-0311-44BB-A3E4-829907410AB8}"/>
+                <a16:creationId xmlns:a16="http://schemas.microsoft.com/office/drawing/2014/main" id="{F738877B-A0B7-4793-81FC-3DBB67053E19}"/>
               </a:ext>
             </a:extLst>
           </p:cNvPr>
@@ -2195,7 +2250,7 @@
           <p:cNvPr id="10" name="">
             <a:extLst xmlns:a="http://schemas.openxmlformats.org/drawingml/2006/main">
               <a:ext uri="{FF2B5EF4-FFF2-40B4-BE49-F238E27FC236}">
-                <a16:creationId xmlns:a16="http://schemas.microsoft.com/office/drawing/2014/main" id="{E1D942B9-1787-49F2-906E-647D0234CBAB}"/>
+                <a16:creationId xmlns:a16="http://schemas.microsoft.com/office/drawing/2014/main" id="{B2C799B1-7D0D-425C-9B22-C7611D836B0B}"/>
               </a:ext>
             </a:extLst>
           </p:cNvPr>
@@ -2236,7 +2291,7 @@
           <p:cNvPr id="11" name="">
             <a:extLst xmlns:a="http://schemas.openxmlformats.org/drawingml/2006/main">
               <a:ext uri="{FF2B5EF4-FFF2-40B4-BE49-F238E27FC236}">
-                <a16:creationId xmlns:a16="http://schemas.microsoft.com/office/drawing/2014/main" id="{F1F6E64D-62AB-4777-B40D-29CE12737E45}"/>
+                <a16:creationId xmlns:a16="http://schemas.microsoft.com/office/drawing/2014/main" id="{C3339CCF-1A8A-4EA3-83E4-3B95B261EC37}"/>
               </a:ext>
             </a:extLst>
           </p:cNvPr>
@@ -2303,7 +2358,7 @@
           <p:cNvPr id="12" name="">
             <a:extLst xmlns:a="http://schemas.openxmlformats.org/drawingml/2006/main">
               <a:ext uri="{FF2B5EF4-FFF2-40B4-BE49-F238E27FC236}">
-                <a16:creationId xmlns:a16="http://schemas.microsoft.com/office/drawing/2014/main" id="{9035FD00-2F77-4003-8D37-31CC72C798D8}"/>
+                <a16:creationId xmlns:a16="http://schemas.microsoft.com/office/drawing/2014/main" id="{7CBDBA7F-2E4B-445F-AC52-AABE56D84BD7}"/>
               </a:ext>
             </a:extLst>
           </p:cNvPr>
@@ -2336,7 +2391,7 @@
           <p:cNvPr id="13" name="">
             <a:extLst xmlns:a="http://schemas.openxmlformats.org/drawingml/2006/main">
               <a:ext uri="{FF2B5EF4-FFF2-40B4-BE49-F238E27FC236}">
-                <a16:creationId xmlns:a16="http://schemas.microsoft.com/office/drawing/2014/main" id="{C3E2E9D5-CA0C-4B78-88A1-3D13866245BA}"/>
+                <a16:creationId xmlns:a16="http://schemas.microsoft.com/office/drawing/2014/main" id="{797B7A02-5ECC-41E4-9E68-5FB8B20AF29E}"/>
               </a:ext>
             </a:extLst>
           </p:cNvPr>
@@ -2386,7 +2441,7 @@
           <p:cNvPr id="14" name="">
             <a:extLst xmlns:a="http://schemas.openxmlformats.org/drawingml/2006/main">
               <a:ext uri="{FF2B5EF4-FFF2-40B4-BE49-F238E27FC236}">
-                <a16:creationId xmlns:a16="http://schemas.microsoft.com/office/drawing/2014/main" id="{2FFECD10-3454-4441-8101-B15CA33FAB3E}"/>
+                <a16:creationId xmlns:a16="http://schemas.microsoft.com/office/drawing/2014/main" id="{E0DFF2F4-55D2-4438-92AC-F1D65879B69F}"/>
               </a:ext>
             </a:extLst>
           </p:cNvPr>
@@ -2436,7 +2491,7 @@
           <p:cNvPr id="15" name="">
             <a:extLst xmlns:a="http://schemas.openxmlformats.org/drawingml/2006/main">
               <a:ext uri="{FF2B5EF4-FFF2-40B4-BE49-F238E27FC236}">
-                <a16:creationId xmlns:a16="http://schemas.microsoft.com/office/drawing/2014/main" id="{D84B1827-8E49-4A2B-8BF7-F63894076DDE}"/>
+                <a16:creationId xmlns:a16="http://schemas.microsoft.com/office/drawing/2014/main" id="{28059225-8A26-4CD8-81D1-18D0007039EC}"/>
               </a:ext>
             </a:extLst>
           </p:cNvPr>
@@ -2469,7 +2524,7 @@
           <p:cNvPr id="16" name="">
             <a:extLst xmlns:a="http://schemas.openxmlformats.org/drawingml/2006/main">
               <a:ext uri="{FF2B5EF4-FFF2-40B4-BE49-F238E27FC236}">
-                <a16:creationId xmlns:a16="http://schemas.microsoft.com/office/drawing/2014/main" id="{F9E92D8C-C1F2-48BF-B1DC-34F937FE857D}"/>
+                <a16:creationId xmlns:a16="http://schemas.microsoft.com/office/drawing/2014/main" id="{8B4199D1-1519-4D9F-9A43-8410A7A04C0B}"/>
               </a:ext>
             </a:extLst>
           </p:cNvPr>
@@ -2519,7 +2574,7 @@
           <p:cNvPr id="17" name="">
             <a:extLst xmlns:a="http://schemas.openxmlformats.org/drawingml/2006/main">
               <a:ext uri="{FF2B5EF4-FFF2-40B4-BE49-F238E27FC236}">
-                <a16:creationId xmlns:a16="http://schemas.microsoft.com/office/drawing/2014/main" id="{CAA4FE66-7530-4618-B023-CA9FBB5A8FDE}"/>
+                <a16:creationId xmlns:a16="http://schemas.microsoft.com/office/drawing/2014/main" id="{7A2BA0D9-5693-46E8-A61E-3745C90E1E02}"/>
               </a:ext>
             </a:extLst>
           </p:cNvPr>
@@ -2569,7 +2624,7 @@
           <p:cNvPr id="18" name="">
             <a:extLst xmlns:a="http://schemas.openxmlformats.org/drawingml/2006/main">
               <a:ext uri="{FF2B5EF4-FFF2-40B4-BE49-F238E27FC236}">
-                <a16:creationId xmlns:a16="http://schemas.microsoft.com/office/drawing/2014/main" id="{2B799B2E-C455-439B-BBC4-A3933D8637B8}"/>
+                <a16:creationId xmlns:a16="http://schemas.microsoft.com/office/drawing/2014/main" id="{4BD85DDD-EA99-4EB1-9C20-72CFB49D218A}"/>
               </a:ext>
             </a:extLst>
           </p:cNvPr>
@@ -2602,7 +2657,7 @@
           <p:cNvPr id="19" name="">
             <a:extLst xmlns:a="http://schemas.openxmlformats.org/drawingml/2006/main">
               <a:ext uri="{FF2B5EF4-FFF2-40B4-BE49-F238E27FC236}">
-                <a16:creationId xmlns:a16="http://schemas.microsoft.com/office/drawing/2014/main" id="{59ABD992-2650-48AE-9EF7-C31D13FBFC5B}"/>
+                <a16:creationId xmlns:a16="http://schemas.microsoft.com/office/drawing/2014/main" id="{A57DE4AE-9514-4BE6-899E-1C0D527F2E3A}"/>
               </a:ext>
             </a:extLst>
           </p:cNvPr>
@@ -2652,7 +2707,7 @@
           <p:cNvPr id="20" name="">
             <a:extLst xmlns:a="http://schemas.openxmlformats.org/drawingml/2006/main">
               <a:ext uri="{FF2B5EF4-FFF2-40B4-BE49-F238E27FC236}">
-                <a16:creationId xmlns:a16="http://schemas.microsoft.com/office/drawing/2014/main" id="{ACD730B7-F575-4A34-B322-12B7980839CB}"/>
+                <a16:creationId xmlns:a16="http://schemas.microsoft.com/office/drawing/2014/main" id="{12E17B73-9B19-42B4-A55A-4D1F95C4069D}"/>
               </a:ext>
             </a:extLst>
           </p:cNvPr>
@@ -2702,7 +2757,7 @@
           <p:cNvPr id="21" name="">
             <a:extLst xmlns:a="http://schemas.openxmlformats.org/drawingml/2006/main">
               <a:ext uri="{FF2B5EF4-FFF2-40B4-BE49-F238E27FC236}">
-                <a16:creationId xmlns:a16="http://schemas.microsoft.com/office/drawing/2014/main" id="{FCE03C6D-1A8D-4880-9244-EB9B1657C2F1}"/>
+                <a16:creationId xmlns:a16="http://schemas.microsoft.com/office/drawing/2014/main" id="{2E574388-FE02-4786-BF17-50A5A9EA1D12}"/>
               </a:ext>
             </a:extLst>
           </p:cNvPr>
@@ -2735,7 +2790,7 @@
           <p:cNvPr id="22" name="">
             <a:extLst xmlns:a="http://schemas.openxmlformats.org/drawingml/2006/main">
               <a:ext uri="{FF2B5EF4-FFF2-40B4-BE49-F238E27FC236}">
-                <a16:creationId xmlns:a16="http://schemas.microsoft.com/office/drawing/2014/main" id="{C9714F89-31A2-4C41-9C72-77F30FC9DD00}"/>
+                <a16:creationId xmlns:a16="http://schemas.microsoft.com/office/drawing/2014/main" id="{435B9E5A-FDD4-4E99-9EBD-4A786D898540}"/>
               </a:ext>
             </a:extLst>
           </p:cNvPr>
@@ -2785,7 +2840,7 @@
           <p:cNvPr id="23" name="">
             <a:extLst xmlns:a="http://schemas.openxmlformats.org/drawingml/2006/main">
               <a:ext uri="{FF2B5EF4-FFF2-40B4-BE49-F238E27FC236}">
-                <a16:creationId xmlns:a16="http://schemas.microsoft.com/office/drawing/2014/main" id="{FFA67FA3-85E3-4609-BF0B-BF4636ACD77C}"/>
+                <a16:creationId xmlns:a16="http://schemas.microsoft.com/office/drawing/2014/main" id="{8DDE432D-88B3-4F6C-B7E2-157F962B3EA9}"/>
               </a:ext>
             </a:extLst>
           </p:cNvPr>
@@ -2835,7 +2890,7 @@
           <p:cNvPr id="24" name="">
             <a:extLst xmlns:a="http://schemas.openxmlformats.org/drawingml/2006/main">
               <a:ext uri="{FF2B5EF4-FFF2-40B4-BE49-F238E27FC236}">
-                <a16:creationId xmlns:a16="http://schemas.microsoft.com/office/drawing/2014/main" id="{981FD897-7C10-4036-B46F-CEA62A938ADF}"/>
+                <a16:creationId xmlns:a16="http://schemas.microsoft.com/office/drawing/2014/main" id="{10D58CE2-91B4-4C0A-B411-8F090E3FB676}"/>
               </a:ext>
             </a:extLst>
           </p:cNvPr>
@@ -2868,7 +2923,7 @@
           <p:cNvPr id="25" name="">
             <a:extLst xmlns:a="http://schemas.openxmlformats.org/drawingml/2006/main">
               <a:ext uri="{FF2B5EF4-FFF2-40B4-BE49-F238E27FC236}">
-                <a16:creationId xmlns:a16="http://schemas.microsoft.com/office/drawing/2014/main" id="{44399FB0-C686-45F4-A8A0-A4F98CC7AC5D}"/>
+                <a16:creationId xmlns:a16="http://schemas.microsoft.com/office/drawing/2014/main" id="{7FAEE5FE-1211-4076-9352-B1E02D4BB577}"/>
               </a:ext>
             </a:extLst>
           </p:cNvPr>
@@ -2935,7 +2990,7 @@
           <p:cNvPr id="26" name="">
             <a:extLst xmlns:a="http://schemas.openxmlformats.org/drawingml/2006/main">
               <a:ext uri="{FF2B5EF4-FFF2-40B4-BE49-F238E27FC236}">
-                <a16:creationId xmlns:a16="http://schemas.microsoft.com/office/drawing/2014/main" id="{E6593550-D1FE-46C0-90CF-003BCF3EFE74}"/>
+                <a16:creationId xmlns:a16="http://schemas.microsoft.com/office/drawing/2014/main" id="{9398198E-1A1A-4849-AE28-AE25AAE93E9E}"/>
               </a:ext>
             </a:extLst>
           </p:cNvPr>
@@ -2985,7 +3040,7 @@
           <p:cNvPr id="27" name="">
             <a:extLst xmlns:a="http://schemas.openxmlformats.org/drawingml/2006/main">
               <a:ext uri="{FF2B5EF4-FFF2-40B4-BE49-F238E27FC236}">
-                <a16:creationId xmlns:a16="http://schemas.microsoft.com/office/drawing/2014/main" id="{2ABF2C8D-50F7-493A-B3F6-3AF5F13AE7EC}"/>
+                <a16:creationId xmlns:a16="http://schemas.microsoft.com/office/drawing/2014/main" id="{CC68B182-51AE-43A5-994D-9C14C1BDFB46}"/>
               </a:ext>
             </a:extLst>
           </p:cNvPr>
@@ -3033,7 +3088,7 @@
     </p:spTree>
     <p:extLst>
       <p:ext uri="{BB962C8B-B14F-4D97-AF65-F5344CB8AC3E}">
-        <p14:creationId xmlns:p14="http://schemas.microsoft.com/office/powerpoint/2010/main" val="1918221004"/>
+        <p14:creationId xmlns:p14="http://schemas.microsoft.com/office/powerpoint/2010/main" val="590085454"/>
       </p:ext>
     </p:extLst>
   </p:cSld>
@@ -3061,10 +3116,10 @@
       </p:grpSpPr>
       <p:sp>
         <p:nvSpPr>
-          <p:cNvPr id="16" name="">
-            <a:extLst xmlns:a="http://schemas.openxmlformats.org/drawingml/2006/main">
-              <a:ext uri="{FF2B5EF4-FFF2-40B4-BE49-F238E27FC236}">
-                <a16:creationId xmlns:a16="http://schemas.microsoft.com/office/drawing/2014/main" id="{979FA014-9A83-4FA3-8AB3-610CA70A99BC}"/>
+          <p:cNvPr id="20" name="">
+            <a:extLst xmlns:a="http://schemas.openxmlformats.org/drawingml/2006/main">
+              <a:ext uri="{FF2B5EF4-FFF2-40B4-BE49-F238E27FC236}">
+                <a16:creationId xmlns:a16="http://schemas.microsoft.com/office/drawing/2014/main" id="{F69FAA6C-9E60-4629-B9B1-5DAF9296E1D5}"/>
               </a:ext>
             </a:extLst>
           </p:cNvPr>
@@ -3114,7 +3169,7 @@
           <p:cNvPr id="2" name="">
             <a:extLst xmlns:a="http://schemas.openxmlformats.org/drawingml/2006/main">
               <a:ext uri="{FF2B5EF4-FFF2-40B4-BE49-F238E27FC236}">
-                <a16:creationId xmlns:a16="http://schemas.microsoft.com/office/drawing/2014/main" id="{74B8B11A-C670-4D85-89D1-A5F88DB1098A}"/>
+                <a16:creationId xmlns:a16="http://schemas.microsoft.com/office/drawing/2014/main" id="{1784C5E0-91A3-4150-8DB4-DF8CF3CF8EBB}"/>
               </a:ext>
             </a:extLst>
           </p:cNvPr>
@@ -3164,7 +3219,7 @@
           <p:cNvPr id="3" name="">
             <a:extLst xmlns:a="http://schemas.openxmlformats.org/drawingml/2006/main">
               <a:ext uri="{FF2B5EF4-FFF2-40B4-BE49-F238E27FC236}">
-                <a16:creationId xmlns:a16="http://schemas.microsoft.com/office/drawing/2014/main" id="{2DBA6ED1-6080-4AB7-B0CD-7F7497DC2E3F}"/>
+                <a16:creationId xmlns:a16="http://schemas.microsoft.com/office/drawing/2014/main" id="{7D500528-CEC2-4A36-AA63-4DA6AB4FD2A8}"/>
               </a:ext>
             </a:extLst>
           </p:cNvPr>
@@ -3197,42 +3252,42 @@
           <p:cNvPr id="4" name="">
             <a:extLst xmlns:a="http://schemas.openxmlformats.org/drawingml/2006/main">
               <a:ext uri="{FF2B5EF4-FFF2-40B4-BE49-F238E27FC236}">
-                <a16:creationId xmlns:a16="http://schemas.microsoft.com/office/drawing/2014/main" id="{48EB8F02-D607-47A9-966D-C0B7AC330C9E}"/>
-              </a:ext>
-            </a:extLst>
-          </p:cNvPr>
-          <p:cNvSpPr>
-            <a:spLocks xmlns:a="http://schemas.openxmlformats.org/drawingml/2006/main" noGrp="1"/>
-          </p:cNvSpPr>
-          <p:nvPr/>
-        </p:nvSpPr>
-        <p:spPr>
-          <a:xfrm xmlns:a="http://schemas.openxmlformats.org/drawingml/2006/main">
-            <a:off x="457200" y="1104900"/>
-            <a:ext cx="7762875" cy="1428750"/>
-          </a:xfrm>
-          <a:prstGeom xmlns:a="http://schemas.openxmlformats.org/drawingml/2006/main" prst="rect">
-            <a:avLst/>
-          </a:prstGeom>
-          <a:noFill xmlns:a="http://schemas.openxmlformats.org/drawingml/2006/main"/>
-          <a:ln xmlns:a="http://schemas.openxmlformats.org/drawingml/2006/main" w="0">
-            <a:noFill/>
-            <a:prstDash val="solid"/>
-          </a:ln>
-        </p:spPr>
-        <p:txBody>
-          <a:bodyPr xmlns:a="http://schemas.openxmlformats.org/drawingml/2006/main"/>
-          <a:lstStyle xmlns:a="http://schemas.openxmlformats.org/drawingml/2006/main"/>
-          <a:p xmlns:a="http://schemas.openxmlformats.org/drawingml/2006/main">
-            <a:pPr algn="l">
-              <a:defRPr sz="4050" b="1" i="0">
+                <a16:creationId xmlns:a16="http://schemas.microsoft.com/office/drawing/2014/main" id="{6AF005B0-5E86-45C2-B3DE-FB8C357CD09F}"/>
+              </a:ext>
+            </a:extLst>
+          </p:cNvPr>
+          <p:cNvSpPr>
+            <a:spLocks xmlns:a="http://schemas.openxmlformats.org/drawingml/2006/main" noGrp="1"/>
+          </p:cNvSpPr>
+          <p:nvPr/>
+        </p:nvSpPr>
+        <p:spPr>
+          <a:xfrm xmlns:a="http://schemas.openxmlformats.org/drawingml/2006/main">
+            <a:off x="457200" y="952500"/>
+            <a:ext cx="7762875" cy="1238250"/>
+          </a:xfrm>
+          <a:prstGeom xmlns:a="http://schemas.openxmlformats.org/drawingml/2006/main" prst="rect">
+            <a:avLst/>
+          </a:prstGeom>
+          <a:noFill xmlns:a="http://schemas.openxmlformats.org/drawingml/2006/main"/>
+          <a:ln xmlns:a="http://schemas.openxmlformats.org/drawingml/2006/main" w="0">
+            <a:noFill/>
+            <a:prstDash val="solid"/>
+          </a:ln>
+        </p:spPr>
+        <p:txBody>
+          <a:bodyPr xmlns:a="http://schemas.openxmlformats.org/drawingml/2006/main"/>
+          <a:lstStyle xmlns:a="http://schemas.openxmlformats.org/drawingml/2006/main"/>
+          <a:p xmlns:a="http://schemas.openxmlformats.org/drawingml/2006/main">
+            <a:pPr algn="l">
+              <a:defRPr sz="3600" b="1" i="0">
                 <a:solidFill>
                   <a:srgbClr val="0B1F33"/>
                 </a:solidFill>
               </a:defRPr>
             </a:pPr>
             <a:r>
-              <a:rPr sz="4050" b="1" i="0">
+              <a:rPr sz="3600" b="1" i="0">
                 <a:solidFill>
                   <a:srgbClr val="0B1F33"/>
                 </a:solidFill>
@@ -3242,14 +3297,14 @@
           </a:p>
           <a:p xmlns:a="http://schemas.openxmlformats.org/drawingml/2006/main">
             <a:pPr algn="l">
-              <a:defRPr sz="4050" b="1" i="0">
+              <a:defRPr sz="3600" b="1" i="0">
                 <a:solidFill>
                   <a:srgbClr val="0B1F33"/>
                 </a:solidFill>
               </a:defRPr>
             </a:pPr>
             <a:r>
-              <a:rPr sz="4050" b="1" i="0">
+              <a:rPr sz="3600" b="1" i="0">
                 <a:solidFill>
                   <a:srgbClr val="0B1F33"/>
                 </a:solidFill>
@@ -3264,47 +3319,47 @@
           <p:cNvPr id="5" name="">
             <a:extLst xmlns:a="http://schemas.openxmlformats.org/drawingml/2006/main">
               <a:ext uri="{FF2B5EF4-FFF2-40B4-BE49-F238E27FC236}">
-                <a16:creationId xmlns:a16="http://schemas.microsoft.com/office/drawing/2014/main" id="{F9AD539D-FA82-4219-91F5-1858F70BB07B}"/>
-              </a:ext>
-            </a:extLst>
-          </p:cNvPr>
-          <p:cNvSpPr>
-            <a:spLocks xmlns:a="http://schemas.openxmlformats.org/drawingml/2006/main" noGrp="1"/>
-          </p:cNvSpPr>
-          <p:nvPr/>
-        </p:nvSpPr>
-        <p:spPr>
-          <a:xfrm xmlns:a="http://schemas.openxmlformats.org/drawingml/2006/main">
-            <a:off x="495300" y="2876550"/>
-            <a:ext cx="6381750" cy="523875"/>
-          </a:xfrm>
-          <a:prstGeom xmlns:a="http://schemas.openxmlformats.org/drawingml/2006/main" prst="rect">
-            <a:avLst/>
-          </a:prstGeom>
-          <a:noFill xmlns:a="http://schemas.openxmlformats.org/drawingml/2006/main"/>
-          <a:ln xmlns:a="http://schemas.openxmlformats.org/drawingml/2006/main" w="0">
-            <a:noFill/>
-            <a:prstDash val="solid"/>
-          </a:ln>
-        </p:spPr>
-        <p:txBody>
-          <a:bodyPr xmlns:a="http://schemas.openxmlformats.org/drawingml/2006/main"/>
-          <a:lstStyle xmlns:a="http://schemas.openxmlformats.org/drawingml/2006/main"/>
-          <a:p xmlns:a="http://schemas.openxmlformats.org/drawingml/2006/main">
-            <a:pPr algn="l">
-              <a:defRPr sz="1425" b="0" i="0">
+                <a16:creationId xmlns:a16="http://schemas.microsoft.com/office/drawing/2014/main" id="{120493CB-9FF8-4C45-905B-35092F78F1F5}"/>
+              </a:ext>
+            </a:extLst>
+          </p:cNvPr>
+          <p:cNvSpPr>
+            <a:spLocks xmlns:a="http://schemas.openxmlformats.org/drawingml/2006/main" noGrp="1"/>
+          </p:cNvSpPr>
+          <p:nvPr/>
+        </p:nvSpPr>
+        <p:spPr>
+          <a:xfrm xmlns:a="http://schemas.openxmlformats.org/drawingml/2006/main">
+            <a:off x="495300" y="2428875"/>
+            <a:ext cx="7239000" cy="523875"/>
+          </a:xfrm>
+          <a:prstGeom xmlns:a="http://schemas.openxmlformats.org/drawingml/2006/main" prst="rect">
+            <a:avLst/>
+          </a:prstGeom>
+          <a:noFill xmlns:a="http://schemas.openxmlformats.org/drawingml/2006/main"/>
+          <a:ln xmlns:a="http://schemas.openxmlformats.org/drawingml/2006/main" w="0">
+            <a:noFill/>
+            <a:prstDash val="solid"/>
+          </a:ln>
+        </p:spPr>
+        <p:txBody>
+          <a:bodyPr xmlns:a="http://schemas.openxmlformats.org/drawingml/2006/main"/>
+          <a:lstStyle xmlns:a="http://schemas.openxmlformats.org/drawingml/2006/main"/>
+          <a:p xmlns:a="http://schemas.openxmlformats.org/drawingml/2006/main">
+            <a:pPr algn="l">
+              <a:defRPr sz="1200" b="0" i="0">
                 <a:solidFill>
                   <a:srgbClr val="5F6D80"/>
                 </a:solidFill>
               </a:defRPr>
             </a:pPr>
             <a:r>
-              <a:rPr sz="1425" b="0" i="0">
+              <a:rPr sz="1200" b="0" i="0">
                 <a:solidFill>
                   <a:srgbClr val="5F6D80"/>
                 </a:solidFill>
               </a:rPr>
-              <a:t>RxRelay is the voice coordination layer that turns a consented call into a verifiable outcome.</a:t>
+              <a:t>RxRelay turns a consented call into a verifiable outcome — grounded in PAVO research and the same evidence discipline as Groundtruth, Lifeline, and MCP Observatory.</a:t>
             </a:r>
           </a:p>
         </p:txBody>
@@ -3314,19 +3369,19 @@
           <p:cNvPr id="6" name="">
             <a:extLst xmlns:a="http://schemas.openxmlformats.org/drawingml/2006/main">
               <a:ext uri="{FF2B5EF4-FFF2-40B4-BE49-F238E27FC236}">
-                <a16:creationId xmlns:a16="http://schemas.microsoft.com/office/drawing/2014/main" id="{61032778-6464-4051-97AD-92D28C4372C8}"/>
-              </a:ext>
-            </a:extLst>
-          </p:cNvPr>
-          <p:cNvSpPr>
-            <a:spLocks xmlns:a="http://schemas.openxmlformats.org/drawingml/2006/main" noGrp="1"/>
-          </p:cNvSpPr>
-          <p:nvPr/>
-        </p:nvSpPr>
-        <p:spPr>
-          <a:xfrm xmlns:a="http://schemas.openxmlformats.org/drawingml/2006/main">
-            <a:off x="476250" y="3914775"/>
-            <a:ext cx="4762500" cy="1428750"/>
+                <a16:creationId xmlns:a16="http://schemas.microsoft.com/office/drawing/2014/main" id="{5BD3B5DB-CE21-4F43-9172-75F9547F269B}"/>
+              </a:ext>
+            </a:extLst>
+          </p:cNvPr>
+          <p:cNvSpPr>
+            <a:spLocks xmlns:a="http://schemas.openxmlformats.org/drawingml/2006/main" noGrp="1"/>
+          </p:cNvSpPr>
+          <p:nvPr/>
+        </p:nvSpPr>
+        <p:spPr>
+          <a:xfrm xmlns:a="http://schemas.openxmlformats.org/drawingml/2006/main">
+            <a:off x="476250" y="3238500"/>
+            <a:ext cx="3619500" cy="1428750"/>
           </a:xfrm>
           <a:prstGeom xmlns:a="http://schemas.openxmlformats.org/drawingml/2006/main" prst="roundRect">
             <a:avLst>
@@ -3355,18 +3410,18 @@
           <p:cNvPr id="7" name="">
             <a:extLst xmlns:a="http://schemas.openxmlformats.org/drawingml/2006/main">
               <a:ext uri="{FF2B5EF4-FFF2-40B4-BE49-F238E27FC236}">
-                <a16:creationId xmlns:a16="http://schemas.microsoft.com/office/drawing/2014/main" id="{EE1F2E8E-AFDE-413B-A453-6606672EAEC7}"/>
-              </a:ext>
-            </a:extLst>
-          </p:cNvPr>
-          <p:cNvSpPr>
-            <a:spLocks xmlns:a="http://schemas.openxmlformats.org/drawingml/2006/main" noGrp="1"/>
-          </p:cNvSpPr>
-          <p:nvPr/>
-        </p:nvSpPr>
-        <p:spPr>
-          <a:xfrm xmlns:a="http://schemas.openxmlformats.org/drawingml/2006/main">
-            <a:off x="733425" y="4181475"/>
+                <a16:creationId xmlns:a16="http://schemas.microsoft.com/office/drawing/2014/main" id="{27630D29-E3BA-4655-A761-A8E76968B95F}"/>
+              </a:ext>
+            </a:extLst>
+          </p:cNvPr>
+          <p:cNvSpPr>
+            <a:spLocks xmlns:a="http://schemas.openxmlformats.org/drawingml/2006/main" noGrp="1"/>
+          </p:cNvSpPr>
+          <p:nvPr/>
+        </p:nvSpPr>
+        <p:spPr>
+          <a:xfrm xmlns:a="http://schemas.openxmlformats.org/drawingml/2006/main">
+            <a:off x="733425" y="3476625"/>
             <a:ext cx="1143000" cy="161925"/>
           </a:xfrm>
           <a:prstGeom xmlns:a="http://schemas.openxmlformats.org/drawingml/2006/main" prst="rect">
@@ -3405,64 +3460,64 @@
           <p:cNvPr id="8" name="">
             <a:extLst xmlns:a="http://schemas.openxmlformats.org/drawingml/2006/main">
               <a:ext uri="{FF2B5EF4-FFF2-40B4-BE49-F238E27FC236}">
-                <a16:creationId xmlns:a16="http://schemas.microsoft.com/office/drawing/2014/main" id="{422F9BDA-86A4-48A6-A7D6-BCE9579D534D}"/>
-              </a:ext>
-            </a:extLst>
-          </p:cNvPr>
-          <p:cNvSpPr>
-            <a:spLocks xmlns:a="http://schemas.openxmlformats.org/drawingml/2006/main" noGrp="1"/>
-          </p:cNvSpPr>
-          <p:nvPr/>
-        </p:nvSpPr>
-        <p:spPr>
-          <a:xfrm xmlns:a="http://schemas.openxmlformats.org/drawingml/2006/main">
-            <a:off x="733425" y="4505325"/>
-            <a:ext cx="3810000" cy="495300"/>
-          </a:xfrm>
-          <a:prstGeom xmlns:a="http://schemas.openxmlformats.org/drawingml/2006/main" prst="rect">
-            <a:avLst/>
-          </a:prstGeom>
-          <a:noFill xmlns:a="http://schemas.openxmlformats.org/drawingml/2006/main"/>
-          <a:ln xmlns:a="http://schemas.openxmlformats.org/drawingml/2006/main" w="0">
-            <a:noFill/>
-            <a:prstDash val="solid"/>
-          </a:ln>
-        </p:spPr>
-        <p:txBody>
-          <a:bodyPr xmlns:a="http://schemas.openxmlformats.org/drawingml/2006/main"/>
-          <a:lstStyle xmlns:a="http://schemas.openxmlformats.org/drawingml/2006/main"/>
-          <a:p xmlns:a="http://schemas.openxmlformats.org/drawingml/2006/main">
-            <a:pPr algn="l">
-              <a:defRPr sz="1800" b="1" i="0">
+                <a16:creationId xmlns:a16="http://schemas.microsoft.com/office/drawing/2014/main" id="{F4179D3A-E828-46B3-8F06-B10FE52A3850}"/>
+              </a:ext>
+            </a:extLst>
+          </p:cNvPr>
+          <p:cNvSpPr>
+            <a:spLocks xmlns:a="http://schemas.openxmlformats.org/drawingml/2006/main" noGrp="1"/>
+          </p:cNvSpPr>
+          <p:nvPr/>
+        </p:nvSpPr>
+        <p:spPr>
+          <a:xfrm xmlns:a="http://schemas.openxmlformats.org/drawingml/2006/main">
+            <a:off x="733425" y="3810000"/>
+            <a:ext cx="3048000" cy="523875"/>
+          </a:xfrm>
+          <a:prstGeom xmlns:a="http://schemas.openxmlformats.org/drawingml/2006/main" prst="rect">
+            <a:avLst/>
+          </a:prstGeom>
+          <a:noFill xmlns:a="http://schemas.openxmlformats.org/drawingml/2006/main"/>
+          <a:ln xmlns:a="http://schemas.openxmlformats.org/drawingml/2006/main" w="0">
+            <a:noFill/>
+            <a:prstDash val="solid"/>
+          </a:ln>
+        </p:spPr>
+        <p:txBody>
+          <a:bodyPr xmlns:a="http://schemas.openxmlformats.org/drawingml/2006/main"/>
+          <a:lstStyle xmlns:a="http://schemas.openxmlformats.org/drawingml/2006/main"/>
+          <a:p xmlns:a="http://schemas.openxmlformats.org/drawingml/2006/main">
+            <a:pPr algn="l">
+              <a:defRPr sz="1650" b="1" i="0">
                 <a:solidFill>
                   <a:srgbClr val="FFFFFF"/>
                 </a:solidFill>
               </a:defRPr>
             </a:pPr>
             <a:r>
-              <a:rPr sz="1800" b="1" i="0">
+              <a:rPr sz="1650" b="1" i="0">
                 <a:solidFill>
                   <a:srgbClr val="FFFFFF"/>
                 </a:solidFill>
               </a:rPr>
-              <a:t>Run the proof board.</a:t>
-            </a:r>
-          </a:p>
-          <a:p xmlns:a="http://schemas.openxmlformats.org/drawingml/2006/main">
-            <a:pPr algn="l">
-              <a:defRPr sz="1800" b="1" i="0">
+              <a:t>Proof board + unsafe branch.</a:t>
+            </a:r>
+          </a:p>
+          <a:p xmlns:a="http://schemas.openxmlformats.org/drawingml/2006/main">
+            <a:pPr algn="l">
+              <a:defRPr sz="1650" b="1" i="0">
                 <a:solidFill>
                   <a:srgbClr val="FFFFFF"/>
                 </a:solidFill>
               </a:defRPr>
             </a:pPr>
             <a:r>
-              <a:rPr sz="1800" b="1" i="0">
+              <a:rPr sz="1650" b="1" i="0">
                 <a:solidFill>
                   <a:srgbClr val="FFFFFF"/>
                 </a:solidFill>
               </a:rPr>
-              <a:t>Try the unsafe branch.</a:t>
+              <a:t>Call the claimed number.</a:t>
             </a:r>
           </a:p>
         </p:txBody>
@@ -3472,19 +3527,19 @@
           <p:cNvPr id="9" name="">
             <a:extLst xmlns:a="http://schemas.openxmlformats.org/drawingml/2006/main">
               <a:ext uri="{FF2B5EF4-FFF2-40B4-BE49-F238E27FC236}">
-                <a16:creationId xmlns:a16="http://schemas.microsoft.com/office/drawing/2014/main" id="{40FC12AA-A403-48B1-99F2-3E7EB0B27A52}"/>
-              </a:ext>
-            </a:extLst>
-          </p:cNvPr>
-          <p:cNvSpPr>
-            <a:spLocks xmlns:a="http://schemas.openxmlformats.org/drawingml/2006/main" noGrp="1"/>
-          </p:cNvSpPr>
-          <p:nvPr/>
-        </p:nvSpPr>
-        <p:spPr>
-          <a:xfrm xmlns:a="http://schemas.openxmlformats.org/drawingml/2006/main">
-            <a:off x="5543550" y="3914775"/>
-            <a:ext cx="5734050" cy="1428750"/>
+                <a16:creationId xmlns:a16="http://schemas.microsoft.com/office/drawing/2014/main" id="{23EFE299-EBD1-4AA1-B07A-3B066EF5F715}"/>
+              </a:ext>
+            </a:extLst>
+          </p:cNvPr>
+          <p:cNvSpPr>
+            <a:spLocks xmlns:a="http://schemas.openxmlformats.org/drawingml/2006/main" noGrp="1"/>
+          </p:cNvSpPr>
+          <p:nvPr/>
+        </p:nvSpPr>
+        <p:spPr>
+          <a:xfrm xmlns:a="http://schemas.openxmlformats.org/drawingml/2006/main">
+            <a:off x="4286250" y="3238500"/>
+            <a:ext cx="3619500" cy="1428750"/>
           </a:xfrm>
           <a:prstGeom xmlns:a="http://schemas.openxmlformats.org/drawingml/2006/main" prst="roundRect">
             <a:avLst>
@@ -3513,18 +3568,18 @@
           <p:cNvPr id="10" name="">
             <a:extLst xmlns:a="http://schemas.openxmlformats.org/drawingml/2006/main">
               <a:ext uri="{FF2B5EF4-FFF2-40B4-BE49-F238E27FC236}">
-                <a16:creationId xmlns:a16="http://schemas.microsoft.com/office/drawing/2014/main" id="{B1548BDB-50BA-454A-BDB6-1FF21BCDEAA0}"/>
-              </a:ext>
-            </a:extLst>
-          </p:cNvPr>
-          <p:cNvSpPr>
-            <a:spLocks xmlns:a="http://schemas.openxmlformats.org/drawingml/2006/main" noGrp="1"/>
-          </p:cNvSpPr>
-          <p:nvPr/>
-        </p:nvSpPr>
-        <p:spPr>
-          <a:xfrm xmlns:a="http://schemas.openxmlformats.org/drawingml/2006/main">
-            <a:off x="5810250" y="4181475"/>
+                <a16:creationId xmlns:a16="http://schemas.microsoft.com/office/drawing/2014/main" id="{1E86902E-0E1C-46B2-863A-08F51F34B139}"/>
+              </a:ext>
+            </a:extLst>
+          </p:cNvPr>
+          <p:cNvSpPr>
+            <a:spLocks xmlns:a="http://schemas.openxmlformats.org/drawingml/2006/main" noGrp="1"/>
+          </p:cNvSpPr>
+          <p:nvPr/>
+        </p:nvSpPr>
+        <p:spPr>
+          <a:xfrm xmlns:a="http://schemas.openxmlformats.org/drawingml/2006/main">
+            <a:off x="4552950" y="3476625"/>
             <a:ext cx="1714500" cy="161925"/>
           </a:xfrm>
           <a:prstGeom xmlns:a="http://schemas.openxmlformats.org/drawingml/2006/main" prst="rect">
@@ -3563,42 +3618,42 @@
           <p:cNvPr id="11" name="">
             <a:extLst xmlns:a="http://schemas.openxmlformats.org/drawingml/2006/main">
               <a:ext uri="{FF2B5EF4-FFF2-40B4-BE49-F238E27FC236}">
-                <a16:creationId xmlns:a16="http://schemas.microsoft.com/office/drawing/2014/main" id="{6B60486C-576F-4049-9A19-5CF912645A55}"/>
-              </a:ext>
-            </a:extLst>
-          </p:cNvPr>
-          <p:cNvSpPr>
-            <a:spLocks xmlns:a="http://schemas.openxmlformats.org/drawingml/2006/main" noGrp="1"/>
-          </p:cNvSpPr>
-          <p:nvPr/>
-        </p:nvSpPr>
-        <p:spPr>
-          <a:xfrm xmlns:a="http://schemas.openxmlformats.org/drawingml/2006/main">
-            <a:off x="5810250" y="4505325"/>
-            <a:ext cx="4953000" cy="495300"/>
-          </a:xfrm>
-          <a:prstGeom xmlns:a="http://schemas.openxmlformats.org/drawingml/2006/main" prst="rect">
-            <a:avLst/>
-          </a:prstGeom>
-          <a:noFill xmlns:a="http://schemas.openxmlformats.org/drawingml/2006/main"/>
-          <a:ln xmlns:a="http://schemas.openxmlformats.org/drawingml/2006/main" w="0">
-            <a:noFill/>
-            <a:prstDash val="solid"/>
-          </a:ln>
-        </p:spPr>
-        <p:txBody>
-          <a:bodyPr xmlns:a="http://schemas.openxmlformats.org/drawingml/2006/main"/>
-          <a:lstStyle xmlns:a="http://schemas.openxmlformats.org/drawingml/2006/main"/>
-          <a:p xmlns:a="http://schemas.openxmlformats.org/drawingml/2006/main">
-            <a:pPr algn="l">
-              <a:defRPr sz="1800" b="1" i="0">
+                <a16:creationId xmlns:a16="http://schemas.microsoft.com/office/drawing/2014/main" id="{87893FB4-E962-4B66-A0E6-C28A5F369DB0}"/>
+              </a:ext>
+            </a:extLst>
+          </p:cNvPr>
+          <p:cNvSpPr>
+            <a:spLocks xmlns:a="http://schemas.openxmlformats.org/drawingml/2006/main" noGrp="1"/>
+          </p:cNvSpPr>
+          <p:nvPr/>
+        </p:nvSpPr>
+        <p:spPr>
+          <a:xfrm xmlns:a="http://schemas.openxmlformats.org/drawingml/2006/main">
+            <a:off x="4552950" y="3810000"/>
+            <a:ext cx="3048000" cy="523875"/>
+          </a:xfrm>
+          <a:prstGeom xmlns:a="http://schemas.openxmlformats.org/drawingml/2006/main" prst="rect">
+            <a:avLst/>
+          </a:prstGeom>
+          <a:noFill xmlns:a="http://schemas.openxmlformats.org/drawingml/2006/main"/>
+          <a:ln xmlns:a="http://schemas.openxmlformats.org/drawingml/2006/main" w="0">
+            <a:noFill/>
+            <a:prstDash val="solid"/>
+          </a:ln>
+        </p:spPr>
+        <p:txBody>
+          <a:bodyPr xmlns:a="http://schemas.openxmlformats.org/drawingml/2006/main"/>
+          <a:lstStyle xmlns:a="http://schemas.openxmlformats.org/drawingml/2006/main"/>
+          <a:p xmlns:a="http://schemas.openxmlformats.org/drawingml/2006/main">
+            <a:pPr algn="l">
+              <a:defRPr sz="1650" b="1" i="0">
                 <a:solidFill>
                   <a:srgbClr val="0B1F33"/>
                 </a:solidFill>
               </a:defRPr>
             </a:pPr>
             <a:r>
-              <a:rPr sz="1800" b="1" i="0">
+              <a:rPr sz="1650" b="1" i="0">
                 <a:solidFill>
                   <a:srgbClr val="0B1F33"/>
                 </a:solidFill>
@@ -3608,14 +3663,14 @@
           </a:p>
           <a:p xmlns:a="http://schemas.openxmlformats.org/drawingml/2006/main">
             <a:pPr algn="l">
-              <a:defRPr sz="1800" b="1" i="0">
+              <a:defRPr sz="1650" b="1" i="0">
                 <a:solidFill>
                   <a:srgbClr val="0B1F33"/>
                 </a:solidFill>
               </a:defRPr>
             </a:pPr>
             <a:r>
-              <a:rPr sz="1800" b="1" i="0">
+              <a:rPr sz="1650" b="1" i="0">
                 <a:solidFill>
                   <a:srgbClr val="0B1F33"/>
                 </a:solidFill>
@@ -3630,46 +3685,204 @@
           <p:cNvPr id="12" name="">
             <a:extLst xmlns:a="http://schemas.openxmlformats.org/drawingml/2006/main">
               <a:ext uri="{FF2B5EF4-FFF2-40B4-BE49-F238E27FC236}">
-                <a16:creationId xmlns:a16="http://schemas.microsoft.com/office/drawing/2014/main" id="{BA7AF75D-372E-4DC2-97C6-C4CFB127CB99}"/>
-              </a:ext>
-            </a:extLst>
-          </p:cNvPr>
-          <p:cNvSpPr>
-            <a:spLocks xmlns:a="http://schemas.openxmlformats.org/drawingml/2006/main" noGrp="1"/>
-          </p:cNvSpPr>
-          <p:nvPr/>
-        </p:nvSpPr>
-        <p:spPr>
-          <a:xfrm xmlns:a="http://schemas.openxmlformats.org/drawingml/2006/main">
-            <a:off x="476250" y="5848350"/>
-            <a:ext cx="5715000" cy="228600"/>
-          </a:xfrm>
-          <a:prstGeom xmlns:a="http://schemas.openxmlformats.org/drawingml/2006/main" prst="rect">
-            <a:avLst/>
-          </a:prstGeom>
-          <a:noFill xmlns:a="http://schemas.openxmlformats.org/drawingml/2006/main"/>
-          <a:ln xmlns:a="http://schemas.openxmlformats.org/drawingml/2006/main" w="0">
-            <a:noFill/>
-            <a:prstDash val="solid"/>
-          </a:ln>
-        </p:spPr>
-        <p:txBody>
-          <a:bodyPr xmlns:a="http://schemas.openxmlformats.org/drawingml/2006/main"/>
-          <a:lstStyle xmlns:a="http://schemas.openxmlformats.org/drawingml/2006/main"/>
-          <a:p xmlns:a="http://schemas.openxmlformats.org/drawingml/2006/main">
-            <a:pPr algn="l">
-              <a:defRPr sz="1275" b="1" i="0">
+                <a16:creationId xmlns:a16="http://schemas.microsoft.com/office/drawing/2014/main" id="{EC8DE040-9267-4D76-8860-A1F2CF7021FA}"/>
+              </a:ext>
+            </a:extLst>
+          </p:cNvPr>
+          <p:cNvSpPr>
+            <a:spLocks xmlns:a="http://schemas.openxmlformats.org/drawingml/2006/main" noGrp="1"/>
+          </p:cNvSpPr>
+          <p:nvPr/>
+        </p:nvSpPr>
+        <p:spPr>
+          <a:xfrm xmlns:a="http://schemas.openxmlformats.org/drawingml/2006/main">
+            <a:off x="8096250" y="3238500"/>
+            <a:ext cx="3638550" cy="1428750"/>
+          </a:xfrm>
+          <a:prstGeom xmlns:a="http://schemas.openxmlformats.org/drawingml/2006/main" prst="roundRect">
+            <a:avLst>
+              <a:gd name="adj" fmla="val 8000"/>
+            </a:avLst>
+          </a:prstGeom>
+          <a:solidFill xmlns:a="http://schemas.openxmlformats.org/drawingml/2006/main">
+            <a:srgbClr val="E5F0FF"/>
+          </a:solidFill>
+          <a:ln xmlns:a="http://schemas.openxmlformats.org/drawingml/2006/main" w="9525">
+            <a:solidFill>
+              <a:srgbClr val="E5F0FF"/>
+            </a:solidFill>
+            <a:prstDash val="solid"/>
+          </a:ln>
+        </p:spPr>
+        <p:style>
+          <a:lnRef xmlns:a="http://schemas.openxmlformats.org/drawingml/2006/main" idx="0"/>
+          <a:fillRef xmlns:a="http://schemas.openxmlformats.org/drawingml/2006/main" idx="0"/>
+          <a:effectRef xmlns:a="http://schemas.openxmlformats.org/drawingml/2006/main" idx="4"/>
+          <a:fontRef xmlns:a="http://schemas.openxmlformats.org/drawingml/2006/main" idx="major"/>
+        </p:style>
+      </p:sp>
+      <p:sp>
+        <p:nvSpPr>
+          <p:cNvPr id="13" name="">
+            <a:extLst xmlns:a="http://schemas.openxmlformats.org/drawingml/2006/main">
+              <a:ext uri="{FF2B5EF4-FFF2-40B4-BE49-F238E27FC236}">
+                <a16:creationId xmlns:a16="http://schemas.microsoft.com/office/drawing/2014/main" id="{6FFDB88E-AD59-402B-8D10-DF9ACDC1C656}"/>
+              </a:ext>
+            </a:extLst>
+          </p:cNvPr>
+          <p:cNvSpPr>
+            <a:spLocks xmlns:a="http://schemas.openxmlformats.org/drawingml/2006/main" noGrp="1"/>
+          </p:cNvSpPr>
+          <p:nvPr/>
+        </p:nvSpPr>
+        <p:spPr>
+          <a:xfrm xmlns:a="http://schemas.openxmlformats.org/drawingml/2006/main">
+            <a:off x="8362950" y="3476625"/>
+            <a:ext cx="1905000" cy="161925"/>
+          </a:xfrm>
+          <a:prstGeom xmlns:a="http://schemas.openxmlformats.org/drawingml/2006/main" prst="rect">
+            <a:avLst/>
+          </a:prstGeom>
+          <a:noFill xmlns:a="http://schemas.openxmlformats.org/drawingml/2006/main"/>
+          <a:ln xmlns:a="http://schemas.openxmlformats.org/drawingml/2006/main" w="0">
+            <a:noFill/>
+            <a:prstDash val="solid"/>
+          </a:ln>
+        </p:spPr>
+        <p:txBody>
+          <a:bodyPr xmlns:a="http://schemas.openxmlformats.org/drawingml/2006/main"/>
+          <a:lstStyle xmlns:a="http://schemas.openxmlformats.org/drawingml/2006/main"/>
+          <a:p xmlns:a="http://schemas.openxmlformats.org/drawingml/2006/main">
+            <a:pPr algn="l">
+              <a:defRPr sz="750" b="1" i="0">
                 <a:solidFill>
                   <a:srgbClr val="3D8DFF"/>
                 </a:solidFill>
               </a:defRPr>
             </a:pPr>
             <a:r>
-              <a:rPr sz="1275" b="1" i="0">
+              <a:rPr sz="750" b="1" i="0">
                 <a:solidFill>
                   <a:srgbClr val="3D8DFF"/>
                 </a:solidFill>
               </a:rPr>
+              <a:t>TRUSTED LINEAGE</a:t>
+            </a:r>
+          </a:p>
+        </p:txBody>
+      </p:sp>
+      <p:sp>
+        <p:nvSpPr>
+          <p:cNvPr id="14" name="">
+            <a:extLst xmlns:a="http://schemas.openxmlformats.org/drawingml/2006/main">
+              <a:ext uri="{FF2B5EF4-FFF2-40B4-BE49-F238E27FC236}">
+                <a16:creationId xmlns:a16="http://schemas.microsoft.com/office/drawing/2014/main" id="{CCEC7D7E-03BD-478A-A09E-E1A0AAEDBAA1}"/>
+              </a:ext>
+            </a:extLst>
+          </p:cNvPr>
+          <p:cNvSpPr>
+            <a:spLocks xmlns:a="http://schemas.openxmlformats.org/drawingml/2006/main" noGrp="1"/>
+          </p:cNvSpPr>
+          <p:nvPr/>
+        </p:nvSpPr>
+        <p:spPr>
+          <a:xfrm xmlns:a="http://schemas.openxmlformats.org/drawingml/2006/main">
+            <a:off x="8362950" y="3810000"/>
+            <a:ext cx="3048000" cy="523875"/>
+          </a:xfrm>
+          <a:prstGeom xmlns:a="http://schemas.openxmlformats.org/drawingml/2006/main" prst="rect">
+            <a:avLst/>
+          </a:prstGeom>
+          <a:noFill xmlns:a="http://schemas.openxmlformats.org/drawingml/2006/main"/>
+          <a:ln xmlns:a="http://schemas.openxmlformats.org/drawingml/2006/main" w="0">
+            <a:noFill/>
+            <a:prstDash val="solid"/>
+          </a:ln>
+        </p:spPr>
+        <p:txBody>
+          <a:bodyPr xmlns:a="http://schemas.openxmlformats.org/drawingml/2006/main"/>
+          <a:lstStyle xmlns:a="http://schemas.openxmlformats.org/drawingml/2006/main"/>
+          <a:p xmlns:a="http://schemas.openxmlformats.org/drawingml/2006/main">
+            <a:pPr algn="l">
+              <a:defRPr sz="1350" b="1" i="0">
+                <a:solidFill>
+                  <a:srgbClr val="0B1F33"/>
+                </a:solidFill>
+              </a:defRPr>
+            </a:pPr>
+            <a:r>
+              <a:rPr sz="1350" b="1" i="0">
+                <a:solidFill>
+                  <a:srgbClr val="0B1F33"/>
+                </a:solidFill>
+              </a:rPr>
+              <a:t>PAVO paper · pavo-bench</a:t>
+            </a:r>
+          </a:p>
+          <a:p xmlns:a="http://schemas.openxmlformats.org/drawingml/2006/main">
+            <a:pPr algn="l">
+              <a:defRPr sz="1350" b="1" i="0">
+                <a:solidFill>
+                  <a:srgbClr val="0B1F33"/>
+                </a:solidFill>
+              </a:defRPr>
+            </a:pPr>
+            <a:r>
+              <a:rPr sz="1350" b="1" i="0">
+                <a:solidFill>
+                  <a:srgbClr val="0B1F33"/>
+                </a:solidFill>
+              </a:rPr>
+              <a:t>Groundtruth · Lifeline · MCPobs</a:t>
+            </a:r>
+          </a:p>
+        </p:txBody>
+      </p:sp>
+      <p:sp>
+        <p:nvSpPr>
+          <p:cNvPr id="15" name="">
+            <a:extLst xmlns:a="http://schemas.openxmlformats.org/drawingml/2006/main">
+              <a:ext uri="{FF2B5EF4-FFF2-40B4-BE49-F238E27FC236}">
+                <a16:creationId xmlns:a16="http://schemas.microsoft.com/office/drawing/2014/main" id="{A919EE0D-F9DE-4A27-9A68-DCEF7A04EB5A}"/>
+              </a:ext>
+            </a:extLst>
+          </p:cNvPr>
+          <p:cNvSpPr>
+            <a:spLocks xmlns:a="http://schemas.openxmlformats.org/drawingml/2006/main" noGrp="1"/>
+          </p:cNvSpPr>
+          <p:nvPr/>
+        </p:nvSpPr>
+        <p:spPr>
+          <a:xfrm xmlns:a="http://schemas.openxmlformats.org/drawingml/2006/main">
+            <a:off x="476250" y="5048250"/>
+            <a:ext cx="4762500" cy="228600"/>
+          </a:xfrm>
+          <a:prstGeom xmlns:a="http://schemas.openxmlformats.org/drawingml/2006/main" prst="rect">
+            <a:avLst/>
+          </a:prstGeom>
+          <a:noFill xmlns:a="http://schemas.openxmlformats.org/drawingml/2006/main"/>
+          <a:ln xmlns:a="http://schemas.openxmlformats.org/drawingml/2006/main" w="0">
+            <a:noFill/>
+            <a:prstDash val="solid"/>
+          </a:ln>
+        </p:spPr>
+        <p:txBody>
+          <a:bodyPr xmlns:a="http://schemas.openxmlformats.org/drawingml/2006/main"/>
+          <a:lstStyle xmlns:a="http://schemas.openxmlformats.org/drawingml/2006/main"/>
+          <a:p xmlns:a="http://schemas.openxmlformats.org/drawingml/2006/main">
+            <a:pPr algn="l">
+              <a:defRPr sz="1350" b="1" i="0">
+                <a:solidFill>
+                  <a:srgbClr val="3D8DFF"/>
+                </a:solidFill>
+              </a:defRPr>
+            </a:pPr>
+            <a:r>
+              <a:rPr sz="1350" b="1" i="0">
+                <a:solidFill>
+                  <a:srgbClr val="3D8DFF"/>
+                </a:solidFill>
+              </a:rPr>
               <a:t>github.com/vnmoorthy/rxrelay</a:t>
             </a:r>
           </a:p>
@@ -3677,60 +3890,110 @@
       </p:sp>
       <p:sp>
         <p:nvSpPr>
-          <p:cNvPr id="13" name="">
-            <a:extLst xmlns:a="http://schemas.openxmlformats.org/drawingml/2006/main">
-              <a:ext uri="{FF2B5EF4-FFF2-40B4-BE49-F238E27FC236}">
-                <a16:creationId xmlns:a16="http://schemas.microsoft.com/office/drawing/2014/main" id="{AEC67BC7-45F2-4EDC-BEF1-A968CAC59C0A}"/>
-              </a:ext>
-            </a:extLst>
-          </p:cNvPr>
-          <p:cNvSpPr>
-            <a:spLocks xmlns:a="http://schemas.openxmlformats.org/drawingml/2006/main" noGrp="1"/>
-          </p:cNvSpPr>
-          <p:nvPr/>
-        </p:nvSpPr>
-        <p:spPr>
-          <a:xfrm xmlns:a="http://schemas.openxmlformats.org/drawingml/2006/main">
-            <a:off x="476250" y="6162675"/>
-            <a:ext cx="7620000" cy="152400"/>
-          </a:xfrm>
-          <a:prstGeom xmlns:a="http://schemas.openxmlformats.org/drawingml/2006/main" prst="rect">
-            <a:avLst/>
-          </a:prstGeom>
-          <a:noFill xmlns:a="http://schemas.openxmlformats.org/drawingml/2006/main"/>
-          <a:ln xmlns:a="http://schemas.openxmlformats.org/drawingml/2006/main" w="0">
-            <a:noFill/>
-            <a:prstDash val="solid"/>
-          </a:ln>
-        </p:spPr>
-        <p:txBody>
-          <a:bodyPr xmlns:a="http://schemas.openxmlformats.org/drawingml/2006/main"/>
-          <a:lstStyle xmlns:a="http://schemas.openxmlformats.org/drawingml/2006/main"/>
-          <a:p xmlns:a="http://schemas.openxmlformats.org/drawingml/2006/main">
-            <a:pPr algn="l">
-              <a:defRPr sz="750" b="0" i="0">
+          <p:cNvPr id="16" name="">
+            <a:extLst xmlns:a="http://schemas.openxmlformats.org/drawingml/2006/main">
+              <a:ext uri="{FF2B5EF4-FFF2-40B4-BE49-F238E27FC236}">
+                <a16:creationId xmlns:a16="http://schemas.microsoft.com/office/drawing/2014/main" id="{6EB2D737-5734-4259-B17D-3F3FEE307FA9}"/>
+              </a:ext>
+            </a:extLst>
+          </p:cNvPr>
+          <p:cNvSpPr>
+            <a:spLocks xmlns:a="http://schemas.openxmlformats.org/drawingml/2006/main" noGrp="1"/>
+          </p:cNvSpPr>
+          <p:nvPr/>
+        </p:nvSpPr>
+        <p:spPr>
+          <a:xfrm xmlns:a="http://schemas.openxmlformats.org/drawingml/2006/main">
+            <a:off x="476250" y="5334000"/>
+            <a:ext cx="4762500" cy="209550"/>
+          </a:xfrm>
+          <a:prstGeom xmlns:a="http://schemas.openxmlformats.org/drawingml/2006/main" prst="rect">
+            <a:avLst/>
+          </a:prstGeom>
+          <a:noFill xmlns:a="http://schemas.openxmlformats.org/drawingml/2006/main"/>
+          <a:ln xmlns:a="http://schemas.openxmlformats.org/drawingml/2006/main" w="0">
+            <a:noFill/>
+            <a:prstDash val="solid"/>
+          </a:ln>
+        </p:spPr>
+        <p:txBody>
+          <a:bodyPr xmlns:a="http://schemas.openxmlformats.org/drawingml/2006/main"/>
+          <a:lstStyle xmlns:a="http://schemas.openxmlformats.org/drawingml/2006/main"/>
+          <a:p xmlns:a="http://schemas.openxmlformats.org/drawingml/2006/main">
+            <a:pPr algn="l">
+              <a:defRPr sz="1200" b="1" i="0">
+                <a:solidFill>
+                  <a:srgbClr val="0E9F8E"/>
+                </a:solidFill>
+              </a:defRPr>
+            </a:pPr>
+            <a:r>
+              <a:rPr sz="1200" b="1" i="0">
+                <a:solidFill>
+                  <a:srgbClr val="0E9F8E"/>
+                </a:solidFill>
+              </a:rPr>
+              <a:t>vnmoorthy.github.io/rxrelay</a:t>
+            </a:r>
+          </a:p>
+        </p:txBody>
+      </p:sp>
+      <p:sp>
+        <p:nvSpPr>
+          <p:cNvPr id="17" name="">
+            <a:extLst xmlns:a="http://schemas.openxmlformats.org/drawingml/2006/main">
+              <a:ext uri="{FF2B5EF4-FFF2-40B4-BE49-F238E27FC236}">
+                <a16:creationId xmlns:a16="http://schemas.microsoft.com/office/drawing/2014/main" id="{7520AE4F-EBCE-4454-977C-16D2F63E6D95}"/>
+              </a:ext>
+            </a:extLst>
+          </p:cNvPr>
+          <p:cNvSpPr>
+            <a:spLocks xmlns:a="http://schemas.openxmlformats.org/drawingml/2006/main" noGrp="1"/>
+          </p:cNvSpPr>
+          <p:nvPr/>
+        </p:nvSpPr>
+        <p:spPr>
+          <a:xfrm xmlns:a="http://schemas.openxmlformats.org/drawingml/2006/main">
+            <a:off x="476250" y="5715000"/>
+            <a:ext cx="8572500" cy="171450"/>
+          </a:xfrm>
+          <a:prstGeom xmlns:a="http://schemas.openxmlformats.org/drawingml/2006/main" prst="rect">
+            <a:avLst/>
+          </a:prstGeom>
+          <a:noFill xmlns:a="http://schemas.openxmlformats.org/drawingml/2006/main"/>
+          <a:ln xmlns:a="http://schemas.openxmlformats.org/drawingml/2006/main" w="0">
+            <a:noFill/>
+            <a:prstDash val="solid"/>
+          </a:ln>
+        </p:spPr>
+        <p:txBody>
+          <a:bodyPr xmlns:a="http://schemas.openxmlformats.org/drawingml/2006/main"/>
+          <a:lstStyle xmlns:a="http://schemas.openxmlformats.org/drawingml/2006/main"/>
+          <a:p xmlns:a="http://schemas.openxmlformats.org/drawingml/2006/main">
+            <a:pPr algn="l">
+              <a:defRPr sz="900" b="0" i="0">
                 <a:solidFill>
                   <a:srgbClr val="5F6D80"/>
                 </a:solidFill>
               </a:defRPr>
             </a:pPr>
             <a:r>
-              <a:rPr sz="750" b="0" i="0">
+              <a:rPr sz="900" b="0" i="0">
                 <a:solidFill>
                   <a:srgbClr val="5F6D80"/>
                 </a:solidFill>
               </a:rPr>
-              <a:t>PAVO: Pipeline-Aware Voice Orchestration with Demand-Conditioned Inference Routing</a:t>
-            </a:r>
-          </a:p>
-        </p:txBody>
-      </p:sp>
-      <p:sp>
-        <p:nvSpPr>
-          <p:cNvPr id="14" name="">
-            <a:extLst xmlns:a="http://schemas.openxmlformats.org/drawingml/2006/main">
-              <a:ext uri="{FF2B5EF4-FFF2-40B4-BE49-F238E27FC236}">
-                <a16:creationId xmlns:a16="http://schemas.microsoft.com/office/drawing/2014/main" id="{9D6299EF-3133-4010-BD7C-18102C81062C}"/>
+              <a:t>openreview.net/forum?id=zrneoIxlFx  ·  Pitch: deck/output/RxRelay_Hackathon_Pitch.pptx</a:t>
+            </a:r>
+          </a:p>
+        </p:txBody>
+      </p:sp>
+      <p:sp>
+        <p:nvSpPr>
+          <p:cNvPr id="18" name="">
+            <a:extLst xmlns:a="http://schemas.openxmlformats.org/drawingml/2006/main">
+              <a:ext uri="{FF2B5EF4-FFF2-40B4-BE49-F238E27FC236}">
+                <a16:creationId xmlns:a16="http://schemas.microsoft.com/office/drawing/2014/main" id="{60166480-6715-4CBA-9907-8715F0A89CDC}"/>
               </a:ext>
             </a:extLst>
           </p:cNvPr>
@@ -3777,10 +4040,10 @@
       </p:sp>
       <p:sp>
         <p:nvSpPr>
-          <p:cNvPr id="15" name="">
-            <a:extLst xmlns:a="http://schemas.openxmlformats.org/drawingml/2006/main">
-              <a:ext uri="{FF2B5EF4-FFF2-40B4-BE49-F238E27FC236}">
-                <a16:creationId xmlns:a16="http://schemas.microsoft.com/office/drawing/2014/main" id="{1ADCBA32-6721-4E04-8336-1DF14D8C4E0A}"/>
+          <p:cNvPr id="19" name="">
+            <a:extLst xmlns:a="http://schemas.openxmlformats.org/drawingml/2006/main">
+              <a:ext uri="{FF2B5EF4-FFF2-40B4-BE49-F238E27FC236}">
+                <a16:creationId xmlns:a16="http://schemas.microsoft.com/office/drawing/2014/main" id="{8C00CADC-B3C1-4A3B-A034-680266D5094D}"/>
               </a:ext>
             </a:extLst>
           </p:cNvPr>
@@ -3828,7 +4091,7 @@
     </p:spTree>
     <p:extLst>
       <p:ext uri="{BB962C8B-B14F-4D97-AF65-F5344CB8AC3E}">
-        <p14:creationId xmlns:p14="http://schemas.microsoft.com/office/powerpoint/2010/main" val="78948058"/>
+        <p14:creationId xmlns:p14="http://schemas.microsoft.com/office/powerpoint/2010/main" val="1652558689"/>
       </p:ext>
     </p:extLst>
   </p:cSld>
@@ -3859,7 +4122,7 @@
           <p:cNvPr id="24" name="">
             <a:extLst xmlns:a="http://schemas.openxmlformats.org/drawingml/2006/main">
               <a:ext uri="{FF2B5EF4-FFF2-40B4-BE49-F238E27FC236}">
-                <a16:creationId xmlns:a16="http://schemas.microsoft.com/office/drawing/2014/main" id="{F3835525-1FE8-42D6-9E45-6567A6B6FE98}"/>
+                <a16:creationId xmlns:a16="http://schemas.microsoft.com/office/drawing/2014/main" id="{3FD26610-BAE1-4DAC-8165-C4B3A8B4EF8F}"/>
               </a:ext>
             </a:extLst>
           </p:cNvPr>
@@ -3909,7 +4172,7 @@
           <p:cNvPr id="2" name="">
             <a:extLst xmlns:a="http://schemas.openxmlformats.org/drawingml/2006/main">
               <a:ext uri="{FF2B5EF4-FFF2-40B4-BE49-F238E27FC236}">
-                <a16:creationId xmlns:a16="http://schemas.microsoft.com/office/drawing/2014/main" id="{9B51B427-843B-4558-8B38-FFD433CE654E}"/>
+                <a16:creationId xmlns:a16="http://schemas.microsoft.com/office/drawing/2014/main" id="{8C273754-52F0-4439-84B1-C4BB446582E3}"/>
               </a:ext>
             </a:extLst>
           </p:cNvPr>
@@ -3959,7 +4222,7 @@
           <p:cNvPr id="3" name="">
             <a:extLst xmlns:a="http://schemas.openxmlformats.org/drawingml/2006/main">
               <a:ext uri="{FF2B5EF4-FFF2-40B4-BE49-F238E27FC236}">
-                <a16:creationId xmlns:a16="http://schemas.microsoft.com/office/drawing/2014/main" id="{A3FEFB86-BC7D-42AD-912A-67A66D3B19D9}"/>
+                <a16:creationId xmlns:a16="http://schemas.microsoft.com/office/drawing/2014/main" id="{60B5EA3C-3D59-4FE3-A506-5C58E0E5C64F}"/>
               </a:ext>
             </a:extLst>
           </p:cNvPr>
@@ -3992,7 +4255,7 @@
           <p:cNvPr id="4" name="title">
             <a:extLst xmlns:a="http://schemas.openxmlformats.org/drawingml/2006/main">
               <a:ext uri="{FF2B5EF4-FFF2-40B4-BE49-F238E27FC236}">
-                <a16:creationId xmlns:a16="http://schemas.microsoft.com/office/drawing/2014/main" id="{F6E2B292-23C4-48E9-860D-D78BCCCBFB8E}"/>
+                <a16:creationId xmlns:a16="http://schemas.microsoft.com/office/drawing/2014/main" id="{7C48EE4D-D3F2-49E1-BA5C-EF52B4573050}"/>
               </a:ext>
             </a:extLst>
           </p:cNvPr>
@@ -4042,7 +4305,7 @@
           <p:cNvPr id="5" name="subtitle">
             <a:extLst xmlns:a="http://schemas.openxmlformats.org/drawingml/2006/main">
               <a:ext uri="{FF2B5EF4-FFF2-40B4-BE49-F238E27FC236}">
-                <a16:creationId xmlns:a16="http://schemas.microsoft.com/office/drawing/2014/main" id="{4214931B-4514-4F90-91FC-02E174DE3180}"/>
+                <a16:creationId xmlns:a16="http://schemas.microsoft.com/office/drawing/2014/main" id="{29B0EC8D-D7AA-4F8B-AA9D-AD5156E60197}"/>
               </a:ext>
             </a:extLst>
           </p:cNvPr>
@@ -4092,7 +4355,7 @@
           <p:cNvPr id="6" name="">
             <a:extLst xmlns:a="http://schemas.openxmlformats.org/drawingml/2006/main">
               <a:ext uri="{FF2B5EF4-FFF2-40B4-BE49-F238E27FC236}">
-                <a16:creationId xmlns:a16="http://schemas.microsoft.com/office/drawing/2014/main" id="{361FD8B8-9EE0-49D5-B3AF-81C28B6F2B95}"/>
+                <a16:creationId xmlns:a16="http://schemas.microsoft.com/office/drawing/2014/main" id="{707D2CBE-7401-4B05-9890-09B6942DA4A4}"/>
               </a:ext>
             </a:extLst>
           </p:cNvPr>
@@ -4133,7 +4396,7 @@
           <p:cNvPr id="7" name="">
             <a:extLst xmlns:a="http://schemas.openxmlformats.org/drawingml/2006/main">
               <a:ext uri="{FF2B5EF4-FFF2-40B4-BE49-F238E27FC236}">
-                <a16:creationId xmlns:a16="http://schemas.microsoft.com/office/drawing/2014/main" id="{53D9BADE-A628-4E09-A1C2-0346DB299269}"/>
+                <a16:creationId xmlns:a16="http://schemas.microsoft.com/office/drawing/2014/main" id="{CA750D85-D5C0-45DC-B51F-04CD9FB9E9A1}"/>
               </a:ext>
             </a:extLst>
           </p:cNvPr>
@@ -4183,7 +4446,7 @@
           <p:cNvPr id="8" name="">
             <a:extLst xmlns:a="http://schemas.openxmlformats.org/drawingml/2006/main">
               <a:ext uri="{FF2B5EF4-FFF2-40B4-BE49-F238E27FC236}">
-                <a16:creationId xmlns:a16="http://schemas.microsoft.com/office/drawing/2014/main" id="{F5E9E347-7AA0-452B-8AA6-9856D545F0B2}"/>
+                <a16:creationId xmlns:a16="http://schemas.microsoft.com/office/drawing/2014/main" id="{BB1C2FF6-F8BB-467A-8031-C3453A02ECD7}"/>
               </a:ext>
             </a:extLst>
           </p:cNvPr>
@@ -4233,7 +4496,7 @@
           <p:cNvPr id="9" name="">
             <a:extLst xmlns:a="http://schemas.openxmlformats.org/drawingml/2006/main">
               <a:ext uri="{FF2B5EF4-FFF2-40B4-BE49-F238E27FC236}">
-                <a16:creationId xmlns:a16="http://schemas.microsoft.com/office/drawing/2014/main" id="{0BBB285A-05EC-41D0-A5B3-7FF983650FC8}"/>
+                <a16:creationId xmlns:a16="http://schemas.microsoft.com/office/drawing/2014/main" id="{08F475BC-BA20-48EF-8A61-AF732763AC32}"/>
               </a:ext>
             </a:extLst>
           </p:cNvPr>
@@ -4283,7 +4546,7 @@
           <p:cNvPr id="10" name="">
             <a:extLst xmlns:a="http://schemas.openxmlformats.org/drawingml/2006/main">
               <a:ext uri="{FF2B5EF4-FFF2-40B4-BE49-F238E27FC236}">
-                <a16:creationId xmlns:a16="http://schemas.microsoft.com/office/drawing/2014/main" id="{21FA726D-E219-44E3-BCA1-A732DC46A2F3}"/>
+                <a16:creationId xmlns:a16="http://schemas.microsoft.com/office/drawing/2014/main" id="{5A8B875D-4FC6-4FB8-A0E6-E1FD51E98D85}"/>
               </a:ext>
             </a:extLst>
           </p:cNvPr>
@@ -4324,7 +4587,7 @@
           <p:cNvPr id="11" name="">
             <a:extLst xmlns:a="http://schemas.openxmlformats.org/drawingml/2006/main">
               <a:ext uri="{FF2B5EF4-FFF2-40B4-BE49-F238E27FC236}">
-                <a16:creationId xmlns:a16="http://schemas.microsoft.com/office/drawing/2014/main" id="{92E89D58-CD62-4607-B33B-62BBEE0D951F}"/>
+                <a16:creationId xmlns:a16="http://schemas.microsoft.com/office/drawing/2014/main" id="{6331E32C-A5A3-4E56-A996-88E3746EEFB3}"/>
               </a:ext>
             </a:extLst>
           </p:cNvPr>
@@ -4374,7 +4637,7 @@
           <p:cNvPr id="12" name="">
             <a:extLst xmlns:a="http://schemas.openxmlformats.org/drawingml/2006/main">
               <a:ext uri="{FF2B5EF4-FFF2-40B4-BE49-F238E27FC236}">
-                <a16:creationId xmlns:a16="http://schemas.microsoft.com/office/drawing/2014/main" id="{F51025DA-F59C-49CD-8A2B-F736EE08A2B3}"/>
+                <a16:creationId xmlns:a16="http://schemas.microsoft.com/office/drawing/2014/main" id="{08327DA2-3E67-4C6B-8D1F-BE436CCC6DAE}"/>
               </a:ext>
             </a:extLst>
           </p:cNvPr>
@@ -4424,7 +4687,7 @@
           <p:cNvPr id="13" name="">
             <a:extLst xmlns:a="http://schemas.openxmlformats.org/drawingml/2006/main">
               <a:ext uri="{FF2B5EF4-FFF2-40B4-BE49-F238E27FC236}">
-                <a16:creationId xmlns:a16="http://schemas.microsoft.com/office/drawing/2014/main" id="{30E36237-7751-41A1-9CEA-959D868C24B8}"/>
+                <a16:creationId xmlns:a16="http://schemas.microsoft.com/office/drawing/2014/main" id="{EF48E1C1-0F26-4492-A2A7-351D75DF0984}"/>
               </a:ext>
             </a:extLst>
           </p:cNvPr>
@@ -4474,7 +4737,7 @@
           <p:cNvPr id="14" name="">
             <a:extLst xmlns:a="http://schemas.openxmlformats.org/drawingml/2006/main">
               <a:ext uri="{FF2B5EF4-FFF2-40B4-BE49-F238E27FC236}">
-                <a16:creationId xmlns:a16="http://schemas.microsoft.com/office/drawing/2014/main" id="{DEF953FB-D3D2-4814-B694-CE829F887B70}"/>
+                <a16:creationId xmlns:a16="http://schemas.microsoft.com/office/drawing/2014/main" id="{D1B94D13-7A17-49CE-A9D0-406E92303B25}"/>
               </a:ext>
             </a:extLst>
           </p:cNvPr>
@@ -4515,7 +4778,7 @@
           <p:cNvPr id="15" name="">
             <a:extLst xmlns:a="http://schemas.openxmlformats.org/drawingml/2006/main">
               <a:ext uri="{FF2B5EF4-FFF2-40B4-BE49-F238E27FC236}">
-                <a16:creationId xmlns:a16="http://schemas.microsoft.com/office/drawing/2014/main" id="{E099868B-F77B-492C-92C8-E64FFA9336B9}"/>
+                <a16:creationId xmlns:a16="http://schemas.microsoft.com/office/drawing/2014/main" id="{D55E841A-B18D-42F9-9CF1-88D35DB34ED8}"/>
               </a:ext>
             </a:extLst>
           </p:cNvPr>
@@ -4565,7 +4828,7 @@
           <p:cNvPr id="16" name="">
             <a:extLst xmlns:a="http://schemas.openxmlformats.org/drawingml/2006/main">
               <a:ext uri="{FF2B5EF4-FFF2-40B4-BE49-F238E27FC236}">
-                <a16:creationId xmlns:a16="http://schemas.microsoft.com/office/drawing/2014/main" id="{A591185F-BF8C-4DA4-9508-D988EAD7589F}"/>
+                <a16:creationId xmlns:a16="http://schemas.microsoft.com/office/drawing/2014/main" id="{1DE8FFAE-1771-449A-8FD7-B19D656FFF03}"/>
               </a:ext>
             </a:extLst>
           </p:cNvPr>
@@ -4615,7 +4878,7 @@
           <p:cNvPr id="17" name="">
             <a:extLst xmlns:a="http://schemas.openxmlformats.org/drawingml/2006/main">
               <a:ext uri="{FF2B5EF4-FFF2-40B4-BE49-F238E27FC236}">
-                <a16:creationId xmlns:a16="http://schemas.microsoft.com/office/drawing/2014/main" id="{031DFA36-B032-4350-A06C-AE6D765277A1}"/>
+                <a16:creationId xmlns:a16="http://schemas.microsoft.com/office/drawing/2014/main" id="{ADDAD807-581D-44C1-9732-B90B01762510}"/>
               </a:ext>
             </a:extLst>
           </p:cNvPr>
@@ -4656,7 +4919,7 @@
           <p:cNvPr id="18" name="">
             <a:extLst xmlns:a="http://schemas.openxmlformats.org/drawingml/2006/main">
               <a:ext uri="{FF2B5EF4-FFF2-40B4-BE49-F238E27FC236}">
-                <a16:creationId xmlns:a16="http://schemas.microsoft.com/office/drawing/2014/main" id="{1501C62C-178B-45F7-9577-4C72D46C1228}"/>
+                <a16:creationId xmlns:a16="http://schemas.microsoft.com/office/drawing/2014/main" id="{6F9C5D42-2689-4A97-B5F5-C0B1FA66662C}"/>
               </a:ext>
             </a:extLst>
           </p:cNvPr>
@@ -4723,7 +4986,7 @@
           <p:cNvPr id="19" name="">
             <a:extLst xmlns:a="http://schemas.openxmlformats.org/drawingml/2006/main">
               <a:ext uri="{FF2B5EF4-FFF2-40B4-BE49-F238E27FC236}">
-                <a16:creationId xmlns:a16="http://schemas.microsoft.com/office/drawing/2014/main" id="{4F48D4F9-8E19-43F0-838B-866D7BDD8600}"/>
+                <a16:creationId xmlns:a16="http://schemas.microsoft.com/office/drawing/2014/main" id="{5B4370F7-FEFD-46FC-A96F-60683F87A695}"/>
               </a:ext>
             </a:extLst>
           </p:cNvPr>
@@ -4756,7 +5019,7 @@
           <p:cNvPr id="20" name="">
             <a:extLst xmlns:a="http://schemas.openxmlformats.org/drawingml/2006/main">
               <a:ext uri="{FF2B5EF4-FFF2-40B4-BE49-F238E27FC236}">
-                <a16:creationId xmlns:a16="http://schemas.microsoft.com/office/drawing/2014/main" id="{85F0CCA2-DD38-4B88-BD7C-DDFE061842E5}"/>
+                <a16:creationId xmlns:a16="http://schemas.microsoft.com/office/drawing/2014/main" id="{EBD0C732-9C9B-4E4A-A1E4-C141ACD1D85C}"/>
               </a:ext>
             </a:extLst>
           </p:cNvPr>
@@ -4806,7 +5069,7 @@
           <p:cNvPr id="21" name="">
             <a:extLst xmlns:a="http://schemas.openxmlformats.org/drawingml/2006/main">
               <a:ext uri="{FF2B5EF4-FFF2-40B4-BE49-F238E27FC236}">
-                <a16:creationId xmlns:a16="http://schemas.microsoft.com/office/drawing/2014/main" id="{AD8A29D1-6850-4474-A552-CE33111B0BCC}"/>
+                <a16:creationId xmlns:a16="http://schemas.microsoft.com/office/drawing/2014/main" id="{85A95842-D2D4-4E6A-85AB-BAEB3E72737F}"/>
               </a:ext>
             </a:extLst>
           </p:cNvPr>
@@ -4873,7 +5136,7 @@
           <p:cNvPr id="22" name="">
             <a:extLst xmlns:a="http://schemas.openxmlformats.org/drawingml/2006/main">
               <a:ext uri="{FF2B5EF4-FFF2-40B4-BE49-F238E27FC236}">
-                <a16:creationId xmlns:a16="http://schemas.microsoft.com/office/drawing/2014/main" id="{B661A461-EB33-48C5-B3C7-C13C4FDD8D6C}"/>
+                <a16:creationId xmlns:a16="http://schemas.microsoft.com/office/drawing/2014/main" id="{A524BB23-233F-49D4-87E0-3CE59C352266}"/>
               </a:ext>
             </a:extLst>
           </p:cNvPr>
@@ -4923,7 +5186,7 @@
           <p:cNvPr id="23" name="">
             <a:extLst xmlns:a="http://schemas.openxmlformats.org/drawingml/2006/main">
               <a:ext uri="{FF2B5EF4-FFF2-40B4-BE49-F238E27FC236}">
-                <a16:creationId xmlns:a16="http://schemas.microsoft.com/office/drawing/2014/main" id="{9B243659-204F-4CD1-AA54-84C901EDD10F}"/>
+                <a16:creationId xmlns:a16="http://schemas.microsoft.com/office/drawing/2014/main" id="{1981BE46-C71C-436F-82C3-21989EF181DD}"/>
               </a:ext>
             </a:extLst>
           </p:cNvPr>
@@ -4971,7 +5234,7 @@
     </p:spTree>
     <p:extLst>
       <p:ext uri="{BB962C8B-B14F-4D97-AF65-F5344CB8AC3E}">
-        <p14:creationId xmlns:p14="http://schemas.microsoft.com/office/powerpoint/2010/main" val="230866231"/>
+        <p14:creationId xmlns:p14="http://schemas.microsoft.com/office/powerpoint/2010/main" val="1592704934"/>
       </p:ext>
     </p:extLst>
   </p:cSld>
@@ -5002,7 +5265,7 @@
           <p:cNvPr id="19" name="">
             <a:extLst xmlns:a="http://schemas.openxmlformats.org/drawingml/2006/main">
               <a:ext uri="{FF2B5EF4-FFF2-40B4-BE49-F238E27FC236}">
-                <a16:creationId xmlns:a16="http://schemas.microsoft.com/office/drawing/2014/main" id="{DECBBE57-B9D3-4AA7-998C-D99F2F781B82}"/>
+                <a16:creationId xmlns:a16="http://schemas.microsoft.com/office/drawing/2014/main" id="{B4CAF705-06BC-49DF-BCD8-EA7287E73541}"/>
               </a:ext>
             </a:extLst>
           </p:cNvPr>
@@ -5052,7 +5315,7 @@
           <p:cNvPr id="2" name="">
             <a:extLst xmlns:a="http://schemas.openxmlformats.org/drawingml/2006/main">
               <a:ext uri="{FF2B5EF4-FFF2-40B4-BE49-F238E27FC236}">
-                <a16:creationId xmlns:a16="http://schemas.microsoft.com/office/drawing/2014/main" id="{7F549CBE-2518-4C23-806D-6CA4FEC97E93}"/>
+                <a16:creationId xmlns:a16="http://schemas.microsoft.com/office/drawing/2014/main" id="{B55A1B07-0661-41B5-A86E-B5FED57E46AF}"/>
               </a:ext>
             </a:extLst>
           </p:cNvPr>
@@ -5102,7 +5365,7 @@
           <p:cNvPr id="3" name="">
             <a:extLst xmlns:a="http://schemas.openxmlformats.org/drawingml/2006/main">
               <a:ext uri="{FF2B5EF4-FFF2-40B4-BE49-F238E27FC236}">
-                <a16:creationId xmlns:a16="http://schemas.microsoft.com/office/drawing/2014/main" id="{E000BEDB-8AF8-414C-911E-B81932CA19D9}"/>
+                <a16:creationId xmlns:a16="http://schemas.microsoft.com/office/drawing/2014/main" id="{DD48FE0D-BD09-45DB-B255-C924E6B267CC}"/>
               </a:ext>
             </a:extLst>
           </p:cNvPr>
@@ -5135,7 +5398,7 @@
           <p:cNvPr id="4" name="title">
             <a:extLst xmlns:a="http://schemas.openxmlformats.org/drawingml/2006/main">
               <a:ext uri="{FF2B5EF4-FFF2-40B4-BE49-F238E27FC236}">
-                <a16:creationId xmlns:a16="http://schemas.microsoft.com/office/drawing/2014/main" id="{970C88CB-778A-42CA-9672-04C02328FAEA}"/>
+                <a16:creationId xmlns:a16="http://schemas.microsoft.com/office/drawing/2014/main" id="{86780C4D-374A-46F6-8AAE-059C12F79073}"/>
               </a:ext>
             </a:extLst>
           </p:cNvPr>
@@ -5185,7 +5448,7 @@
           <p:cNvPr id="5" name="subtitle">
             <a:extLst xmlns:a="http://schemas.openxmlformats.org/drawingml/2006/main">
               <a:ext uri="{FF2B5EF4-FFF2-40B4-BE49-F238E27FC236}">
-                <a16:creationId xmlns:a16="http://schemas.microsoft.com/office/drawing/2014/main" id="{4C807225-4696-44FD-895D-9C77D06C06DE}"/>
+                <a16:creationId xmlns:a16="http://schemas.microsoft.com/office/drawing/2014/main" id="{5BCCB2D1-ACF4-4E35-B1C6-0BC455791EB5}"/>
               </a:ext>
             </a:extLst>
           </p:cNvPr>
@@ -5235,7 +5498,7 @@
           <p:cNvPr id="6" name="">
             <a:extLst xmlns:a="http://schemas.openxmlformats.org/drawingml/2006/main">
               <a:ext uri="{FF2B5EF4-FFF2-40B4-BE49-F238E27FC236}">
-                <a16:creationId xmlns:a16="http://schemas.microsoft.com/office/drawing/2014/main" id="{1AE97E99-467A-497E-B324-C637A74022EA}"/>
+                <a16:creationId xmlns:a16="http://schemas.microsoft.com/office/drawing/2014/main" id="{9362A0A5-4647-44A5-86CD-3BCE22DB26F0}"/>
               </a:ext>
             </a:extLst>
           </p:cNvPr>
@@ -5276,7 +5539,7 @@
           <p:cNvPr id="7" name="">
             <a:extLst xmlns:a="http://schemas.openxmlformats.org/drawingml/2006/main">
               <a:ext uri="{FF2B5EF4-FFF2-40B4-BE49-F238E27FC236}">
-                <a16:creationId xmlns:a16="http://schemas.microsoft.com/office/drawing/2014/main" id="{B99CBA6F-AB95-4CFB-AA47-66B0FAE244EF}"/>
+                <a16:creationId xmlns:a16="http://schemas.microsoft.com/office/drawing/2014/main" id="{D7E49E41-29B7-40F6-AD43-83F290226730}"/>
               </a:ext>
             </a:extLst>
           </p:cNvPr>
@@ -5326,7 +5589,7 @@
           <p:cNvPr id="8" name="">
             <a:extLst xmlns:a="http://schemas.openxmlformats.org/drawingml/2006/main">
               <a:ext uri="{FF2B5EF4-FFF2-40B4-BE49-F238E27FC236}">
-                <a16:creationId xmlns:a16="http://schemas.microsoft.com/office/drawing/2014/main" id="{430EB3C2-276D-43CF-A243-24804D0B4AF5}"/>
+                <a16:creationId xmlns:a16="http://schemas.microsoft.com/office/drawing/2014/main" id="{8959E750-738A-48D5-AD5F-553FDF0E02E7}"/>
               </a:ext>
             </a:extLst>
           </p:cNvPr>
@@ -5376,7 +5639,7 @@
           <p:cNvPr id="9" name="">
             <a:extLst xmlns:a="http://schemas.openxmlformats.org/drawingml/2006/main">
               <a:ext uri="{FF2B5EF4-FFF2-40B4-BE49-F238E27FC236}">
-                <a16:creationId xmlns:a16="http://schemas.microsoft.com/office/drawing/2014/main" id="{2411AD00-53B8-4B5C-8060-1C55DDF1C8A5}"/>
+                <a16:creationId xmlns:a16="http://schemas.microsoft.com/office/drawing/2014/main" id="{A5616EEF-37C6-46AE-8D50-B906F68F34EB}"/>
               </a:ext>
             </a:extLst>
           </p:cNvPr>
@@ -5426,7 +5689,7 @@
           <p:cNvPr id="10" name="">
             <a:extLst xmlns:a="http://schemas.openxmlformats.org/drawingml/2006/main">
               <a:ext uri="{FF2B5EF4-FFF2-40B4-BE49-F238E27FC236}">
-                <a16:creationId xmlns:a16="http://schemas.microsoft.com/office/drawing/2014/main" id="{C9DD27B7-3F5D-4382-9DEC-B3AEA7E2224E}"/>
+                <a16:creationId xmlns:a16="http://schemas.microsoft.com/office/drawing/2014/main" id="{0D72C6E0-D3A1-4B51-B00A-581ECB8B359B}"/>
               </a:ext>
             </a:extLst>
           </p:cNvPr>
@@ -5467,7 +5730,7 @@
           <p:cNvPr id="11" name="">
             <a:extLst xmlns:a="http://schemas.openxmlformats.org/drawingml/2006/main">
               <a:ext uri="{FF2B5EF4-FFF2-40B4-BE49-F238E27FC236}">
-                <a16:creationId xmlns:a16="http://schemas.microsoft.com/office/drawing/2014/main" id="{DB2A5D76-75E2-44DA-B255-0A5AA70956E8}"/>
+                <a16:creationId xmlns:a16="http://schemas.microsoft.com/office/drawing/2014/main" id="{7D322452-59A3-4C65-9E68-55BCDF398A99}"/>
               </a:ext>
             </a:extLst>
           </p:cNvPr>
@@ -5517,7 +5780,7 @@
           <p:cNvPr id="12" name="">
             <a:extLst xmlns:a="http://schemas.openxmlformats.org/drawingml/2006/main">
               <a:ext uri="{FF2B5EF4-FFF2-40B4-BE49-F238E27FC236}">
-                <a16:creationId xmlns:a16="http://schemas.microsoft.com/office/drawing/2014/main" id="{CA1D1240-3DFA-43B0-B11C-F5C3CB254A49}"/>
+                <a16:creationId xmlns:a16="http://schemas.microsoft.com/office/drawing/2014/main" id="{A4F28439-39C2-460B-9CEC-556447EF8E33}"/>
               </a:ext>
             </a:extLst>
           </p:cNvPr>
@@ -5567,7 +5830,7 @@
           <p:cNvPr id="13" name="">
             <a:extLst xmlns:a="http://schemas.openxmlformats.org/drawingml/2006/main">
               <a:ext uri="{FF2B5EF4-FFF2-40B4-BE49-F238E27FC236}">
-                <a16:creationId xmlns:a16="http://schemas.microsoft.com/office/drawing/2014/main" id="{83721EEE-611C-4236-BFE2-960D0B3ED992}"/>
+                <a16:creationId xmlns:a16="http://schemas.microsoft.com/office/drawing/2014/main" id="{5750B704-E685-4E8F-9105-8151132310B0}"/>
               </a:ext>
             </a:extLst>
           </p:cNvPr>
@@ -5617,7 +5880,7 @@
           <p:cNvPr id="14" name="">
             <a:extLst xmlns:a="http://schemas.openxmlformats.org/drawingml/2006/main">
               <a:ext uri="{FF2B5EF4-FFF2-40B4-BE49-F238E27FC236}">
-                <a16:creationId xmlns:a16="http://schemas.microsoft.com/office/drawing/2014/main" id="{50449C96-7540-455D-B1DE-3B797BDE4F09}"/>
+                <a16:creationId xmlns:a16="http://schemas.microsoft.com/office/drawing/2014/main" id="{12329E51-2E0D-433F-9606-F45F259BE5B2}"/>
               </a:ext>
             </a:extLst>
           </p:cNvPr>
@@ -5650,7 +5913,7 @@
           <p:cNvPr id="15" name="">
             <a:extLst xmlns:a="http://schemas.openxmlformats.org/drawingml/2006/main">
               <a:ext uri="{FF2B5EF4-FFF2-40B4-BE49-F238E27FC236}">
-                <a16:creationId xmlns:a16="http://schemas.microsoft.com/office/drawing/2014/main" id="{2392D6F5-F5C8-4DC6-A387-EAEC59BC0FCD}"/>
+                <a16:creationId xmlns:a16="http://schemas.microsoft.com/office/drawing/2014/main" id="{541CFC39-C7B4-4758-A593-EA59873F0C7D}"/>
               </a:ext>
             </a:extLst>
           </p:cNvPr>
@@ -5700,7 +5963,7 @@
           <p:cNvPr id="16" name="">
             <a:extLst xmlns:a="http://schemas.openxmlformats.org/drawingml/2006/main">
               <a:ext uri="{FF2B5EF4-FFF2-40B4-BE49-F238E27FC236}">
-                <a16:creationId xmlns:a16="http://schemas.microsoft.com/office/drawing/2014/main" id="{1260ACE3-9538-4894-A00D-F12BAE358BFC}"/>
+                <a16:creationId xmlns:a16="http://schemas.microsoft.com/office/drawing/2014/main" id="{0E98A60A-060A-4E26-B45C-0D2631C5A37B}"/>
               </a:ext>
             </a:extLst>
           </p:cNvPr>
@@ -5750,7 +6013,7 @@
           <p:cNvPr id="17" name="">
             <a:extLst xmlns:a="http://schemas.openxmlformats.org/drawingml/2006/main">
               <a:ext uri="{FF2B5EF4-FFF2-40B4-BE49-F238E27FC236}">
-                <a16:creationId xmlns:a16="http://schemas.microsoft.com/office/drawing/2014/main" id="{3AB24E83-3503-443E-8CB8-C094E3678CE9}"/>
+                <a16:creationId xmlns:a16="http://schemas.microsoft.com/office/drawing/2014/main" id="{C4EC807B-8CEF-4B3D-8619-03EB9817BC3F}"/>
               </a:ext>
             </a:extLst>
           </p:cNvPr>
@@ -5800,7 +6063,7 @@
           <p:cNvPr id="18" name="">
             <a:extLst xmlns:a="http://schemas.openxmlformats.org/drawingml/2006/main">
               <a:ext uri="{FF2B5EF4-FFF2-40B4-BE49-F238E27FC236}">
-                <a16:creationId xmlns:a16="http://schemas.microsoft.com/office/drawing/2014/main" id="{515C7DD3-68B3-4A1C-8458-F85C8B8556F5}"/>
+                <a16:creationId xmlns:a16="http://schemas.microsoft.com/office/drawing/2014/main" id="{C025B65B-7A5A-47FE-BD81-118F2A47FEBC}"/>
               </a:ext>
             </a:extLst>
           </p:cNvPr>
@@ -5848,7 +6111,7 @@
     </p:spTree>
     <p:extLst>
       <p:ext uri="{BB962C8B-B14F-4D97-AF65-F5344CB8AC3E}">
-        <p14:creationId xmlns:p14="http://schemas.microsoft.com/office/powerpoint/2010/main" val="1085017213"/>
+        <p14:creationId xmlns:p14="http://schemas.microsoft.com/office/powerpoint/2010/main" val="411552714"/>
       </p:ext>
     </p:extLst>
   </p:cSld>
@@ -5879,7 +6142,7 @@
           <p:cNvPr id="22" name="">
             <a:extLst xmlns:a="http://schemas.openxmlformats.org/drawingml/2006/main">
               <a:ext uri="{FF2B5EF4-FFF2-40B4-BE49-F238E27FC236}">
-                <a16:creationId xmlns:a16="http://schemas.microsoft.com/office/drawing/2014/main" id="{C386725A-E461-4884-B8ED-0BCF317EC419}"/>
+                <a16:creationId xmlns:a16="http://schemas.microsoft.com/office/drawing/2014/main" id="{B20F06E9-0F45-4CA4-AE8C-5ABDF1ECB2EA}"/>
               </a:ext>
             </a:extLst>
           </p:cNvPr>
@@ -5929,7 +6192,7 @@
           <p:cNvPr id="2" name="">
             <a:extLst xmlns:a="http://schemas.openxmlformats.org/drawingml/2006/main">
               <a:ext uri="{FF2B5EF4-FFF2-40B4-BE49-F238E27FC236}">
-                <a16:creationId xmlns:a16="http://schemas.microsoft.com/office/drawing/2014/main" id="{D2530999-2B23-47A1-A98C-40E11505CA0F}"/>
+                <a16:creationId xmlns:a16="http://schemas.microsoft.com/office/drawing/2014/main" id="{6C9840C3-902F-4D26-903D-640A54B37BB9}"/>
               </a:ext>
             </a:extLst>
           </p:cNvPr>
@@ -5979,7 +6242,7 @@
           <p:cNvPr id="3" name="">
             <a:extLst xmlns:a="http://schemas.openxmlformats.org/drawingml/2006/main">
               <a:ext uri="{FF2B5EF4-FFF2-40B4-BE49-F238E27FC236}">
-                <a16:creationId xmlns:a16="http://schemas.microsoft.com/office/drawing/2014/main" id="{BA3C416B-2B2C-4DC5-86BC-4C47A48228C6}"/>
+                <a16:creationId xmlns:a16="http://schemas.microsoft.com/office/drawing/2014/main" id="{3230D6AB-0FE8-41F6-9F6E-90FA21CD5A2A}"/>
               </a:ext>
             </a:extLst>
           </p:cNvPr>
@@ -6012,7 +6275,7 @@
           <p:cNvPr id="4" name="title">
             <a:extLst xmlns:a="http://schemas.openxmlformats.org/drawingml/2006/main">
               <a:ext uri="{FF2B5EF4-FFF2-40B4-BE49-F238E27FC236}">
-                <a16:creationId xmlns:a16="http://schemas.microsoft.com/office/drawing/2014/main" id="{CAB6A7D5-7B14-43DE-8973-C1EBF4BF228A}"/>
+                <a16:creationId xmlns:a16="http://schemas.microsoft.com/office/drawing/2014/main" id="{B470358D-F7CF-417B-99BE-91B45ECD33C4}"/>
               </a:ext>
             </a:extLst>
           </p:cNvPr>
@@ -6062,7 +6325,7 @@
           <p:cNvPr id="5" name="subtitle">
             <a:extLst xmlns:a="http://schemas.openxmlformats.org/drawingml/2006/main">
               <a:ext uri="{FF2B5EF4-FFF2-40B4-BE49-F238E27FC236}">
-                <a16:creationId xmlns:a16="http://schemas.microsoft.com/office/drawing/2014/main" id="{6F90A6E6-B594-414C-99A8-52B75D5B5782}"/>
+                <a16:creationId xmlns:a16="http://schemas.microsoft.com/office/drawing/2014/main" id="{A0774406-D6DC-4015-947C-923246B147F1}"/>
               </a:ext>
             </a:extLst>
           </p:cNvPr>
@@ -6112,7 +6375,7 @@
           <p:cNvPr id="6" name="">
             <a:extLst xmlns:a="http://schemas.openxmlformats.org/drawingml/2006/main">
               <a:ext uri="{FF2B5EF4-FFF2-40B4-BE49-F238E27FC236}">
-                <a16:creationId xmlns:a16="http://schemas.microsoft.com/office/drawing/2014/main" id="{993D3ED2-9F89-4E47-B1BE-DA18B38A102E}"/>
+                <a16:creationId xmlns:a16="http://schemas.microsoft.com/office/drawing/2014/main" id="{E14113DB-2828-4503-8706-80B227224AFF}"/>
               </a:ext>
             </a:extLst>
           </p:cNvPr>
@@ -6153,7 +6416,7 @@
           <p:cNvPr id="7" name="">
             <a:extLst xmlns:a="http://schemas.openxmlformats.org/drawingml/2006/main">
               <a:ext uri="{FF2B5EF4-FFF2-40B4-BE49-F238E27FC236}">
-                <a16:creationId xmlns:a16="http://schemas.microsoft.com/office/drawing/2014/main" id="{F453CA05-4D32-4F4D-80BF-B79BA31B7060}"/>
+                <a16:creationId xmlns:a16="http://schemas.microsoft.com/office/drawing/2014/main" id="{8D692F7A-B75E-46C3-90C9-32AEA8872C52}"/>
               </a:ext>
             </a:extLst>
           </p:cNvPr>
@@ -6203,7 +6466,7 @@
           <p:cNvPr id="8" name="">
             <a:extLst xmlns:a="http://schemas.openxmlformats.org/drawingml/2006/main">
               <a:ext uri="{FF2B5EF4-FFF2-40B4-BE49-F238E27FC236}">
-                <a16:creationId xmlns:a16="http://schemas.microsoft.com/office/drawing/2014/main" id="{846FAF63-EB05-4BB6-BF7A-C4D415D22F33}"/>
+                <a16:creationId xmlns:a16="http://schemas.microsoft.com/office/drawing/2014/main" id="{5CAAC883-FCCB-46A3-95B7-0A03A2A84280}"/>
               </a:ext>
             </a:extLst>
           </p:cNvPr>
@@ -6253,7 +6516,7 @@
           <p:cNvPr id="9" name="">
             <a:extLst xmlns:a="http://schemas.openxmlformats.org/drawingml/2006/main">
               <a:ext uri="{FF2B5EF4-FFF2-40B4-BE49-F238E27FC236}">
-                <a16:creationId xmlns:a16="http://schemas.microsoft.com/office/drawing/2014/main" id="{71889587-564A-4BE8-979C-91F6E1A1E967}"/>
+                <a16:creationId xmlns:a16="http://schemas.microsoft.com/office/drawing/2014/main" id="{D6B9201A-C55F-44AF-81B0-1982D92A2339}"/>
               </a:ext>
             </a:extLst>
           </p:cNvPr>
@@ -6303,7 +6566,7 @@
           <p:cNvPr id="10" name="">
             <a:extLst xmlns:a="http://schemas.openxmlformats.org/drawingml/2006/main">
               <a:ext uri="{FF2B5EF4-FFF2-40B4-BE49-F238E27FC236}">
-                <a16:creationId xmlns:a16="http://schemas.microsoft.com/office/drawing/2014/main" id="{31047B87-0A93-4E0C-A191-F3309C25B4BA}"/>
+                <a16:creationId xmlns:a16="http://schemas.microsoft.com/office/drawing/2014/main" id="{FAC40F92-A957-488C-AD1B-720471B13753}"/>
               </a:ext>
             </a:extLst>
           </p:cNvPr>
@@ -6353,7 +6616,7 @@
           <p:cNvPr id="11" name="">
             <a:extLst xmlns:a="http://schemas.openxmlformats.org/drawingml/2006/main">
               <a:ext uri="{FF2B5EF4-FFF2-40B4-BE49-F238E27FC236}">
-                <a16:creationId xmlns:a16="http://schemas.microsoft.com/office/drawing/2014/main" id="{B1B6F124-25EF-4A8F-934E-29B7AAC8D800}"/>
+                <a16:creationId xmlns:a16="http://schemas.microsoft.com/office/drawing/2014/main" id="{24FE58D0-2E85-4F21-9EEC-3A9E59B50147}"/>
               </a:ext>
             </a:extLst>
           </p:cNvPr>
@@ -6394,7 +6657,7 @@
           <p:cNvPr id="12" name="">
             <a:extLst xmlns:a="http://schemas.openxmlformats.org/drawingml/2006/main">
               <a:ext uri="{FF2B5EF4-FFF2-40B4-BE49-F238E27FC236}">
-                <a16:creationId xmlns:a16="http://schemas.microsoft.com/office/drawing/2014/main" id="{113D3A42-26A4-4A0E-BF0A-16C2466EF304}"/>
+                <a16:creationId xmlns:a16="http://schemas.microsoft.com/office/drawing/2014/main" id="{95B2BB8C-7A18-4681-BED6-3FDC4EC6D792}"/>
               </a:ext>
             </a:extLst>
           </p:cNvPr>
@@ -6444,7 +6707,7 @@
           <p:cNvPr id="13" name="">
             <a:extLst xmlns:a="http://schemas.openxmlformats.org/drawingml/2006/main">
               <a:ext uri="{FF2B5EF4-FFF2-40B4-BE49-F238E27FC236}">
-                <a16:creationId xmlns:a16="http://schemas.microsoft.com/office/drawing/2014/main" id="{9F4972BD-79B1-46B3-969B-7DAA360B3D04}"/>
+                <a16:creationId xmlns:a16="http://schemas.microsoft.com/office/drawing/2014/main" id="{2755D5A7-D00D-47C3-9CED-345CD7168674}"/>
               </a:ext>
             </a:extLst>
           </p:cNvPr>
@@ -6494,7 +6757,7 @@
           <p:cNvPr id="14" name="">
             <a:extLst xmlns:a="http://schemas.openxmlformats.org/drawingml/2006/main">
               <a:ext uri="{FF2B5EF4-FFF2-40B4-BE49-F238E27FC236}">
-                <a16:creationId xmlns:a16="http://schemas.microsoft.com/office/drawing/2014/main" id="{7974B589-3136-4AC1-B30C-3292A71E366D}"/>
+                <a16:creationId xmlns:a16="http://schemas.microsoft.com/office/drawing/2014/main" id="{3F2483F2-6120-4DC3-B96A-9DAFEDDCF3D9}"/>
               </a:ext>
             </a:extLst>
           </p:cNvPr>
@@ -6544,7 +6807,7 @@
           <p:cNvPr id="15" name="">
             <a:extLst xmlns:a="http://schemas.openxmlformats.org/drawingml/2006/main">
               <a:ext uri="{FF2B5EF4-FFF2-40B4-BE49-F238E27FC236}">
-                <a16:creationId xmlns:a16="http://schemas.microsoft.com/office/drawing/2014/main" id="{9F3AC090-C8C4-44BC-8DE0-4B4BE30CA29A}"/>
+                <a16:creationId xmlns:a16="http://schemas.microsoft.com/office/drawing/2014/main" id="{F1C45CB5-5596-4672-8B01-474AB8CD20FB}"/>
               </a:ext>
             </a:extLst>
           </p:cNvPr>
@@ -6594,7 +6857,7 @@
           <p:cNvPr id="16" name="">
             <a:extLst xmlns:a="http://schemas.openxmlformats.org/drawingml/2006/main">
               <a:ext uri="{FF2B5EF4-FFF2-40B4-BE49-F238E27FC236}">
-                <a16:creationId xmlns:a16="http://schemas.microsoft.com/office/drawing/2014/main" id="{8EC37E80-2DFB-4608-999B-79220CCDCE11}"/>
+                <a16:creationId xmlns:a16="http://schemas.microsoft.com/office/drawing/2014/main" id="{6BCCB853-8C3D-4CFB-8F6E-856DE5A7DA61}"/>
               </a:ext>
             </a:extLst>
           </p:cNvPr>
@@ -6635,7 +6898,7 @@
           <p:cNvPr id="17" name="">
             <a:extLst xmlns:a="http://schemas.openxmlformats.org/drawingml/2006/main">
               <a:ext uri="{FF2B5EF4-FFF2-40B4-BE49-F238E27FC236}">
-                <a16:creationId xmlns:a16="http://schemas.microsoft.com/office/drawing/2014/main" id="{190B8894-8781-4D91-80B0-07C439F324CF}"/>
+                <a16:creationId xmlns:a16="http://schemas.microsoft.com/office/drawing/2014/main" id="{452CBEF9-BCF8-467A-A760-DF776001651F}"/>
               </a:ext>
             </a:extLst>
           </p:cNvPr>
@@ -6685,7 +6948,7 @@
           <p:cNvPr id="18" name="">
             <a:extLst xmlns:a="http://schemas.openxmlformats.org/drawingml/2006/main">
               <a:ext uri="{FF2B5EF4-FFF2-40B4-BE49-F238E27FC236}">
-                <a16:creationId xmlns:a16="http://schemas.microsoft.com/office/drawing/2014/main" id="{3C0B02D6-3FAA-4F5B-8BA8-CADF30B6DE6B}"/>
+                <a16:creationId xmlns:a16="http://schemas.microsoft.com/office/drawing/2014/main" id="{B2E21971-A2E9-4F17-933E-57F96E7F6E7B}"/>
               </a:ext>
             </a:extLst>
           </p:cNvPr>
@@ -6735,7 +6998,7 @@
           <p:cNvPr id="19" name="">
             <a:extLst xmlns:a="http://schemas.openxmlformats.org/drawingml/2006/main">
               <a:ext uri="{FF2B5EF4-FFF2-40B4-BE49-F238E27FC236}">
-                <a16:creationId xmlns:a16="http://schemas.microsoft.com/office/drawing/2014/main" id="{705E2B87-7669-4A9C-884F-74061F170C47}"/>
+                <a16:creationId xmlns:a16="http://schemas.microsoft.com/office/drawing/2014/main" id="{E9C62F8B-3F86-4EAA-AFC7-38ADDE76EF84}"/>
               </a:ext>
             </a:extLst>
           </p:cNvPr>
@@ -6785,7 +7048,7 @@
           <p:cNvPr id="20" name="">
             <a:extLst xmlns:a="http://schemas.openxmlformats.org/drawingml/2006/main">
               <a:ext uri="{FF2B5EF4-FFF2-40B4-BE49-F238E27FC236}">
-                <a16:creationId xmlns:a16="http://schemas.microsoft.com/office/drawing/2014/main" id="{F1C8E66C-C87F-4E84-BF63-45CCC0306395}"/>
+                <a16:creationId xmlns:a16="http://schemas.microsoft.com/office/drawing/2014/main" id="{10FE9426-0C09-4136-A5F6-11D8DBC4C363}"/>
               </a:ext>
             </a:extLst>
           </p:cNvPr>
@@ -6835,7 +7098,7 @@
           <p:cNvPr id="21" name="">
             <a:extLst xmlns:a="http://schemas.openxmlformats.org/drawingml/2006/main">
               <a:ext uri="{FF2B5EF4-FFF2-40B4-BE49-F238E27FC236}">
-                <a16:creationId xmlns:a16="http://schemas.microsoft.com/office/drawing/2014/main" id="{63E0240D-27FE-4EF4-A555-1DB7E6352710}"/>
+                <a16:creationId xmlns:a16="http://schemas.microsoft.com/office/drawing/2014/main" id="{7C3D7FAB-6B2A-40B4-82E0-541828E8838F}"/>
               </a:ext>
             </a:extLst>
           </p:cNvPr>
@@ -6883,7 +7146,7 @@
     </p:spTree>
     <p:extLst>
       <p:ext uri="{BB962C8B-B14F-4D97-AF65-F5344CB8AC3E}">
-        <p14:creationId xmlns:p14="http://schemas.microsoft.com/office/powerpoint/2010/main" val="842368766"/>
+        <p14:creationId xmlns:p14="http://schemas.microsoft.com/office/powerpoint/2010/main" val="909638112"/>
       </p:ext>
     </p:extLst>
   </p:cSld>
@@ -6914,7 +7177,7 @@
           <p:cNvPr id="31" name="">
             <a:extLst xmlns:a="http://schemas.openxmlformats.org/drawingml/2006/main">
               <a:ext uri="{FF2B5EF4-FFF2-40B4-BE49-F238E27FC236}">
-                <a16:creationId xmlns:a16="http://schemas.microsoft.com/office/drawing/2014/main" id="{7C2A9A61-834C-4AC2-83DF-3EBC515CCD31}"/>
+                <a16:creationId xmlns:a16="http://schemas.microsoft.com/office/drawing/2014/main" id="{4CDED6C4-3A52-43C4-B311-C1D9CF8DFD9E}"/>
               </a:ext>
             </a:extLst>
           </p:cNvPr>
@@ -6964,7 +7227,7 @@
           <p:cNvPr id="2" name="">
             <a:extLst xmlns:a="http://schemas.openxmlformats.org/drawingml/2006/main">
               <a:ext uri="{FF2B5EF4-FFF2-40B4-BE49-F238E27FC236}">
-                <a16:creationId xmlns:a16="http://schemas.microsoft.com/office/drawing/2014/main" id="{1195D06D-6825-4FE0-AB70-CE1758E81928}"/>
+                <a16:creationId xmlns:a16="http://schemas.microsoft.com/office/drawing/2014/main" id="{ED9B25FB-C64D-4936-9F41-F0C3368ECE45}"/>
               </a:ext>
             </a:extLst>
           </p:cNvPr>
@@ -7014,7 +7277,7 @@
           <p:cNvPr id="3" name="">
             <a:extLst xmlns:a="http://schemas.openxmlformats.org/drawingml/2006/main">
               <a:ext uri="{FF2B5EF4-FFF2-40B4-BE49-F238E27FC236}">
-                <a16:creationId xmlns:a16="http://schemas.microsoft.com/office/drawing/2014/main" id="{3E07AC9D-4AB7-4D4C-8F04-1ACDE2F581AF}"/>
+                <a16:creationId xmlns:a16="http://schemas.microsoft.com/office/drawing/2014/main" id="{27395B65-5BC0-46D6-A387-5227F3C04DD9}"/>
               </a:ext>
             </a:extLst>
           </p:cNvPr>
@@ -7047,7 +7310,7 @@
           <p:cNvPr id="4" name="title">
             <a:extLst xmlns:a="http://schemas.openxmlformats.org/drawingml/2006/main">
               <a:ext uri="{FF2B5EF4-FFF2-40B4-BE49-F238E27FC236}">
-                <a16:creationId xmlns:a16="http://schemas.microsoft.com/office/drawing/2014/main" id="{16AA9315-8EBD-4288-88A6-8664219E6449}"/>
+                <a16:creationId xmlns:a16="http://schemas.microsoft.com/office/drawing/2014/main" id="{E4D08F25-0F4F-400C-85CA-2F9EF4913F82}"/>
               </a:ext>
             </a:extLst>
           </p:cNvPr>
@@ -7114,7 +7377,7 @@
           <p:cNvPr id="5" name="subtitle">
             <a:extLst xmlns:a="http://schemas.openxmlformats.org/drawingml/2006/main">
               <a:ext uri="{FF2B5EF4-FFF2-40B4-BE49-F238E27FC236}">
-                <a16:creationId xmlns:a16="http://schemas.microsoft.com/office/drawing/2014/main" id="{46EA4ED6-C032-45A7-B11D-C669979B71AF}"/>
+                <a16:creationId xmlns:a16="http://schemas.microsoft.com/office/drawing/2014/main" id="{ECDC7DAC-6A1A-4F79-AB90-EDD4B27AED30}"/>
               </a:ext>
             </a:extLst>
           </p:cNvPr>
@@ -7164,7 +7427,7 @@
           <p:cNvPr id="6" name="">
             <a:extLst xmlns:a="http://schemas.openxmlformats.org/drawingml/2006/main">
               <a:ext uri="{FF2B5EF4-FFF2-40B4-BE49-F238E27FC236}">
-                <a16:creationId xmlns:a16="http://schemas.microsoft.com/office/drawing/2014/main" id="{31C623D8-BAEB-48F6-859A-8ED872FC850C}"/>
+                <a16:creationId xmlns:a16="http://schemas.microsoft.com/office/drawing/2014/main" id="{9F5DA96F-8D1B-4964-8C03-D3BFFF3253F0}"/>
               </a:ext>
             </a:extLst>
           </p:cNvPr>
@@ -7197,7 +7460,7 @@
           <p:cNvPr id="7" name="">
             <a:extLst xmlns:a="http://schemas.openxmlformats.org/drawingml/2006/main">
               <a:ext uri="{FF2B5EF4-FFF2-40B4-BE49-F238E27FC236}">
-                <a16:creationId xmlns:a16="http://schemas.microsoft.com/office/drawing/2014/main" id="{9A257126-211D-4E7F-BE28-61A4141C7B7D}"/>
+                <a16:creationId xmlns:a16="http://schemas.microsoft.com/office/drawing/2014/main" id="{FBA1126C-6D56-4ED0-9E05-2835CA732996}"/>
               </a:ext>
             </a:extLst>
           </p:cNvPr>
@@ -7230,7 +7493,7 @@
           <p:cNvPr id="8" name="">
             <a:extLst xmlns:a="http://schemas.openxmlformats.org/drawingml/2006/main">
               <a:ext uri="{FF2B5EF4-FFF2-40B4-BE49-F238E27FC236}">
-                <a16:creationId xmlns:a16="http://schemas.microsoft.com/office/drawing/2014/main" id="{D9E9D542-A789-4F06-9AEA-D6A53D00E15D}"/>
+                <a16:creationId xmlns:a16="http://schemas.microsoft.com/office/drawing/2014/main" id="{38F82C9F-FE59-4C57-BF8A-CA31B43E4532}"/>
               </a:ext>
             </a:extLst>
           </p:cNvPr>
@@ -7280,7 +7543,7 @@
           <p:cNvPr id="9" name="">
             <a:extLst xmlns:a="http://schemas.openxmlformats.org/drawingml/2006/main">
               <a:ext uri="{FF2B5EF4-FFF2-40B4-BE49-F238E27FC236}">
-                <a16:creationId xmlns:a16="http://schemas.microsoft.com/office/drawing/2014/main" id="{F545B78B-EAFA-4D6C-9771-BA036757390E}"/>
+                <a16:creationId xmlns:a16="http://schemas.microsoft.com/office/drawing/2014/main" id="{0E05C829-8AC0-4461-B1CE-4FC5F1973AD4}"/>
               </a:ext>
             </a:extLst>
           </p:cNvPr>
@@ -7330,7 +7593,7 @@
           <p:cNvPr id="10" name="">
             <a:extLst xmlns:a="http://schemas.openxmlformats.org/drawingml/2006/main">
               <a:ext uri="{FF2B5EF4-FFF2-40B4-BE49-F238E27FC236}">
-                <a16:creationId xmlns:a16="http://schemas.microsoft.com/office/drawing/2014/main" id="{287B0647-182E-47A4-B1C9-E6E7DC4B8F68}"/>
+                <a16:creationId xmlns:a16="http://schemas.microsoft.com/office/drawing/2014/main" id="{BAC924BA-F911-486E-B110-D045C83EEF23}"/>
               </a:ext>
             </a:extLst>
           </p:cNvPr>
@@ -7380,7 +7643,7 @@
           <p:cNvPr id="11" name="">
             <a:extLst xmlns:a="http://schemas.openxmlformats.org/drawingml/2006/main">
               <a:ext uri="{FF2B5EF4-FFF2-40B4-BE49-F238E27FC236}">
-                <a16:creationId xmlns:a16="http://schemas.microsoft.com/office/drawing/2014/main" id="{AA7E34EA-D072-4356-9B28-59A7D71CE4D4}"/>
+                <a16:creationId xmlns:a16="http://schemas.microsoft.com/office/drawing/2014/main" id="{9F823949-5860-4B1A-AA8E-C9770AAEEDF2}"/>
               </a:ext>
             </a:extLst>
           </p:cNvPr>
@@ -7413,7 +7676,7 @@
           <p:cNvPr id="12" name="">
             <a:extLst xmlns:a="http://schemas.openxmlformats.org/drawingml/2006/main">
               <a:ext uri="{FF2B5EF4-FFF2-40B4-BE49-F238E27FC236}">
-                <a16:creationId xmlns:a16="http://schemas.microsoft.com/office/drawing/2014/main" id="{E5FF1936-B6ED-42DC-8070-88ABACBF45FC}"/>
+                <a16:creationId xmlns:a16="http://schemas.microsoft.com/office/drawing/2014/main" id="{1F1B8911-3F55-462E-AFCF-C9B5620464BC}"/>
               </a:ext>
             </a:extLst>
           </p:cNvPr>
@@ -7463,7 +7726,7 @@
           <p:cNvPr id="13" name="">
             <a:extLst xmlns:a="http://schemas.openxmlformats.org/drawingml/2006/main">
               <a:ext uri="{FF2B5EF4-FFF2-40B4-BE49-F238E27FC236}">
-                <a16:creationId xmlns:a16="http://schemas.microsoft.com/office/drawing/2014/main" id="{A9353CA0-020C-498B-8F1E-D48A366D4B8A}"/>
+                <a16:creationId xmlns:a16="http://schemas.microsoft.com/office/drawing/2014/main" id="{5A16D1C4-F3B7-4D48-92E3-5E48595A89F9}"/>
               </a:ext>
             </a:extLst>
           </p:cNvPr>
@@ -7513,7 +7776,7 @@
           <p:cNvPr id="14" name="">
             <a:extLst xmlns:a="http://schemas.openxmlformats.org/drawingml/2006/main">
               <a:ext uri="{FF2B5EF4-FFF2-40B4-BE49-F238E27FC236}">
-                <a16:creationId xmlns:a16="http://schemas.microsoft.com/office/drawing/2014/main" id="{4BAF669D-3A4D-4E53-8E06-FD83DED4DB84}"/>
+                <a16:creationId xmlns:a16="http://schemas.microsoft.com/office/drawing/2014/main" id="{CA4FD139-0ED3-4737-B825-87CFE6809606}"/>
               </a:ext>
             </a:extLst>
           </p:cNvPr>
@@ -7563,7 +7826,7 @@
           <p:cNvPr id="15" name="">
             <a:extLst xmlns:a="http://schemas.openxmlformats.org/drawingml/2006/main">
               <a:ext uri="{FF2B5EF4-FFF2-40B4-BE49-F238E27FC236}">
-                <a16:creationId xmlns:a16="http://schemas.microsoft.com/office/drawing/2014/main" id="{F83A5806-3D88-4454-B8CE-C20F5F739C0F}"/>
+                <a16:creationId xmlns:a16="http://schemas.microsoft.com/office/drawing/2014/main" id="{C4C4D129-7568-4D01-8C4B-B75C71A9BF9B}"/>
               </a:ext>
             </a:extLst>
           </p:cNvPr>
@@ -7596,7 +7859,7 @@
           <p:cNvPr id="16" name="">
             <a:extLst xmlns:a="http://schemas.openxmlformats.org/drawingml/2006/main">
               <a:ext uri="{FF2B5EF4-FFF2-40B4-BE49-F238E27FC236}">
-                <a16:creationId xmlns:a16="http://schemas.microsoft.com/office/drawing/2014/main" id="{32C63EE9-8C97-4585-A0C1-BCE06E8C9763}"/>
+                <a16:creationId xmlns:a16="http://schemas.microsoft.com/office/drawing/2014/main" id="{53EF24F2-0CEA-462E-9795-8AF0A9AE6651}"/>
               </a:ext>
             </a:extLst>
           </p:cNvPr>
@@ -7646,7 +7909,7 @@
           <p:cNvPr id="17" name="">
             <a:extLst xmlns:a="http://schemas.openxmlformats.org/drawingml/2006/main">
               <a:ext uri="{FF2B5EF4-FFF2-40B4-BE49-F238E27FC236}">
-                <a16:creationId xmlns:a16="http://schemas.microsoft.com/office/drawing/2014/main" id="{9DC73817-F53A-452B-92E3-C17840403F3D}"/>
+                <a16:creationId xmlns:a16="http://schemas.microsoft.com/office/drawing/2014/main" id="{3E1A2DCC-444A-47AB-BEDF-9BDF8C80738D}"/>
               </a:ext>
             </a:extLst>
           </p:cNvPr>
@@ -7696,7 +7959,7 @@
           <p:cNvPr id="18" name="">
             <a:extLst xmlns:a="http://schemas.openxmlformats.org/drawingml/2006/main">
               <a:ext uri="{FF2B5EF4-FFF2-40B4-BE49-F238E27FC236}">
-                <a16:creationId xmlns:a16="http://schemas.microsoft.com/office/drawing/2014/main" id="{F3371C20-4FDF-497C-9426-BA35D419F67A}"/>
+                <a16:creationId xmlns:a16="http://schemas.microsoft.com/office/drawing/2014/main" id="{355E5F47-2F6F-4079-A4E9-F544A3E0848A}"/>
               </a:ext>
             </a:extLst>
           </p:cNvPr>
@@ -7746,7 +8009,7 @@
           <p:cNvPr id="19" name="">
             <a:extLst xmlns:a="http://schemas.openxmlformats.org/drawingml/2006/main">
               <a:ext uri="{FF2B5EF4-FFF2-40B4-BE49-F238E27FC236}">
-                <a16:creationId xmlns:a16="http://schemas.microsoft.com/office/drawing/2014/main" id="{1A1D7D02-650C-4FDA-B5E9-40ACA2B7CBF3}"/>
+                <a16:creationId xmlns:a16="http://schemas.microsoft.com/office/drawing/2014/main" id="{BE1FAB42-F9E4-40FF-A314-AE26F31BB06C}"/>
               </a:ext>
             </a:extLst>
           </p:cNvPr>
@@ -7779,7 +8042,7 @@
           <p:cNvPr id="20" name="">
             <a:extLst xmlns:a="http://schemas.openxmlformats.org/drawingml/2006/main">
               <a:ext uri="{FF2B5EF4-FFF2-40B4-BE49-F238E27FC236}">
-                <a16:creationId xmlns:a16="http://schemas.microsoft.com/office/drawing/2014/main" id="{69398E44-58F1-48CE-9D05-388EDB79156B}"/>
+                <a16:creationId xmlns:a16="http://schemas.microsoft.com/office/drawing/2014/main" id="{89152CB7-561D-45F4-9F78-7C188F4FF0F9}"/>
               </a:ext>
             </a:extLst>
           </p:cNvPr>
@@ -7829,7 +8092,7 @@
           <p:cNvPr id="21" name="">
             <a:extLst xmlns:a="http://schemas.openxmlformats.org/drawingml/2006/main">
               <a:ext uri="{FF2B5EF4-FFF2-40B4-BE49-F238E27FC236}">
-                <a16:creationId xmlns:a16="http://schemas.microsoft.com/office/drawing/2014/main" id="{06E8C34D-6FFA-46B3-9573-A97B7A09602A}"/>
+                <a16:creationId xmlns:a16="http://schemas.microsoft.com/office/drawing/2014/main" id="{D262EFF7-C823-42B4-94A1-0C5BE0DE9E45}"/>
               </a:ext>
             </a:extLst>
           </p:cNvPr>
@@ -7879,7 +8142,7 @@
           <p:cNvPr id="22" name="">
             <a:extLst xmlns:a="http://schemas.openxmlformats.org/drawingml/2006/main">
               <a:ext uri="{FF2B5EF4-FFF2-40B4-BE49-F238E27FC236}">
-                <a16:creationId xmlns:a16="http://schemas.microsoft.com/office/drawing/2014/main" id="{D0F2EFF9-24B6-4852-994A-97D5F147F4BB}"/>
+                <a16:creationId xmlns:a16="http://schemas.microsoft.com/office/drawing/2014/main" id="{6DE8B759-5A7A-4E5A-AA53-C5DA9E37299D}"/>
               </a:ext>
             </a:extLst>
           </p:cNvPr>
@@ -7929,7 +8192,7 @@
           <p:cNvPr id="23" name="">
             <a:extLst xmlns:a="http://schemas.openxmlformats.org/drawingml/2006/main">
               <a:ext uri="{FF2B5EF4-FFF2-40B4-BE49-F238E27FC236}">
-                <a16:creationId xmlns:a16="http://schemas.microsoft.com/office/drawing/2014/main" id="{C3890484-3E84-467F-A3DF-3DD5DAF87402}"/>
+                <a16:creationId xmlns:a16="http://schemas.microsoft.com/office/drawing/2014/main" id="{95DDDB2F-66DA-4785-A7EA-427372775160}"/>
               </a:ext>
             </a:extLst>
           </p:cNvPr>
@@ -7962,7 +8225,7 @@
           <p:cNvPr id="24" name="">
             <a:extLst xmlns:a="http://schemas.openxmlformats.org/drawingml/2006/main">
               <a:ext uri="{FF2B5EF4-FFF2-40B4-BE49-F238E27FC236}">
-                <a16:creationId xmlns:a16="http://schemas.microsoft.com/office/drawing/2014/main" id="{5945E541-5D4F-4EBB-84E4-E6C6CEF7A489}"/>
+                <a16:creationId xmlns:a16="http://schemas.microsoft.com/office/drawing/2014/main" id="{EF11661E-DB22-4A2D-99F5-257CE36C1398}"/>
               </a:ext>
             </a:extLst>
           </p:cNvPr>
@@ -8012,7 +8275,7 @@
           <p:cNvPr id="25" name="">
             <a:extLst xmlns:a="http://schemas.openxmlformats.org/drawingml/2006/main">
               <a:ext uri="{FF2B5EF4-FFF2-40B4-BE49-F238E27FC236}">
-                <a16:creationId xmlns:a16="http://schemas.microsoft.com/office/drawing/2014/main" id="{2A5433BD-398C-45F9-A2A8-3F5ECED37301}"/>
+                <a16:creationId xmlns:a16="http://schemas.microsoft.com/office/drawing/2014/main" id="{959BF714-D2BD-4CB1-938C-2676479A9E51}"/>
               </a:ext>
             </a:extLst>
           </p:cNvPr>
@@ -8062,7 +8325,7 @@
           <p:cNvPr id="26" name="">
             <a:extLst xmlns:a="http://schemas.openxmlformats.org/drawingml/2006/main">
               <a:ext uri="{FF2B5EF4-FFF2-40B4-BE49-F238E27FC236}">
-                <a16:creationId xmlns:a16="http://schemas.microsoft.com/office/drawing/2014/main" id="{22206D2B-B125-41A7-ADBE-6A2EA1A496F7}"/>
+                <a16:creationId xmlns:a16="http://schemas.microsoft.com/office/drawing/2014/main" id="{4A3BEC21-52F2-4172-B913-BE00EB7B2E53}"/>
               </a:ext>
             </a:extLst>
           </p:cNvPr>
@@ -8112,7 +8375,7 @@
           <p:cNvPr id="27" name="">
             <a:extLst xmlns:a="http://schemas.openxmlformats.org/drawingml/2006/main">
               <a:ext uri="{FF2B5EF4-FFF2-40B4-BE49-F238E27FC236}">
-                <a16:creationId xmlns:a16="http://schemas.microsoft.com/office/drawing/2014/main" id="{D67FFF86-9FBC-44A5-A62A-1600945761EB}"/>
+                <a16:creationId xmlns:a16="http://schemas.microsoft.com/office/drawing/2014/main" id="{A5F168B4-1730-4E5D-9B2F-ED288BD079A1}"/>
               </a:ext>
             </a:extLst>
           </p:cNvPr>
@@ -8153,7 +8416,7 @@
           <p:cNvPr id="28" name="">
             <a:extLst xmlns:a="http://schemas.openxmlformats.org/drawingml/2006/main">
               <a:ext uri="{FF2B5EF4-FFF2-40B4-BE49-F238E27FC236}">
-                <a16:creationId xmlns:a16="http://schemas.microsoft.com/office/drawing/2014/main" id="{D54BDAA3-E11A-457E-B394-154792186683}"/>
+                <a16:creationId xmlns:a16="http://schemas.microsoft.com/office/drawing/2014/main" id="{602CD6D6-099A-440A-964E-3AF2C0F3EAE5}"/>
               </a:ext>
             </a:extLst>
           </p:cNvPr>
@@ -8203,7 +8466,7 @@
           <p:cNvPr id="29" name="">
             <a:extLst xmlns:a="http://schemas.openxmlformats.org/drawingml/2006/main">
               <a:ext uri="{FF2B5EF4-FFF2-40B4-BE49-F238E27FC236}">
-                <a16:creationId xmlns:a16="http://schemas.microsoft.com/office/drawing/2014/main" id="{6CB927A7-CB6D-49F1-A25F-F034006E72E9}"/>
+                <a16:creationId xmlns:a16="http://schemas.microsoft.com/office/drawing/2014/main" id="{79C6953D-76D0-4E71-B01E-1D9D7E3F6489}"/>
               </a:ext>
             </a:extLst>
           </p:cNvPr>
@@ -8253,7 +8516,7 @@
           <p:cNvPr id="30" name="">
             <a:extLst xmlns:a="http://schemas.openxmlformats.org/drawingml/2006/main">
               <a:ext uri="{FF2B5EF4-FFF2-40B4-BE49-F238E27FC236}">
-                <a16:creationId xmlns:a16="http://schemas.microsoft.com/office/drawing/2014/main" id="{BD7E254C-FF78-45B1-9C83-61DA76B4B0D9}"/>
+                <a16:creationId xmlns:a16="http://schemas.microsoft.com/office/drawing/2014/main" id="{9B5304A5-C665-48FE-AB87-D756E4FF11D7}"/>
               </a:ext>
             </a:extLst>
           </p:cNvPr>
@@ -8301,7 +8564,7 @@
     </p:spTree>
     <p:extLst>
       <p:ext uri="{BB962C8B-B14F-4D97-AF65-F5344CB8AC3E}">
-        <p14:creationId xmlns:p14="http://schemas.microsoft.com/office/powerpoint/2010/main" val="1104770661"/>
+        <p14:creationId xmlns:p14="http://schemas.microsoft.com/office/powerpoint/2010/main" val="1333255362"/>
       </p:ext>
     </p:extLst>
   </p:cSld>
@@ -8332,7 +8595,7 @@
           <p:cNvPr id="41" name="">
             <a:extLst xmlns:a="http://schemas.openxmlformats.org/drawingml/2006/main">
               <a:ext uri="{FF2B5EF4-FFF2-40B4-BE49-F238E27FC236}">
-                <a16:creationId xmlns:a16="http://schemas.microsoft.com/office/drawing/2014/main" id="{C4851629-3A3D-41AF-8FF1-12F5864E2569}"/>
+                <a16:creationId xmlns:a16="http://schemas.microsoft.com/office/drawing/2014/main" id="{77EF71E8-6152-445F-A856-02ECF08EF619}"/>
               </a:ext>
             </a:extLst>
           </p:cNvPr>
@@ -8382,7 +8645,7 @@
           <p:cNvPr id="2" name="">
             <a:extLst xmlns:a="http://schemas.openxmlformats.org/drawingml/2006/main">
               <a:ext uri="{FF2B5EF4-FFF2-40B4-BE49-F238E27FC236}">
-                <a16:creationId xmlns:a16="http://schemas.microsoft.com/office/drawing/2014/main" id="{4B7EF463-D6F3-4C3A-9667-9147787D12E2}"/>
+                <a16:creationId xmlns:a16="http://schemas.microsoft.com/office/drawing/2014/main" id="{50A9B832-7C33-4F65-9F42-68C21A5067AB}"/>
               </a:ext>
             </a:extLst>
           </p:cNvPr>
@@ -8432,7 +8695,7 @@
           <p:cNvPr id="3" name="">
             <a:extLst xmlns:a="http://schemas.openxmlformats.org/drawingml/2006/main">
               <a:ext uri="{FF2B5EF4-FFF2-40B4-BE49-F238E27FC236}">
-                <a16:creationId xmlns:a16="http://schemas.microsoft.com/office/drawing/2014/main" id="{FB15337D-ECE0-4F41-B812-B8FB9134C0C4}"/>
+                <a16:creationId xmlns:a16="http://schemas.microsoft.com/office/drawing/2014/main" id="{22D614C7-4F89-4E9C-8485-3910D36C54B1}"/>
               </a:ext>
             </a:extLst>
           </p:cNvPr>
@@ -8465,7 +8728,7 @@
           <p:cNvPr id="4" name="title">
             <a:extLst xmlns:a="http://schemas.openxmlformats.org/drawingml/2006/main">
               <a:ext uri="{FF2B5EF4-FFF2-40B4-BE49-F238E27FC236}">
-                <a16:creationId xmlns:a16="http://schemas.microsoft.com/office/drawing/2014/main" id="{1E670F15-6C97-46C9-9642-ED67F6F6F4B8}"/>
+                <a16:creationId xmlns:a16="http://schemas.microsoft.com/office/drawing/2014/main" id="{080035A7-AEBC-4C64-A752-D4167937E8B3}"/>
               </a:ext>
             </a:extLst>
           </p:cNvPr>
@@ -8515,7 +8778,7 @@
           <p:cNvPr id="5" name="subtitle">
             <a:extLst xmlns:a="http://schemas.openxmlformats.org/drawingml/2006/main">
               <a:ext uri="{FF2B5EF4-FFF2-40B4-BE49-F238E27FC236}">
-                <a16:creationId xmlns:a16="http://schemas.microsoft.com/office/drawing/2014/main" id="{BD8D3952-B60E-4C66-99C5-B39EDA9A3474}"/>
+                <a16:creationId xmlns:a16="http://schemas.microsoft.com/office/drawing/2014/main" id="{D3B8161F-FD7C-433A-B470-3B5E38575CA3}"/>
               </a:ext>
             </a:extLst>
           </p:cNvPr>
@@ -8565,7 +8828,7 @@
           <p:cNvPr id="6" name="">
             <a:extLst xmlns:a="http://schemas.openxmlformats.org/drawingml/2006/main">
               <a:ext uri="{FF2B5EF4-FFF2-40B4-BE49-F238E27FC236}">
-                <a16:creationId xmlns:a16="http://schemas.microsoft.com/office/drawing/2014/main" id="{A9391C69-E846-490C-AA93-5491AB941AAB}"/>
+                <a16:creationId xmlns:a16="http://schemas.microsoft.com/office/drawing/2014/main" id="{DCBBCE6A-8D0F-48AA-A06A-339AED6D8587}"/>
               </a:ext>
             </a:extLst>
           </p:cNvPr>
@@ -8606,7 +8869,7 @@
           <p:cNvPr id="7" name="">
             <a:extLst xmlns:a="http://schemas.openxmlformats.org/drawingml/2006/main">
               <a:ext uri="{FF2B5EF4-FFF2-40B4-BE49-F238E27FC236}">
-                <a16:creationId xmlns:a16="http://schemas.microsoft.com/office/drawing/2014/main" id="{34F6196F-2325-4AB5-8D3E-37A11AA3CA77}"/>
+                <a16:creationId xmlns:a16="http://schemas.microsoft.com/office/drawing/2014/main" id="{8D61DC22-FDD0-4138-8C59-1F5C817B5CFD}"/>
               </a:ext>
             </a:extLst>
           </p:cNvPr>
@@ -8656,7 +8919,7 @@
           <p:cNvPr id="8" name="">
             <a:extLst xmlns:a="http://schemas.openxmlformats.org/drawingml/2006/main">
               <a:ext uri="{FF2B5EF4-FFF2-40B4-BE49-F238E27FC236}">
-                <a16:creationId xmlns:a16="http://schemas.microsoft.com/office/drawing/2014/main" id="{5DCE8D73-BE82-4984-8686-D5070E3083FA}"/>
+                <a16:creationId xmlns:a16="http://schemas.microsoft.com/office/drawing/2014/main" id="{41ED224D-08F9-4BB1-B649-207EC5666853}"/>
               </a:ext>
             </a:extLst>
           </p:cNvPr>
@@ -8691,7 +8954,7 @@
           <p:cNvPr id="9" name="">
             <a:extLst xmlns:a="http://schemas.openxmlformats.org/drawingml/2006/main">
               <a:ext uri="{FF2B5EF4-FFF2-40B4-BE49-F238E27FC236}">
-                <a16:creationId xmlns:a16="http://schemas.microsoft.com/office/drawing/2014/main" id="{423C4977-5FED-4B39-BFEB-09FE59B99EF1}"/>
+                <a16:creationId xmlns:a16="http://schemas.microsoft.com/office/drawing/2014/main" id="{7AC35219-8ADB-443D-9234-F2C48C1FB006}"/>
               </a:ext>
             </a:extLst>
           </p:cNvPr>
@@ -8741,7 +9004,7 @@
           <p:cNvPr id="10" name="">
             <a:extLst xmlns:a="http://schemas.openxmlformats.org/drawingml/2006/main">
               <a:ext uri="{FF2B5EF4-FFF2-40B4-BE49-F238E27FC236}">
-                <a16:creationId xmlns:a16="http://schemas.microsoft.com/office/drawing/2014/main" id="{D08E32EF-C592-4877-99BB-2F47E62E2769}"/>
+                <a16:creationId xmlns:a16="http://schemas.microsoft.com/office/drawing/2014/main" id="{13573D7B-959F-44F7-9C20-EBC2BC0C067B}"/>
               </a:ext>
             </a:extLst>
           </p:cNvPr>
@@ -8782,7 +9045,7 @@
           <p:cNvPr id="11" name="">
             <a:extLst xmlns:a="http://schemas.openxmlformats.org/drawingml/2006/main">
               <a:ext uri="{FF2B5EF4-FFF2-40B4-BE49-F238E27FC236}">
-                <a16:creationId xmlns:a16="http://schemas.microsoft.com/office/drawing/2014/main" id="{DF01FE3B-36F7-4BC7-B5B2-478043229EB5}"/>
+                <a16:creationId xmlns:a16="http://schemas.microsoft.com/office/drawing/2014/main" id="{AB9D8602-8BA9-4CF5-A6EB-71A20502C621}"/>
               </a:ext>
             </a:extLst>
           </p:cNvPr>
@@ -8832,7 +9095,7 @@
           <p:cNvPr id="12" name="">
             <a:extLst xmlns:a="http://schemas.openxmlformats.org/drawingml/2006/main">
               <a:ext uri="{FF2B5EF4-FFF2-40B4-BE49-F238E27FC236}">
-                <a16:creationId xmlns:a16="http://schemas.microsoft.com/office/drawing/2014/main" id="{4F92A310-B3FA-4982-9B19-5CA6DC620054}"/>
+                <a16:creationId xmlns:a16="http://schemas.microsoft.com/office/drawing/2014/main" id="{517D5EBB-FEA5-489E-BE4D-9971E36B4174}"/>
               </a:ext>
             </a:extLst>
           </p:cNvPr>
@@ -8882,7 +9145,7 @@
           <p:cNvPr id="13" name="">
             <a:extLst xmlns:a="http://schemas.openxmlformats.org/drawingml/2006/main">
               <a:ext uri="{FF2B5EF4-FFF2-40B4-BE49-F238E27FC236}">
-                <a16:creationId xmlns:a16="http://schemas.microsoft.com/office/drawing/2014/main" id="{DD7B232B-8753-4679-8674-FDDB4283E104}"/>
+                <a16:creationId xmlns:a16="http://schemas.microsoft.com/office/drawing/2014/main" id="{A76A10C6-FFA8-45E6-8F71-E8D12DD1EED7}"/>
               </a:ext>
             </a:extLst>
           </p:cNvPr>
@@ -8915,7 +9178,7 @@
           <p:cNvPr id="14" name="">
             <a:extLst xmlns:a="http://schemas.openxmlformats.org/drawingml/2006/main">
               <a:ext uri="{FF2B5EF4-FFF2-40B4-BE49-F238E27FC236}">
-                <a16:creationId xmlns:a16="http://schemas.microsoft.com/office/drawing/2014/main" id="{91C718CC-B633-4304-847D-51CC5958805D}"/>
+                <a16:creationId xmlns:a16="http://schemas.microsoft.com/office/drawing/2014/main" id="{EABFDE7F-FAB4-4A61-BDED-0B3EEEAEE6F3}"/>
               </a:ext>
             </a:extLst>
           </p:cNvPr>
@@ -8965,7 +9228,7 @@
           <p:cNvPr id="15" name="">
             <a:extLst xmlns:a="http://schemas.openxmlformats.org/drawingml/2006/main">
               <a:ext uri="{FF2B5EF4-FFF2-40B4-BE49-F238E27FC236}">
-                <a16:creationId xmlns:a16="http://schemas.microsoft.com/office/drawing/2014/main" id="{CE1DB0D5-F299-43CC-8670-0DE0858E27AC}"/>
+                <a16:creationId xmlns:a16="http://schemas.microsoft.com/office/drawing/2014/main" id="{32C06E0C-639B-4D9D-BE14-FE947CA745A3}"/>
               </a:ext>
             </a:extLst>
           </p:cNvPr>
@@ -9006,7 +9269,7 @@
           <p:cNvPr id="16" name="">
             <a:extLst xmlns:a="http://schemas.openxmlformats.org/drawingml/2006/main">
               <a:ext uri="{FF2B5EF4-FFF2-40B4-BE49-F238E27FC236}">
-                <a16:creationId xmlns:a16="http://schemas.microsoft.com/office/drawing/2014/main" id="{DE6ABCDC-78E2-4BBB-B2D9-7317C9D42D9C}"/>
+                <a16:creationId xmlns:a16="http://schemas.microsoft.com/office/drawing/2014/main" id="{AFF720BC-CF09-42CA-B6B5-4402D122DB70}"/>
               </a:ext>
             </a:extLst>
           </p:cNvPr>
@@ -9056,7 +9319,7 @@
           <p:cNvPr id="17" name="">
             <a:extLst xmlns:a="http://schemas.openxmlformats.org/drawingml/2006/main">
               <a:ext uri="{FF2B5EF4-FFF2-40B4-BE49-F238E27FC236}">
-                <a16:creationId xmlns:a16="http://schemas.microsoft.com/office/drawing/2014/main" id="{7FA6D9D1-2E66-4594-AE1E-EBC10B7A450F}"/>
+                <a16:creationId xmlns:a16="http://schemas.microsoft.com/office/drawing/2014/main" id="{DCED37B0-087A-4BD8-974D-0132E1474388}"/>
               </a:ext>
             </a:extLst>
           </p:cNvPr>
@@ -9106,7 +9369,7 @@
           <p:cNvPr id="18" name="">
             <a:extLst xmlns:a="http://schemas.openxmlformats.org/drawingml/2006/main">
               <a:ext uri="{FF2B5EF4-FFF2-40B4-BE49-F238E27FC236}">
-                <a16:creationId xmlns:a16="http://schemas.microsoft.com/office/drawing/2014/main" id="{1B901946-2336-4AF8-8895-F4B710843DC3}"/>
+                <a16:creationId xmlns:a16="http://schemas.microsoft.com/office/drawing/2014/main" id="{A5E1C64D-8824-4DC8-BA5E-5DD03E860D63}"/>
               </a:ext>
             </a:extLst>
           </p:cNvPr>
@@ -9139,7 +9402,7 @@
           <p:cNvPr id="19" name="">
             <a:extLst xmlns:a="http://schemas.openxmlformats.org/drawingml/2006/main">
               <a:ext uri="{FF2B5EF4-FFF2-40B4-BE49-F238E27FC236}">
-                <a16:creationId xmlns:a16="http://schemas.microsoft.com/office/drawing/2014/main" id="{0EEC37D5-C817-4B0C-B993-DAF4E2EC7C01}"/>
+                <a16:creationId xmlns:a16="http://schemas.microsoft.com/office/drawing/2014/main" id="{9E51976F-B867-4E63-B212-F234AFA35990}"/>
               </a:ext>
             </a:extLst>
           </p:cNvPr>
@@ -9189,7 +9452,7 @@
           <p:cNvPr id="20" name="">
             <a:extLst xmlns:a="http://schemas.openxmlformats.org/drawingml/2006/main">
               <a:ext uri="{FF2B5EF4-FFF2-40B4-BE49-F238E27FC236}">
-                <a16:creationId xmlns:a16="http://schemas.microsoft.com/office/drawing/2014/main" id="{D6B8C160-FA7B-486F-A6CB-25F076AD2060}"/>
+                <a16:creationId xmlns:a16="http://schemas.microsoft.com/office/drawing/2014/main" id="{15D98AB3-95CC-4C52-9B06-EC86FB761932}"/>
               </a:ext>
             </a:extLst>
           </p:cNvPr>
@@ -9230,7 +9493,7 @@
           <p:cNvPr id="21" name="">
             <a:extLst xmlns:a="http://schemas.openxmlformats.org/drawingml/2006/main">
               <a:ext uri="{FF2B5EF4-FFF2-40B4-BE49-F238E27FC236}">
-                <a16:creationId xmlns:a16="http://schemas.microsoft.com/office/drawing/2014/main" id="{6E7E0156-60D5-4AF8-A4AF-CCD66EE6DAC3}"/>
+                <a16:creationId xmlns:a16="http://schemas.microsoft.com/office/drawing/2014/main" id="{5B30C849-0DA0-4941-BA96-37495F166705}"/>
               </a:ext>
             </a:extLst>
           </p:cNvPr>
@@ -9280,7 +9543,7 @@
           <p:cNvPr id="22" name="">
             <a:extLst xmlns:a="http://schemas.openxmlformats.org/drawingml/2006/main">
               <a:ext uri="{FF2B5EF4-FFF2-40B4-BE49-F238E27FC236}">
-                <a16:creationId xmlns:a16="http://schemas.microsoft.com/office/drawing/2014/main" id="{C6965C97-065B-4296-8A9C-6C396F68490C}"/>
+                <a16:creationId xmlns:a16="http://schemas.microsoft.com/office/drawing/2014/main" id="{45953AC5-7B12-4444-813B-7CCE815F021E}"/>
               </a:ext>
             </a:extLst>
           </p:cNvPr>
@@ -9330,7 +9593,7 @@
           <p:cNvPr id="23" name="">
             <a:extLst xmlns:a="http://schemas.openxmlformats.org/drawingml/2006/main">
               <a:ext uri="{FF2B5EF4-FFF2-40B4-BE49-F238E27FC236}">
-                <a16:creationId xmlns:a16="http://schemas.microsoft.com/office/drawing/2014/main" id="{4B7FD396-7605-4B2C-90FF-129D8B417F43}"/>
+                <a16:creationId xmlns:a16="http://schemas.microsoft.com/office/drawing/2014/main" id="{65CA15DE-A8CA-42CF-A148-ECE4C3DADBF9}"/>
               </a:ext>
             </a:extLst>
           </p:cNvPr>
@@ -9363,7 +9626,7 @@
           <p:cNvPr id="24" name="">
             <a:extLst xmlns:a="http://schemas.openxmlformats.org/drawingml/2006/main">
               <a:ext uri="{FF2B5EF4-FFF2-40B4-BE49-F238E27FC236}">
-                <a16:creationId xmlns:a16="http://schemas.microsoft.com/office/drawing/2014/main" id="{70572007-FE70-4960-86EE-155E8FBE3B5D}"/>
+                <a16:creationId xmlns:a16="http://schemas.microsoft.com/office/drawing/2014/main" id="{74F27C29-FA80-4789-BA0C-D56949386D70}"/>
               </a:ext>
             </a:extLst>
           </p:cNvPr>
@@ -9413,7 +9676,7 @@
           <p:cNvPr id="25" name="">
             <a:extLst xmlns:a="http://schemas.openxmlformats.org/drawingml/2006/main">
               <a:ext uri="{FF2B5EF4-FFF2-40B4-BE49-F238E27FC236}">
-                <a16:creationId xmlns:a16="http://schemas.microsoft.com/office/drawing/2014/main" id="{01F3A974-3EAB-4D58-8148-4F75353B5B8A}"/>
+                <a16:creationId xmlns:a16="http://schemas.microsoft.com/office/drawing/2014/main" id="{F972FFA8-E4E5-4AC3-9768-2C7A8A510FBD}"/>
               </a:ext>
             </a:extLst>
           </p:cNvPr>
@@ -9454,7 +9717,7 @@
           <p:cNvPr id="26" name="">
             <a:extLst xmlns:a="http://schemas.openxmlformats.org/drawingml/2006/main">
               <a:ext uri="{FF2B5EF4-FFF2-40B4-BE49-F238E27FC236}">
-                <a16:creationId xmlns:a16="http://schemas.microsoft.com/office/drawing/2014/main" id="{E6A34DB5-28FE-4BDD-94BE-C42A86EA7CFA}"/>
+                <a16:creationId xmlns:a16="http://schemas.microsoft.com/office/drawing/2014/main" id="{EEF92B72-DD2B-425D-943C-9474EB63D80B}"/>
               </a:ext>
             </a:extLst>
           </p:cNvPr>
@@ -9504,7 +9767,7 @@
           <p:cNvPr id="27" name="">
             <a:extLst xmlns:a="http://schemas.openxmlformats.org/drawingml/2006/main">
               <a:ext uri="{FF2B5EF4-FFF2-40B4-BE49-F238E27FC236}">
-                <a16:creationId xmlns:a16="http://schemas.microsoft.com/office/drawing/2014/main" id="{66F8D6A7-D76A-401D-88BD-E35C0D949A09}"/>
+                <a16:creationId xmlns:a16="http://schemas.microsoft.com/office/drawing/2014/main" id="{C8B21787-3242-4D04-8006-98CF1CAB2C15}"/>
               </a:ext>
             </a:extLst>
           </p:cNvPr>
@@ -9537,7 +9800,7 @@
           <p:cNvPr id="28" name="">
             <a:extLst xmlns:a="http://schemas.openxmlformats.org/drawingml/2006/main">
               <a:ext uri="{FF2B5EF4-FFF2-40B4-BE49-F238E27FC236}">
-                <a16:creationId xmlns:a16="http://schemas.microsoft.com/office/drawing/2014/main" id="{CA1765EF-40BB-4196-8630-D519952590AD}"/>
+                <a16:creationId xmlns:a16="http://schemas.microsoft.com/office/drawing/2014/main" id="{30253BD7-2602-4C44-BC1C-A80B9BDB9540}"/>
               </a:ext>
             </a:extLst>
           </p:cNvPr>
@@ -9587,7 +9850,7 @@
           <p:cNvPr id="29" name="">
             <a:extLst xmlns:a="http://schemas.openxmlformats.org/drawingml/2006/main">
               <a:ext uri="{FF2B5EF4-FFF2-40B4-BE49-F238E27FC236}">
-                <a16:creationId xmlns:a16="http://schemas.microsoft.com/office/drawing/2014/main" id="{CD78A38C-A768-4332-9209-B730C1D583CD}"/>
+                <a16:creationId xmlns:a16="http://schemas.microsoft.com/office/drawing/2014/main" id="{F28EA782-C807-4414-B2C0-0CD248A2FF61}"/>
               </a:ext>
             </a:extLst>
           </p:cNvPr>
@@ -9637,7 +9900,7 @@
           <p:cNvPr id="30" name="">
             <a:extLst xmlns:a="http://schemas.openxmlformats.org/drawingml/2006/main">
               <a:ext uri="{FF2B5EF4-FFF2-40B4-BE49-F238E27FC236}">
-                <a16:creationId xmlns:a16="http://schemas.microsoft.com/office/drawing/2014/main" id="{8A47A79F-C8CD-461A-B002-CA634760DEDF}"/>
+                <a16:creationId xmlns:a16="http://schemas.microsoft.com/office/drawing/2014/main" id="{70F02D08-625D-4973-BF5E-74F7A1BAD5C9}"/>
               </a:ext>
             </a:extLst>
           </p:cNvPr>
@@ -9670,7 +9933,7 @@
           <p:cNvPr id="31" name="">
             <a:extLst xmlns:a="http://schemas.openxmlformats.org/drawingml/2006/main">
               <a:ext uri="{FF2B5EF4-FFF2-40B4-BE49-F238E27FC236}">
-                <a16:creationId xmlns:a16="http://schemas.microsoft.com/office/drawing/2014/main" id="{F3BDC1D4-AC68-4C9D-9906-1981525C2F2D}"/>
+                <a16:creationId xmlns:a16="http://schemas.microsoft.com/office/drawing/2014/main" id="{F167E71E-D088-4554-8AF2-6700FA785DA3}"/>
               </a:ext>
             </a:extLst>
           </p:cNvPr>
@@ -9720,7 +9983,7 @@
           <p:cNvPr id="32" name="">
             <a:extLst xmlns:a="http://schemas.openxmlformats.org/drawingml/2006/main">
               <a:ext uri="{FF2B5EF4-FFF2-40B4-BE49-F238E27FC236}">
-                <a16:creationId xmlns:a16="http://schemas.microsoft.com/office/drawing/2014/main" id="{9D55A071-96E4-4C69-A4F7-77BE2F4165A6}"/>
+                <a16:creationId xmlns:a16="http://schemas.microsoft.com/office/drawing/2014/main" id="{54128445-A5FC-46C1-BE7B-4BB896F33E6E}"/>
               </a:ext>
             </a:extLst>
           </p:cNvPr>
@@ -9770,7 +10033,7 @@
           <p:cNvPr id="33" name="">
             <a:extLst xmlns:a="http://schemas.openxmlformats.org/drawingml/2006/main">
               <a:ext uri="{FF2B5EF4-FFF2-40B4-BE49-F238E27FC236}">
-                <a16:creationId xmlns:a16="http://schemas.microsoft.com/office/drawing/2014/main" id="{017470E2-C4C9-4C9E-BA41-3EB739CBB626}"/>
+                <a16:creationId xmlns:a16="http://schemas.microsoft.com/office/drawing/2014/main" id="{7B567A45-F759-4BA8-8E3B-AC8337D357E1}"/>
               </a:ext>
             </a:extLst>
           </p:cNvPr>
@@ -9803,7 +10066,7 @@
           <p:cNvPr id="34" name="">
             <a:extLst xmlns:a="http://schemas.openxmlformats.org/drawingml/2006/main">
               <a:ext uri="{FF2B5EF4-FFF2-40B4-BE49-F238E27FC236}">
-                <a16:creationId xmlns:a16="http://schemas.microsoft.com/office/drawing/2014/main" id="{889663F9-D553-4A86-9D7B-E84CE690ED67}"/>
+                <a16:creationId xmlns:a16="http://schemas.microsoft.com/office/drawing/2014/main" id="{24C480AC-0919-4B5C-B831-DD2B534D1A79}"/>
               </a:ext>
             </a:extLst>
           </p:cNvPr>
@@ -9853,7 +10116,7 @@
           <p:cNvPr id="35" name="">
             <a:extLst xmlns:a="http://schemas.openxmlformats.org/drawingml/2006/main">
               <a:ext uri="{FF2B5EF4-FFF2-40B4-BE49-F238E27FC236}">
-                <a16:creationId xmlns:a16="http://schemas.microsoft.com/office/drawing/2014/main" id="{DC820159-CC53-4B89-93F5-1404C5474FB9}"/>
+                <a16:creationId xmlns:a16="http://schemas.microsoft.com/office/drawing/2014/main" id="{E092065B-86CC-4138-AFDD-FC0A69BFD706}"/>
               </a:ext>
             </a:extLst>
           </p:cNvPr>
@@ -9903,7 +10166,7 @@
           <p:cNvPr id="36" name="">
             <a:extLst xmlns:a="http://schemas.openxmlformats.org/drawingml/2006/main">
               <a:ext uri="{FF2B5EF4-FFF2-40B4-BE49-F238E27FC236}">
-                <a16:creationId xmlns:a16="http://schemas.microsoft.com/office/drawing/2014/main" id="{5B20FD49-BDEC-4031-996C-5911F9CD3AA9}"/>
+                <a16:creationId xmlns:a16="http://schemas.microsoft.com/office/drawing/2014/main" id="{5113BF4E-F7B8-4DD0-9239-71D1CEDD2EA8}"/>
               </a:ext>
             </a:extLst>
           </p:cNvPr>
@@ -9936,7 +10199,7 @@
           <p:cNvPr id="37" name="">
             <a:extLst xmlns:a="http://schemas.openxmlformats.org/drawingml/2006/main">
               <a:ext uri="{FF2B5EF4-FFF2-40B4-BE49-F238E27FC236}">
-                <a16:creationId xmlns:a16="http://schemas.microsoft.com/office/drawing/2014/main" id="{70CA4A6D-A29C-417E-99FF-535DB665BE27}"/>
+                <a16:creationId xmlns:a16="http://schemas.microsoft.com/office/drawing/2014/main" id="{778C2CE6-7748-4518-AA2B-3152C48F0369}"/>
               </a:ext>
             </a:extLst>
           </p:cNvPr>
@@ -9986,7 +10249,7 @@
           <p:cNvPr id="38" name="">
             <a:extLst xmlns:a="http://schemas.openxmlformats.org/drawingml/2006/main">
               <a:ext uri="{FF2B5EF4-FFF2-40B4-BE49-F238E27FC236}">
-                <a16:creationId xmlns:a16="http://schemas.microsoft.com/office/drawing/2014/main" id="{909DBFE4-0848-4BB0-84DD-95961A427438}"/>
+                <a16:creationId xmlns:a16="http://schemas.microsoft.com/office/drawing/2014/main" id="{AB44BBE2-E80E-4403-BDE6-2CA9CBCEC00E}"/>
               </a:ext>
             </a:extLst>
           </p:cNvPr>
@@ -10036,7 +10299,7 @@
           <p:cNvPr id="39" name="">
             <a:extLst xmlns:a="http://schemas.openxmlformats.org/drawingml/2006/main">
               <a:ext uri="{FF2B5EF4-FFF2-40B4-BE49-F238E27FC236}">
-                <a16:creationId xmlns:a16="http://schemas.microsoft.com/office/drawing/2014/main" id="{7F20F8BF-E12A-4507-AC26-D6ECBD3CD06F}"/>
+                <a16:creationId xmlns:a16="http://schemas.microsoft.com/office/drawing/2014/main" id="{1D9906CB-B90A-47ED-A3CB-EA1F4514AC72}"/>
               </a:ext>
             </a:extLst>
           </p:cNvPr>
@@ -10086,7 +10349,7 @@
           <p:cNvPr id="40" name="">
             <a:extLst xmlns:a="http://schemas.openxmlformats.org/drawingml/2006/main">
               <a:ext uri="{FF2B5EF4-FFF2-40B4-BE49-F238E27FC236}">
-                <a16:creationId xmlns:a16="http://schemas.microsoft.com/office/drawing/2014/main" id="{FEE785A7-CEAD-440C-A3FA-DC675F53B830}"/>
+                <a16:creationId xmlns:a16="http://schemas.microsoft.com/office/drawing/2014/main" id="{C0B6F7FB-0F97-4F37-9E31-CB4DEB6DEDBB}"/>
               </a:ext>
             </a:extLst>
           </p:cNvPr>
@@ -10134,7 +10397,7 @@
     </p:spTree>
     <p:extLst>
       <p:ext uri="{BB962C8B-B14F-4D97-AF65-F5344CB8AC3E}">
-        <p14:creationId xmlns:p14="http://schemas.microsoft.com/office/powerpoint/2010/main" val="892513421"/>
+        <p14:creationId xmlns:p14="http://schemas.microsoft.com/office/powerpoint/2010/main" val="1625616690"/>
       </p:ext>
     </p:extLst>
   </p:cSld>
@@ -10165,7 +10428,7 @@
           <p:cNvPr id="29" name="">
             <a:extLst xmlns:a="http://schemas.openxmlformats.org/drawingml/2006/main">
               <a:ext uri="{FF2B5EF4-FFF2-40B4-BE49-F238E27FC236}">
-                <a16:creationId xmlns:a16="http://schemas.microsoft.com/office/drawing/2014/main" id="{4A9B8ABF-A92F-4DD6-B60F-51FDD3BE9197}"/>
+                <a16:creationId xmlns:a16="http://schemas.microsoft.com/office/drawing/2014/main" id="{D409F691-8998-4500-8227-9BD4C9E78865}"/>
               </a:ext>
             </a:extLst>
           </p:cNvPr>
@@ -10215,7 +10478,7 @@
           <p:cNvPr id="2" name="">
             <a:extLst xmlns:a="http://schemas.openxmlformats.org/drawingml/2006/main">
               <a:ext uri="{FF2B5EF4-FFF2-40B4-BE49-F238E27FC236}">
-                <a16:creationId xmlns:a16="http://schemas.microsoft.com/office/drawing/2014/main" id="{0BD8E5BC-3324-425C-B466-5AC51FDAA7E5}"/>
+                <a16:creationId xmlns:a16="http://schemas.microsoft.com/office/drawing/2014/main" id="{413F907A-99A1-44FF-951D-32D067D7A128}"/>
               </a:ext>
             </a:extLst>
           </p:cNvPr>
@@ -10265,7 +10528,7 @@
           <p:cNvPr id="3" name="">
             <a:extLst xmlns:a="http://schemas.openxmlformats.org/drawingml/2006/main">
               <a:ext uri="{FF2B5EF4-FFF2-40B4-BE49-F238E27FC236}">
-                <a16:creationId xmlns:a16="http://schemas.microsoft.com/office/drawing/2014/main" id="{C3A66C7D-13DC-4DE4-B5C4-5AF8E4A6CF06}"/>
+                <a16:creationId xmlns:a16="http://schemas.microsoft.com/office/drawing/2014/main" id="{B1144A6D-3861-474B-A406-1ADCD78D4D5A}"/>
               </a:ext>
             </a:extLst>
           </p:cNvPr>
@@ -10298,7 +10561,7 @@
           <p:cNvPr id="4" name="title">
             <a:extLst xmlns:a="http://schemas.openxmlformats.org/drawingml/2006/main">
               <a:ext uri="{FF2B5EF4-FFF2-40B4-BE49-F238E27FC236}">
-                <a16:creationId xmlns:a16="http://schemas.microsoft.com/office/drawing/2014/main" id="{E0F374BF-30E6-4114-ADC8-FE5234F06404}"/>
+                <a16:creationId xmlns:a16="http://schemas.microsoft.com/office/drawing/2014/main" id="{DE96613C-13E0-448C-92DF-41DD8B46DB2A}"/>
               </a:ext>
             </a:extLst>
           </p:cNvPr>
@@ -10365,7 +10628,7 @@
           <p:cNvPr id="5" name="subtitle">
             <a:extLst xmlns:a="http://schemas.openxmlformats.org/drawingml/2006/main">
               <a:ext uri="{FF2B5EF4-FFF2-40B4-BE49-F238E27FC236}">
-                <a16:creationId xmlns:a16="http://schemas.microsoft.com/office/drawing/2014/main" id="{11CB52D2-C29B-445B-B558-1A6F01A34CA9}"/>
+                <a16:creationId xmlns:a16="http://schemas.microsoft.com/office/drawing/2014/main" id="{18E38536-4A07-4189-A252-6A252A9E7912}"/>
               </a:ext>
             </a:extLst>
           </p:cNvPr>
@@ -10415,7 +10678,7 @@
           <p:cNvPr id="6" name="">
             <a:extLst xmlns:a="http://schemas.openxmlformats.org/drawingml/2006/main">
               <a:ext uri="{FF2B5EF4-FFF2-40B4-BE49-F238E27FC236}">
-                <a16:creationId xmlns:a16="http://schemas.microsoft.com/office/drawing/2014/main" id="{3F7E77AC-5BCC-4E97-BC13-7BC047BB5BE5}"/>
+                <a16:creationId xmlns:a16="http://schemas.microsoft.com/office/drawing/2014/main" id="{99F5E335-421B-4F88-AD9E-23B1F4AAC272}"/>
               </a:ext>
             </a:extLst>
           </p:cNvPr>
@@ -10456,7 +10719,7 @@
           <p:cNvPr id="7" name="">
             <a:extLst xmlns:a="http://schemas.openxmlformats.org/drawingml/2006/main">
               <a:ext uri="{FF2B5EF4-FFF2-40B4-BE49-F238E27FC236}">
-                <a16:creationId xmlns:a16="http://schemas.microsoft.com/office/drawing/2014/main" id="{9207BBE8-A611-4242-B741-2C875F481FD4}"/>
+                <a16:creationId xmlns:a16="http://schemas.microsoft.com/office/drawing/2014/main" id="{42564038-BFC9-4378-93A7-D001C6ACF8F6}"/>
               </a:ext>
             </a:extLst>
           </p:cNvPr>
@@ -10506,7 +10769,7 @@
           <p:cNvPr id="8" name="">
             <a:extLst xmlns:a="http://schemas.openxmlformats.org/drawingml/2006/main">
               <a:ext uri="{FF2B5EF4-FFF2-40B4-BE49-F238E27FC236}">
-                <a16:creationId xmlns:a16="http://schemas.microsoft.com/office/drawing/2014/main" id="{045B1EDA-034F-4C72-8344-B1C5B29A6EB9}"/>
+                <a16:creationId xmlns:a16="http://schemas.microsoft.com/office/drawing/2014/main" id="{5101620F-60A2-4017-9565-A0641F288D32}"/>
               </a:ext>
             </a:extLst>
           </p:cNvPr>
@@ -10556,7 +10819,7 @@
           <p:cNvPr id="9" name="">
             <a:extLst xmlns:a="http://schemas.openxmlformats.org/drawingml/2006/main">
               <a:ext uri="{FF2B5EF4-FFF2-40B4-BE49-F238E27FC236}">
-                <a16:creationId xmlns:a16="http://schemas.microsoft.com/office/drawing/2014/main" id="{88876BDE-5D13-4707-843F-87B8C00A13B4}"/>
+                <a16:creationId xmlns:a16="http://schemas.microsoft.com/office/drawing/2014/main" id="{80690717-9A39-452C-934B-F8342B7960FF}"/>
               </a:ext>
             </a:extLst>
           </p:cNvPr>
@@ -10589,7 +10852,7 @@
           <p:cNvPr id="10" name="">
             <a:extLst xmlns:a="http://schemas.openxmlformats.org/drawingml/2006/main">
               <a:ext uri="{FF2B5EF4-FFF2-40B4-BE49-F238E27FC236}">
-                <a16:creationId xmlns:a16="http://schemas.microsoft.com/office/drawing/2014/main" id="{45E859F5-2A9E-4AD2-B77D-D80C0CEF3B82}"/>
+                <a16:creationId xmlns:a16="http://schemas.microsoft.com/office/drawing/2014/main" id="{8497E578-D5FC-4568-ACC7-FB1B6C193690}"/>
               </a:ext>
             </a:extLst>
           </p:cNvPr>
@@ -10639,7 +10902,7 @@
           <p:cNvPr id="11" name="">
             <a:extLst xmlns:a="http://schemas.openxmlformats.org/drawingml/2006/main">
               <a:ext uri="{FF2B5EF4-FFF2-40B4-BE49-F238E27FC236}">
-                <a16:creationId xmlns:a16="http://schemas.microsoft.com/office/drawing/2014/main" id="{78E21D4C-90BD-421F-A117-77A8D68044B9}"/>
+                <a16:creationId xmlns:a16="http://schemas.microsoft.com/office/drawing/2014/main" id="{452ED8FD-D9CD-49A9-9A1D-1F9225A7C353}"/>
               </a:ext>
             </a:extLst>
           </p:cNvPr>
@@ -10680,7 +10943,7 @@
           <p:cNvPr id="12" name="">
             <a:extLst xmlns:a="http://schemas.openxmlformats.org/drawingml/2006/main">
               <a:ext uri="{FF2B5EF4-FFF2-40B4-BE49-F238E27FC236}">
-                <a16:creationId xmlns:a16="http://schemas.microsoft.com/office/drawing/2014/main" id="{D1E53F5F-C0CC-4FF1-8381-7F795A27FD6E}"/>
+                <a16:creationId xmlns:a16="http://schemas.microsoft.com/office/drawing/2014/main" id="{BC9605B1-1D9B-4A6F-BBFC-5BB59F9E6FDB}"/>
               </a:ext>
             </a:extLst>
           </p:cNvPr>
@@ -10730,7 +10993,7 @@
           <p:cNvPr id="13" name="">
             <a:extLst xmlns:a="http://schemas.openxmlformats.org/drawingml/2006/main">
               <a:ext uri="{FF2B5EF4-FFF2-40B4-BE49-F238E27FC236}">
-                <a16:creationId xmlns:a16="http://schemas.microsoft.com/office/drawing/2014/main" id="{7D2B642C-96A1-4A20-84F1-24211EACA854}"/>
+                <a16:creationId xmlns:a16="http://schemas.microsoft.com/office/drawing/2014/main" id="{29D97940-BE09-4DD6-B3C2-4E8F56DC6C26}"/>
               </a:ext>
             </a:extLst>
           </p:cNvPr>
@@ -10780,7 +11043,7 @@
           <p:cNvPr id="14" name="">
             <a:extLst xmlns:a="http://schemas.openxmlformats.org/drawingml/2006/main">
               <a:ext uri="{FF2B5EF4-FFF2-40B4-BE49-F238E27FC236}">
-                <a16:creationId xmlns:a16="http://schemas.microsoft.com/office/drawing/2014/main" id="{1EFC6319-FA42-43B6-9ACB-7A60235F5DDE}"/>
+                <a16:creationId xmlns:a16="http://schemas.microsoft.com/office/drawing/2014/main" id="{A0708935-9766-4EF3-BED0-704C6665FD00}"/>
               </a:ext>
             </a:extLst>
           </p:cNvPr>
@@ -10813,7 +11076,7 @@
           <p:cNvPr id="15" name="">
             <a:extLst xmlns:a="http://schemas.openxmlformats.org/drawingml/2006/main">
               <a:ext uri="{FF2B5EF4-FFF2-40B4-BE49-F238E27FC236}">
-                <a16:creationId xmlns:a16="http://schemas.microsoft.com/office/drawing/2014/main" id="{63FC5EC1-81BB-4CE9-BF6B-66AB91BAFC85}"/>
+                <a16:creationId xmlns:a16="http://schemas.microsoft.com/office/drawing/2014/main" id="{2A98C401-EABA-4E5A-98F3-0E9A98A6D649}"/>
               </a:ext>
             </a:extLst>
           </p:cNvPr>
@@ -10863,7 +11126,7 @@
           <p:cNvPr id="16" name="">
             <a:extLst xmlns:a="http://schemas.openxmlformats.org/drawingml/2006/main">
               <a:ext uri="{FF2B5EF4-FFF2-40B4-BE49-F238E27FC236}">
-                <a16:creationId xmlns:a16="http://schemas.microsoft.com/office/drawing/2014/main" id="{3C8C041F-E140-4C13-B835-864221319E54}"/>
+                <a16:creationId xmlns:a16="http://schemas.microsoft.com/office/drawing/2014/main" id="{5640B5E0-0FDD-484A-8FE4-E248A1A65A9C}"/>
               </a:ext>
             </a:extLst>
           </p:cNvPr>
@@ -10904,7 +11167,7 @@
           <p:cNvPr id="17" name="">
             <a:extLst xmlns:a="http://schemas.openxmlformats.org/drawingml/2006/main">
               <a:ext uri="{FF2B5EF4-FFF2-40B4-BE49-F238E27FC236}">
-                <a16:creationId xmlns:a16="http://schemas.microsoft.com/office/drawing/2014/main" id="{92C65333-4913-4FFB-B01F-64D40AF95A60}"/>
+                <a16:creationId xmlns:a16="http://schemas.microsoft.com/office/drawing/2014/main" id="{FBD1327A-77DA-4EBE-A471-B0216333491E}"/>
               </a:ext>
             </a:extLst>
           </p:cNvPr>
@@ -10954,7 +11217,7 @@
           <p:cNvPr id="18" name="">
             <a:extLst xmlns:a="http://schemas.openxmlformats.org/drawingml/2006/main">
               <a:ext uri="{FF2B5EF4-FFF2-40B4-BE49-F238E27FC236}">
-                <a16:creationId xmlns:a16="http://schemas.microsoft.com/office/drawing/2014/main" id="{5D8D6C36-BDB7-4872-A1C9-AD5844DB9B61}"/>
+                <a16:creationId xmlns:a16="http://schemas.microsoft.com/office/drawing/2014/main" id="{14FC2A72-0D86-488F-8D99-81BC1BFE106F}"/>
               </a:ext>
             </a:extLst>
           </p:cNvPr>
@@ -11004,7 +11267,7 @@
           <p:cNvPr id="19" name="">
             <a:extLst xmlns:a="http://schemas.openxmlformats.org/drawingml/2006/main">
               <a:ext uri="{FF2B5EF4-FFF2-40B4-BE49-F238E27FC236}">
-                <a16:creationId xmlns:a16="http://schemas.microsoft.com/office/drawing/2014/main" id="{EA0B03E6-3D0C-415A-9C28-FEE8BA69DF0B}"/>
+                <a16:creationId xmlns:a16="http://schemas.microsoft.com/office/drawing/2014/main" id="{7E9FBD4C-93FC-4B56-9A5A-12370DF0E0C7}"/>
               </a:ext>
             </a:extLst>
           </p:cNvPr>
@@ -11037,7 +11300,7 @@
           <p:cNvPr id="20" name="">
             <a:extLst xmlns:a="http://schemas.openxmlformats.org/drawingml/2006/main">
               <a:ext uri="{FF2B5EF4-FFF2-40B4-BE49-F238E27FC236}">
-                <a16:creationId xmlns:a16="http://schemas.microsoft.com/office/drawing/2014/main" id="{461A7168-F121-46E1-92B1-F07AEB1C008F}"/>
+                <a16:creationId xmlns:a16="http://schemas.microsoft.com/office/drawing/2014/main" id="{62497F8A-BD5A-43A4-90C3-7DCCECFCACE7}"/>
               </a:ext>
             </a:extLst>
           </p:cNvPr>
@@ -11087,7 +11350,7 @@
           <p:cNvPr id="21" name="">
             <a:extLst xmlns:a="http://schemas.openxmlformats.org/drawingml/2006/main">
               <a:ext uri="{FF2B5EF4-FFF2-40B4-BE49-F238E27FC236}">
-                <a16:creationId xmlns:a16="http://schemas.microsoft.com/office/drawing/2014/main" id="{48B6AF19-54B4-4268-85A0-76C6D8B51887}"/>
+                <a16:creationId xmlns:a16="http://schemas.microsoft.com/office/drawing/2014/main" id="{D7BC9390-98B0-4411-AD59-CA60EBB6A903}"/>
               </a:ext>
             </a:extLst>
           </p:cNvPr>
@@ -11128,7 +11391,7 @@
           <p:cNvPr id="22" name="">
             <a:extLst xmlns:a="http://schemas.openxmlformats.org/drawingml/2006/main">
               <a:ext uri="{FF2B5EF4-FFF2-40B4-BE49-F238E27FC236}">
-                <a16:creationId xmlns:a16="http://schemas.microsoft.com/office/drawing/2014/main" id="{BEDC5FA4-5067-408A-8B05-EC6617D94AB6}"/>
+                <a16:creationId xmlns:a16="http://schemas.microsoft.com/office/drawing/2014/main" id="{24B2FE34-02E9-4874-B7C5-B38C233F54D9}"/>
               </a:ext>
             </a:extLst>
           </p:cNvPr>
@@ -11178,7 +11441,7 @@
           <p:cNvPr id="23" name="">
             <a:extLst xmlns:a="http://schemas.openxmlformats.org/drawingml/2006/main">
               <a:ext uri="{FF2B5EF4-FFF2-40B4-BE49-F238E27FC236}">
-                <a16:creationId xmlns:a16="http://schemas.microsoft.com/office/drawing/2014/main" id="{E650A6A4-48BA-4E63-953C-4E70C867C6DC}"/>
+                <a16:creationId xmlns:a16="http://schemas.microsoft.com/office/drawing/2014/main" id="{E12C595A-3BA5-4B38-A8CF-FA5AC4A6839F}"/>
               </a:ext>
             </a:extLst>
           </p:cNvPr>
@@ -11228,7 +11491,7 @@
           <p:cNvPr id="24" name="">
             <a:extLst xmlns:a="http://schemas.openxmlformats.org/drawingml/2006/main">
               <a:ext uri="{FF2B5EF4-FFF2-40B4-BE49-F238E27FC236}">
-                <a16:creationId xmlns:a16="http://schemas.microsoft.com/office/drawing/2014/main" id="{1555E9A1-589B-48DD-B94A-61B8BB4D0750}"/>
+                <a16:creationId xmlns:a16="http://schemas.microsoft.com/office/drawing/2014/main" id="{1765DC0F-B90D-4C33-9E60-FE31A62A4A15}"/>
               </a:ext>
             </a:extLst>
           </p:cNvPr>
@@ -11261,7 +11524,7 @@
           <p:cNvPr id="25" name="">
             <a:extLst xmlns:a="http://schemas.openxmlformats.org/drawingml/2006/main">
               <a:ext uri="{FF2B5EF4-FFF2-40B4-BE49-F238E27FC236}">
-                <a16:creationId xmlns:a16="http://schemas.microsoft.com/office/drawing/2014/main" id="{30509AC7-71B5-4606-B931-4827BC3A08E3}"/>
+                <a16:creationId xmlns:a16="http://schemas.microsoft.com/office/drawing/2014/main" id="{B266CC9C-B196-43E0-80F7-36F59A5F99D7}"/>
               </a:ext>
             </a:extLst>
           </p:cNvPr>
@@ -11311,7 +11574,7 @@
           <p:cNvPr id="26" name="">
             <a:extLst xmlns:a="http://schemas.openxmlformats.org/drawingml/2006/main">
               <a:ext uri="{FF2B5EF4-FFF2-40B4-BE49-F238E27FC236}">
-                <a16:creationId xmlns:a16="http://schemas.microsoft.com/office/drawing/2014/main" id="{57CB1D90-6D05-422A-A91A-09A032A3F615}"/>
+                <a16:creationId xmlns:a16="http://schemas.microsoft.com/office/drawing/2014/main" id="{4609A22E-68FE-4218-B932-2990231B78B2}"/>
               </a:ext>
             </a:extLst>
           </p:cNvPr>
@@ -11361,7 +11624,7 @@
           <p:cNvPr id="27" name="">
             <a:extLst xmlns:a="http://schemas.openxmlformats.org/drawingml/2006/main">
               <a:ext uri="{FF2B5EF4-FFF2-40B4-BE49-F238E27FC236}">
-                <a16:creationId xmlns:a16="http://schemas.microsoft.com/office/drawing/2014/main" id="{21ECA2B6-70FB-490C-B78E-E25E3473CF0D}"/>
+                <a16:creationId xmlns:a16="http://schemas.microsoft.com/office/drawing/2014/main" id="{87762488-0AEB-427B-9F6A-227969F3BF91}"/>
               </a:ext>
             </a:extLst>
           </p:cNvPr>
@@ -11411,7 +11674,7 @@
           <p:cNvPr id="28" name="">
             <a:extLst xmlns:a="http://schemas.openxmlformats.org/drawingml/2006/main">
               <a:ext uri="{FF2B5EF4-FFF2-40B4-BE49-F238E27FC236}">
-                <a16:creationId xmlns:a16="http://schemas.microsoft.com/office/drawing/2014/main" id="{DF6BAEC4-230B-470C-AED6-66C71A2C443F}"/>
+                <a16:creationId xmlns:a16="http://schemas.microsoft.com/office/drawing/2014/main" id="{C628FD58-0630-4364-9956-130A351BFE38}"/>
               </a:ext>
             </a:extLst>
           </p:cNvPr>
@@ -11459,7 +11722,7 @@
     </p:spTree>
     <p:extLst>
       <p:ext uri="{BB962C8B-B14F-4D97-AF65-F5344CB8AC3E}">
-        <p14:creationId xmlns:p14="http://schemas.microsoft.com/office/powerpoint/2010/main" val="788713911"/>
+        <p14:creationId xmlns:p14="http://schemas.microsoft.com/office/powerpoint/2010/main" val="261496127"/>
       </p:ext>
     </p:extLst>
   </p:cSld>
@@ -11472,7 +11735,7 @@
     <p:bg>
       <p:bgPr>
         <a:solidFill xmlns:a="http://schemas.openxmlformats.org/drawingml/2006/main">
-          <a:srgbClr val="FFFFFF"/>
+          <a:srgbClr val="071829"/>
         </a:solidFill>
       </p:bgPr>
     </p:bg>
@@ -11487,22 +11750,22 @@
       </p:grpSpPr>
       <p:sp>
         <p:nvSpPr>
-          <p:cNvPr id="45" name="">
-            <a:extLst xmlns:a="http://schemas.openxmlformats.org/drawingml/2006/main">
-              <a:ext uri="{FF2B5EF4-FFF2-40B4-BE49-F238E27FC236}">
-                <a16:creationId xmlns:a16="http://schemas.microsoft.com/office/drawing/2014/main" id="{AD495059-FA37-4AD8-8873-9EC248FBA471}"/>
-              </a:ext>
-            </a:extLst>
-          </p:cNvPr>
-          <p:cNvSpPr>
-            <a:spLocks xmlns:a="http://schemas.openxmlformats.org/drawingml/2006/main" noGrp="1"/>
-          </p:cNvSpPr>
-          <p:nvPr/>
-        </p:nvSpPr>
-        <p:spPr>
-          <a:xfrm xmlns:a="http://schemas.openxmlformats.org/drawingml/2006/main">
-            <a:off x="457200" y="314325"/>
-            <a:ext cx="5905500" cy="171450"/>
+          <p:cNvPr id="76" name="">
+            <a:extLst xmlns:a="http://schemas.openxmlformats.org/drawingml/2006/main">
+              <a:ext uri="{FF2B5EF4-FFF2-40B4-BE49-F238E27FC236}">
+                <a16:creationId xmlns:a16="http://schemas.microsoft.com/office/drawing/2014/main" id="{D118F98F-3508-42CE-8972-7913AB5783C2}"/>
+              </a:ext>
+            </a:extLst>
+          </p:cNvPr>
+          <p:cNvSpPr>
+            <a:spLocks xmlns:a="http://schemas.openxmlformats.org/drawingml/2006/main" noGrp="1"/>
+          </p:cNvSpPr>
+          <p:nvPr/>
+        </p:nvSpPr>
+        <p:spPr>
+          <a:xfrm xmlns:a="http://schemas.openxmlformats.org/drawingml/2006/main">
+            <a:off x="457200" y="266700"/>
+            <a:ext cx="2095500" cy="152400"/>
           </a:xfrm>
           <a:prstGeom xmlns:a="http://schemas.openxmlformats.org/drawingml/2006/main" prst="rect">
             <a:avLst/>
@@ -11520,14 +11783,14 @@
             <a:pPr algn="l">
               <a:defRPr sz="750" b="1" i="0">
                 <a:solidFill>
-                  <a:srgbClr val="5F6D80"/>
+                  <a:srgbClr val="7CE7D5"/>
                 </a:solidFill>
               </a:defRPr>
             </a:pPr>
             <a:r>
               <a:rPr sz="750" b="1" i="0">
                 <a:solidFill>
-                  <a:srgbClr val="5F6D80"/>
+                  <a:srgbClr val="7CE7D5"/>
                 </a:solidFill>
               </a:rPr>
               <a:t>ARCHITECTURE</a:t>
@@ -11540,19 +11803,19 @@
           <p:cNvPr id="2" name="">
             <a:extLst xmlns:a="http://schemas.openxmlformats.org/drawingml/2006/main">
               <a:ext uri="{FF2B5EF4-FFF2-40B4-BE49-F238E27FC236}">
-                <a16:creationId xmlns:a16="http://schemas.microsoft.com/office/drawing/2014/main" id="{EE4A2BE5-E0DB-44C5-B778-E0009AC9B54E}"/>
-              </a:ext>
-            </a:extLst>
-          </p:cNvPr>
-          <p:cNvSpPr>
-            <a:spLocks xmlns:a="http://schemas.openxmlformats.org/drawingml/2006/main" noGrp="1"/>
-          </p:cNvSpPr>
-          <p:nvPr/>
-        </p:nvSpPr>
-        <p:spPr>
-          <a:xfrm xmlns:a="http://schemas.openxmlformats.org/drawingml/2006/main">
-            <a:off x="9639300" y="314325"/>
-            <a:ext cx="2095500" cy="171450"/>
+                <a16:creationId xmlns:a16="http://schemas.microsoft.com/office/drawing/2014/main" id="{7339D150-53DD-435B-9817-2BFBC7736301}"/>
+              </a:ext>
+            </a:extLst>
+          </p:cNvPr>
+          <p:cNvSpPr>
+            <a:spLocks xmlns:a="http://schemas.openxmlformats.org/drawingml/2006/main" noGrp="1"/>
+          </p:cNvSpPr>
+          <p:nvPr/>
+        </p:nvSpPr>
+        <p:spPr>
+          <a:xfrm xmlns:a="http://schemas.openxmlformats.org/drawingml/2006/main">
+            <a:off x="9639300" y="266700"/>
+            <a:ext cx="2095500" cy="152400"/>
           </a:xfrm>
           <a:prstGeom xmlns:a="http://schemas.openxmlformats.org/drawingml/2006/main" prst="rect">
             <a:avLst/>
@@ -11570,14 +11833,14 @@
             <a:pPr algn="r">
               <a:defRPr sz="750" b="1" i="0">
                 <a:solidFill>
-                  <a:srgbClr val="5F6D80"/>
+                  <a:srgbClr val="8BA1B5"/>
                 </a:solidFill>
               </a:defRPr>
             </a:pPr>
             <a:r>
               <a:rPr sz="750" b="1" i="0">
                 <a:solidFill>
-                  <a:srgbClr val="5F6D80"/>
+                  <a:srgbClr val="8BA1B5"/>
                 </a:solidFill>
               </a:rPr>
               <a:t>RXRELAY  /  08</a:t>
@@ -11590,77 +11853,44 @@
           <p:cNvPr id="3" name="">
             <a:extLst xmlns:a="http://schemas.openxmlformats.org/drawingml/2006/main">
               <a:ext uri="{FF2B5EF4-FFF2-40B4-BE49-F238E27FC236}">
-                <a16:creationId xmlns:a16="http://schemas.microsoft.com/office/drawing/2014/main" id="{9B9CF7FF-13B1-460E-9CCD-2160485AAF6A}"/>
-              </a:ext>
-            </a:extLst>
-          </p:cNvPr>
-          <p:cNvSpPr>
-            <a:spLocks xmlns:a="http://schemas.openxmlformats.org/drawingml/2006/main" noGrp="1"/>
-          </p:cNvSpPr>
-          <p:nvPr/>
-        </p:nvSpPr>
-        <p:spPr>
-          <a:xfrm xmlns:a="http://schemas.openxmlformats.org/drawingml/2006/main">
-            <a:off x="457200" y="552450"/>
-            <a:ext cx="11277600" cy="9525"/>
-          </a:xfrm>
-          <a:prstGeom xmlns:a="http://schemas.openxmlformats.org/drawingml/2006/main" prst="rect">
-            <a:avLst/>
-          </a:prstGeom>
-          <a:solidFill xmlns:a="http://schemas.openxmlformats.org/drawingml/2006/main">
-            <a:srgbClr val="D8E0E7"/>
-          </a:solidFill>
-          <a:ln xmlns:a="http://schemas.openxmlformats.org/drawingml/2006/main" w="0">
-            <a:solidFill>
-              <a:srgbClr val="D8E0E7"/>
-            </a:solidFill>
-            <a:prstDash val="solid"/>
-          </a:ln>
-        </p:spPr>
-      </p:sp>
-      <p:sp>
-        <p:nvSpPr>
-          <p:cNvPr id="4" name="title">
-            <a:extLst xmlns:a="http://schemas.openxmlformats.org/drawingml/2006/main">
-              <a:ext uri="{FF2B5EF4-FFF2-40B4-BE49-F238E27FC236}">
-                <a16:creationId xmlns:a16="http://schemas.microsoft.com/office/drawing/2014/main" id="{FA1E72DC-5C43-4C62-B474-0B34E204DA83}"/>
-              </a:ext>
-            </a:extLst>
-          </p:cNvPr>
-          <p:cNvSpPr>
-            <a:spLocks xmlns:a="http://schemas.openxmlformats.org/drawingml/2006/main" noGrp="1"/>
-          </p:cNvSpPr>
-          <p:nvPr/>
-        </p:nvSpPr>
-        <p:spPr>
-          <a:xfrm xmlns:a="http://schemas.openxmlformats.org/drawingml/2006/main">
-            <a:off x="457200" y="876300"/>
-            <a:ext cx="8096250" cy="828675"/>
-          </a:xfrm>
-          <a:prstGeom xmlns:a="http://schemas.openxmlformats.org/drawingml/2006/main" prst="rect">
-            <a:avLst/>
-          </a:prstGeom>
-          <a:noFill xmlns:a="http://schemas.openxmlformats.org/drawingml/2006/main"/>
-          <a:ln xmlns:a="http://schemas.openxmlformats.org/drawingml/2006/main" w="0">
-            <a:noFill/>
-            <a:prstDash val="solid"/>
-          </a:ln>
-        </p:spPr>
-        <p:txBody>
-          <a:bodyPr xmlns:a="http://schemas.openxmlformats.org/drawingml/2006/main"/>
-          <a:lstStyle xmlns:a="http://schemas.openxmlformats.org/drawingml/2006/main"/>
-          <a:p xmlns:a="http://schemas.openxmlformats.org/drawingml/2006/main">
-            <a:pPr algn="l">
-              <a:defRPr sz="3375" b="1" i="0">
-                <a:solidFill>
-                  <a:srgbClr val="0B1F33"/>
-                </a:solidFill>
-              </a:defRPr>
-            </a:pPr>
-            <a:r>
-              <a:rPr sz="3375" b="1" i="0">
-                <a:solidFill>
-                  <a:srgbClr val="0B1F33"/>
+                <a16:creationId xmlns:a16="http://schemas.microsoft.com/office/drawing/2014/main" id="{AC5EB5E2-1DA0-4DEC-9C3B-20F64D52A03D}"/>
+              </a:ext>
+            </a:extLst>
+          </p:cNvPr>
+          <p:cNvSpPr>
+            <a:spLocks xmlns:a="http://schemas.openxmlformats.org/drawingml/2006/main" noGrp="1"/>
+          </p:cNvSpPr>
+          <p:nvPr/>
+        </p:nvSpPr>
+        <p:spPr>
+          <a:xfrm xmlns:a="http://schemas.openxmlformats.org/drawingml/2006/main">
+            <a:off x="457200" y="495300"/>
+            <a:ext cx="8572500" cy="342900"/>
+          </a:xfrm>
+          <a:prstGeom xmlns:a="http://schemas.openxmlformats.org/drawingml/2006/main" prst="rect">
+            <a:avLst/>
+          </a:prstGeom>
+          <a:noFill xmlns:a="http://schemas.openxmlformats.org/drawingml/2006/main"/>
+          <a:ln xmlns:a="http://schemas.openxmlformats.org/drawingml/2006/main" w="0">
+            <a:noFill/>
+            <a:prstDash val="solid"/>
+          </a:ln>
+        </p:spPr>
+        <p:txBody>
+          <a:bodyPr xmlns:a="http://schemas.openxmlformats.org/drawingml/2006/main"/>
+          <a:lstStyle xmlns:a="http://schemas.openxmlformats.org/drawingml/2006/main"/>
+          <a:p xmlns:a="http://schemas.openxmlformats.org/drawingml/2006/main">
+            <a:pPr algn="l">
+              <a:defRPr sz="2100" b="1" i="0">
+                <a:solidFill>
+                  <a:srgbClr val="FFFFFF"/>
+                </a:solidFill>
+              </a:defRPr>
+            </a:pPr>
+            <a:r>
+              <a:rPr sz="2100" b="1" i="0">
+                <a:solidFill>
+                  <a:srgbClr val="FFFFFF"/>
                 </a:solidFill>
               </a:rPr>
               <a:t>A voice agent with a real trust boundary.</a:t>
@@ -11670,84 +11900,334 @@
       </p:sp>
       <p:sp>
         <p:nvSpPr>
-          <p:cNvPr id="5" name="subtitle">
-            <a:extLst xmlns:a="http://schemas.openxmlformats.org/drawingml/2006/main">
-              <a:ext uri="{FF2B5EF4-FFF2-40B4-BE49-F238E27FC236}">
-                <a16:creationId xmlns:a16="http://schemas.microsoft.com/office/drawing/2014/main" id="{93447955-D35D-4378-85CD-4214EDF268A1}"/>
-              </a:ext>
-            </a:extLst>
-          </p:cNvPr>
-          <p:cNvSpPr>
-            <a:spLocks xmlns:a="http://schemas.openxmlformats.org/drawingml/2006/main" noGrp="1"/>
-          </p:cNvSpPr>
-          <p:nvPr/>
-        </p:nvSpPr>
-        <p:spPr>
-          <a:xfrm xmlns:a="http://schemas.openxmlformats.org/drawingml/2006/main">
-            <a:off x="457200" y="1819275"/>
-            <a:ext cx="7143750" cy="523875"/>
-          </a:xfrm>
-          <a:prstGeom xmlns:a="http://schemas.openxmlformats.org/drawingml/2006/main" prst="rect">
-            <a:avLst/>
-          </a:prstGeom>
-          <a:noFill xmlns:a="http://schemas.openxmlformats.org/drawingml/2006/main"/>
-          <a:ln xmlns:a="http://schemas.openxmlformats.org/drawingml/2006/main" w="0">
-            <a:noFill/>
-            <a:prstDash val="solid"/>
-          </a:ln>
-        </p:spPr>
-        <p:txBody>
-          <a:bodyPr xmlns:a="http://schemas.openxmlformats.org/drawingml/2006/main"/>
-          <a:lstStyle xmlns:a="http://schemas.openxmlformats.org/drawingml/2006/main"/>
-          <a:p xmlns:a="http://schemas.openxmlformats.org/drawingml/2006/main">
-            <a:pPr algn="l">
-              <a:defRPr sz="1350" b="0" i="0">
-                <a:solidFill>
-                  <a:srgbClr val="5F6D80"/>
-                </a:solidFill>
-              </a:defRPr>
-            </a:pPr>
-            <a:r>
-              <a:rPr sz="1350" b="0" i="0">
-                <a:solidFill>
-                  <a:srgbClr val="5F6D80"/>
-                </a:solidFill>
-              </a:rPr>
-              <a:t>The big idea: an LLM proposes language. Deterministic policy and evidence decide what may happen.</a:t>
-            </a:r>
-          </a:p>
-        </p:txBody>
-      </p:sp>
-      <p:sp>
-        <p:nvSpPr>
-          <p:cNvPr id="6" name="Patient">
-            <a:extLst xmlns:a="http://schemas.openxmlformats.org/drawingml/2006/main">
-              <a:ext uri="{FF2B5EF4-FFF2-40B4-BE49-F238E27FC236}">
-                <a16:creationId xmlns:a16="http://schemas.microsoft.com/office/drawing/2014/main" id="{FBCE3A60-86B4-4CBA-8157-576F941430F1}"/>
-              </a:ext>
-            </a:extLst>
-          </p:cNvPr>
-          <p:cNvSpPr>
-            <a:spLocks xmlns:a="http://schemas.openxmlformats.org/drawingml/2006/main" noGrp="1"/>
-          </p:cNvSpPr>
-          <p:nvPr/>
-        </p:nvSpPr>
-        <p:spPr>
-          <a:xfrm xmlns:a="http://schemas.openxmlformats.org/drawingml/2006/main">
-            <a:off x="457200" y="3181350"/>
-            <a:ext cx="1428750" cy="904875"/>
+          <p:cNvPr id="4" name="">
+            <a:extLst xmlns:a="http://schemas.openxmlformats.org/drawingml/2006/main">
+              <a:ext uri="{FF2B5EF4-FFF2-40B4-BE49-F238E27FC236}">
+                <a16:creationId xmlns:a16="http://schemas.microsoft.com/office/drawing/2014/main" id="{FDAA40B4-11E4-4505-BD23-1EC7056453F1}"/>
+              </a:ext>
+            </a:extLst>
+          </p:cNvPr>
+          <p:cNvSpPr>
+            <a:spLocks xmlns:a="http://schemas.openxmlformats.org/drawingml/2006/main" noGrp="1"/>
+          </p:cNvSpPr>
+          <p:nvPr/>
+        </p:nvSpPr>
+        <p:spPr>
+          <a:xfrm xmlns:a="http://schemas.openxmlformats.org/drawingml/2006/main">
+            <a:off x="457200" y="857250"/>
+            <a:ext cx="10477500" cy="266700"/>
+          </a:xfrm>
+          <a:prstGeom xmlns:a="http://schemas.openxmlformats.org/drawingml/2006/main" prst="rect">
+            <a:avLst/>
+          </a:prstGeom>
+          <a:noFill xmlns:a="http://schemas.openxmlformats.org/drawingml/2006/main"/>
+          <a:ln xmlns:a="http://schemas.openxmlformats.org/drawingml/2006/main" w="0">
+            <a:noFill/>
+            <a:prstDash val="solid"/>
+          </a:ln>
+        </p:spPr>
+        <p:txBody>
+          <a:bodyPr xmlns:a="http://schemas.openxmlformats.org/drawingml/2006/main"/>
+          <a:lstStyle xmlns:a="http://schemas.openxmlformats.org/drawingml/2006/main"/>
+          <a:p xmlns:a="http://schemas.openxmlformats.org/drawingml/2006/main">
+            <a:pPr algn="l">
+              <a:defRPr sz="975" b="0" i="0">
+                <a:solidFill>
+                  <a:srgbClr val="A8BACB"/>
+                </a:solidFill>
+              </a:defRPr>
+            </a:pPr>
+            <a:r>
+              <a:rPr sz="975" b="0" i="0">
+                <a:solidFill>
+                  <a:srgbClr val="A8BACB"/>
+                </a:solidFill>
+              </a:rPr>
+              <a:t>LLM proposes language. Deterministic policy + evidence decide what may happen. Public tunnel never reaches the dashboard.</a:t>
+            </a:r>
+          </a:p>
+        </p:txBody>
+      </p:sp>
+      <p:sp>
+        <p:nvSpPr>
+          <p:cNvPr id="5" name="">
+            <a:extLst xmlns:a="http://schemas.openxmlformats.org/drawingml/2006/main">
+              <a:ext uri="{FF2B5EF4-FFF2-40B4-BE49-F238E27FC236}">
+                <a16:creationId xmlns:a16="http://schemas.microsoft.com/office/drawing/2014/main" id="{D00DA2AB-0412-450E-8B4E-57BEDA0CA7AF}"/>
+              </a:ext>
+            </a:extLst>
+          </p:cNvPr>
+          <p:cNvSpPr>
+            <a:spLocks xmlns:a="http://schemas.openxmlformats.org/drawingml/2006/main" noGrp="1"/>
+          </p:cNvSpPr>
+          <p:nvPr/>
+        </p:nvSpPr>
+        <p:spPr>
+          <a:xfrm xmlns:a="http://schemas.openxmlformats.org/drawingml/2006/main">
+            <a:off x="457200" y="1257300"/>
+            <a:ext cx="1524000" cy="133350"/>
+          </a:xfrm>
+          <a:prstGeom xmlns:a="http://schemas.openxmlformats.org/drawingml/2006/main" prst="rect">
+            <a:avLst/>
+          </a:prstGeom>
+          <a:noFill xmlns:a="http://schemas.openxmlformats.org/drawingml/2006/main"/>
+          <a:ln xmlns:a="http://schemas.openxmlformats.org/drawingml/2006/main" w="0">
+            <a:noFill/>
+            <a:prstDash val="solid"/>
+          </a:ln>
+        </p:spPr>
+        <p:txBody>
+          <a:bodyPr xmlns:a="http://schemas.openxmlformats.org/drawingml/2006/main"/>
+          <a:lstStyle xmlns:a="http://schemas.openxmlformats.org/drawingml/2006/main"/>
+          <a:p xmlns:a="http://schemas.openxmlformats.org/drawingml/2006/main">
+            <a:pPr algn="l">
+              <a:defRPr sz="675" b="1" i="0">
+                <a:solidFill>
+                  <a:srgbClr val="7CE7D5"/>
+                </a:solidFill>
+              </a:defRPr>
+            </a:pPr>
+            <a:r>
+              <a:rPr sz="675" b="1" i="0">
+                <a:solidFill>
+                  <a:srgbClr val="7CE7D5"/>
+                </a:solidFill>
+              </a:rPr>
+              <a:t>PUBLIC EDGE</a:t>
+            </a:r>
+          </a:p>
+        </p:txBody>
+      </p:sp>
+      <p:sp>
+        <p:nvSpPr>
+          <p:cNvPr id="6" name="">
+            <a:extLst xmlns:a="http://schemas.openxmlformats.org/drawingml/2006/main">
+              <a:ext uri="{FF2B5EF4-FFF2-40B4-BE49-F238E27FC236}">
+                <a16:creationId xmlns:a16="http://schemas.microsoft.com/office/drawing/2014/main" id="{B36DD898-CD68-4BE1-B70D-7473671320A6}"/>
+              </a:ext>
+            </a:extLst>
+          </p:cNvPr>
+          <p:cNvSpPr>
+            <a:spLocks xmlns:a="http://schemas.openxmlformats.org/drawingml/2006/main" noGrp="1"/>
+          </p:cNvSpPr>
+          <p:nvPr/>
+        </p:nvSpPr>
+        <p:spPr>
+          <a:xfrm xmlns:a="http://schemas.openxmlformats.org/drawingml/2006/main">
+            <a:off x="2667000" y="1257300"/>
+            <a:ext cx="1524000" cy="133350"/>
+          </a:xfrm>
+          <a:prstGeom xmlns:a="http://schemas.openxmlformats.org/drawingml/2006/main" prst="rect">
+            <a:avLst/>
+          </a:prstGeom>
+          <a:noFill xmlns:a="http://schemas.openxmlformats.org/drawingml/2006/main"/>
+          <a:ln xmlns:a="http://schemas.openxmlformats.org/drawingml/2006/main" w="0">
+            <a:noFill/>
+            <a:prstDash val="solid"/>
+          </a:ln>
+        </p:spPr>
+        <p:txBody>
+          <a:bodyPr xmlns:a="http://schemas.openxmlformats.org/drawingml/2006/main"/>
+          <a:lstStyle xmlns:a="http://schemas.openxmlformats.org/drawingml/2006/main"/>
+          <a:p xmlns:a="http://schemas.openxmlformats.org/drawingml/2006/main">
+            <a:pPr algn="l">
+              <a:defRPr sz="675" b="1" i="0">
+                <a:solidFill>
+                  <a:srgbClr val="7CE7D5"/>
+                </a:solidFill>
+              </a:defRPr>
+            </a:pPr>
+            <a:r>
+              <a:rPr sz="675" b="1" i="0">
+                <a:solidFill>
+                  <a:srgbClr val="7CE7D5"/>
+                </a:solidFill>
+              </a:rPr>
+              <a:t>VOICE PROCESS</a:t>
+            </a:r>
+          </a:p>
+        </p:txBody>
+      </p:sp>
+      <p:sp>
+        <p:nvSpPr>
+          <p:cNvPr id="7" name="">
+            <a:extLst xmlns:a="http://schemas.openxmlformats.org/drawingml/2006/main">
+              <a:ext uri="{FF2B5EF4-FFF2-40B4-BE49-F238E27FC236}">
+                <a16:creationId xmlns:a16="http://schemas.microsoft.com/office/drawing/2014/main" id="{E700FCF4-FF61-4750-9D96-516B902B0AB8}"/>
+              </a:ext>
+            </a:extLst>
+          </p:cNvPr>
+          <p:cNvSpPr>
+            <a:spLocks xmlns:a="http://schemas.openxmlformats.org/drawingml/2006/main" noGrp="1"/>
+          </p:cNvSpPr>
+          <p:nvPr/>
+        </p:nvSpPr>
+        <p:spPr>
+          <a:xfrm xmlns:a="http://schemas.openxmlformats.org/drawingml/2006/main">
+            <a:off x="4953000" y="1257300"/>
+            <a:ext cx="1524000" cy="133350"/>
+          </a:xfrm>
+          <a:prstGeom xmlns:a="http://schemas.openxmlformats.org/drawingml/2006/main" prst="rect">
+            <a:avLst/>
+          </a:prstGeom>
+          <a:noFill xmlns:a="http://schemas.openxmlformats.org/drawingml/2006/main"/>
+          <a:ln xmlns:a="http://schemas.openxmlformats.org/drawingml/2006/main" w="0">
+            <a:noFill/>
+            <a:prstDash val="solid"/>
+          </a:ln>
+        </p:spPr>
+        <p:txBody>
+          <a:bodyPr xmlns:a="http://schemas.openxmlformats.org/drawingml/2006/main"/>
+          <a:lstStyle xmlns:a="http://schemas.openxmlformats.org/drawingml/2006/main"/>
+          <a:p xmlns:a="http://schemas.openxmlformats.org/drawingml/2006/main">
+            <a:pPr algn="l">
+              <a:defRPr sz="675" b="1" i="0">
+                <a:solidFill>
+                  <a:srgbClr val="7CE7D5"/>
+                </a:solidFill>
+              </a:defRPr>
+            </a:pPr>
+            <a:r>
+              <a:rPr sz="675" b="1" i="0">
+                <a:solidFill>
+                  <a:srgbClr val="7CE7D5"/>
+                </a:solidFill>
+              </a:rPr>
+              <a:t>SHARED CORE</a:t>
+            </a:r>
+          </a:p>
+        </p:txBody>
+      </p:sp>
+      <p:sp>
+        <p:nvSpPr>
+          <p:cNvPr id="8" name="">
+            <a:extLst xmlns:a="http://schemas.openxmlformats.org/drawingml/2006/main">
+              <a:ext uri="{FF2B5EF4-FFF2-40B4-BE49-F238E27FC236}">
+                <a16:creationId xmlns:a16="http://schemas.microsoft.com/office/drawing/2014/main" id="{FCED61F3-B82A-46EE-861D-07525FFB3065}"/>
+              </a:ext>
+            </a:extLst>
+          </p:cNvPr>
+          <p:cNvSpPr>
+            <a:spLocks xmlns:a="http://schemas.openxmlformats.org/drawingml/2006/main" noGrp="1"/>
+          </p:cNvSpPr>
+          <p:nvPr/>
+        </p:nvSpPr>
+        <p:spPr>
+          <a:xfrm xmlns:a="http://schemas.openxmlformats.org/drawingml/2006/main">
+            <a:off x="7429500" y="1257300"/>
+            <a:ext cx="1714500" cy="133350"/>
+          </a:xfrm>
+          <a:prstGeom xmlns:a="http://schemas.openxmlformats.org/drawingml/2006/main" prst="rect">
+            <a:avLst/>
+          </a:prstGeom>
+          <a:noFill xmlns:a="http://schemas.openxmlformats.org/drawingml/2006/main"/>
+          <a:ln xmlns:a="http://schemas.openxmlformats.org/drawingml/2006/main" w="0">
+            <a:noFill/>
+            <a:prstDash val="solid"/>
+          </a:ln>
+        </p:spPr>
+        <p:txBody>
+          <a:bodyPr xmlns:a="http://schemas.openxmlformats.org/drawingml/2006/main"/>
+          <a:lstStyle xmlns:a="http://schemas.openxmlformats.org/drawingml/2006/main"/>
+          <a:p xmlns:a="http://schemas.openxmlformats.org/drawingml/2006/main">
+            <a:pPr algn="l">
+              <a:defRPr sz="675" b="1" i="0">
+                <a:solidFill>
+                  <a:srgbClr val="7CE7D5"/>
+                </a:solidFill>
+              </a:defRPr>
+            </a:pPr>
+            <a:r>
+              <a:rPr sz="675" b="1" i="0">
+                <a:solidFill>
+                  <a:srgbClr val="7CE7D5"/>
+                </a:solidFill>
+              </a:rPr>
+              <a:t>DASHBOARD / MCP</a:t>
+            </a:r>
+          </a:p>
+        </p:txBody>
+      </p:sp>
+      <p:sp>
+        <p:nvSpPr>
+          <p:cNvPr id="9" name="">
+            <a:extLst xmlns:a="http://schemas.openxmlformats.org/drawingml/2006/main">
+              <a:ext uri="{FF2B5EF4-FFF2-40B4-BE49-F238E27FC236}">
+                <a16:creationId xmlns:a16="http://schemas.microsoft.com/office/drawing/2014/main" id="{41C2D3DF-9C8E-4255-8ADE-66B7CE09BE21}"/>
+              </a:ext>
+            </a:extLst>
+          </p:cNvPr>
+          <p:cNvSpPr>
+            <a:spLocks xmlns:a="http://schemas.openxmlformats.org/drawingml/2006/main" noGrp="1"/>
+          </p:cNvSpPr>
+          <p:nvPr/>
+        </p:nvSpPr>
+        <p:spPr>
+          <a:xfrm xmlns:a="http://schemas.openxmlformats.org/drawingml/2006/main">
+            <a:off x="9906000" y="1257300"/>
+            <a:ext cx="1524000" cy="133350"/>
+          </a:xfrm>
+          <a:prstGeom xmlns:a="http://schemas.openxmlformats.org/drawingml/2006/main" prst="rect">
+            <a:avLst/>
+          </a:prstGeom>
+          <a:noFill xmlns:a="http://schemas.openxmlformats.org/drawingml/2006/main"/>
+          <a:ln xmlns:a="http://schemas.openxmlformats.org/drawingml/2006/main" w="0">
+            <a:noFill/>
+            <a:prstDash val="solid"/>
+          </a:ln>
+        </p:spPr>
+        <p:txBody>
+          <a:bodyPr xmlns:a="http://schemas.openxmlformats.org/drawingml/2006/main"/>
+          <a:lstStyle xmlns:a="http://schemas.openxmlformats.org/drawingml/2006/main"/>
+          <a:p xmlns:a="http://schemas.openxmlformats.org/drawingml/2006/main">
+            <a:pPr algn="l">
+              <a:defRPr sz="675" b="1" i="0">
+                <a:solidFill>
+                  <a:srgbClr val="7CE7D5"/>
+                </a:solidFill>
+              </a:defRPr>
+            </a:pPr>
+            <a:r>
+              <a:rPr sz="675" b="1" i="0">
+                <a:solidFill>
+                  <a:srgbClr val="7CE7D5"/>
+                </a:solidFill>
+              </a:rPr>
+              <a:t>COUNTERPARTS</a:t>
+            </a:r>
+          </a:p>
+        </p:txBody>
+      </p:sp>
+      <p:sp>
+        <p:nvSpPr>
+          <p:cNvPr id="10" name="Caller">
+            <a:extLst xmlns:a="http://schemas.openxmlformats.org/drawingml/2006/main">
+              <a:ext uri="{FF2B5EF4-FFF2-40B4-BE49-F238E27FC236}">
+                <a16:creationId xmlns:a16="http://schemas.microsoft.com/office/drawing/2014/main" id="{D9727470-DCC0-483E-ACF2-805C9750CF4D}"/>
+              </a:ext>
+            </a:extLst>
+          </p:cNvPr>
+          <p:cNvSpPr>
+            <a:spLocks xmlns:a="http://schemas.openxmlformats.org/drawingml/2006/main" noGrp="1"/>
+          </p:cNvSpPr>
+          <p:nvPr/>
+        </p:nvSpPr>
+        <p:spPr>
+          <a:xfrm xmlns:a="http://schemas.openxmlformats.org/drawingml/2006/main">
+            <a:off x="381000" y="1524000"/>
+            <a:ext cx="1905000" cy="742950"/>
           </a:xfrm>
           <a:prstGeom xmlns:a="http://schemas.openxmlformats.org/drawingml/2006/main" prst="roundRect">
             <a:avLst>
-              <a:gd name="adj" fmla="val 12632"/>
+              <a:gd name="adj" fmla="val 15385"/>
             </a:avLst>
           </a:prstGeom>
           <a:solidFill xmlns:a="http://schemas.openxmlformats.org/drawingml/2006/main">
-            <a:srgbClr val="E5F0FF"/>
+            <a:srgbClr val="12324A"/>
           </a:solidFill>
           <a:ln xmlns:a="http://schemas.openxmlformats.org/drawingml/2006/main" w="9525">
             <a:solidFill>
-              <a:srgbClr val="E5F0FF"/>
+              <a:srgbClr val="12324A"/>
             </a:solidFill>
             <a:prstDash val="solid"/>
           </a:ln>
@@ -11761,22 +12241,22 @@
       </p:sp>
       <p:sp>
         <p:nvSpPr>
-          <p:cNvPr id="7" name="">
-            <a:extLst xmlns:a="http://schemas.openxmlformats.org/drawingml/2006/main">
-              <a:ext uri="{FF2B5EF4-FFF2-40B4-BE49-F238E27FC236}">
-                <a16:creationId xmlns:a16="http://schemas.microsoft.com/office/drawing/2014/main" id="{49CEBDDD-A9AC-40B9-BCC7-916B027EAF83}"/>
-              </a:ext>
-            </a:extLst>
-          </p:cNvPr>
-          <p:cNvSpPr>
-            <a:spLocks xmlns:a="http://schemas.openxmlformats.org/drawingml/2006/main" noGrp="1"/>
-          </p:cNvSpPr>
-          <p:nvPr/>
-        </p:nvSpPr>
-        <p:spPr>
-          <a:xfrm xmlns:a="http://schemas.openxmlformats.org/drawingml/2006/main">
-            <a:off x="600075" y="3314700"/>
-            <a:ext cx="1143000" cy="133350"/>
+          <p:cNvPr id="11" name="">
+            <a:extLst xmlns:a="http://schemas.openxmlformats.org/drawingml/2006/main">
+              <a:ext uri="{FF2B5EF4-FFF2-40B4-BE49-F238E27FC236}">
+                <a16:creationId xmlns:a16="http://schemas.microsoft.com/office/drawing/2014/main" id="{6E556FBD-D6A1-49E3-BA14-0CCD00BD12FF}"/>
+              </a:ext>
+            </a:extLst>
+          </p:cNvPr>
+          <p:cNvSpPr>
+            <a:spLocks xmlns:a="http://schemas.openxmlformats.org/drawingml/2006/main" noGrp="1"/>
+          </p:cNvSpPr>
+          <p:nvPr/>
+        </p:nvSpPr>
+        <p:spPr>
+          <a:xfrm xmlns:a="http://schemas.openxmlformats.org/drawingml/2006/main">
+            <a:off x="523875" y="1657350"/>
+            <a:ext cx="1619250" cy="133350"/>
           </a:xfrm>
           <a:prstGeom xmlns:a="http://schemas.openxmlformats.org/drawingml/2006/main" prst="rect">
             <a:avLst/>
@@ -11794,118 +12274,118 @@
             <a:pPr algn="l">
               <a:defRPr sz="675" b="1" i="0">
                 <a:solidFill>
-                  <a:srgbClr val="3D8DFF"/>
+                  <a:srgbClr val="7CE7D5"/>
                 </a:solidFill>
               </a:defRPr>
             </a:pPr>
             <a:r>
               <a:rPr sz="675" b="1" i="0">
                 <a:solidFill>
-                  <a:srgbClr val="3D8DFF"/>
-                </a:solidFill>
-              </a:rPr>
-              <a:t>PATIENT</a:t>
-            </a:r>
-          </a:p>
-        </p:txBody>
-      </p:sp>
-      <p:sp>
-        <p:nvSpPr>
-          <p:cNvPr id="8" name="">
-            <a:extLst xmlns:a="http://schemas.openxmlformats.org/drawingml/2006/main">
-              <a:ext uri="{FF2B5EF4-FFF2-40B4-BE49-F238E27FC236}">
-                <a16:creationId xmlns:a16="http://schemas.microsoft.com/office/drawing/2014/main" id="{69670A5F-B392-4CBD-8737-190A21B6BA34}"/>
-              </a:ext>
-            </a:extLst>
-          </p:cNvPr>
-          <p:cNvSpPr>
-            <a:spLocks xmlns:a="http://schemas.openxmlformats.org/drawingml/2006/main" noGrp="1"/>
-          </p:cNvSpPr>
-          <p:nvPr/>
-        </p:nvSpPr>
-        <p:spPr>
-          <a:xfrm xmlns:a="http://schemas.openxmlformats.org/drawingml/2006/main">
-            <a:off x="600075" y="3581400"/>
-            <a:ext cx="1143000" cy="428625"/>
-          </a:xfrm>
-          <a:prstGeom xmlns:a="http://schemas.openxmlformats.org/drawingml/2006/main" prst="rect">
-            <a:avLst/>
-          </a:prstGeom>
-          <a:noFill xmlns:a="http://schemas.openxmlformats.org/drawingml/2006/main"/>
-          <a:ln xmlns:a="http://schemas.openxmlformats.org/drawingml/2006/main" w="0">
-            <a:noFill/>
-            <a:prstDash val="solid"/>
-          </a:ln>
-        </p:spPr>
-        <p:txBody>
-          <a:bodyPr xmlns:a="http://schemas.openxmlformats.org/drawingml/2006/main"/>
-          <a:lstStyle xmlns:a="http://schemas.openxmlformats.org/drawingml/2006/main"/>
-          <a:p xmlns:a="http://schemas.openxmlformats.org/drawingml/2006/main">
-            <a:pPr algn="l">
-              <a:defRPr sz="975" b="1" i="0">
+                  <a:srgbClr val="7CE7D5"/>
+                </a:solidFill>
+              </a:rPr>
+              <a:t>CALLER</a:t>
+            </a:r>
+          </a:p>
+        </p:txBody>
+      </p:sp>
+      <p:sp>
+        <p:nvSpPr>
+          <p:cNvPr id="12" name="">
+            <a:extLst xmlns:a="http://schemas.openxmlformats.org/drawingml/2006/main">
+              <a:ext uri="{FF2B5EF4-FFF2-40B4-BE49-F238E27FC236}">
+                <a16:creationId xmlns:a16="http://schemas.microsoft.com/office/drawing/2014/main" id="{436B807E-327F-41B8-9B5F-1DAFEB2C642F}"/>
+              </a:ext>
+            </a:extLst>
+          </p:cNvPr>
+          <p:cNvSpPr>
+            <a:spLocks xmlns:a="http://schemas.openxmlformats.org/drawingml/2006/main" noGrp="1"/>
+          </p:cNvSpPr>
+          <p:nvPr/>
+        </p:nvSpPr>
+        <p:spPr>
+          <a:xfrm xmlns:a="http://schemas.openxmlformats.org/drawingml/2006/main">
+            <a:off x="523875" y="1885950"/>
+            <a:ext cx="1619250" cy="285750"/>
+          </a:xfrm>
+          <a:prstGeom xmlns:a="http://schemas.openxmlformats.org/drawingml/2006/main" prst="rect">
+            <a:avLst/>
+          </a:prstGeom>
+          <a:noFill xmlns:a="http://schemas.openxmlformats.org/drawingml/2006/main"/>
+          <a:ln xmlns:a="http://schemas.openxmlformats.org/drawingml/2006/main" w="0">
+            <a:noFill/>
+            <a:prstDash val="solid"/>
+          </a:ln>
+        </p:spPr>
+        <p:txBody>
+          <a:bodyPr xmlns:a="http://schemas.openxmlformats.org/drawingml/2006/main"/>
+          <a:lstStyle xmlns:a="http://schemas.openxmlformats.org/drawingml/2006/main"/>
+          <a:p xmlns:a="http://schemas.openxmlformats.org/drawingml/2006/main">
+            <a:pPr algn="l">
+              <a:defRPr sz="900" b="1" i="0">
                 <a:solidFill>
                   <a:srgbClr val="0B1F33"/>
                 </a:solidFill>
               </a:defRPr>
             </a:pPr>
             <a:r>
-              <a:rPr sz="975" b="1" i="0">
+              <a:rPr sz="900" b="1" i="0">
                 <a:solidFill>
                   <a:srgbClr val="0B1F33"/>
                 </a:solidFill>
               </a:rPr>
-              <a:t>Phone / text</a:t>
-            </a:r>
-          </a:p>
-          <a:p xmlns:a="http://schemas.openxmlformats.org/drawingml/2006/main">
-            <a:pPr algn="l">
-              <a:defRPr sz="975" b="1" i="0">
+              <a:t>OTP-verified phone</a:t>
+            </a:r>
+          </a:p>
+          <a:p xmlns:a="http://schemas.openxmlformats.org/drawingml/2006/main">
+            <a:pPr algn="l">
+              <a:defRPr sz="900" b="1" i="0">
                 <a:solidFill>
                   <a:srgbClr val="0B1F33"/>
                 </a:solidFill>
               </a:defRPr>
             </a:pPr>
             <a:r>
-              <a:rPr sz="975" b="1" i="0">
+              <a:rPr sz="900" b="1" i="0">
                 <a:solidFill>
                   <a:srgbClr val="0B1F33"/>
                 </a:solidFill>
               </a:rPr>
-              <a:t>consented only</a:t>
-            </a:r>
-          </a:p>
-        </p:txBody>
-      </p:sp>
-      <p:sp>
-        <p:nvSpPr>
-          <p:cNvPr id="9" name="Voice ingress">
-            <a:extLst xmlns:a="http://schemas.openxmlformats.org/drawingml/2006/main">
-              <a:ext uri="{FF2B5EF4-FFF2-40B4-BE49-F238E27FC236}">
-                <a16:creationId xmlns:a16="http://schemas.microsoft.com/office/drawing/2014/main" id="{06F1F105-6E17-4B39-946E-9884908CA6D7}"/>
-              </a:ext>
-            </a:extLst>
-          </p:cNvPr>
-          <p:cNvSpPr>
-            <a:spLocks xmlns:a="http://schemas.openxmlformats.org/drawingml/2006/main" noGrp="1"/>
-          </p:cNvSpPr>
-          <p:nvPr/>
-        </p:nvSpPr>
-        <p:spPr>
-          <a:xfrm xmlns:a="http://schemas.openxmlformats.org/drawingml/2006/main">
-            <a:off x="2247900" y="3181350"/>
-            <a:ext cx="1524000" cy="904875"/>
+              <a:t>consented speech</a:t>
+            </a:r>
+          </a:p>
+        </p:txBody>
+      </p:sp>
+      <p:sp>
+        <p:nvSpPr>
+          <p:cNvPr id="13" name="Quick tunnel">
+            <a:extLst xmlns:a="http://schemas.openxmlformats.org/drawingml/2006/main">
+              <a:ext uri="{FF2B5EF4-FFF2-40B4-BE49-F238E27FC236}">
+                <a16:creationId xmlns:a16="http://schemas.microsoft.com/office/drawing/2014/main" id="{36BCAFA9-47C3-4962-906F-AE81E8213926}"/>
+              </a:ext>
+            </a:extLst>
+          </p:cNvPr>
+          <p:cNvSpPr>
+            <a:spLocks xmlns:a="http://schemas.openxmlformats.org/drawingml/2006/main" noGrp="1"/>
+          </p:cNvSpPr>
+          <p:nvPr/>
+        </p:nvSpPr>
+        <p:spPr>
+          <a:xfrm xmlns:a="http://schemas.openxmlformats.org/drawingml/2006/main">
+            <a:off x="381000" y="2476500"/>
+            <a:ext cx="1905000" cy="742950"/>
           </a:xfrm>
           <a:prstGeom xmlns:a="http://schemas.openxmlformats.org/drawingml/2006/main" prst="roundRect">
             <a:avLst>
-              <a:gd name="adj" fmla="val 12632"/>
+              <a:gd name="adj" fmla="val 15385"/>
             </a:avLst>
           </a:prstGeom>
           <a:solidFill xmlns:a="http://schemas.openxmlformats.org/drawingml/2006/main">
-            <a:srgbClr val="F2F5F8"/>
+            <a:srgbClr val="12324A"/>
           </a:solidFill>
           <a:ln xmlns:a="http://schemas.openxmlformats.org/drawingml/2006/main" w="9525">
             <a:solidFill>
-              <a:srgbClr val="F2F5F8"/>
+              <a:srgbClr val="12324A"/>
             </a:solidFill>
             <a:prstDash val="solid"/>
           </a:ln>
@@ -11919,22 +12399,22 @@
       </p:sp>
       <p:sp>
         <p:nvSpPr>
-          <p:cNvPr id="10" name="">
-            <a:extLst xmlns:a="http://schemas.openxmlformats.org/drawingml/2006/main">
-              <a:ext uri="{FF2B5EF4-FFF2-40B4-BE49-F238E27FC236}">
-                <a16:creationId xmlns:a16="http://schemas.microsoft.com/office/drawing/2014/main" id="{807D2A66-10F8-427A-81D9-7D9056E23C39}"/>
-              </a:ext>
-            </a:extLst>
-          </p:cNvPr>
-          <p:cNvSpPr>
-            <a:spLocks xmlns:a="http://schemas.openxmlformats.org/drawingml/2006/main" noGrp="1"/>
-          </p:cNvSpPr>
-          <p:nvPr/>
-        </p:nvSpPr>
-        <p:spPr>
-          <a:xfrm xmlns:a="http://schemas.openxmlformats.org/drawingml/2006/main">
-            <a:off x="2390775" y="3314700"/>
-            <a:ext cx="1238250" cy="133350"/>
+          <p:cNvPr id="14" name="">
+            <a:extLst xmlns:a="http://schemas.openxmlformats.org/drawingml/2006/main">
+              <a:ext uri="{FF2B5EF4-FFF2-40B4-BE49-F238E27FC236}">
+                <a16:creationId xmlns:a16="http://schemas.microsoft.com/office/drawing/2014/main" id="{DF53A99E-2CCC-44F6-8D5C-3B07B5DDFC7F}"/>
+              </a:ext>
+            </a:extLst>
+          </p:cNvPr>
+          <p:cNvSpPr>
+            <a:spLocks xmlns:a="http://schemas.openxmlformats.org/drawingml/2006/main" noGrp="1"/>
+          </p:cNvSpPr>
+          <p:nvPr/>
+        </p:nvSpPr>
+        <p:spPr>
+          <a:xfrm xmlns:a="http://schemas.openxmlformats.org/drawingml/2006/main">
+            <a:off x="523875" y="2609850"/>
+            <a:ext cx="1619250" cy="133350"/>
           </a:xfrm>
           <a:prstGeom xmlns:a="http://schemas.openxmlformats.org/drawingml/2006/main" prst="rect">
             <a:avLst/>
@@ -11952,118 +12432,118 @@
             <a:pPr algn="l">
               <a:defRPr sz="675" b="1" i="0">
                 <a:solidFill>
-                  <a:srgbClr val="5F6D80"/>
+                  <a:srgbClr val="7CE7D5"/>
                 </a:solidFill>
               </a:defRPr>
             </a:pPr>
             <a:r>
               <a:rPr sz="675" b="1" i="0">
                 <a:solidFill>
-                  <a:srgbClr val="5F6D80"/>
-                </a:solidFill>
-              </a:rPr>
-              <a:t>VOICE INGRESS</a:t>
-            </a:r>
-          </a:p>
-        </p:txBody>
-      </p:sp>
-      <p:sp>
-        <p:nvSpPr>
-          <p:cNvPr id="11" name="">
-            <a:extLst xmlns:a="http://schemas.openxmlformats.org/drawingml/2006/main">
-              <a:ext uri="{FF2B5EF4-FFF2-40B4-BE49-F238E27FC236}">
-                <a16:creationId xmlns:a16="http://schemas.microsoft.com/office/drawing/2014/main" id="{B760DF83-4FDA-47A6-923A-C8345120C268}"/>
-              </a:ext>
-            </a:extLst>
-          </p:cNvPr>
-          <p:cNvSpPr>
-            <a:spLocks xmlns:a="http://schemas.openxmlformats.org/drawingml/2006/main" noGrp="1"/>
-          </p:cNvSpPr>
-          <p:nvPr/>
-        </p:nvSpPr>
-        <p:spPr>
-          <a:xfrm xmlns:a="http://schemas.openxmlformats.org/drawingml/2006/main">
-            <a:off x="2390775" y="3581400"/>
-            <a:ext cx="1238250" cy="428625"/>
-          </a:xfrm>
-          <a:prstGeom xmlns:a="http://schemas.openxmlformats.org/drawingml/2006/main" prst="rect">
-            <a:avLst/>
-          </a:prstGeom>
-          <a:noFill xmlns:a="http://schemas.openxmlformats.org/drawingml/2006/main"/>
-          <a:ln xmlns:a="http://schemas.openxmlformats.org/drawingml/2006/main" w="0">
-            <a:noFill/>
-            <a:prstDash val="solid"/>
-          </a:ln>
-        </p:spPr>
-        <p:txBody>
-          <a:bodyPr xmlns:a="http://schemas.openxmlformats.org/drawingml/2006/main"/>
-          <a:lstStyle xmlns:a="http://schemas.openxmlformats.org/drawingml/2006/main"/>
-          <a:p xmlns:a="http://schemas.openxmlformats.org/drawingml/2006/main">
-            <a:pPr algn="l">
-              <a:defRPr sz="975" b="1" i="0">
+                  <a:srgbClr val="7CE7D5"/>
+                </a:solidFill>
+              </a:rPr>
+              <a:t>QUICK TUNNEL</a:t>
+            </a:r>
+          </a:p>
+        </p:txBody>
+      </p:sp>
+      <p:sp>
+        <p:nvSpPr>
+          <p:cNvPr id="15" name="">
+            <a:extLst xmlns:a="http://schemas.openxmlformats.org/drawingml/2006/main">
+              <a:ext uri="{FF2B5EF4-FFF2-40B4-BE49-F238E27FC236}">
+                <a16:creationId xmlns:a16="http://schemas.microsoft.com/office/drawing/2014/main" id="{7B5A4F98-C55E-44FB-BB8E-6CFEF9871460}"/>
+              </a:ext>
+            </a:extLst>
+          </p:cNvPr>
+          <p:cNvSpPr>
+            <a:spLocks xmlns:a="http://schemas.openxmlformats.org/drawingml/2006/main" noGrp="1"/>
+          </p:cNvSpPr>
+          <p:nvPr/>
+        </p:nvSpPr>
+        <p:spPr>
+          <a:xfrm xmlns:a="http://schemas.openxmlformats.org/drawingml/2006/main">
+            <a:off x="523875" y="2838450"/>
+            <a:ext cx="1619250" cy="285750"/>
+          </a:xfrm>
+          <a:prstGeom xmlns:a="http://schemas.openxmlformats.org/drawingml/2006/main" prst="rect">
+            <a:avLst/>
+          </a:prstGeom>
+          <a:noFill xmlns:a="http://schemas.openxmlformats.org/drawingml/2006/main"/>
+          <a:ln xmlns:a="http://schemas.openxmlformats.org/drawingml/2006/main" w="0">
+            <a:noFill/>
+            <a:prstDash val="solid"/>
+          </a:ln>
+        </p:spPr>
+        <p:txBody>
+          <a:bodyPr xmlns:a="http://schemas.openxmlformats.org/drawingml/2006/main"/>
+          <a:lstStyle xmlns:a="http://schemas.openxmlformats.org/drawingml/2006/main"/>
+          <a:p xmlns:a="http://schemas.openxmlformats.org/drawingml/2006/main">
+            <a:pPr algn="l">
+              <a:defRPr sz="900" b="1" i="0">
                 <a:solidFill>
                   <a:srgbClr val="0B1F33"/>
                 </a:solidFill>
               </a:defRPr>
             </a:pPr>
             <a:r>
-              <a:rPr sz="975" b="1" i="0">
+              <a:rPr sz="900" b="1" i="0">
                 <a:solidFill>
                   <a:srgbClr val="0B1F33"/>
                 </a:solidFill>
               </a:rPr>
-              <a:t>a1mobile</a:t>
-            </a:r>
-          </a:p>
-          <a:p xmlns:a="http://schemas.openxmlformats.org/drawingml/2006/main">
-            <a:pPr algn="l">
-              <a:defRPr sz="975" b="1" i="0">
+              <a:t>Cloudflare → :3001 only</a:t>
+            </a:r>
+          </a:p>
+          <a:p xmlns:a="http://schemas.openxmlformats.org/drawingml/2006/main">
+            <a:pPr algn="l">
+              <a:defRPr sz="900" b="1" i="0">
                 <a:solidFill>
                   <a:srgbClr val="0B1F33"/>
                 </a:solidFill>
               </a:defRPr>
             </a:pPr>
             <a:r>
-              <a:rPr sz="975" b="1" i="0">
+              <a:rPr sz="900" b="1" i="0">
                 <a:solidFill>
                   <a:srgbClr val="0B1F33"/>
                 </a:solidFill>
               </a:rPr>
-              <a:t>webhook / MCP</a:t>
-            </a:r>
-          </a:p>
-        </p:txBody>
-      </p:sp>
-      <p:sp>
-        <p:nvSpPr>
-          <p:cNvPr id="12" name="Policy gate">
-            <a:extLst xmlns:a="http://schemas.openxmlformats.org/drawingml/2006/main">
-              <a:ext uri="{FF2B5EF4-FFF2-40B4-BE49-F238E27FC236}">
-                <a16:creationId xmlns:a16="http://schemas.microsoft.com/office/drawing/2014/main" id="{76CD1C0E-2872-4585-95AA-831F541D8E92}"/>
-              </a:ext>
-            </a:extLst>
-          </p:cNvPr>
-          <p:cNvSpPr>
-            <a:spLocks xmlns:a="http://schemas.openxmlformats.org/drawingml/2006/main" noGrp="1"/>
-          </p:cNvSpPr>
-          <p:nvPr/>
-        </p:nvSpPr>
-        <p:spPr>
-          <a:xfrm xmlns:a="http://schemas.openxmlformats.org/drawingml/2006/main">
-            <a:off x="4143375" y="3181350"/>
-            <a:ext cx="1428750" cy="904875"/>
+              <a:t>never exposes dashboard</a:t>
+            </a:r>
+          </a:p>
+        </p:txBody>
+      </p:sp>
+      <p:sp>
+        <p:nvSpPr>
+          <p:cNvPr id="16" name="a1mobile / Telnyx">
+            <a:extLst xmlns:a="http://schemas.openxmlformats.org/drawingml/2006/main">
+              <a:ext uri="{FF2B5EF4-FFF2-40B4-BE49-F238E27FC236}">
+                <a16:creationId xmlns:a16="http://schemas.microsoft.com/office/drawing/2014/main" id="{33FF6C86-B2E6-4610-AA21-9425309DD0EB}"/>
+              </a:ext>
+            </a:extLst>
+          </p:cNvPr>
+          <p:cNvSpPr>
+            <a:spLocks xmlns:a="http://schemas.openxmlformats.org/drawingml/2006/main" noGrp="1"/>
+          </p:cNvSpPr>
+          <p:nvPr/>
+        </p:nvSpPr>
+        <p:spPr>
+          <a:xfrm xmlns:a="http://schemas.openxmlformats.org/drawingml/2006/main">
+            <a:off x="381000" y="3429000"/>
+            <a:ext cx="1905000" cy="742950"/>
           </a:xfrm>
           <a:prstGeom xmlns:a="http://schemas.openxmlformats.org/drawingml/2006/main" prst="roundRect">
             <a:avLst>
-              <a:gd name="adj" fmla="val 12632"/>
+              <a:gd name="adj" fmla="val 15385"/>
             </a:avLst>
           </a:prstGeom>
           <a:solidFill xmlns:a="http://schemas.openxmlformats.org/drawingml/2006/main">
-            <a:srgbClr val="FCE6E6"/>
+            <a:srgbClr val="12324A"/>
           </a:solidFill>
           <a:ln xmlns:a="http://schemas.openxmlformats.org/drawingml/2006/main" w="9525">
             <a:solidFill>
-              <a:srgbClr val="FCE6E6"/>
+              <a:srgbClr val="12324A"/>
             </a:solidFill>
             <a:prstDash val="solid"/>
           </a:ln>
@@ -12077,22 +12557,22 @@
       </p:sp>
       <p:sp>
         <p:nvSpPr>
-          <p:cNvPr id="13" name="">
-            <a:extLst xmlns:a="http://schemas.openxmlformats.org/drawingml/2006/main">
-              <a:ext uri="{FF2B5EF4-FFF2-40B4-BE49-F238E27FC236}">
-                <a16:creationId xmlns:a16="http://schemas.microsoft.com/office/drawing/2014/main" id="{9938B5FE-2748-420E-B207-C78FDB989079}"/>
-              </a:ext>
-            </a:extLst>
-          </p:cNvPr>
-          <p:cNvSpPr>
-            <a:spLocks xmlns:a="http://schemas.openxmlformats.org/drawingml/2006/main" noGrp="1"/>
-          </p:cNvSpPr>
-          <p:nvPr/>
-        </p:nvSpPr>
-        <p:spPr>
-          <a:xfrm xmlns:a="http://schemas.openxmlformats.org/drawingml/2006/main">
-            <a:off x="4286250" y="3314700"/>
-            <a:ext cx="1143000" cy="133350"/>
+          <p:cNvPr id="17" name="">
+            <a:extLst xmlns:a="http://schemas.openxmlformats.org/drawingml/2006/main">
+              <a:ext uri="{FF2B5EF4-FFF2-40B4-BE49-F238E27FC236}">
+                <a16:creationId xmlns:a16="http://schemas.microsoft.com/office/drawing/2014/main" id="{544B3906-C904-4E5F-9270-30A6F4A1038F}"/>
+              </a:ext>
+            </a:extLst>
+          </p:cNvPr>
+          <p:cNvSpPr>
+            <a:spLocks xmlns:a="http://schemas.openxmlformats.org/drawingml/2006/main" noGrp="1"/>
+          </p:cNvSpPr>
+          <p:nvPr/>
+        </p:nvSpPr>
+        <p:spPr>
+          <a:xfrm xmlns:a="http://schemas.openxmlformats.org/drawingml/2006/main">
+            <a:off x="523875" y="3562350"/>
+            <a:ext cx="1619250" cy="133350"/>
           </a:xfrm>
           <a:prstGeom xmlns:a="http://schemas.openxmlformats.org/drawingml/2006/main" prst="rect">
             <a:avLst/>
@@ -12110,118 +12590,118 @@
             <a:pPr algn="l">
               <a:defRPr sz="675" b="1" i="0">
                 <a:solidFill>
-                  <a:srgbClr val="D35656"/>
+                  <a:srgbClr val="7CE7D5"/>
                 </a:solidFill>
               </a:defRPr>
             </a:pPr>
             <a:r>
               <a:rPr sz="675" b="1" i="0">
                 <a:solidFill>
-                  <a:srgbClr val="D35656"/>
-                </a:solidFill>
-              </a:rPr>
-              <a:t>POLICY GATE</a:t>
-            </a:r>
-          </a:p>
-        </p:txBody>
-      </p:sp>
-      <p:sp>
-        <p:nvSpPr>
-          <p:cNvPr id="14" name="">
-            <a:extLst xmlns:a="http://schemas.openxmlformats.org/drawingml/2006/main">
-              <a:ext uri="{FF2B5EF4-FFF2-40B4-BE49-F238E27FC236}">
-                <a16:creationId xmlns:a16="http://schemas.microsoft.com/office/drawing/2014/main" id="{1E7C5439-EDFB-44BF-9993-49EB70BCF852}"/>
-              </a:ext>
-            </a:extLst>
-          </p:cNvPr>
-          <p:cNvSpPr>
-            <a:spLocks xmlns:a="http://schemas.openxmlformats.org/drawingml/2006/main" noGrp="1"/>
-          </p:cNvSpPr>
-          <p:nvPr/>
-        </p:nvSpPr>
-        <p:spPr>
-          <a:xfrm xmlns:a="http://schemas.openxmlformats.org/drawingml/2006/main">
-            <a:off x="4286250" y="3581400"/>
-            <a:ext cx="1143000" cy="428625"/>
-          </a:xfrm>
-          <a:prstGeom xmlns:a="http://schemas.openxmlformats.org/drawingml/2006/main" prst="rect">
-            <a:avLst/>
-          </a:prstGeom>
-          <a:noFill xmlns:a="http://schemas.openxmlformats.org/drawingml/2006/main"/>
-          <a:ln xmlns:a="http://schemas.openxmlformats.org/drawingml/2006/main" w="0">
-            <a:noFill/>
-            <a:prstDash val="solid"/>
-          </a:ln>
-        </p:spPr>
-        <p:txBody>
-          <a:bodyPr xmlns:a="http://schemas.openxmlformats.org/drawingml/2006/main"/>
-          <a:lstStyle xmlns:a="http://schemas.openxmlformats.org/drawingml/2006/main"/>
-          <a:p xmlns:a="http://schemas.openxmlformats.org/drawingml/2006/main">
-            <a:pPr algn="l">
-              <a:defRPr sz="975" b="1" i="0">
+                  <a:srgbClr val="7CE7D5"/>
+                </a:solidFill>
+              </a:rPr>
+              <a:t>A1MOBILE / TELNYX</a:t>
+            </a:r>
+          </a:p>
+        </p:txBody>
+      </p:sp>
+      <p:sp>
+        <p:nvSpPr>
+          <p:cNvPr id="18" name="">
+            <a:extLst xmlns:a="http://schemas.openxmlformats.org/drawingml/2006/main">
+              <a:ext uri="{FF2B5EF4-FFF2-40B4-BE49-F238E27FC236}">
+                <a16:creationId xmlns:a16="http://schemas.microsoft.com/office/drawing/2014/main" id="{278A1853-4E83-4298-80CE-6B1785349B65}"/>
+              </a:ext>
+            </a:extLst>
+          </p:cNvPr>
+          <p:cNvSpPr>
+            <a:spLocks xmlns:a="http://schemas.openxmlformats.org/drawingml/2006/main" noGrp="1"/>
+          </p:cNvSpPr>
+          <p:nvPr/>
+        </p:nvSpPr>
+        <p:spPr>
+          <a:xfrm xmlns:a="http://schemas.openxmlformats.org/drawingml/2006/main">
+            <a:off x="523875" y="3790950"/>
+            <a:ext cx="1619250" cy="285750"/>
+          </a:xfrm>
+          <a:prstGeom xmlns:a="http://schemas.openxmlformats.org/drawingml/2006/main" prst="rect">
+            <a:avLst/>
+          </a:prstGeom>
+          <a:noFill xmlns:a="http://schemas.openxmlformats.org/drawingml/2006/main"/>
+          <a:ln xmlns:a="http://schemas.openxmlformats.org/drawingml/2006/main" w="0">
+            <a:noFill/>
+            <a:prstDash val="solid"/>
+          </a:ln>
+        </p:spPr>
+        <p:txBody>
+          <a:bodyPr xmlns:a="http://schemas.openxmlformats.org/drawingml/2006/main"/>
+          <a:lstStyle xmlns:a="http://schemas.openxmlformats.org/drawingml/2006/main"/>
+          <a:p xmlns:a="http://schemas.openxmlformats.org/drawingml/2006/main">
+            <a:pPr algn="l">
+              <a:defRPr sz="900" b="1" i="0">
                 <a:solidFill>
                   <a:srgbClr val="0B1F33"/>
                 </a:solidFill>
               </a:defRPr>
             </a:pPr>
             <a:r>
-              <a:rPr sz="975" b="1" i="0">
+              <a:rPr sz="900" b="1" i="0">
                 <a:solidFill>
                   <a:srgbClr val="0B1F33"/>
                 </a:solidFill>
               </a:rPr>
-              <a:t>Consent +</a:t>
-            </a:r>
-          </a:p>
-          <a:p xmlns:a="http://schemas.openxmlformats.org/drawingml/2006/main">
-            <a:pPr algn="l">
-              <a:defRPr sz="975" b="1" i="0">
+              <a:t>TeXML Gather + SpeechResult</a:t>
+            </a:r>
+          </a:p>
+          <a:p xmlns:a="http://schemas.openxmlformats.org/drawingml/2006/main">
+            <a:pPr algn="l">
+              <a:defRPr sz="900" b="1" i="0">
                 <a:solidFill>
                   <a:srgbClr val="0B1F33"/>
                 </a:solidFill>
               </a:defRPr>
             </a:pPr>
             <a:r>
-              <a:rPr sz="975" b="1" i="0">
+              <a:rPr sz="900" b="1" i="0">
                 <a:solidFill>
                   <a:srgbClr val="0B1F33"/>
                 </a:solidFill>
               </a:rPr>
-              <a:t>safety scope</a:t>
-            </a:r>
-          </a:p>
-        </p:txBody>
-      </p:sp>
-      <p:sp>
-        <p:nvSpPr>
-          <p:cNvPr id="15" name="PAVO router">
-            <a:extLst xmlns:a="http://schemas.openxmlformats.org/drawingml/2006/main">
-              <a:ext uri="{FF2B5EF4-FFF2-40B4-BE49-F238E27FC236}">
-                <a16:creationId xmlns:a16="http://schemas.microsoft.com/office/drawing/2014/main" id="{77FEC29C-81D4-4EFA-86C6-0EFF48909CEB}"/>
-              </a:ext>
-            </a:extLst>
-          </p:cNvPr>
-          <p:cNvSpPr>
-            <a:spLocks xmlns:a="http://schemas.openxmlformats.org/drawingml/2006/main" noGrp="1"/>
-          </p:cNvSpPr>
-          <p:nvPr/>
-        </p:nvSpPr>
-        <p:spPr>
-          <a:xfrm xmlns:a="http://schemas.openxmlformats.org/drawingml/2006/main">
-            <a:off x="5962650" y="3000375"/>
-            <a:ext cx="1762125" cy="1257300"/>
+              <a:t>claim · point · SMS APIs</a:t>
+            </a:r>
+          </a:p>
+        </p:txBody>
+      </p:sp>
+      <p:sp>
+        <p:nvSpPr>
+          <p:cNvPr id="19" name="voice-server.mjs">
+            <a:extLst xmlns:a="http://schemas.openxmlformats.org/drawingml/2006/main">
+              <a:ext uri="{FF2B5EF4-FFF2-40B4-BE49-F238E27FC236}">
+                <a16:creationId xmlns:a16="http://schemas.microsoft.com/office/drawing/2014/main" id="{015F482D-B3CA-4FD6-B482-603F11209DF5}"/>
+              </a:ext>
+            </a:extLst>
+          </p:cNvPr>
+          <p:cNvSpPr>
+            <a:spLocks xmlns:a="http://schemas.openxmlformats.org/drawingml/2006/main" noGrp="1"/>
+          </p:cNvSpPr>
+          <p:nvPr/>
+        </p:nvSpPr>
+        <p:spPr>
+          <a:xfrm xmlns:a="http://schemas.openxmlformats.org/drawingml/2006/main">
+            <a:off x="2571750" y="1524000"/>
+            <a:ext cx="2000250" cy="1047750"/>
           </a:xfrm>
           <a:prstGeom xmlns:a="http://schemas.openxmlformats.org/drawingml/2006/main" prst="roundRect">
             <a:avLst>
-              <a:gd name="adj" fmla="val 9091"/>
+              <a:gd name="adj" fmla="val 10909"/>
             </a:avLst>
           </a:prstGeom>
           <a:solidFill xmlns:a="http://schemas.openxmlformats.org/drawingml/2006/main">
-            <a:srgbClr val="DCF6F0"/>
+            <a:srgbClr val="0E4A44"/>
           </a:solidFill>
           <a:ln xmlns:a="http://schemas.openxmlformats.org/drawingml/2006/main" w="9525">
             <a:solidFill>
-              <a:srgbClr val="DCF6F0"/>
+              <a:srgbClr val="0E4A44"/>
             </a:solidFill>
             <a:prstDash val="solid"/>
           </a:ln>
@@ -12235,22 +12715,22 @@
       </p:sp>
       <p:sp>
         <p:nvSpPr>
-          <p:cNvPr id="16" name="">
-            <a:extLst xmlns:a="http://schemas.openxmlformats.org/drawingml/2006/main">
-              <a:ext uri="{FF2B5EF4-FFF2-40B4-BE49-F238E27FC236}">
-                <a16:creationId xmlns:a16="http://schemas.microsoft.com/office/drawing/2014/main" id="{99C5BADE-5A9D-4108-8DB4-EC73231A675B}"/>
-              </a:ext>
-            </a:extLst>
-          </p:cNvPr>
-          <p:cNvSpPr>
-            <a:spLocks xmlns:a="http://schemas.openxmlformats.org/drawingml/2006/main" noGrp="1"/>
-          </p:cNvSpPr>
-          <p:nvPr/>
-        </p:nvSpPr>
-        <p:spPr>
-          <a:xfrm xmlns:a="http://schemas.openxmlformats.org/drawingml/2006/main">
-            <a:off x="6105525" y="3133725"/>
-            <a:ext cx="1476375" cy="133350"/>
+          <p:cNvPr id="20" name="">
+            <a:extLst xmlns:a="http://schemas.openxmlformats.org/drawingml/2006/main">
+              <a:ext uri="{FF2B5EF4-FFF2-40B4-BE49-F238E27FC236}">
+                <a16:creationId xmlns:a16="http://schemas.microsoft.com/office/drawing/2014/main" id="{2F0B0CE6-B657-43B4-BA76-FACD0C3F9094}"/>
+              </a:ext>
+            </a:extLst>
+          </p:cNvPr>
+          <p:cNvSpPr>
+            <a:spLocks xmlns:a="http://schemas.openxmlformats.org/drawingml/2006/main" noGrp="1"/>
+          </p:cNvSpPr>
+          <p:nvPr/>
+        </p:nvSpPr>
+        <p:spPr>
+          <a:xfrm xmlns:a="http://schemas.openxmlformats.org/drawingml/2006/main">
+            <a:off x="2714625" y="1657350"/>
+            <a:ext cx="1714500" cy="133350"/>
           </a:xfrm>
           <a:prstGeom xmlns:a="http://schemas.openxmlformats.org/drawingml/2006/main" prst="rect">
             <a:avLst/>
@@ -12268,135 +12748,118 @@
             <a:pPr algn="l">
               <a:defRPr sz="675" b="1" i="0">
                 <a:solidFill>
-                  <a:srgbClr val="0E9F8E"/>
+                  <a:srgbClr val="7CE7D5"/>
                 </a:solidFill>
               </a:defRPr>
             </a:pPr>
             <a:r>
               <a:rPr sz="675" b="1" i="0">
                 <a:solidFill>
-                  <a:srgbClr val="0E9F8E"/>
-                </a:solidFill>
-              </a:rPr>
-              <a:t>PAVO ROUTER</a:t>
-            </a:r>
-          </a:p>
-        </p:txBody>
-      </p:sp>
-      <p:sp>
-        <p:nvSpPr>
-          <p:cNvPr id="17" name="">
-            <a:extLst xmlns:a="http://schemas.openxmlformats.org/drawingml/2006/main">
-              <a:ext uri="{FF2B5EF4-FFF2-40B4-BE49-F238E27FC236}">
-                <a16:creationId xmlns:a16="http://schemas.microsoft.com/office/drawing/2014/main" id="{2A6CD474-927F-4376-A089-A0EB5D0C0F58}"/>
-              </a:ext>
-            </a:extLst>
-          </p:cNvPr>
-          <p:cNvSpPr>
-            <a:spLocks xmlns:a="http://schemas.openxmlformats.org/drawingml/2006/main" noGrp="1"/>
-          </p:cNvSpPr>
-          <p:nvPr/>
-        </p:nvSpPr>
-        <p:spPr>
-          <a:xfrm xmlns:a="http://schemas.openxmlformats.org/drawingml/2006/main">
-            <a:off x="6105525" y="3400425"/>
-            <a:ext cx="1476375" cy="781050"/>
-          </a:xfrm>
-          <a:prstGeom xmlns:a="http://schemas.openxmlformats.org/drawingml/2006/main" prst="rect">
-            <a:avLst/>
-          </a:prstGeom>
-          <a:noFill xmlns:a="http://schemas.openxmlformats.org/drawingml/2006/main"/>
-          <a:ln xmlns:a="http://schemas.openxmlformats.org/drawingml/2006/main" w="0">
-            <a:noFill/>
-            <a:prstDash val="solid"/>
-          </a:ln>
-        </p:spPr>
-        <p:txBody>
-          <a:bodyPr xmlns:a="http://schemas.openxmlformats.org/drawingml/2006/main"/>
-          <a:lstStyle xmlns:a="http://schemas.openxmlformats.org/drawingml/2006/main"/>
-          <a:p xmlns:a="http://schemas.openxmlformats.org/drawingml/2006/main">
-            <a:pPr algn="l">
-              <a:defRPr sz="975" b="1" i="0">
+                  <a:srgbClr val="7CE7D5"/>
+                </a:solidFill>
+              </a:rPr>
+              <a:t>VOICE-SERVER.MJS</a:t>
+            </a:r>
+          </a:p>
+        </p:txBody>
+      </p:sp>
+      <p:sp>
+        <p:nvSpPr>
+          <p:cNvPr id="21" name="">
+            <a:extLst xmlns:a="http://schemas.openxmlformats.org/drawingml/2006/main">
+              <a:ext uri="{FF2B5EF4-FFF2-40B4-BE49-F238E27FC236}">
+                <a16:creationId xmlns:a16="http://schemas.microsoft.com/office/drawing/2014/main" id="{1EF74D7B-6875-4CD6-9358-0944E3DBBE69}"/>
+              </a:ext>
+            </a:extLst>
+          </p:cNvPr>
+          <p:cNvSpPr>
+            <a:spLocks xmlns:a="http://schemas.openxmlformats.org/drawingml/2006/main" noGrp="1"/>
+          </p:cNvSpPr>
+          <p:nvPr/>
+        </p:nvSpPr>
+        <p:spPr>
+          <a:xfrm xmlns:a="http://schemas.openxmlformats.org/drawingml/2006/main">
+            <a:off x="2714625" y="1885950"/>
+            <a:ext cx="1714500" cy="590550"/>
+          </a:xfrm>
+          <a:prstGeom xmlns:a="http://schemas.openxmlformats.org/drawingml/2006/main" prst="rect">
+            <a:avLst/>
+          </a:prstGeom>
+          <a:noFill xmlns:a="http://schemas.openxmlformats.org/drawingml/2006/main"/>
+          <a:ln xmlns:a="http://schemas.openxmlformats.org/drawingml/2006/main" w="0">
+            <a:noFill/>
+            <a:prstDash val="solid"/>
+          </a:ln>
+        </p:spPr>
+        <p:txBody>
+          <a:bodyPr xmlns:a="http://schemas.openxmlformats.org/drawingml/2006/main"/>
+          <a:lstStyle xmlns:a="http://schemas.openxmlformats.org/drawingml/2006/main"/>
+          <a:p xmlns:a="http://schemas.openxmlformats.org/drawingml/2006/main">
+            <a:pPr algn="l">
+              <a:defRPr sz="900" b="1" i="0">
                 <a:solidFill>
                   <a:srgbClr val="0B1F33"/>
                 </a:solidFill>
               </a:defRPr>
             </a:pPr>
             <a:r>
-              <a:rPr sz="975" b="1" i="0">
+              <a:rPr sz="900" b="1" i="0">
                 <a:solidFill>
                   <a:srgbClr val="0B1F33"/>
                 </a:solidFill>
               </a:rPr>
-              <a:t>confidence · noise</a:t>
-            </a:r>
-          </a:p>
-          <a:p xmlns:a="http://schemas.openxmlformats.org/drawingml/2006/main">
-            <a:pPr algn="l">
-              <a:defRPr sz="975" b="1" i="0">
+              <a:t>/voice · /voice/turn · /health</a:t>
+            </a:r>
+          </a:p>
+          <a:p xmlns:a="http://schemas.openxmlformats.org/drawingml/2006/main">
+            <a:pPr algn="l">
+              <a:defRPr sz="900" b="1" i="0">
                 <a:solidFill>
                   <a:srgbClr val="0B1F33"/>
                 </a:solidFill>
               </a:defRPr>
             </a:pPr>
             <a:r>
-              <a:rPr sz="975" b="1" i="0">
+              <a:rPr sz="900" b="1" i="0">
                 <a:solidFill>
                   <a:srgbClr val="0B1F33"/>
                 </a:solidFill>
               </a:rPr>
-              <a:t>critical entities</a:t>
-            </a:r>
-          </a:p>
-          <a:p xmlns:a="http://schemas.openxmlformats.org/drawingml/2006/main">
-            <a:pPr algn="l">
-              <a:defRPr sz="975" b="1" i="0">
-                <a:solidFill>
-                  <a:srgbClr val="0B1F33"/>
-                </a:solidFill>
-              </a:defRPr>
-            </a:pPr>
-            <a:r>
-              <a:rPr sz="975" b="1" i="0">
-                <a:solidFill>
-                  <a:srgbClr val="0B1F33"/>
-                </a:solidFill>
-              </a:rPr>
-              <a:t>action risk</a:t>
-            </a:r>
-          </a:p>
-        </p:txBody>
-      </p:sp>
-      <p:sp>
-        <p:nvSpPr>
-          <p:cNvPr id="18" name="Case engine">
-            <a:extLst xmlns:a="http://schemas.openxmlformats.org/drawingml/2006/main">
-              <a:ext uri="{FF2B5EF4-FFF2-40B4-BE49-F238E27FC236}">
-                <a16:creationId xmlns:a16="http://schemas.microsoft.com/office/drawing/2014/main" id="{57D57222-B556-41C5-AAEC-5A195164ACE7}"/>
-              </a:ext>
-            </a:extLst>
-          </p:cNvPr>
-          <p:cNvSpPr>
-            <a:spLocks xmlns:a="http://schemas.openxmlformats.org/drawingml/2006/main" noGrp="1"/>
-          </p:cNvSpPr>
-          <p:nvPr/>
-        </p:nvSpPr>
-        <p:spPr>
-          <a:xfrm xmlns:a="http://schemas.openxmlformats.org/drawingml/2006/main">
-            <a:off x="8115300" y="3000375"/>
-            <a:ext cx="1619250" cy="1257300"/>
+              <a:t>token-gated TeXML only</a:t>
+            </a:r>
+          </a:p>
+        </p:txBody>
+      </p:sp>
+      <p:sp>
+        <p:nvSpPr>
+          <p:cNvPr id="22" name="Consent parse">
+            <a:extLst xmlns:a="http://schemas.openxmlformats.org/drawingml/2006/main">
+              <a:ext uri="{FF2B5EF4-FFF2-40B4-BE49-F238E27FC236}">
+                <a16:creationId xmlns:a16="http://schemas.microsoft.com/office/drawing/2014/main" id="{CCA074C9-5ADD-4061-A5FF-280B2033190C}"/>
+              </a:ext>
+            </a:extLst>
+          </p:cNvPr>
+          <p:cNvSpPr>
+            <a:spLocks xmlns:a="http://schemas.openxmlformats.org/drawingml/2006/main" noGrp="1"/>
+          </p:cNvSpPr>
+          <p:nvPr/>
+        </p:nvSpPr>
+        <p:spPr>
+          <a:xfrm xmlns:a="http://schemas.openxmlformats.org/drawingml/2006/main">
+            <a:off x="2571750" y="2809875"/>
+            <a:ext cx="2000250" cy="904875"/>
           </a:xfrm>
           <a:prstGeom xmlns:a="http://schemas.openxmlformats.org/drawingml/2006/main" prst="roundRect">
             <a:avLst>
-              <a:gd name="adj" fmla="val 9091"/>
+              <a:gd name="adj" fmla="val 12632"/>
             </a:avLst>
           </a:prstGeom>
           <a:solidFill xmlns:a="http://schemas.openxmlformats.org/drawingml/2006/main">
-            <a:srgbClr val="EEE9FF"/>
+            <a:srgbClr val="3A1F24"/>
           </a:solidFill>
           <a:ln xmlns:a="http://schemas.openxmlformats.org/drawingml/2006/main" w="9525">
             <a:solidFill>
-              <a:srgbClr val="EEE9FF"/>
+              <a:srgbClr val="3A1F24"/>
             </a:solidFill>
             <a:prstDash val="solid"/>
           </a:ln>
@@ -12410,22 +12873,22 @@
       </p:sp>
       <p:sp>
         <p:nvSpPr>
-          <p:cNvPr id="19" name="">
-            <a:extLst xmlns:a="http://schemas.openxmlformats.org/drawingml/2006/main">
-              <a:ext uri="{FF2B5EF4-FFF2-40B4-BE49-F238E27FC236}">
-                <a16:creationId xmlns:a16="http://schemas.microsoft.com/office/drawing/2014/main" id="{DC04A313-28AF-441F-825D-CB0E3685AB43}"/>
-              </a:ext>
-            </a:extLst>
-          </p:cNvPr>
-          <p:cNvSpPr>
-            <a:spLocks xmlns:a="http://schemas.openxmlformats.org/drawingml/2006/main" noGrp="1"/>
-          </p:cNvSpPr>
-          <p:nvPr/>
-        </p:nvSpPr>
-        <p:spPr>
-          <a:xfrm xmlns:a="http://schemas.openxmlformats.org/drawingml/2006/main">
-            <a:off x="8258175" y="3133725"/>
-            <a:ext cx="1333500" cy="133350"/>
+          <p:cNvPr id="23" name="">
+            <a:extLst xmlns:a="http://schemas.openxmlformats.org/drawingml/2006/main">
+              <a:ext uri="{FF2B5EF4-FFF2-40B4-BE49-F238E27FC236}">
+                <a16:creationId xmlns:a16="http://schemas.microsoft.com/office/drawing/2014/main" id="{710F8CA9-B1CF-4C4B-B075-2CE6CCBBA93F}"/>
+              </a:ext>
+            </a:extLst>
+          </p:cNvPr>
+          <p:cNvSpPr>
+            <a:spLocks xmlns:a="http://schemas.openxmlformats.org/drawingml/2006/main" noGrp="1"/>
+          </p:cNvSpPr>
+          <p:nvPr/>
+        </p:nvSpPr>
+        <p:spPr>
+          <a:xfrm xmlns:a="http://schemas.openxmlformats.org/drawingml/2006/main">
+            <a:off x="2714625" y="2943225"/>
+            <a:ext cx="1714500" cy="133350"/>
           </a:xfrm>
           <a:prstGeom xmlns:a="http://schemas.openxmlformats.org/drawingml/2006/main" prst="rect">
             <a:avLst/>
@@ -12443,135 +12906,118 @@
             <a:pPr algn="l">
               <a:defRPr sz="675" b="1" i="0">
                 <a:solidFill>
-                  <a:srgbClr val="7B61D4"/>
+                  <a:srgbClr val="F0A0A0"/>
                 </a:solidFill>
               </a:defRPr>
             </a:pPr>
             <a:r>
               <a:rPr sz="675" b="1" i="0">
                 <a:solidFill>
-                  <a:srgbClr val="7B61D4"/>
-                </a:solidFill>
-              </a:rPr>
-              <a:t>CASE ENGINE</a:t>
-            </a:r>
-          </a:p>
-        </p:txBody>
-      </p:sp>
-      <p:sp>
-        <p:nvSpPr>
-          <p:cNvPr id="20" name="">
-            <a:extLst xmlns:a="http://schemas.openxmlformats.org/drawingml/2006/main">
-              <a:ext uri="{FF2B5EF4-FFF2-40B4-BE49-F238E27FC236}">
-                <a16:creationId xmlns:a16="http://schemas.microsoft.com/office/drawing/2014/main" id="{B9A96706-10BB-46DE-949D-13B1786B39FC}"/>
-              </a:ext>
-            </a:extLst>
-          </p:cNvPr>
-          <p:cNvSpPr>
-            <a:spLocks xmlns:a="http://schemas.openxmlformats.org/drawingml/2006/main" noGrp="1"/>
-          </p:cNvSpPr>
-          <p:nvPr/>
-        </p:nvSpPr>
-        <p:spPr>
-          <a:xfrm xmlns:a="http://schemas.openxmlformats.org/drawingml/2006/main">
-            <a:off x="8258175" y="3400425"/>
-            <a:ext cx="1333500" cy="781050"/>
-          </a:xfrm>
-          <a:prstGeom xmlns:a="http://schemas.openxmlformats.org/drawingml/2006/main" prst="rect">
-            <a:avLst/>
-          </a:prstGeom>
-          <a:noFill xmlns:a="http://schemas.openxmlformats.org/drawingml/2006/main"/>
-          <a:ln xmlns:a="http://schemas.openxmlformats.org/drawingml/2006/main" w="0">
-            <a:noFill/>
-            <a:prstDash val="solid"/>
-          </a:ln>
-        </p:spPr>
-        <p:txBody>
-          <a:bodyPr xmlns:a="http://schemas.openxmlformats.org/drawingml/2006/main"/>
-          <a:lstStyle xmlns:a="http://schemas.openxmlformats.org/drawingml/2006/main"/>
-          <a:p xmlns:a="http://schemas.openxmlformats.org/drawingml/2006/main">
-            <a:pPr algn="l">
-              <a:defRPr sz="975" b="1" i="0">
+                  <a:srgbClr val="F0A0A0"/>
+                </a:solidFill>
+              </a:rPr>
+              <a:t>CONSENT PARSE</a:t>
+            </a:r>
+          </a:p>
+        </p:txBody>
+      </p:sp>
+      <p:sp>
+        <p:nvSpPr>
+          <p:cNvPr id="24" name="">
+            <a:extLst xmlns:a="http://schemas.openxmlformats.org/drawingml/2006/main">
+              <a:ext uri="{FF2B5EF4-FFF2-40B4-BE49-F238E27FC236}">
+                <a16:creationId xmlns:a16="http://schemas.microsoft.com/office/drawing/2014/main" id="{E72F4632-2AB0-4388-84BC-89EBE2AC402F}"/>
+              </a:ext>
+            </a:extLst>
+          </p:cNvPr>
+          <p:cNvSpPr>
+            <a:spLocks xmlns:a="http://schemas.openxmlformats.org/drawingml/2006/main" noGrp="1"/>
+          </p:cNvSpPr>
+          <p:nvPr/>
+        </p:nvSpPr>
+        <p:spPr>
+          <a:xfrm xmlns:a="http://schemas.openxmlformats.org/drawingml/2006/main">
+            <a:off x="2714625" y="3171825"/>
+            <a:ext cx="1714500" cy="447675"/>
+          </a:xfrm>
+          <a:prstGeom xmlns:a="http://schemas.openxmlformats.org/drawingml/2006/main" prst="rect">
+            <a:avLst/>
+          </a:prstGeom>
+          <a:noFill xmlns:a="http://schemas.openxmlformats.org/drawingml/2006/main"/>
+          <a:ln xmlns:a="http://schemas.openxmlformats.org/drawingml/2006/main" w="0">
+            <a:noFill/>
+            <a:prstDash val="solid"/>
+          </a:ln>
+        </p:spPr>
+        <p:txBody>
+          <a:bodyPr xmlns:a="http://schemas.openxmlformats.org/drawingml/2006/main"/>
+          <a:lstStyle xmlns:a="http://schemas.openxmlformats.org/drawingml/2006/main"/>
+          <a:p xmlns:a="http://schemas.openxmlformats.org/drawingml/2006/main">
+            <a:pPr algn="l">
+              <a:defRPr sz="900" b="1" i="0">
                 <a:solidFill>
                   <a:srgbClr val="0B1F33"/>
                 </a:solidFill>
               </a:defRPr>
             </a:pPr>
             <a:r>
-              <a:rPr sz="975" b="1" i="0">
+              <a:rPr sz="900" b="1" i="0">
                 <a:solidFill>
                   <a:srgbClr val="0B1F33"/>
                 </a:solidFill>
               </a:rPr>
-              <a:t>minimum facts</a:t>
-            </a:r>
-          </a:p>
-          <a:p xmlns:a="http://schemas.openxmlformats.org/drawingml/2006/main">
-            <a:pPr algn="l">
-              <a:defRPr sz="975" b="1" i="0">
+              <a:t>explicit phrase + scope</a:t>
+            </a:r>
+          </a:p>
+          <a:p xmlns:a="http://schemas.openxmlformats.org/drawingml/2006/main">
+            <a:pPr algn="l">
+              <a:defRPr sz="900" b="1" i="0">
                 <a:solidFill>
                   <a:srgbClr val="0B1F33"/>
                 </a:solidFill>
               </a:defRPr>
             </a:pPr>
             <a:r>
-              <a:rPr sz="975" b="1" i="0">
+              <a:rPr sz="900" b="1" i="0">
                 <a:solidFill>
                   <a:srgbClr val="0B1F33"/>
                 </a:solidFill>
               </a:rPr>
-              <a:t>event timeline</a:t>
-            </a:r>
-          </a:p>
-          <a:p xmlns:a="http://schemas.openxmlformats.org/drawingml/2006/main">
-            <a:pPr algn="l">
-              <a:defRPr sz="975" b="1" i="0">
-                <a:solidFill>
-                  <a:srgbClr val="0B1F33"/>
-                </a:solidFill>
-              </a:defRPr>
-            </a:pPr>
-            <a:r>
-              <a:rPr sz="975" b="1" i="0">
-                <a:solidFill>
-                  <a:srgbClr val="0B1F33"/>
-                </a:solidFill>
-              </a:rPr>
-              <a:t>proof gate</a:t>
-            </a:r>
-          </a:p>
-        </p:txBody>
-      </p:sp>
-      <p:sp>
-        <p:nvSpPr>
-          <p:cNvPr id="21" name="Pharmacy">
-            <a:extLst xmlns:a="http://schemas.openxmlformats.org/drawingml/2006/main">
-              <a:ext uri="{FF2B5EF4-FFF2-40B4-BE49-F238E27FC236}">
-                <a16:creationId xmlns:a16="http://schemas.microsoft.com/office/drawing/2014/main" id="{D996D9D9-6856-4AC9-88C8-D3553C1D3519}"/>
-              </a:ext>
-            </a:extLst>
-          </p:cNvPr>
-          <p:cNvSpPr>
-            <a:spLocks xmlns:a="http://schemas.openxmlformats.org/drawingml/2006/main" noGrp="1"/>
-          </p:cNvSpPr>
-          <p:nvPr/>
-        </p:nvSpPr>
-        <p:spPr>
-          <a:xfrm xmlns:a="http://schemas.openxmlformats.org/drawingml/2006/main">
-            <a:off x="10115550" y="2600325"/>
-            <a:ext cx="1619250" cy="742950"/>
+              <a:t>vague “yes” rejected</a:t>
+            </a:r>
+          </a:p>
+        </p:txBody>
+      </p:sp>
+      <p:sp>
+        <p:nvSpPr>
+          <p:cNvPr id="25" name="Safe stop">
+            <a:extLst xmlns:a="http://schemas.openxmlformats.org/drawingml/2006/main">
+              <a:ext uri="{FF2B5EF4-FFF2-40B4-BE49-F238E27FC236}">
+                <a16:creationId xmlns:a16="http://schemas.microsoft.com/office/drawing/2014/main" id="{F4F926CE-C39D-4A2F-812D-B3BD7D73079E}"/>
+              </a:ext>
+            </a:extLst>
+          </p:cNvPr>
+          <p:cNvSpPr>
+            <a:spLocks xmlns:a="http://schemas.openxmlformats.org/drawingml/2006/main" noGrp="1"/>
+          </p:cNvSpPr>
+          <p:nvPr/>
+        </p:nvSpPr>
+        <p:spPr>
+          <a:xfrm xmlns:a="http://schemas.openxmlformats.org/drawingml/2006/main">
+            <a:off x="2571750" y="3952875"/>
+            <a:ext cx="2000250" cy="904875"/>
           </a:xfrm>
           <a:prstGeom xmlns:a="http://schemas.openxmlformats.org/drawingml/2006/main" prst="roundRect">
             <a:avLst>
-              <a:gd name="adj" fmla="val 15385"/>
+              <a:gd name="adj" fmla="val 12632"/>
             </a:avLst>
           </a:prstGeom>
           <a:solidFill xmlns:a="http://schemas.openxmlformats.org/drawingml/2006/main">
-            <a:srgbClr val="FFF1D7"/>
+            <a:srgbClr val="3A1F24"/>
           </a:solidFill>
           <a:ln xmlns:a="http://schemas.openxmlformats.org/drawingml/2006/main" w="9525">
             <a:solidFill>
-              <a:srgbClr val="FFF1D7"/>
+              <a:srgbClr val="3A1F24"/>
             </a:solidFill>
             <a:prstDash val="solid"/>
           </a:ln>
@@ -12585,22 +13031,22 @@
       </p:sp>
       <p:sp>
         <p:nvSpPr>
-          <p:cNvPr id="22" name="">
-            <a:extLst xmlns:a="http://schemas.openxmlformats.org/drawingml/2006/main">
-              <a:ext uri="{FF2B5EF4-FFF2-40B4-BE49-F238E27FC236}">
-                <a16:creationId xmlns:a16="http://schemas.microsoft.com/office/drawing/2014/main" id="{7B4F7960-22EF-45D6-A680-0DCFC7A78E74}"/>
-              </a:ext>
-            </a:extLst>
-          </p:cNvPr>
-          <p:cNvSpPr>
-            <a:spLocks xmlns:a="http://schemas.openxmlformats.org/drawingml/2006/main" noGrp="1"/>
-          </p:cNvSpPr>
-          <p:nvPr/>
-        </p:nvSpPr>
-        <p:spPr>
-          <a:xfrm xmlns:a="http://schemas.openxmlformats.org/drawingml/2006/main">
-            <a:off x="10258425" y="2733675"/>
-            <a:ext cx="1333500" cy="133350"/>
+          <p:cNvPr id="26" name="">
+            <a:extLst xmlns:a="http://schemas.openxmlformats.org/drawingml/2006/main">
+              <a:ext uri="{FF2B5EF4-FFF2-40B4-BE49-F238E27FC236}">
+                <a16:creationId xmlns:a16="http://schemas.microsoft.com/office/drawing/2014/main" id="{9B25904B-8408-4E6F-908B-D6889329CE4A}"/>
+              </a:ext>
+            </a:extLst>
+          </p:cNvPr>
+          <p:cNvSpPr>
+            <a:spLocks xmlns:a="http://schemas.openxmlformats.org/drawingml/2006/main" noGrp="1"/>
+          </p:cNvSpPr>
+          <p:nvPr/>
+        </p:nvSpPr>
+        <p:spPr>
+          <a:xfrm xmlns:a="http://schemas.openxmlformats.org/drawingml/2006/main">
+            <a:off x="2714625" y="4086225"/>
+            <a:ext cx="1714500" cy="133350"/>
           </a:xfrm>
           <a:prstGeom xmlns:a="http://schemas.openxmlformats.org/drawingml/2006/main" prst="rect">
             <a:avLst/>
@@ -12618,101 +13064,118 @@
             <a:pPr algn="l">
               <a:defRPr sz="675" b="1" i="0">
                 <a:solidFill>
-                  <a:srgbClr val="E6A037"/>
+                  <a:srgbClr val="F0A0A0"/>
                 </a:solidFill>
               </a:defRPr>
             </a:pPr>
             <a:r>
               <a:rPr sz="675" b="1" i="0">
                 <a:solidFill>
-                  <a:srgbClr val="E6A037"/>
-                </a:solidFill>
-              </a:rPr>
-              <a:t>PHARMACY</a:t>
-            </a:r>
-          </a:p>
-        </p:txBody>
-      </p:sp>
-      <p:sp>
-        <p:nvSpPr>
-          <p:cNvPr id="23" name="">
-            <a:extLst xmlns:a="http://schemas.openxmlformats.org/drawingml/2006/main">
-              <a:ext uri="{FF2B5EF4-FFF2-40B4-BE49-F238E27FC236}">
-                <a16:creationId xmlns:a16="http://schemas.microsoft.com/office/drawing/2014/main" id="{8227D424-971B-4667-9B67-8D949FE49696}"/>
-              </a:ext>
-            </a:extLst>
-          </p:cNvPr>
-          <p:cNvSpPr>
-            <a:spLocks xmlns:a="http://schemas.openxmlformats.org/drawingml/2006/main" noGrp="1"/>
-          </p:cNvSpPr>
-          <p:nvPr/>
-        </p:nvSpPr>
-        <p:spPr>
-          <a:xfrm xmlns:a="http://schemas.openxmlformats.org/drawingml/2006/main">
-            <a:off x="10258425" y="3000375"/>
-            <a:ext cx="1333500" cy="266700"/>
-          </a:xfrm>
-          <a:prstGeom xmlns:a="http://schemas.openxmlformats.org/drawingml/2006/main" prst="rect">
-            <a:avLst/>
-          </a:prstGeom>
-          <a:noFill xmlns:a="http://schemas.openxmlformats.org/drawingml/2006/main"/>
-          <a:ln xmlns:a="http://schemas.openxmlformats.org/drawingml/2006/main" w="0">
-            <a:noFill/>
-            <a:prstDash val="solid"/>
-          </a:ln>
-        </p:spPr>
-        <p:txBody>
-          <a:bodyPr xmlns:a="http://schemas.openxmlformats.org/drawingml/2006/main"/>
-          <a:lstStyle xmlns:a="http://schemas.openxmlformats.org/drawingml/2006/main"/>
-          <a:p xmlns:a="http://schemas.openxmlformats.org/drawingml/2006/main">
-            <a:pPr algn="l">
-              <a:defRPr sz="975" b="1" i="0">
+                  <a:srgbClr val="F0A0A0"/>
+                </a:solidFill>
+              </a:rPr>
+              <a:t>SAFE STOP</a:t>
+            </a:r>
+          </a:p>
+        </p:txBody>
+      </p:sp>
+      <p:sp>
+        <p:nvSpPr>
+          <p:cNvPr id="27" name="">
+            <a:extLst xmlns:a="http://schemas.openxmlformats.org/drawingml/2006/main">
+              <a:ext uri="{FF2B5EF4-FFF2-40B4-BE49-F238E27FC236}">
+                <a16:creationId xmlns:a16="http://schemas.microsoft.com/office/drawing/2014/main" id="{4D58A4ED-07A8-497E-A60D-017CBD49BFA4}"/>
+              </a:ext>
+            </a:extLst>
+          </p:cNvPr>
+          <p:cNvSpPr>
+            <a:spLocks xmlns:a="http://schemas.openxmlformats.org/drawingml/2006/main" noGrp="1"/>
+          </p:cNvSpPr>
+          <p:nvPr/>
+        </p:nvSpPr>
+        <p:spPr>
+          <a:xfrm xmlns:a="http://schemas.openxmlformats.org/drawingml/2006/main">
+            <a:off x="2714625" y="4314825"/>
+            <a:ext cx="1714500" cy="447675"/>
+          </a:xfrm>
+          <a:prstGeom xmlns:a="http://schemas.openxmlformats.org/drawingml/2006/main" prst="rect">
+            <a:avLst/>
+          </a:prstGeom>
+          <a:noFill xmlns:a="http://schemas.openxmlformats.org/drawingml/2006/main"/>
+          <a:ln xmlns:a="http://schemas.openxmlformats.org/drawingml/2006/main" w="0">
+            <a:noFill/>
+            <a:prstDash val="solid"/>
+          </a:ln>
+        </p:spPr>
+        <p:txBody>
+          <a:bodyPr xmlns:a="http://schemas.openxmlformats.org/drawingml/2006/main"/>
+          <a:lstStyle xmlns:a="http://schemas.openxmlformats.org/drawingml/2006/main"/>
+          <a:p xmlns:a="http://schemas.openxmlformats.org/drawingml/2006/main">
+            <a:pPr algn="l">
+              <a:defRPr sz="900" b="1" i="0">
                 <a:solidFill>
                   <a:srgbClr val="0B1F33"/>
                 </a:solidFill>
               </a:defRPr>
             </a:pPr>
             <a:r>
-              <a:rPr sz="975" b="1" i="0">
+              <a:rPr sz="900" b="1" i="0">
                 <a:solidFill>
                   <a:srgbClr val="0B1F33"/>
                 </a:solidFill>
               </a:rPr>
-              <a:t>status outcome</a:t>
-            </a:r>
-          </a:p>
-        </p:txBody>
-      </p:sp>
-      <p:sp>
-        <p:nvSpPr>
-          <p:cNvPr id="24" name="Clinic / insurer">
-            <a:extLst xmlns:a="http://schemas.openxmlformats.org/drawingml/2006/main">
-              <a:ext uri="{FF2B5EF4-FFF2-40B4-BE49-F238E27FC236}">
-                <a16:creationId xmlns:a16="http://schemas.microsoft.com/office/drawing/2014/main" id="{5761ED83-E082-4838-BA97-4057DC35F532}"/>
-              </a:ext>
-            </a:extLst>
-          </p:cNvPr>
-          <p:cNvSpPr>
-            <a:spLocks xmlns:a="http://schemas.openxmlformats.org/drawingml/2006/main" noGrp="1"/>
-          </p:cNvSpPr>
-          <p:nvPr/>
-        </p:nvSpPr>
-        <p:spPr>
-          <a:xfrm xmlns:a="http://schemas.openxmlformats.org/drawingml/2006/main">
-            <a:off x="10115550" y="3800475"/>
-            <a:ext cx="1619250" cy="742950"/>
+              <a:t>clinical / emergency / Rx change</a:t>
+            </a:r>
+          </a:p>
+          <a:p xmlns:a="http://schemas.openxmlformats.org/drawingml/2006/main">
+            <a:pPr algn="l">
+              <a:defRPr sz="900" b="1" i="0">
+                <a:solidFill>
+                  <a:srgbClr val="0B1F33"/>
+                </a:solidFill>
+              </a:defRPr>
+            </a:pPr>
+            <a:r>
+              <a:rPr sz="900" b="1" i="0">
+                <a:solidFill>
+                  <a:srgbClr val="0B1F33"/>
+                </a:solidFill>
+              </a:rPr>
+              <a:t>→ human review, no action</a:t>
+            </a:r>
+          </a:p>
+        </p:txBody>
+      </p:sp>
+      <p:sp>
+        <p:nvSpPr>
+          <p:cNvPr id="28" name="PAVO router">
+            <a:extLst xmlns:a="http://schemas.openxmlformats.org/drawingml/2006/main">
+              <a:ext uri="{FF2B5EF4-FFF2-40B4-BE49-F238E27FC236}">
+                <a16:creationId xmlns:a16="http://schemas.microsoft.com/office/drawing/2014/main" id="{D806E611-C2DB-44E2-8CB4-1BA515A03BAA}"/>
+              </a:ext>
+            </a:extLst>
+          </p:cNvPr>
+          <p:cNvSpPr>
+            <a:spLocks xmlns:a="http://schemas.openxmlformats.org/drawingml/2006/main" noGrp="1"/>
+          </p:cNvSpPr>
+          <p:nvPr/>
+        </p:nvSpPr>
+        <p:spPr>
+          <a:xfrm xmlns:a="http://schemas.openxmlformats.org/drawingml/2006/main">
+            <a:off x="4857750" y="1524000"/>
+            <a:ext cx="2190750" cy="952500"/>
           </a:xfrm>
           <a:prstGeom xmlns:a="http://schemas.openxmlformats.org/drawingml/2006/main" prst="roundRect">
             <a:avLst>
-              <a:gd name="adj" fmla="val 15385"/>
+              <a:gd name="adj" fmla="val 12000"/>
             </a:avLst>
           </a:prstGeom>
           <a:solidFill xmlns:a="http://schemas.openxmlformats.org/drawingml/2006/main">
-            <a:srgbClr val="E5F0FF"/>
+            <a:srgbClr val="0E4A44"/>
           </a:solidFill>
           <a:ln xmlns:a="http://schemas.openxmlformats.org/drawingml/2006/main" w="9525">
             <a:solidFill>
-              <a:srgbClr val="E5F0FF"/>
+              <a:srgbClr val="0E4A44"/>
             </a:solidFill>
             <a:prstDash val="solid"/>
           </a:ln>
@@ -12726,22 +13189,22 @@
       </p:sp>
       <p:sp>
         <p:nvSpPr>
-          <p:cNvPr id="25" name="">
-            <a:extLst xmlns:a="http://schemas.openxmlformats.org/drawingml/2006/main">
-              <a:ext uri="{FF2B5EF4-FFF2-40B4-BE49-F238E27FC236}">
-                <a16:creationId xmlns:a16="http://schemas.microsoft.com/office/drawing/2014/main" id="{751ABEE9-CDDB-4C0F-8BDD-2691552AD5DC}"/>
-              </a:ext>
-            </a:extLst>
-          </p:cNvPr>
-          <p:cNvSpPr>
-            <a:spLocks xmlns:a="http://schemas.openxmlformats.org/drawingml/2006/main" noGrp="1"/>
-          </p:cNvSpPr>
-          <p:nvPr/>
-        </p:nvSpPr>
-        <p:spPr>
-          <a:xfrm xmlns:a="http://schemas.openxmlformats.org/drawingml/2006/main">
-            <a:off x="10258425" y="3933825"/>
-            <a:ext cx="1333500" cy="133350"/>
+          <p:cNvPr id="29" name="">
+            <a:extLst xmlns:a="http://schemas.openxmlformats.org/drawingml/2006/main">
+              <a:ext uri="{FF2B5EF4-FFF2-40B4-BE49-F238E27FC236}">
+                <a16:creationId xmlns:a16="http://schemas.microsoft.com/office/drawing/2014/main" id="{030AA6A9-3A42-47A1-84D7-13FA42B8BF03}"/>
+              </a:ext>
+            </a:extLst>
+          </p:cNvPr>
+          <p:cNvSpPr>
+            <a:spLocks xmlns:a="http://schemas.openxmlformats.org/drawingml/2006/main" noGrp="1"/>
+          </p:cNvSpPr>
+          <p:nvPr/>
+        </p:nvSpPr>
+        <p:spPr>
+          <a:xfrm xmlns:a="http://schemas.openxmlformats.org/drawingml/2006/main">
+            <a:off x="5000625" y="1657350"/>
+            <a:ext cx="1905000" cy="133350"/>
           </a:xfrm>
           <a:prstGeom xmlns:a="http://schemas.openxmlformats.org/drawingml/2006/main" prst="rect">
             <a:avLst/>
@@ -12759,101 +13222,118 @@
             <a:pPr algn="l">
               <a:defRPr sz="675" b="1" i="0">
                 <a:solidFill>
-                  <a:srgbClr val="3D8DFF"/>
+                  <a:srgbClr val="7CE7D5"/>
                 </a:solidFill>
               </a:defRPr>
             </a:pPr>
             <a:r>
               <a:rPr sz="675" b="1" i="0">
                 <a:solidFill>
-                  <a:srgbClr val="3D8DFF"/>
-                </a:solidFill>
-              </a:rPr>
-              <a:t>CLINIC / INSURER</a:t>
-            </a:r>
-          </a:p>
-        </p:txBody>
-      </p:sp>
-      <p:sp>
-        <p:nvSpPr>
-          <p:cNvPr id="26" name="">
-            <a:extLst xmlns:a="http://schemas.openxmlformats.org/drawingml/2006/main">
-              <a:ext uri="{FF2B5EF4-FFF2-40B4-BE49-F238E27FC236}">
-                <a16:creationId xmlns:a16="http://schemas.microsoft.com/office/drawing/2014/main" id="{8F97DA85-F559-48A7-9998-155BFBEFBE75}"/>
-              </a:ext>
-            </a:extLst>
-          </p:cNvPr>
-          <p:cNvSpPr>
-            <a:spLocks xmlns:a="http://schemas.openxmlformats.org/drawingml/2006/main" noGrp="1"/>
-          </p:cNvSpPr>
-          <p:nvPr/>
-        </p:nvSpPr>
-        <p:spPr>
-          <a:xfrm xmlns:a="http://schemas.openxmlformats.org/drawingml/2006/main">
-            <a:off x="10258425" y="4200525"/>
-            <a:ext cx="1333500" cy="266700"/>
-          </a:xfrm>
-          <a:prstGeom xmlns:a="http://schemas.openxmlformats.org/drawingml/2006/main" prst="rect">
-            <a:avLst/>
-          </a:prstGeom>
-          <a:noFill xmlns:a="http://schemas.openxmlformats.org/drawingml/2006/main"/>
-          <a:ln xmlns:a="http://schemas.openxmlformats.org/drawingml/2006/main" w="0">
-            <a:noFill/>
-            <a:prstDash val="solid"/>
-          </a:ln>
-        </p:spPr>
-        <p:txBody>
-          <a:bodyPr xmlns:a="http://schemas.openxmlformats.org/drawingml/2006/main"/>
-          <a:lstStyle xmlns:a="http://schemas.openxmlformats.org/drawingml/2006/main"/>
-          <a:p xmlns:a="http://schemas.openxmlformats.org/drawingml/2006/main">
-            <a:pPr algn="l">
-              <a:defRPr sz="975" b="1" i="0">
+                  <a:srgbClr val="7CE7D5"/>
+                </a:solidFill>
+              </a:rPr>
+              <a:t>PAVO ROUTER</a:t>
+            </a:r>
+          </a:p>
+        </p:txBody>
+      </p:sp>
+      <p:sp>
+        <p:nvSpPr>
+          <p:cNvPr id="30" name="">
+            <a:extLst xmlns:a="http://schemas.openxmlformats.org/drawingml/2006/main">
+              <a:ext uri="{FF2B5EF4-FFF2-40B4-BE49-F238E27FC236}">
+                <a16:creationId xmlns:a16="http://schemas.microsoft.com/office/drawing/2014/main" id="{AE1E407E-2695-42A6-B3A9-729B52B67FFC}"/>
+              </a:ext>
+            </a:extLst>
+          </p:cNvPr>
+          <p:cNvSpPr>
+            <a:spLocks xmlns:a="http://schemas.openxmlformats.org/drawingml/2006/main" noGrp="1"/>
+          </p:cNvSpPr>
+          <p:nvPr/>
+        </p:nvSpPr>
+        <p:spPr>
+          <a:xfrm xmlns:a="http://schemas.openxmlformats.org/drawingml/2006/main">
+            <a:off x="5000625" y="1885950"/>
+            <a:ext cx="1905000" cy="495300"/>
+          </a:xfrm>
+          <a:prstGeom xmlns:a="http://schemas.openxmlformats.org/drawingml/2006/main" prst="rect">
+            <a:avLst/>
+          </a:prstGeom>
+          <a:noFill xmlns:a="http://schemas.openxmlformats.org/drawingml/2006/main"/>
+          <a:ln xmlns:a="http://schemas.openxmlformats.org/drawingml/2006/main" w="0">
+            <a:noFill/>
+            <a:prstDash val="solid"/>
+          </a:ln>
+        </p:spPr>
+        <p:txBody>
+          <a:bodyPr xmlns:a="http://schemas.openxmlformats.org/drawingml/2006/main"/>
+          <a:lstStyle xmlns:a="http://schemas.openxmlformats.org/drawingml/2006/main"/>
+          <a:p xmlns:a="http://schemas.openxmlformats.org/drawingml/2006/main">
+            <a:pPr algn="l">
+              <a:defRPr sz="900" b="1" i="0">
                 <a:solidFill>
                   <a:srgbClr val="0B1F33"/>
                 </a:solidFill>
               </a:defRPr>
             </a:pPr>
             <a:r>
-              <a:rPr sz="975" b="1" i="0">
+              <a:rPr sz="900" b="1" i="0">
                 <a:solidFill>
                   <a:srgbClr val="0B1F33"/>
                 </a:solidFill>
               </a:rPr>
-              <a:t>follow-up outcome</a:t>
-            </a:r>
-          </a:p>
-        </p:txBody>
-      </p:sp>
-      <p:sp>
-        <p:nvSpPr>
-          <p:cNvPr id="27" name="Human review">
-            <a:extLst xmlns:a="http://schemas.openxmlformats.org/drawingml/2006/main">
-              <a:ext uri="{FF2B5EF4-FFF2-40B4-BE49-F238E27FC236}">
-                <a16:creationId xmlns:a16="http://schemas.microsoft.com/office/drawing/2014/main" id="{0EED2805-7F35-429B-AED3-F2C18A5E4E3F}"/>
-              </a:ext>
-            </a:extLst>
-          </p:cNvPr>
-          <p:cNvSpPr>
-            <a:spLocks xmlns:a="http://schemas.openxmlformats.org/drawingml/2006/main" noGrp="1"/>
-          </p:cNvSpPr>
-          <p:nvPr/>
-        </p:nvSpPr>
-        <p:spPr>
-          <a:xfrm xmlns:a="http://schemas.openxmlformats.org/drawingml/2006/main">
-            <a:off x="5962650" y="4943475"/>
-            <a:ext cx="1762125" cy="742950"/>
+              <a:t>confidence · noise · entities</a:t>
+            </a:r>
+          </a:p>
+          <a:p xmlns:a="http://schemas.openxmlformats.org/drawingml/2006/main">
+            <a:pPr algn="l">
+              <a:defRPr sz="900" b="1" i="0">
+                <a:solidFill>
+                  <a:srgbClr val="0B1F33"/>
+                </a:solidFill>
+              </a:defRPr>
+            </a:pPr>
+            <a:r>
+              <a:rPr sz="900" b="1" i="0">
+                <a:solidFill>
+                  <a:srgbClr val="0B1F33"/>
+                </a:solidFill>
+              </a:rPr>
+              <a:t>fast / balanced / verified / stop</a:t>
+            </a:r>
+          </a:p>
+        </p:txBody>
+      </p:sp>
+      <p:sp>
+        <p:nvSpPr>
+          <p:cNvPr id="31" name="Inference">
+            <a:extLst xmlns:a="http://schemas.openxmlformats.org/drawingml/2006/main">
+              <a:ext uri="{FF2B5EF4-FFF2-40B4-BE49-F238E27FC236}">
+                <a16:creationId xmlns:a16="http://schemas.microsoft.com/office/drawing/2014/main" id="{F01599C4-732B-40E8-A7FE-6C2619A973CA}"/>
+              </a:ext>
+            </a:extLst>
+          </p:cNvPr>
+          <p:cNvSpPr>
+            <a:spLocks xmlns:a="http://schemas.openxmlformats.org/drawingml/2006/main" noGrp="1"/>
+          </p:cNvSpPr>
+          <p:nvPr/>
+        </p:nvSpPr>
+        <p:spPr>
+          <a:xfrm xmlns:a="http://schemas.openxmlformats.org/drawingml/2006/main">
+            <a:off x="4857750" y="2686050"/>
+            <a:ext cx="2190750" cy="857250"/>
           </a:xfrm>
           <a:prstGeom xmlns:a="http://schemas.openxmlformats.org/drawingml/2006/main" prst="roundRect">
             <a:avLst>
-              <a:gd name="adj" fmla="val 15385"/>
+              <a:gd name="adj" fmla="val 13333"/>
             </a:avLst>
           </a:prstGeom>
           <a:solidFill xmlns:a="http://schemas.openxmlformats.org/drawingml/2006/main">
-            <a:srgbClr val="FCE6E6"/>
+            <a:srgbClr val="12324A"/>
           </a:solidFill>
           <a:ln xmlns:a="http://schemas.openxmlformats.org/drawingml/2006/main" w="9525">
             <a:solidFill>
-              <a:srgbClr val="FCE6E6"/>
+              <a:srgbClr val="12324A"/>
             </a:solidFill>
             <a:prstDash val="solid"/>
           </a:ln>
@@ -12867,22 +13347,22 @@
       </p:sp>
       <p:sp>
         <p:nvSpPr>
-          <p:cNvPr id="28" name="">
-            <a:extLst xmlns:a="http://schemas.openxmlformats.org/drawingml/2006/main">
-              <a:ext uri="{FF2B5EF4-FFF2-40B4-BE49-F238E27FC236}">
-                <a16:creationId xmlns:a16="http://schemas.microsoft.com/office/drawing/2014/main" id="{AA0513CD-9F17-4FBC-9D17-69BA4E27B2B3}"/>
-              </a:ext>
-            </a:extLst>
-          </p:cNvPr>
-          <p:cNvSpPr>
-            <a:spLocks xmlns:a="http://schemas.openxmlformats.org/drawingml/2006/main" noGrp="1"/>
-          </p:cNvSpPr>
-          <p:nvPr/>
-        </p:nvSpPr>
-        <p:spPr>
-          <a:xfrm xmlns:a="http://schemas.openxmlformats.org/drawingml/2006/main">
-            <a:off x="6105525" y="5076825"/>
-            <a:ext cx="1476375" cy="133350"/>
+          <p:cNvPr id="32" name="">
+            <a:extLst xmlns:a="http://schemas.openxmlformats.org/drawingml/2006/main">
+              <a:ext uri="{FF2B5EF4-FFF2-40B4-BE49-F238E27FC236}">
+                <a16:creationId xmlns:a16="http://schemas.microsoft.com/office/drawing/2014/main" id="{DE56E2B7-68E8-4245-9753-8F439E6443DD}"/>
+              </a:ext>
+            </a:extLst>
+          </p:cNvPr>
+          <p:cNvSpPr>
+            <a:spLocks xmlns:a="http://schemas.openxmlformats.org/drawingml/2006/main" noGrp="1"/>
+          </p:cNvSpPr>
+          <p:nvPr/>
+        </p:nvSpPr>
+        <p:spPr>
+          <a:xfrm xmlns:a="http://schemas.openxmlformats.org/drawingml/2006/main">
+            <a:off x="5000625" y="2819400"/>
+            <a:ext cx="1905000" cy="133350"/>
           </a:xfrm>
           <a:prstGeom xmlns:a="http://schemas.openxmlformats.org/drawingml/2006/main" prst="rect">
             <a:avLst/>
@@ -12900,118 +13380,118 @@
             <a:pPr algn="l">
               <a:defRPr sz="675" b="1" i="0">
                 <a:solidFill>
-                  <a:srgbClr val="D35656"/>
+                  <a:srgbClr val="9FB6C9"/>
                 </a:solidFill>
               </a:defRPr>
             </a:pPr>
             <a:r>
               <a:rPr sz="675" b="1" i="0">
                 <a:solidFill>
-                  <a:srgbClr val="D35656"/>
-                </a:solidFill>
-              </a:rPr>
-              <a:t>HUMAN REVIEW</a:t>
-            </a:r>
-          </a:p>
-        </p:txBody>
-      </p:sp>
-      <p:sp>
-        <p:nvSpPr>
-          <p:cNvPr id="29" name="">
-            <a:extLst xmlns:a="http://schemas.openxmlformats.org/drawingml/2006/main">
-              <a:ext uri="{FF2B5EF4-FFF2-40B4-BE49-F238E27FC236}">
-                <a16:creationId xmlns:a16="http://schemas.microsoft.com/office/drawing/2014/main" id="{62FF2E7B-B781-47EB-A51A-011293AE21DE}"/>
-              </a:ext>
-            </a:extLst>
-          </p:cNvPr>
-          <p:cNvSpPr>
-            <a:spLocks xmlns:a="http://schemas.openxmlformats.org/drawingml/2006/main" noGrp="1"/>
-          </p:cNvSpPr>
-          <p:nvPr/>
-        </p:nvSpPr>
-        <p:spPr>
-          <a:xfrm xmlns:a="http://schemas.openxmlformats.org/drawingml/2006/main">
-            <a:off x="6105525" y="5343525"/>
-            <a:ext cx="1476375" cy="266700"/>
-          </a:xfrm>
-          <a:prstGeom xmlns:a="http://schemas.openxmlformats.org/drawingml/2006/main" prst="rect">
-            <a:avLst/>
-          </a:prstGeom>
-          <a:noFill xmlns:a="http://schemas.openxmlformats.org/drawingml/2006/main"/>
-          <a:ln xmlns:a="http://schemas.openxmlformats.org/drawingml/2006/main" w="0">
-            <a:noFill/>
-            <a:prstDash val="solid"/>
-          </a:ln>
-        </p:spPr>
-        <p:txBody>
-          <a:bodyPr xmlns:a="http://schemas.openxmlformats.org/drawingml/2006/main"/>
-          <a:lstStyle xmlns:a="http://schemas.openxmlformats.org/drawingml/2006/main"/>
-          <a:p xmlns:a="http://schemas.openxmlformats.org/drawingml/2006/main">
-            <a:pPr algn="l">
-              <a:defRPr sz="975" b="1" i="0">
+                  <a:srgbClr val="9FB6C9"/>
+                </a:solidFill>
+              </a:rPr>
+              <a:t>INFERENCE</a:t>
+            </a:r>
+          </a:p>
+        </p:txBody>
+      </p:sp>
+      <p:sp>
+        <p:nvSpPr>
+          <p:cNvPr id="33" name="">
+            <a:extLst xmlns:a="http://schemas.openxmlformats.org/drawingml/2006/main">
+              <a:ext uri="{FF2B5EF4-FFF2-40B4-BE49-F238E27FC236}">
+                <a16:creationId xmlns:a16="http://schemas.microsoft.com/office/drawing/2014/main" id="{FE06A4EA-6D50-47FB-9CA5-2020060CF58B}"/>
+              </a:ext>
+            </a:extLst>
+          </p:cNvPr>
+          <p:cNvSpPr>
+            <a:spLocks xmlns:a="http://schemas.openxmlformats.org/drawingml/2006/main" noGrp="1"/>
+          </p:cNvSpPr>
+          <p:nvPr/>
+        </p:nvSpPr>
+        <p:spPr>
+          <a:xfrm xmlns:a="http://schemas.openxmlformats.org/drawingml/2006/main">
+            <a:off x="5000625" y="3048000"/>
+            <a:ext cx="1905000" cy="400050"/>
+          </a:xfrm>
+          <a:prstGeom xmlns:a="http://schemas.openxmlformats.org/drawingml/2006/main" prst="rect">
+            <a:avLst/>
+          </a:prstGeom>
+          <a:noFill xmlns:a="http://schemas.openxmlformats.org/drawingml/2006/main"/>
+          <a:ln xmlns:a="http://schemas.openxmlformats.org/drawingml/2006/main" w="0">
+            <a:noFill/>
+            <a:prstDash val="solid"/>
+          </a:ln>
+        </p:spPr>
+        <p:txBody>
+          <a:bodyPr xmlns:a="http://schemas.openxmlformats.org/drawingml/2006/main"/>
+          <a:lstStyle xmlns:a="http://schemas.openxmlformats.org/drawingml/2006/main"/>
+          <a:p xmlns:a="http://schemas.openxmlformats.org/drawingml/2006/main">
+            <a:pPr algn="l">
+              <a:defRPr sz="900" b="1" i="0">
                 <a:solidFill>
                   <a:srgbClr val="0B1F33"/>
                 </a:solidFill>
               </a:defRPr>
             </a:pPr>
             <a:r>
-              <a:rPr sz="975" b="1" i="0">
+              <a:rPr sz="900" b="1" i="0">
                 <a:solidFill>
                   <a:srgbClr val="0B1F33"/>
                 </a:solidFill>
               </a:rPr>
-              <a:t>urgent / clinical /</a:t>
-            </a:r>
-          </a:p>
-          <a:p xmlns:a="http://schemas.openxmlformats.org/drawingml/2006/main">
-            <a:pPr algn="l">
-              <a:defRPr sz="975" b="1" i="0">
+              <a:t>a1 Responses gateway</a:t>
+            </a:r>
+          </a:p>
+          <a:p xmlns:a="http://schemas.openxmlformats.org/drawingml/2006/main">
+            <a:pPr algn="l">
+              <a:defRPr sz="900" b="1" i="0">
                 <a:solidFill>
                   <a:srgbClr val="0B1F33"/>
                 </a:solidFill>
               </a:defRPr>
             </a:pPr>
             <a:r>
-              <a:rPr sz="975" b="1" i="0">
+              <a:rPr sz="900" b="1" i="0">
                 <a:solidFill>
                   <a:srgbClr val="0B1F33"/>
                 </a:solidFill>
               </a:rPr>
-              <a:t>contradictory</a:t>
-            </a:r>
-          </a:p>
-        </p:txBody>
-      </p:sp>
-      <p:sp>
-        <p:nvSpPr>
-          <p:cNvPr id="30" name="Patient update">
-            <a:extLst xmlns:a="http://schemas.openxmlformats.org/drawingml/2006/main">
-              <a:ext uri="{FF2B5EF4-FFF2-40B4-BE49-F238E27FC236}">
-                <a16:creationId xmlns:a16="http://schemas.microsoft.com/office/drawing/2014/main" id="{CCB4AE81-31EE-4B2A-A9B5-6CCB758BB317}"/>
-              </a:ext>
-            </a:extLst>
-          </p:cNvPr>
-          <p:cNvSpPr>
-            <a:spLocks xmlns:a="http://schemas.openxmlformats.org/drawingml/2006/main" noGrp="1"/>
-          </p:cNvSpPr>
-          <p:nvPr/>
-        </p:nvSpPr>
-        <p:spPr>
-          <a:xfrm xmlns:a="http://schemas.openxmlformats.org/drawingml/2006/main">
-            <a:off x="8115300" y="4943475"/>
-            <a:ext cx="1619250" cy="742950"/>
+              <a:t>+ local safe fallback</a:t>
+            </a:r>
+          </a:p>
+        </p:txBody>
+      </p:sp>
+      <p:sp>
+        <p:nvSpPr>
+          <p:cNvPr id="34" name="CaseStore + proof gate">
+            <a:extLst xmlns:a="http://schemas.openxmlformats.org/drawingml/2006/main">
+              <a:ext uri="{FF2B5EF4-FFF2-40B4-BE49-F238E27FC236}">
+                <a16:creationId xmlns:a16="http://schemas.microsoft.com/office/drawing/2014/main" id="{F2684045-CE9C-47E8-A5A1-7D06E6F0DFA4}"/>
+              </a:ext>
+            </a:extLst>
+          </p:cNvPr>
+          <p:cNvSpPr>
+            <a:spLocks xmlns:a="http://schemas.openxmlformats.org/drawingml/2006/main" noGrp="1"/>
+          </p:cNvSpPr>
+          <p:nvPr/>
+        </p:nvSpPr>
+        <p:spPr>
+          <a:xfrm xmlns:a="http://schemas.openxmlformats.org/drawingml/2006/main">
+            <a:off x="4857750" y="3733800"/>
+            <a:ext cx="2190750" cy="1123950"/>
           </a:xfrm>
           <a:prstGeom xmlns:a="http://schemas.openxmlformats.org/drawingml/2006/main" prst="roundRect">
             <a:avLst>
-              <a:gd name="adj" fmla="val 15385"/>
+              <a:gd name="adj" fmla="val 10169"/>
             </a:avLst>
           </a:prstGeom>
           <a:solidFill xmlns:a="http://schemas.openxmlformats.org/drawingml/2006/main">
-            <a:srgbClr val="DCF6F0"/>
+            <a:srgbClr val="1B3A5C"/>
           </a:solidFill>
           <a:ln xmlns:a="http://schemas.openxmlformats.org/drawingml/2006/main" w="9525">
             <a:solidFill>
-              <a:srgbClr val="DCF6F0"/>
+              <a:srgbClr val="1B3A5C"/>
             </a:solidFill>
             <a:prstDash val="solid"/>
           </a:ln>
@@ -13025,22 +13505,22 @@
       </p:sp>
       <p:sp>
         <p:nvSpPr>
-          <p:cNvPr id="31" name="">
-            <a:extLst xmlns:a="http://schemas.openxmlformats.org/drawingml/2006/main">
-              <a:ext uri="{FF2B5EF4-FFF2-40B4-BE49-F238E27FC236}">
-                <a16:creationId xmlns:a16="http://schemas.microsoft.com/office/drawing/2014/main" id="{3BC3A5AB-4924-49C7-ABD5-9C7C8999671B}"/>
-              </a:ext>
-            </a:extLst>
-          </p:cNvPr>
-          <p:cNvSpPr>
-            <a:spLocks xmlns:a="http://schemas.openxmlformats.org/drawingml/2006/main" noGrp="1"/>
-          </p:cNvSpPr>
-          <p:nvPr/>
-        </p:nvSpPr>
-        <p:spPr>
-          <a:xfrm xmlns:a="http://schemas.openxmlformats.org/drawingml/2006/main">
-            <a:off x="8258175" y="5076825"/>
-            <a:ext cx="1333500" cy="133350"/>
+          <p:cNvPr id="35" name="">
+            <a:extLst xmlns:a="http://schemas.openxmlformats.org/drawingml/2006/main">
+              <a:ext uri="{FF2B5EF4-FFF2-40B4-BE49-F238E27FC236}">
+                <a16:creationId xmlns:a16="http://schemas.microsoft.com/office/drawing/2014/main" id="{BA4BDA9D-7180-4299-A09E-AB86E0E7F220}"/>
+              </a:ext>
+            </a:extLst>
+          </p:cNvPr>
+          <p:cNvSpPr>
+            <a:spLocks xmlns:a="http://schemas.openxmlformats.org/drawingml/2006/main" noGrp="1"/>
+          </p:cNvSpPr>
+          <p:nvPr/>
+        </p:nvSpPr>
+        <p:spPr>
+          <a:xfrm xmlns:a="http://schemas.openxmlformats.org/drawingml/2006/main">
+            <a:off x="5000625" y="3867150"/>
+            <a:ext cx="1905000" cy="133350"/>
           </a:xfrm>
           <a:prstGeom xmlns:a="http://schemas.openxmlformats.org/drawingml/2006/main" prst="rect">
             <a:avLst/>
@@ -13058,104 +13538,1553 @@
             <a:pPr algn="l">
               <a:defRPr sz="675" b="1" i="0">
                 <a:solidFill>
-                  <a:srgbClr val="0E9F8E"/>
+                  <a:srgbClr val="7CE7D5"/>
                 </a:solidFill>
               </a:defRPr>
             </a:pPr>
             <a:r>
               <a:rPr sz="675" b="1" i="0">
                 <a:solidFill>
-                  <a:srgbClr val="0E9F8E"/>
-                </a:solidFill>
-              </a:rPr>
-              <a:t>PATIENT UPDATE</a:t>
-            </a:r>
-          </a:p>
-        </p:txBody>
-      </p:sp>
-      <p:sp>
-        <p:nvSpPr>
-          <p:cNvPr id="32" name="">
-            <a:extLst xmlns:a="http://schemas.openxmlformats.org/drawingml/2006/main">
-              <a:ext uri="{FF2B5EF4-FFF2-40B4-BE49-F238E27FC236}">
-                <a16:creationId xmlns:a16="http://schemas.microsoft.com/office/drawing/2014/main" id="{2F8C4FFD-1C40-4766-9FE1-5052AFA6DFC4}"/>
-              </a:ext>
-            </a:extLst>
-          </p:cNvPr>
-          <p:cNvSpPr>
-            <a:spLocks xmlns:a="http://schemas.openxmlformats.org/drawingml/2006/main" noGrp="1"/>
-          </p:cNvSpPr>
-          <p:nvPr/>
-        </p:nvSpPr>
-        <p:spPr>
-          <a:xfrm xmlns:a="http://schemas.openxmlformats.org/drawingml/2006/main">
-            <a:off x="8258175" y="5343525"/>
-            <a:ext cx="1333500" cy="266700"/>
-          </a:xfrm>
-          <a:prstGeom xmlns:a="http://schemas.openxmlformats.org/drawingml/2006/main" prst="rect">
-            <a:avLst/>
-          </a:prstGeom>
-          <a:noFill xmlns:a="http://schemas.openxmlformats.org/drawingml/2006/main"/>
-          <a:ln xmlns:a="http://schemas.openxmlformats.org/drawingml/2006/main" w="0">
-            <a:noFill/>
-            <a:prstDash val="solid"/>
-          </a:ln>
-        </p:spPr>
-        <p:txBody>
-          <a:bodyPr xmlns:a="http://schemas.openxmlformats.org/drawingml/2006/main"/>
-          <a:lstStyle xmlns:a="http://schemas.openxmlformats.org/drawingml/2006/main"/>
-          <a:p xmlns:a="http://schemas.openxmlformats.org/drawingml/2006/main">
-            <a:pPr algn="l">
-              <a:defRPr sz="975" b="1" i="0">
+                  <a:srgbClr val="7CE7D5"/>
+                </a:solidFill>
+              </a:rPr>
+              <a:t>CASESTORE + PROOF GATE</a:t>
+            </a:r>
+          </a:p>
+        </p:txBody>
+      </p:sp>
+      <p:sp>
+        <p:nvSpPr>
+          <p:cNvPr id="36" name="">
+            <a:extLst xmlns:a="http://schemas.openxmlformats.org/drawingml/2006/main">
+              <a:ext uri="{FF2B5EF4-FFF2-40B4-BE49-F238E27FC236}">
+                <a16:creationId xmlns:a16="http://schemas.microsoft.com/office/drawing/2014/main" id="{9B3F967B-6606-48E8-ACBC-3A2D95D8FFB8}"/>
+              </a:ext>
+            </a:extLst>
+          </p:cNvPr>
+          <p:cNvSpPr>
+            <a:spLocks xmlns:a="http://schemas.openxmlformats.org/drawingml/2006/main" noGrp="1"/>
+          </p:cNvSpPr>
+          <p:nvPr/>
+        </p:nvSpPr>
+        <p:spPr>
+          <a:xfrm xmlns:a="http://schemas.openxmlformats.org/drawingml/2006/main">
+            <a:off x="5000625" y="4095750"/>
+            <a:ext cx="1905000" cy="666750"/>
+          </a:xfrm>
+          <a:prstGeom xmlns:a="http://schemas.openxmlformats.org/drawingml/2006/main" prst="rect">
+            <a:avLst/>
+          </a:prstGeom>
+          <a:noFill xmlns:a="http://schemas.openxmlformats.org/drawingml/2006/main"/>
+          <a:ln xmlns:a="http://schemas.openxmlformats.org/drawingml/2006/main" w="0">
+            <a:noFill/>
+            <a:prstDash val="solid"/>
+          </a:ln>
+        </p:spPr>
+        <p:txBody>
+          <a:bodyPr xmlns:a="http://schemas.openxmlformats.org/drawingml/2006/main"/>
+          <a:lstStyle xmlns:a="http://schemas.openxmlformats.org/drawingml/2006/main"/>
+          <a:p xmlns:a="http://schemas.openxmlformats.org/drawingml/2006/main">
+            <a:pPr algn="l">
+              <a:defRPr sz="900" b="1" i="0">
                 <a:solidFill>
                   <a:srgbClr val="0B1F33"/>
                 </a:solidFill>
               </a:defRPr>
             </a:pPr>
             <a:r>
-              <a:rPr sz="975" b="1" i="0">
+              <a:rPr sz="900" b="1" i="0">
                 <a:solidFill>
                   <a:srgbClr val="0B1F33"/>
                 </a:solidFill>
               </a:rPr>
-              <a:t>only after</a:t>
-            </a:r>
-          </a:p>
-          <a:p xmlns:a="http://schemas.openxmlformats.org/drawingml/2006/main">
-            <a:pPr algn="l">
-              <a:defRPr sz="975" b="1" i="0">
+              <a:t>consent ∧ action ∧ outcome ∧ update</a:t>
+            </a:r>
+          </a:p>
+          <a:p xmlns:a="http://schemas.openxmlformats.org/drawingml/2006/main">
+            <a:pPr algn="l">
+              <a:defRPr sz="900" b="1" i="0">
                 <a:solidFill>
                   <a:srgbClr val="0B1F33"/>
                 </a:solidFill>
               </a:defRPr>
             </a:pPr>
             <a:r>
-              <a:rPr sz="975" b="1" i="0">
+              <a:rPr sz="900" b="1" i="0">
                 <a:solidFill>
                   <a:srgbClr val="0B1F33"/>
                 </a:solidFill>
               </a:rPr>
-              <a:t>verified outcome</a:t>
+              <a:t>persist → data/cases.json</a:t>
+            </a:r>
+          </a:p>
+        </p:txBody>
+      </p:sp>
+      <p:sp>
+        <p:nvSpPr>
+          <p:cNvPr id="37" name="Proof board">
+            <a:extLst xmlns:a="http://schemas.openxmlformats.org/drawingml/2006/main">
+              <a:ext uri="{FF2B5EF4-FFF2-40B4-BE49-F238E27FC236}">
+                <a16:creationId xmlns:a16="http://schemas.microsoft.com/office/drawing/2014/main" id="{C6FCB570-AE13-42CE-9A4A-AD057A19C08B}"/>
+              </a:ext>
+            </a:extLst>
+          </p:cNvPr>
+          <p:cNvSpPr>
+            <a:spLocks xmlns:a="http://schemas.openxmlformats.org/drawingml/2006/main" noGrp="1"/>
+          </p:cNvSpPr>
+          <p:nvPr/>
+        </p:nvSpPr>
+        <p:spPr>
+          <a:xfrm xmlns:a="http://schemas.openxmlformats.org/drawingml/2006/main">
+            <a:off x="7334250" y="1524000"/>
+            <a:ext cx="2190750" cy="904875"/>
+          </a:xfrm>
+          <a:prstGeom xmlns:a="http://schemas.openxmlformats.org/drawingml/2006/main" prst="roundRect">
+            <a:avLst>
+              <a:gd name="adj" fmla="val 12632"/>
+            </a:avLst>
+          </a:prstGeom>
+          <a:solidFill xmlns:a="http://schemas.openxmlformats.org/drawingml/2006/main">
+            <a:srgbClr val="12324A"/>
+          </a:solidFill>
+          <a:ln xmlns:a="http://schemas.openxmlformats.org/drawingml/2006/main" w="9525">
+            <a:solidFill>
+              <a:srgbClr val="12324A"/>
+            </a:solidFill>
+            <a:prstDash val="solid"/>
+          </a:ln>
+        </p:spPr>
+        <p:style>
+          <a:lnRef xmlns:a="http://schemas.openxmlformats.org/drawingml/2006/main" idx="0"/>
+          <a:fillRef xmlns:a="http://schemas.openxmlformats.org/drawingml/2006/main" idx="0"/>
+          <a:effectRef xmlns:a="http://schemas.openxmlformats.org/drawingml/2006/main" idx="4"/>
+          <a:fontRef xmlns:a="http://schemas.openxmlformats.org/drawingml/2006/main" idx="major"/>
+        </p:style>
+      </p:sp>
+      <p:sp>
+        <p:nvSpPr>
+          <p:cNvPr id="38" name="">
+            <a:extLst xmlns:a="http://schemas.openxmlformats.org/drawingml/2006/main">
+              <a:ext uri="{FF2B5EF4-FFF2-40B4-BE49-F238E27FC236}">
+                <a16:creationId xmlns:a16="http://schemas.microsoft.com/office/drawing/2014/main" id="{B531DA5B-EFD3-4A19-AADD-DC6451E91FC9}"/>
+              </a:ext>
+            </a:extLst>
+          </p:cNvPr>
+          <p:cNvSpPr>
+            <a:spLocks xmlns:a="http://schemas.openxmlformats.org/drawingml/2006/main" noGrp="1"/>
+          </p:cNvSpPr>
+          <p:nvPr/>
+        </p:nvSpPr>
+        <p:spPr>
+          <a:xfrm xmlns:a="http://schemas.openxmlformats.org/drawingml/2006/main">
+            <a:off x="7477125" y="1657350"/>
+            <a:ext cx="1905000" cy="133350"/>
+          </a:xfrm>
+          <a:prstGeom xmlns:a="http://schemas.openxmlformats.org/drawingml/2006/main" prst="rect">
+            <a:avLst/>
+          </a:prstGeom>
+          <a:noFill xmlns:a="http://schemas.openxmlformats.org/drawingml/2006/main"/>
+          <a:ln xmlns:a="http://schemas.openxmlformats.org/drawingml/2006/main" w="0">
+            <a:noFill/>
+            <a:prstDash val="solid"/>
+          </a:ln>
+        </p:spPr>
+        <p:txBody>
+          <a:bodyPr xmlns:a="http://schemas.openxmlformats.org/drawingml/2006/main"/>
+          <a:lstStyle xmlns:a="http://schemas.openxmlformats.org/drawingml/2006/main"/>
+          <a:p xmlns:a="http://schemas.openxmlformats.org/drawingml/2006/main">
+            <a:pPr algn="l">
+              <a:defRPr sz="675" b="1" i="0">
+                <a:solidFill>
+                  <a:srgbClr val="9FB6C9"/>
+                </a:solidFill>
+              </a:defRPr>
+            </a:pPr>
+            <a:r>
+              <a:rPr sz="675" b="1" i="0">
+                <a:solidFill>
+                  <a:srgbClr val="9FB6C9"/>
+                </a:solidFill>
+              </a:rPr>
+              <a:t>PROOF BOARD</a:t>
+            </a:r>
+          </a:p>
+        </p:txBody>
+      </p:sp>
+      <p:sp>
+        <p:nvSpPr>
+          <p:cNvPr id="39" name="">
+            <a:extLst xmlns:a="http://schemas.openxmlformats.org/drawingml/2006/main">
+              <a:ext uri="{FF2B5EF4-FFF2-40B4-BE49-F238E27FC236}">
+                <a16:creationId xmlns:a16="http://schemas.microsoft.com/office/drawing/2014/main" id="{54863D4D-8FFB-4054-81B8-BFFCB9E649C9}"/>
+              </a:ext>
+            </a:extLst>
+          </p:cNvPr>
+          <p:cNvSpPr>
+            <a:spLocks xmlns:a="http://schemas.openxmlformats.org/drawingml/2006/main" noGrp="1"/>
+          </p:cNvSpPr>
+          <p:nvPr/>
+        </p:nvSpPr>
+        <p:spPr>
+          <a:xfrm xmlns:a="http://schemas.openxmlformats.org/drawingml/2006/main">
+            <a:off x="7477125" y="1885950"/>
+            <a:ext cx="1905000" cy="447675"/>
+          </a:xfrm>
+          <a:prstGeom xmlns:a="http://schemas.openxmlformats.org/drawingml/2006/main" prst="rect">
+            <a:avLst/>
+          </a:prstGeom>
+          <a:noFill xmlns:a="http://schemas.openxmlformats.org/drawingml/2006/main"/>
+          <a:ln xmlns:a="http://schemas.openxmlformats.org/drawingml/2006/main" w="0">
+            <a:noFill/>
+            <a:prstDash val="solid"/>
+          </a:ln>
+        </p:spPr>
+        <p:txBody>
+          <a:bodyPr xmlns:a="http://schemas.openxmlformats.org/drawingml/2006/main"/>
+          <a:lstStyle xmlns:a="http://schemas.openxmlformats.org/drawingml/2006/main"/>
+          <a:p xmlns:a="http://schemas.openxmlformats.org/drawingml/2006/main">
+            <a:pPr algn="l">
+              <a:defRPr sz="900" b="1" i="0">
+                <a:solidFill>
+                  <a:srgbClr val="0B1F33"/>
+                </a:solidFill>
+              </a:defRPr>
+            </a:pPr>
+            <a:r>
+              <a:rPr sz="900" b="1" i="0">
+                <a:solidFill>
+                  <a:srgbClr val="0B1F33"/>
+                </a:solidFill>
+              </a:rPr>
+              <a:t>lanes · timeline · 4/4 gate</a:t>
+            </a:r>
+          </a:p>
+          <a:p xmlns:a="http://schemas.openxmlformats.org/drawingml/2006/main">
+            <a:pPr algn="l">
+              <a:defRPr sz="900" b="1" i="0">
+                <a:solidFill>
+                  <a:srgbClr val="0B1F33"/>
+                </a:solidFill>
+              </a:defRPr>
+            </a:pPr>
+            <a:r>
+              <a:rPr sz="900" b="1" i="0">
+                <a:solidFill>
+                  <a:srgbClr val="0B1F33"/>
+                </a:solidFill>
+              </a:rPr>
+              <a:t>public/ on :3000</a:t>
+            </a:r>
+          </a:p>
+        </p:txBody>
+      </p:sp>
+      <p:sp>
+        <p:nvSpPr>
+          <p:cNvPr id="40" name="MCP /api">
+            <a:extLst xmlns:a="http://schemas.openxmlformats.org/drawingml/2006/main">
+              <a:ext uri="{FF2B5EF4-FFF2-40B4-BE49-F238E27FC236}">
+                <a16:creationId xmlns:a16="http://schemas.microsoft.com/office/drawing/2014/main" id="{13B8838E-8B01-437B-8724-67BC0C6842C1}"/>
+              </a:ext>
+            </a:extLst>
+          </p:cNvPr>
+          <p:cNvSpPr>
+            <a:spLocks xmlns:a="http://schemas.openxmlformats.org/drawingml/2006/main" noGrp="1"/>
+          </p:cNvSpPr>
+          <p:nvPr/>
+        </p:nvSpPr>
+        <p:spPr>
+          <a:xfrm xmlns:a="http://schemas.openxmlformats.org/drawingml/2006/main">
+            <a:off x="7334250" y="2619375"/>
+            <a:ext cx="2190750" cy="904875"/>
+          </a:xfrm>
+          <a:prstGeom xmlns:a="http://schemas.openxmlformats.org/drawingml/2006/main" prst="roundRect">
+            <a:avLst>
+              <a:gd name="adj" fmla="val 12632"/>
+            </a:avLst>
+          </a:prstGeom>
+          <a:solidFill xmlns:a="http://schemas.openxmlformats.org/drawingml/2006/main">
+            <a:srgbClr val="12324A"/>
+          </a:solidFill>
+          <a:ln xmlns:a="http://schemas.openxmlformats.org/drawingml/2006/main" w="9525">
+            <a:solidFill>
+              <a:srgbClr val="12324A"/>
+            </a:solidFill>
+            <a:prstDash val="solid"/>
+          </a:ln>
+        </p:spPr>
+        <p:style>
+          <a:lnRef xmlns:a="http://schemas.openxmlformats.org/drawingml/2006/main" idx="0"/>
+          <a:fillRef xmlns:a="http://schemas.openxmlformats.org/drawingml/2006/main" idx="0"/>
+          <a:effectRef xmlns:a="http://schemas.openxmlformats.org/drawingml/2006/main" idx="4"/>
+          <a:fontRef xmlns:a="http://schemas.openxmlformats.org/drawingml/2006/main" idx="major"/>
+        </p:style>
+      </p:sp>
+      <p:sp>
+        <p:nvSpPr>
+          <p:cNvPr id="41" name="">
+            <a:extLst xmlns:a="http://schemas.openxmlformats.org/drawingml/2006/main">
+              <a:ext uri="{FF2B5EF4-FFF2-40B4-BE49-F238E27FC236}">
+                <a16:creationId xmlns:a16="http://schemas.microsoft.com/office/drawing/2014/main" id="{07D9908A-BD10-4C4F-B33B-9C87DC4A5B0D}"/>
+              </a:ext>
+            </a:extLst>
+          </p:cNvPr>
+          <p:cNvSpPr>
+            <a:spLocks xmlns:a="http://schemas.openxmlformats.org/drawingml/2006/main" noGrp="1"/>
+          </p:cNvSpPr>
+          <p:nvPr/>
+        </p:nvSpPr>
+        <p:spPr>
+          <a:xfrm xmlns:a="http://schemas.openxmlformats.org/drawingml/2006/main">
+            <a:off x="7477125" y="2752725"/>
+            <a:ext cx="1905000" cy="133350"/>
+          </a:xfrm>
+          <a:prstGeom xmlns:a="http://schemas.openxmlformats.org/drawingml/2006/main" prst="rect">
+            <a:avLst/>
+          </a:prstGeom>
+          <a:noFill xmlns:a="http://schemas.openxmlformats.org/drawingml/2006/main"/>
+          <a:ln xmlns:a="http://schemas.openxmlformats.org/drawingml/2006/main" w="0">
+            <a:noFill/>
+            <a:prstDash val="solid"/>
+          </a:ln>
+        </p:spPr>
+        <p:txBody>
+          <a:bodyPr xmlns:a="http://schemas.openxmlformats.org/drawingml/2006/main"/>
+          <a:lstStyle xmlns:a="http://schemas.openxmlformats.org/drawingml/2006/main"/>
+          <a:p xmlns:a="http://schemas.openxmlformats.org/drawingml/2006/main">
+            <a:pPr algn="l">
+              <a:defRPr sz="675" b="1" i="0">
+                <a:solidFill>
+                  <a:srgbClr val="9FB6C9"/>
+                </a:solidFill>
+              </a:defRPr>
+            </a:pPr>
+            <a:r>
+              <a:rPr sz="675" b="1" i="0">
+                <a:solidFill>
+                  <a:srgbClr val="9FB6C9"/>
+                </a:solidFill>
+              </a:rPr>
+              <a:t>MCP /API</a:t>
+            </a:r>
+          </a:p>
+        </p:txBody>
+      </p:sp>
+      <p:sp>
+        <p:nvSpPr>
+          <p:cNvPr id="42" name="">
+            <a:extLst xmlns:a="http://schemas.openxmlformats.org/drawingml/2006/main">
+              <a:ext uri="{FF2B5EF4-FFF2-40B4-BE49-F238E27FC236}">
+                <a16:creationId xmlns:a16="http://schemas.microsoft.com/office/drawing/2014/main" id="{46C4C675-9B3E-4CFE-8D00-81CC59CA433C}"/>
+              </a:ext>
+            </a:extLst>
+          </p:cNvPr>
+          <p:cNvSpPr>
+            <a:spLocks xmlns:a="http://schemas.openxmlformats.org/drawingml/2006/main" noGrp="1"/>
+          </p:cNvSpPr>
+          <p:nvPr/>
+        </p:nvSpPr>
+        <p:spPr>
+          <a:xfrm xmlns:a="http://schemas.openxmlformats.org/drawingml/2006/main">
+            <a:off x="7477125" y="2981325"/>
+            <a:ext cx="1905000" cy="447675"/>
+          </a:xfrm>
+          <a:prstGeom xmlns:a="http://schemas.openxmlformats.org/drawingml/2006/main" prst="rect">
+            <a:avLst/>
+          </a:prstGeom>
+          <a:noFill xmlns:a="http://schemas.openxmlformats.org/drawingml/2006/main"/>
+          <a:ln xmlns:a="http://schemas.openxmlformats.org/drawingml/2006/main" w="0">
+            <a:noFill/>
+            <a:prstDash val="solid"/>
+          </a:ln>
+        </p:spPr>
+        <p:txBody>
+          <a:bodyPr xmlns:a="http://schemas.openxmlformats.org/drawingml/2006/main"/>
+          <a:lstStyle xmlns:a="http://schemas.openxmlformats.org/drawingml/2006/main"/>
+          <a:p xmlns:a="http://schemas.openxmlformats.org/drawingml/2006/main">
+            <a:pPr algn="l">
+              <a:defRPr sz="900" b="1" i="0">
+                <a:solidFill>
+                  <a:srgbClr val="0B1F33"/>
+                </a:solidFill>
+              </a:defRPr>
+            </a:pPr>
+            <a:r>
+              <a:rPr sz="900" b="1" i="0">
+                <a:solidFill>
+                  <a:srgbClr val="0B1F33"/>
+                </a:solidFill>
+              </a:rPr>
+              <a:t>create · consent · coordinate</a:t>
+            </a:r>
+          </a:p>
+          <a:p xmlns:a="http://schemas.openxmlformats.org/drawingml/2006/main">
+            <a:pPr algn="l">
+              <a:defRPr sz="900" b="1" i="0">
+                <a:solidFill>
+                  <a:srgbClr val="0B1F33"/>
+                </a:solidFill>
+              </a:defRPr>
+            </a:pPr>
+            <a:r>
+              <a:rPr sz="900" b="1" i="0">
+                <a:solidFill>
+                  <a:srgbClr val="0B1F33"/>
+                </a:solidFill>
+              </a:rPr>
+              <a:t>outcome · brief — same gate</a:t>
+            </a:r>
+          </a:p>
+        </p:txBody>
+      </p:sp>
+      <p:sp>
+        <p:nvSpPr>
+          <p:cNvPr id="43" name="telephony.mjs">
+            <a:extLst xmlns:a="http://schemas.openxmlformats.org/drawingml/2006/main">
+              <a:ext uri="{FF2B5EF4-FFF2-40B4-BE49-F238E27FC236}">
+                <a16:creationId xmlns:a16="http://schemas.microsoft.com/office/drawing/2014/main" id="{BE5B5909-B795-4C45-BD3D-281A6FAABB41}"/>
+              </a:ext>
+            </a:extLst>
+          </p:cNvPr>
+          <p:cNvSpPr>
+            <a:spLocks xmlns:a="http://schemas.openxmlformats.org/drawingml/2006/main" noGrp="1"/>
+          </p:cNvSpPr>
+          <p:nvPr/>
+        </p:nvSpPr>
+        <p:spPr>
+          <a:xfrm xmlns:a="http://schemas.openxmlformats.org/drawingml/2006/main">
+            <a:off x="7334250" y="3714750"/>
+            <a:ext cx="2190750" cy="1143000"/>
+          </a:xfrm>
+          <a:prstGeom xmlns:a="http://schemas.openxmlformats.org/drawingml/2006/main" prst="roundRect">
+            <a:avLst>
+              <a:gd name="adj" fmla="val 10000"/>
+            </a:avLst>
+          </a:prstGeom>
+          <a:solidFill xmlns:a="http://schemas.openxmlformats.org/drawingml/2006/main">
+            <a:srgbClr val="3A2A12"/>
+          </a:solidFill>
+          <a:ln xmlns:a="http://schemas.openxmlformats.org/drawingml/2006/main" w="9525">
+            <a:solidFill>
+              <a:srgbClr val="3A2A12"/>
+            </a:solidFill>
+            <a:prstDash val="solid"/>
+          </a:ln>
+        </p:spPr>
+        <p:style>
+          <a:lnRef xmlns:a="http://schemas.openxmlformats.org/drawingml/2006/main" idx="0"/>
+          <a:fillRef xmlns:a="http://schemas.openxmlformats.org/drawingml/2006/main" idx="0"/>
+          <a:effectRef xmlns:a="http://schemas.openxmlformats.org/drawingml/2006/main" idx="4"/>
+          <a:fontRef xmlns:a="http://schemas.openxmlformats.org/drawingml/2006/main" idx="major"/>
+        </p:style>
+      </p:sp>
+      <p:sp>
+        <p:nvSpPr>
+          <p:cNvPr id="44" name="">
+            <a:extLst xmlns:a="http://schemas.openxmlformats.org/drawingml/2006/main">
+              <a:ext uri="{FF2B5EF4-FFF2-40B4-BE49-F238E27FC236}">
+                <a16:creationId xmlns:a16="http://schemas.microsoft.com/office/drawing/2014/main" id="{15A7D81D-BE23-4495-AF75-DFDAF2E9B57E}"/>
+              </a:ext>
+            </a:extLst>
+          </p:cNvPr>
+          <p:cNvSpPr>
+            <a:spLocks xmlns:a="http://schemas.openxmlformats.org/drawingml/2006/main" noGrp="1"/>
+          </p:cNvSpPr>
+          <p:nvPr/>
+        </p:nvSpPr>
+        <p:spPr>
+          <a:xfrm xmlns:a="http://schemas.openxmlformats.org/drawingml/2006/main">
+            <a:off x="7477125" y="3848100"/>
+            <a:ext cx="1905000" cy="133350"/>
+          </a:xfrm>
+          <a:prstGeom xmlns:a="http://schemas.openxmlformats.org/drawingml/2006/main" prst="rect">
+            <a:avLst/>
+          </a:prstGeom>
+          <a:noFill xmlns:a="http://schemas.openxmlformats.org/drawingml/2006/main"/>
+          <a:ln xmlns:a="http://schemas.openxmlformats.org/drawingml/2006/main" w="0">
+            <a:noFill/>
+            <a:prstDash val="solid"/>
+          </a:ln>
+        </p:spPr>
+        <p:txBody>
+          <a:bodyPr xmlns:a="http://schemas.openxmlformats.org/drawingml/2006/main"/>
+          <a:lstStyle xmlns:a="http://schemas.openxmlformats.org/drawingml/2006/main"/>
+          <a:p xmlns:a="http://schemas.openxmlformats.org/drawingml/2006/main">
+            <a:pPr algn="l">
+              <a:defRPr sz="675" b="1" i="0">
+                <a:solidFill>
+                  <a:srgbClr val="E6A037"/>
+                </a:solidFill>
+              </a:defRPr>
+            </a:pPr>
+            <a:r>
+              <a:rPr sz="675" b="1" i="0">
+                <a:solidFill>
+                  <a:srgbClr val="E6A037"/>
+                </a:solidFill>
+              </a:rPr>
+              <a:t>TELEPHONY.MJS</a:t>
+            </a:r>
+          </a:p>
+        </p:txBody>
+      </p:sp>
+      <p:sp>
+        <p:nvSpPr>
+          <p:cNvPr id="45" name="">
+            <a:extLst xmlns:a="http://schemas.openxmlformats.org/drawingml/2006/main">
+              <a:ext uri="{FF2B5EF4-FFF2-40B4-BE49-F238E27FC236}">
+                <a16:creationId xmlns:a16="http://schemas.microsoft.com/office/drawing/2014/main" id="{F4B1799E-B9A0-4309-B19F-31E96FBD634E}"/>
+              </a:ext>
+            </a:extLst>
+          </p:cNvPr>
+          <p:cNvSpPr>
+            <a:spLocks xmlns:a="http://schemas.openxmlformats.org/drawingml/2006/main" noGrp="1"/>
+          </p:cNvSpPr>
+          <p:nvPr/>
+        </p:nvSpPr>
+        <p:spPr>
+          <a:xfrm xmlns:a="http://schemas.openxmlformats.org/drawingml/2006/main">
+            <a:off x="7477125" y="4076700"/>
+            <a:ext cx="1905000" cy="685800"/>
+          </a:xfrm>
+          <a:prstGeom xmlns:a="http://schemas.openxmlformats.org/drawingml/2006/main" prst="rect">
+            <a:avLst/>
+          </a:prstGeom>
+          <a:noFill xmlns:a="http://schemas.openxmlformats.org/drawingml/2006/main"/>
+          <a:ln xmlns:a="http://schemas.openxmlformats.org/drawingml/2006/main" w="0">
+            <a:noFill/>
+            <a:prstDash val="solid"/>
+          </a:ln>
+        </p:spPr>
+        <p:txBody>
+          <a:bodyPr xmlns:a="http://schemas.openxmlformats.org/drawingml/2006/main"/>
+          <a:lstStyle xmlns:a="http://schemas.openxmlformats.org/drawingml/2006/main"/>
+          <a:p xmlns:a="http://schemas.openxmlformats.org/drawingml/2006/main">
+            <a:pPr algn="l">
+              <a:defRPr sz="900" b="1" i="0">
+                <a:solidFill>
+                  <a:srgbClr val="0B1F33"/>
+                </a:solidFill>
+              </a:defRPr>
+            </a:pPr>
+            <a:r>
+              <a:rPr sz="900" b="1" i="0">
+                <a:solidFill>
+                  <a:srgbClr val="0B1F33"/>
+                </a:solidFill>
+              </a:rPr>
+              <a:t>sandbox adapter by default</a:t>
+            </a:r>
+          </a:p>
+          <a:p xmlns:a="http://schemas.openxmlformats.org/drawingml/2006/main">
+            <a:pPr algn="l">
+              <a:defRPr sz="900" b="1" i="0">
+                <a:solidFill>
+                  <a:srgbClr val="0B1F33"/>
+                </a:solidFill>
+              </a:defRPr>
+            </a:pPr>
+            <a:r>
+              <a:rPr sz="900" b="1" i="0">
+                <a:solidFill>
+                  <a:srgbClr val="0B1F33"/>
+                </a:solidFill>
+              </a:rPr>
+              <a:t>live fails closed without</a:t>
+            </a:r>
+          </a:p>
+          <a:p xmlns:a="http://schemas.openxmlformats.org/drawingml/2006/main">
+            <a:pPr algn="l">
+              <a:defRPr sz="900" b="1" i="0">
+                <a:solidFill>
+                  <a:srgbClr val="0B1F33"/>
+                </a:solidFill>
+              </a:defRPr>
+            </a:pPr>
+            <a:r>
+              <a:rPr sz="900" b="1" i="0">
+                <a:solidFill>
+                  <a:srgbClr val="0B1F33"/>
+                </a:solidFill>
+              </a:rPr>
+              <a:t>OTP allowlist + provider id</a:t>
+            </a:r>
+          </a:p>
+        </p:txBody>
+      </p:sp>
+      <p:sp>
+        <p:nvSpPr>
+          <p:cNvPr id="46" name="Pharmacy">
+            <a:extLst xmlns:a="http://schemas.openxmlformats.org/drawingml/2006/main">
+              <a:ext uri="{FF2B5EF4-FFF2-40B4-BE49-F238E27FC236}">
+                <a16:creationId xmlns:a16="http://schemas.microsoft.com/office/drawing/2014/main" id="{7466620B-614F-4144-8C68-6EEEDB0F895F}"/>
+              </a:ext>
+            </a:extLst>
+          </p:cNvPr>
+          <p:cNvSpPr>
+            <a:spLocks xmlns:a="http://schemas.openxmlformats.org/drawingml/2006/main" noGrp="1"/>
+          </p:cNvSpPr>
+          <p:nvPr/>
+        </p:nvSpPr>
+        <p:spPr>
+          <a:xfrm xmlns:a="http://schemas.openxmlformats.org/drawingml/2006/main">
+            <a:off x="9810750" y="1524000"/>
+            <a:ext cx="2000250" cy="857250"/>
+          </a:xfrm>
+          <a:prstGeom xmlns:a="http://schemas.openxmlformats.org/drawingml/2006/main" prst="roundRect">
+            <a:avLst>
+              <a:gd name="adj" fmla="val 13333"/>
+            </a:avLst>
+          </a:prstGeom>
+          <a:solidFill xmlns:a="http://schemas.openxmlformats.org/drawingml/2006/main">
+            <a:srgbClr val="3A2A12"/>
+          </a:solidFill>
+          <a:ln xmlns:a="http://schemas.openxmlformats.org/drawingml/2006/main" w="9525">
+            <a:solidFill>
+              <a:srgbClr val="3A2A12"/>
+            </a:solidFill>
+            <a:prstDash val="solid"/>
+          </a:ln>
+        </p:spPr>
+        <p:style>
+          <a:lnRef xmlns:a="http://schemas.openxmlformats.org/drawingml/2006/main" idx="0"/>
+          <a:fillRef xmlns:a="http://schemas.openxmlformats.org/drawingml/2006/main" idx="0"/>
+          <a:effectRef xmlns:a="http://schemas.openxmlformats.org/drawingml/2006/main" idx="4"/>
+          <a:fontRef xmlns:a="http://schemas.openxmlformats.org/drawingml/2006/main" idx="major"/>
+        </p:style>
+      </p:sp>
+      <p:sp>
+        <p:nvSpPr>
+          <p:cNvPr id="47" name="">
+            <a:extLst xmlns:a="http://schemas.openxmlformats.org/drawingml/2006/main">
+              <a:ext uri="{FF2B5EF4-FFF2-40B4-BE49-F238E27FC236}">
+                <a16:creationId xmlns:a16="http://schemas.microsoft.com/office/drawing/2014/main" id="{5DB6AE27-B6D9-4EDB-B71B-1E2BC5EFF177}"/>
+              </a:ext>
+            </a:extLst>
+          </p:cNvPr>
+          <p:cNvSpPr>
+            <a:spLocks xmlns:a="http://schemas.openxmlformats.org/drawingml/2006/main" noGrp="1"/>
+          </p:cNvSpPr>
+          <p:nvPr/>
+        </p:nvSpPr>
+        <p:spPr>
+          <a:xfrm xmlns:a="http://schemas.openxmlformats.org/drawingml/2006/main">
+            <a:off x="9953625" y="1657350"/>
+            <a:ext cx="1714500" cy="133350"/>
+          </a:xfrm>
+          <a:prstGeom xmlns:a="http://schemas.openxmlformats.org/drawingml/2006/main" prst="rect">
+            <a:avLst/>
+          </a:prstGeom>
+          <a:noFill xmlns:a="http://schemas.openxmlformats.org/drawingml/2006/main"/>
+          <a:ln xmlns:a="http://schemas.openxmlformats.org/drawingml/2006/main" w="0">
+            <a:noFill/>
+            <a:prstDash val="solid"/>
+          </a:ln>
+        </p:spPr>
+        <p:txBody>
+          <a:bodyPr xmlns:a="http://schemas.openxmlformats.org/drawingml/2006/main"/>
+          <a:lstStyle xmlns:a="http://schemas.openxmlformats.org/drawingml/2006/main"/>
+          <a:p xmlns:a="http://schemas.openxmlformats.org/drawingml/2006/main">
+            <a:pPr algn="l">
+              <a:defRPr sz="675" b="1" i="0">
+                <a:solidFill>
+                  <a:srgbClr val="E6A037"/>
+                </a:solidFill>
+              </a:defRPr>
+            </a:pPr>
+            <a:r>
+              <a:rPr sz="675" b="1" i="0">
+                <a:solidFill>
+                  <a:srgbClr val="E6A037"/>
+                </a:solidFill>
+              </a:rPr>
+              <a:t>PHARMACY</a:t>
+            </a:r>
+          </a:p>
+        </p:txBody>
+      </p:sp>
+      <p:sp>
+        <p:nvSpPr>
+          <p:cNvPr id="48" name="">
+            <a:extLst xmlns:a="http://schemas.openxmlformats.org/drawingml/2006/main">
+              <a:ext uri="{FF2B5EF4-FFF2-40B4-BE49-F238E27FC236}">
+                <a16:creationId xmlns:a16="http://schemas.microsoft.com/office/drawing/2014/main" id="{A518866C-52FC-41B5-A509-707FD0BDD6F7}"/>
+              </a:ext>
+            </a:extLst>
+          </p:cNvPr>
+          <p:cNvSpPr>
+            <a:spLocks xmlns:a="http://schemas.openxmlformats.org/drawingml/2006/main" noGrp="1"/>
+          </p:cNvSpPr>
+          <p:nvPr/>
+        </p:nvSpPr>
+        <p:spPr>
+          <a:xfrm xmlns:a="http://schemas.openxmlformats.org/drawingml/2006/main">
+            <a:off x="9953625" y="1885950"/>
+            <a:ext cx="1714500" cy="400050"/>
+          </a:xfrm>
+          <a:prstGeom xmlns:a="http://schemas.openxmlformats.org/drawingml/2006/main" prst="rect">
+            <a:avLst/>
+          </a:prstGeom>
+          <a:noFill xmlns:a="http://schemas.openxmlformats.org/drawingml/2006/main"/>
+          <a:ln xmlns:a="http://schemas.openxmlformats.org/drawingml/2006/main" w="0">
+            <a:noFill/>
+            <a:prstDash val="solid"/>
+          </a:ln>
+        </p:spPr>
+        <p:txBody>
+          <a:bodyPr xmlns:a="http://schemas.openxmlformats.org/drawingml/2006/main"/>
+          <a:lstStyle xmlns:a="http://schemas.openxmlformats.org/drawingml/2006/main"/>
+          <a:p xmlns:a="http://schemas.openxmlformats.org/drawingml/2006/main">
+            <a:pPr algn="l">
+              <a:defRPr sz="900" b="1" i="0">
+                <a:solidFill>
+                  <a:srgbClr val="0B1F33"/>
+                </a:solidFill>
+              </a:defRPr>
+            </a:pPr>
+            <a:r>
+              <a:rPr sz="900" b="1" i="0">
+                <a:solidFill>
+                  <a:srgbClr val="0B1F33"/>
+                </a:solidFill>
+              </a:rPr>
+              <a:t>status / blocker / ready</a:t>
+            </a:r>
+          </a:p>
+          <a:p xmlns:a="http://schemas.openxmlformats.org/drawingml/2006/main">
+            <a:pPr algn="l">
+              <a:defRPr sz="900" b="1" i="0">
+                <a:solidFill>
+                  <a:srgbClr val="0B1F33"/>
+                </a:solidFill>
+              </a:defRPr>
+            </a:pPr>
+            <a:r>
+              <a:rPr sz="900" b="1" i="0">
+                <a:solidFill>
+                  <a:srgbClr val="0B1F33"/>
+                </a:solidFill>
+              </a:rPr>
+              <a:t>sandbox or live action</a:t>
+            </a:r>
+          </a:p>
+        </p:txBody>
+      </p:sp>
+      <p:sp>
+        <p:nvSpPr>
+          <p:cNvPr id="49" name="Clinic / insurer">
+            <a:extLst xmlns:a="http://schemas.openxmlformats.org/drawingml/2006/main">
+              <a:ext uri="{FF2B5EF4-FFF2-40B4-BE49-F238E27FC236}">
+                <a16:creationId xmlns:a16="http://schemas.microsoft.com/office/drawing/2014/main" id="{1D9A1B9A-B5BC-4BD2-AA72-EFCBE56091F5}"/>
+              </a:ext>
+            </a:extLst>
+          </p:cNvPr>
+          <p:cNvSpPr>
+            <a:spLocks xmlns:a="http://schemas.openxmlformats.org/drawingml/2006/main" noGrp="1"/>
+          </p:cNvSpPr>
+          <p:nvPr/>
+        </p:nvSpPr>
+        <p:spPr>
+          <a:xfrm xmlns:a="http://schemas.openxmlformats.org/drawingml/2006/main">
+            <a:off x="9810750" y="2619375"/>
+            <a:ext cx="2000250" cy="857250"/>
+          </a:xfrm>
+          <a:prstGeom xmlns:a="http://schemas.openxmlformats.org/drawingml/2006/main" prst="roundRect">
+            <a:avLst>
+              <a:gd name="adj" fmla="val 13333"/>
+            </a:avLst>
+          </a:prstGeom>
+          <a:solidFill xmlns:a="http://schemas.openxmlformats.org/drawingml/2006/main">
+            <a:srgbClr val="1B3A5C"/>
+          </a:solidFill>
+          <a:ln xmlns:a="http://schemas.openxmlformats.org/drawingml/2006/main" w="9525">
+            <a:solidFill>
+              <a:srgbClr val="1B3A5C"/>
+            </a:solidFill>
+            <a:prstDash val="solid"/>
+          </a:ln>
+        </p:spPr>
+        <p:style>
+          <a:lnRef xmlns:a="http://schemas.openxmlformats.org/drawingml/2006/main" idx="0"/>
+          <a:fillRef xmlns:a="http://schemas.openxmlformats.org/drawingml/2006/main" idx="0"/>
+          <a:effectRef xmlns:a="http://schemas.openxmlformats.org/drawingml/2006/main" idx="4"/>
+          <a:fontRef xmlns:a="http://schemas.openxmlformats.org/drawingml/2006/main" idx="major"/>
+        </p:style>
+      </p:sp>
+      <p:sp>
+        <p:nvSpPr>
+          <p:cNvPr id="50" name="">
+            <a:extLst xmlns:a="http://schemas.openxmlformats.org/drawingml/2006/main">
+              <a:ext uri="{FF2B5EF4-FFF2-40B4-BE49-F238E27FC236}">
+                <a16:creationId xmlns:a16="http://schemas.microsoft.com/office/drawing/2014/main" id="{03E1AE94-2605-4C6F-A496-AD9DD0E322B5}"/>
+              </a:ext>
+            </a:extLst>
+          </p:cNvPr>
+          <p:cNvSpPr>
+            <a:spLocks xmlns:a="http://schemas.openxmlformats.org/drawingml/2006/main" noGrp="1"/>
+          </p:cNvSpPr>
+          <p:nvPr/>
+        </p:nvSpPr>
+        <p:spPr>
+          <a:xfrm xmlns:a="http://schemas.openxmlformats.org/drawingml/2006/main">
+            <a:off x="9953625" y="2752725"/>
+            <a:ext cx="1714500" cy="133350"/>
+          </a:xfrm>
+          <a:prstGeom xmlns:a="http://schemas.openxmlformats.org/drawingml/2006/main" prst="rect">
+            <a:avLst/>
+          </a:prstGeom>
+          <a:noFill xmlns:a="http://schemas.openxmlformats.org/drawingml/2006/main"/>
+          <a:ln xmlns:a="http://schemas.openxmlformats.org/drawingml/2006/main" w="0">
+            <a:noFill/>
+            <a:prstDash val="solid"/>
+          </a:ln>
+        </p:spPr>
+        <p:txBody>
+          <a:bodyPr xmlns:a="http://schemas.openxmlformats.org/drawingml/2006/main"/>
+          <a:lstStyle xmlns:a="http://schemas.openxmlformats.org/drawingml/2006/main"/>
+          <a:p xmlns:a="http://schemas.openxmlformats.org/drawingml/2006/main">
+            <a:pPr algn="l">
+              <a:defRPr sz="675" b="1" i="0">
+                <a:solidFill>
+                  <a:srgbClr val="3D8DFF"/>
+                </a:solidFill>
+              </a:defRPr>
+            </a:pPr>
+            <a:r>
+              <a:rPr sz="675" b="1" i="0">
+                <a:solidFill>
+                  <a:srgbClr val="3D8DFF"/>
+                </a:solidFill>
+              </a:rPr>
+              <a:t>CLINIC / INSURER</a:t>
+            </a:r>
+          </a:p>
+        </p:txBody>
+      </p:sp>
+      <p:sp>
+        <p:nvSpPr>
+          <p:cNvPr id="51" name="">
+            <a:extLst xmlns:a="http://schemas.openxmlformats.org/drawingml/2006/main">
+              <a:ext uri="{FF2B5EF4-FFF2-40B4-BE49-F238E27FC236}">
+                <a16:creationId xmlns:a16="http://schemas.microsoft.com/office/drawing/2014/main" id="{990A26F8-C39D-4C00-A5D2-9BD471F8B990}"/>
+              </a:ext>
+            </a:extLst>
+          </p:cNvPr>
+          <p:cNvSpPr>
+            <a:spLocks xmlns:a="http://schemas.openxmlformats.org/drawingml/2006/main" noGrp="1"/>
+          </p:cNvSpPr>
+          <p:nvPr/>
+        </p:nvSpPr>
+        <p:spPr>
+          <a:xfrm xmlns:a="http://schemas.openxmlformats.org/drawingml/2006/main">
+            <a:off x="9953625" y="2981325"/>
+            <a:ext cx="1714500" cy="400050"/>
+          </a:xfrm>
+          <a:prstGeom xmlns:a="http://schemas.openxmlformats.org/drawingml/2006/main" prst="rect">
+            <a:avLst/>
+          </a:prstGeom>
+          <a:noFill xmlns:a="http://schemas.openxmlformats.org/drawingml/2006/main"/>
+          <a:ln xmlns:a="http://schemas.openxmlformats.org/drawingml/2006/main" w="0">
+            <a:noFill/>
+            <a:prstDash val="solid"/>
+          </a:ln>
+        </p:spPr>
+        <p:txBody>
+          <a:bodyPr xmlns:a="http://schemas.openxmlformats.org/drawingml/2006/main"/>
+          <a:lstStyle xmlns:a="http://schemas.openxmlformats.org/drawingml/2006/main"/>
+          <a:p xmlns:a="http://schemas.openxmlformats.org/drawingml/2006/main">
+            <a:pPr algn="l">
+              <a:defRPr sz="900" b="1" i="0">
+                <a:solidFill>
+                  <a:srgbClr val="0B1F33"/>
+                </a:solidFill>
+              </a:defRPr>
+            </a:pPr>
+            <a:r>
+              <a:rPr sz="900" b="1" i="0">
+                <a:solidFill>
+                  <a:srgbClr val="0B1F33"/>
+                </a:solidFill>
+              </a:rPr>
+              <a:t>PA / follow-up recorded</a:t>
+            </a:r>
+          </a:p>
+          <a:p xmlns:a="http://schemas.openxmlformats.org/drawingml/2006/main">
+            <a:pPr algn="l">
+              <a:defRPr sz="900" b="1" i="0">
+                <a:solidFill>
+                  <a:srgbClr val="0B1F33"/>
+                </a:solidFill>
+              </a:defRPr>
+            </a:pPr>
+            <a:r>
+              <a:rPr sz="900" b="1" i="0">
+                <a:solidFill>
+                  <a:srgbClr val="0B1F33"/>
+                </a:solidFill>
+              </a:rPr>
+              <a:t>as counterpart outcome</a:t>
+            </a:r>
+          </a:p>
+        </p:txBody>
+      </p:sp>
+      <p:sp>
+        <p:nvSpPr>
+          <p:cNvPr id="52" name="Patient SMS">
+            <a:extLst xmlns:a="http://schemas.openxmlformats.org/drawingml/2006/main">
+              <a:ext uri="{FF2B5EF4-FFF2-40B4-BE49-F238E27FC236}">
+                <a16:creationId xmlns:a16="http://schemas.microsoft.com/office/drawing/2014/main" id="{5A34E32B-FCE4-4779-9796-7F41BFFD3482}"/>
+              </a:ext>
+            </a:extLst>
+          </p:cNvPr>
+          <p:cNvSpPr>
+            <a:spLocks xmlns:a="http://schemas.openxmlformats.org/drawingml/2006/main" noGrp="1"/>
+          </p:cNvSpPr>
+          <p:nvPr/>
+        </p:nvSpPr>
+        <p:spPr>
+          <a:xfrm xmlns:a="http://schemas.openxmlformats.org/drawingml/2006/main">
+            <a:off x="9810750" y="3714750"/>
+            <a:ext cx="2000250" cy="857250"/>
+          </a:xfrm>
+          <a:prstGeom xmlns:a="http://schemas.openxmlformats.org/drawingml/2006/main" prst="roundRect">
+            <a:avLst>
+              <a:gd name="adj" fmla="val 13333"/>
+            </a:avLst>
+          </a:prstGeom>
+          <a:solidFill xmlns:a="http://schemas.openxmlformats.org/drawingml/2006/main">
+            <a:srgbClr val="0E4A44"/>
+          </a:solidFill>
+          <a:ln xmlns:a="http://schemas.openxmlformats.org/drawingml/2006/main" w="9525">
+            <a:solidFill>
+              <a:srgbClr val="0E4A44"/>
+            </a:solidFill>
+            <a:prstDash val="solid"/>
+          </a:ln>
+        </p:spPr>
+        <p:style>
+          <a:lnRef xmlns:a="http://schemas.openxmlformats.org/drawingml/2006/main" idx="0"/>
+          <a:fillRef xmlns:a="http://schemas.openxmlformats.org/drawingml/2006/main" idx="0"/>
+          <a:effectRef xmlns:a="http://schemas.openxmlformats.org/drawingml/2006/main" idx="4"/>
+          <a:fontRef xmlns:a="http://schemas.openxmlformats.org/drawingml/2006/main" idx="major"/>
+        </p:style>
+      </p:sp>
+      <p:sp>
+        <p:nvSpPr>
+          <p:cNvPr id="53" name="">
+            <a:extLst xmlns:a="http://schemas.openxmlformats.org/drawingml/2006/main">
+              <a:ext uri="{FF2B5EF4-FFF2-40B4-BE49-F238E27FC236}">
+                <a16:creationId xmlns:a16="http://schemas.microsoft.com/office/drawing/2014/main" id="{54B50ED9-1E45-46FB-AF29-23234F30BCAB}"/>
+              </a:ext>
+            </a:extLst>
+          </p:cNvPr>
+          <p:cNvSpPr>
+            <a:spLocks xmlns:a="http://schemas.openxmlformats.org/drawingml/2006/main" noGrp="1"/>
+          </p:cNvSpPr>
+          <p:nvPr/>
+        </p:nvSpPr>
+        <p:spPr>
+          <a:xfrm xmlns:a="http://schemas.openxmlformats.org/drawingml/2006/main">
+            <a:off x="9953625" y="3848100"/>
+            <a:ext cx="1714500" cy="133350"/>
+          </a:xfrm>
+          <a:prstGeom xmlns:a="http://schemas.openxmlformats.org/drawingml/2006/main" prst="rect">
+            <a:avLst/>
+          </a:prstGeom>
+          <a:noFill xmlns:a="http://schemas.openxmlformats.org/drawingml/2006/main"/>
+          <a:ln xmlns:a="http://schemas.openxmlformats.org/drawingml/2006/main" w="0">
+            <a:noFill/>
+            <a:prstDash val="solid"/>
+          </a:ln>
+        </p:spPr>
+        <p:txBody>
+          <a:bodyPr xmlns:a="http://schemas.openxmlformats.org/drawingml/2006/main"/>
+          <a:lstStyle xmlns:a="http://schemas.openxmlformats.org/drawingml/2006/main"/>
+          <a:p xmlns:a="http://schemas.openxmlformats.org/drawingml/2006/main">
+            <a:pPr algn="l">
+              <a:defRPr sz="675" b="1" i="0">
+                <a:solidFill>
+                  <a:srgbClr val="7CE7D5"/>
+                </a:solidFill>
+              </a:defRPr>
+            </a:pPr>
+            <a:r>
+              <a:rPr sz="675" b="1" i="0">
+                <a:solidFill>
+                  <a:srgbClr val="7CE7D5"/>
+                </a:solidFill>
+              </a:rPr>
+              <a:t>PATIENT SMS</a:t>
+            </a:r>
+          </a:p>
+        </p:txBody>
+      </p:sp>
+      <p:sp>
+        <p:nvSpPr>
+          <p:cNvPr id="54" name="">
+            <a:extLst xmlns:a="http://schemas.openxmlformats.org/drawingml/2006/main">
+              <a:ext uri="{FF2B5EF4-FFF2-40B4-BE49-F238E27FC236}">
+                <a16:creationId xmlns:a16="http://schemas.microsoft.com/office/drawing/2014/main" id="{DFD5F827-A0A2-4649-B747-20AEBB75F633}"/>
+              </a:ext>
+            </a:extLst>
+          </p:cNvPr>
+          <p:cNvSpPr>
+            <a:spLocks xmlns:a="http://schemas.openxmlformats.org/drawingml/2006/main" noGrp="1"/>
+          </p:cNvSpPr>
+          <p:nvPr/>
+        </p:nvSpPr>
+        <p:spPr>
+          <a:xfrm xmlns:a="http://schemas.openxmlformats.org/drawingml/2006/main">
+            <a:off x="9953625" y="4076700"/>
+            <a:ext cx="1714500" cy="400050"/>
+          </a:xfrm>
+          <a:prstGeom xmlns:a="http://schemas.openxmlformats.org/drawingml/2006/main" prst="rect">
+            <a:avLst/>
+          </a:prstGeom>
+          <a:noFill xmlns:a="http://schemas.openxmlformats.org/drawingml/2006/main"/>
+          <a:ln xmlns:a="http://schemas.openxmlformats.org/drawingml/2006/main" w="0">
+            <a:noFill/>
+            <a:prstDash val="solid"/>
+          </a:ln>
+        </p:spPr>
+        <p:txBody>
+          <a:bodyPr xmlns:a="http://schemas.openxmlformats.org/drawingml/2006/main"/>
+          <a:lstStyle xmlns:a="http://schemas.openxmlformats.org/drawingml/2006/main"/>
+          <a:p xmlns:a="http://schemas.openxmlformats.org/drawingml/2006/main">
+            <a:pPr algn="l">
+              <a:defRPr sz="900" b="1" i="0">
+                <a:solidFill>
+                  <a:srgbClr val="0B1F33"/>
+                </a:solidFill>
+              </a:defRPr>
+            </a:pPr>
+            <a:r>
+              <a:rPr sz="900" b="1" i="0">
+                <a:solidFill>
+                  <a:srgbClr val="0B1F33"/>
+                </a:solidFill>
+              </a:rPr>
+              <a:t>only after proof path</a:t>
+            </a:r>
+          </a:p>
+          <a:p xmlns:a="http://schemas.openxmlformats.org/drawingml/2006/main">
+            <a:pPr algn="l">
+              <a:defRPr sz="900" b="1" i="0">
+                <a:solidFill>
+                  <a:srgbClr val="0B1F33"/>
+                </a:solidFill>
+              </a:defRPr>
+            </a:pPr>
+            <a:r>
+              <a:rPr sz="900" b="1" i="0">
+                <a:solidFill>
+                  <a:srgbClr val="0B1F33"/>
+                </a:solidFill>
+              </a:rPr>
+              <a:t>OTP-verified recipient</a:t>
+            </a:r>
+          </a:p>
+        </p:txBody>
+      </p:sp>
+      <p:sp>
+        <p:nvSpPr>
+          <p:cNvPr id="55" name="Human owner">
+            <a:extLst xmlns:a="http://schemas.openxmlformats.org/drawingml/2006/main">
+              <a:ext uri="{FF2B5EF4-FFF2-40B4-BE49-F238E27FC236}">
+                <a16:creationId xmlns:a16="http://schemas.microsoft.com/office/drawing/2014/main" id="{E31CE74C-6FE5-40FF-96C1-0F1B5DED4D5E}"/>
+              </a:ext>
+            </a:extLst>
+          </p:cNvPr>
+          <p:cNvSpPr>
+            <a:spLocks xmlns:a="http://schemas.openxmlformats.org/drawingml/2006/main" noGrp="1"/>
+          </p:cNvSpPr>
+          <p:nvPr/>
+        </p:nvSpPr>
+        <p:spPr>
+          <a:xfrm xmlns:a="http://schemas.openxmlformats.org/drawingml/2006/main">
+            <a:off x="9810750" y="4810125"/>
+            <a:ext cx="2000250" cy="742950"/>
+          </a:xfrm>
+          <a:prstGeom xmlns:a="http://schemas.openxmlformats.org/drawingml/2006/main" prst="roundRect">
+            <a:avLst>
+              <a:gd name="adj" fmla="val 15385"/>
+            </a:avLst>
+          </a:prstGeom>
+          <a:solidFill xmlns:a="http://schemas.openxmlformats.org/drawingml/2006/main">
+            <a:srgbClr val="3A1F24"/>
+          </a:solidFill>
+          <a:ln xmlns:a="http://schemas.openxmlformats.org/drawingml/2006/main" w="9525">
+            <a:solidFill>
+              <a:srgbClr val="3A1F24"/>
+            </a:solidFill>
+            <a:prstDash val="solid"/>
+          </a:ln>
+        </p:spPr>
+        <p:style>
+          <a:lnRef xmlns:a="http://schemas.openxmlformats.org/drawingml/2006/main" idx="0"/>
+          <a:fillRef xmlns:a="http://schemas.openxmlformats.org/drawingml/2006/main" idx="0"/>
+          <a:effectRef xmlns:a="http://schemas.openxmlformats.org/drawingml/2006/main" idx="4"/>
+          <a:fontRef xmlns:a="http://schemas.openxmlformats.org/drawingml/2006/main" idx="major"/>
+        </p:style>
+      </p:sp>
+      <p:sp>
+        <p:nvSpPr>
+          <p:cNvPr id="56" name="">
+            <a:extLst xmlns:a="http://schemas.openxmlformats.org/drawingml/2006/main">
+              <a:ext uri="{FF2B5EF4-FFF2-40B4-BE49-F238E27FC236}">
+                <a16:creationId xmlns:a16="http://schemas.microsoft.com/office/drawing/2014/main" id="{9B3AB308-96A0-490E-A3E9-60D5C15E7160}"/>
+              </a:ext>
+            </a:extLst>
+          </p:cNvPr>
+          <p:cNvSpPr>
+            <a:spLocks xmlns:a="http://schemas.openxmlformats.org/drawingml/2006/main" noGrp="1"/>
+          </p:cNvSpPr>
+          <p:nvPr/>
+        </p:nvSpPr>
+        <p:spPr>
+          <a:xfrm xmlns:a="http://schemas.openxmlformats.org/drawingml/2006/main">
+            <a:off x="9953625" y="4943475"/>
+            <a:ext cx="1714500" cy="133350"/>
+          </a:xfrm>
+          <a:prstGeom xmlns:a="http://schemas.openxmlformats.org/drawingml/2006/main" prst="rect">
+            <a:avLst/>
+          </a:prstGeom>
+          <a:noFill xmlns:a="http://schemas.openxmlformats.org/drawingml/2006/main"/>
+          <a:ln xmlns:a="http://schemas.openxmlformats.org/drawingml/2006/main" w="0">
+            <a:noFill/>
+            <a:prstDash val="solid"/>
+          </a:ln>
+        </p:spPr>
+        <p:txBody>
+          <a:bodyPr xmlns:a="http://schemas.openxmlformats.org/drawingml/2006/main"/>
+          <a:lstStyle xmlns:a="http://schemas.openxmlformats.org/drawingml/2006/main"/>
+          <a:p xmlns:a="http://schemas.openxmlformats.org/drawingml/2006/main">
+            <a:pPr algn="l">
+              <a:defRPr sz="675" b="1" i="0">
+                <a:solidFill>
+                  <a:srgbClr val="F0A0A0"/>
+                </a:solidFill>
+              </a:defRPr>
+            </a:pPr>
+            <a:r>
+              <a:rPr sz="675" b="1" i="0">
+                <a:solidFill>
+                  <a:srgbClr val="F0A0A0"/>
+                </a:solidFill>
+              </a:rPr>
+              <a:t>HUMAN OWNER</a:t>
+            </a:r>
+          </a:p>
+        </p:txBody>
+      </p:sp>
+      <p:sp>
+        <p:nvSpPr>
+          <p:cNvPr id="57" name="">
+            <a:extLst xmlns:a="http://schemas.openxmlformats.org/drawingml/2006/main">
+              <a:ext uri="{FF2B5EF4-FFF2-40B4-BE49-F238E27FC236}">
+                <a16:creationId xmlns:a16="http://schemas.microsoft.com/office/drawing/2014/main" id="{B5535E3F-5A96-481B-9C4B-CC5A9785EEFC}"/>
+              </a:ext>
+            </a:extLst>
+          </p:cNvPr>
+          <p:cNvSpPr>
+            <a:spLocks xmlns:a="http://schemas.openxmlformats.org/drawingml/2006/main" noGrp="1"/>
+          </p:cNvSpPr>
+          <p:nvPr/>
+        </p:nvSpPr>
+        <p:spPr>
+          <a:xfrm xmlns:a="http://schemas.openxmlformats.org/drawingml/2006/main">
+            <a:off x="9953625" y="5172075"/>
+            <a:ext cx="1714500" cy="285750"/>
+          </a:xfrm>
+          <a:prstGeom xmlns:a="http://schemas.openxmlformats.org/drawingml/2006/main" prst="rect">
+            <a:avLst/>
+          </a:prstGeom>
+          <a:noFill xmlns:a="http://schemas.openxmlformats.org/drawingml/2006/main"/>
+          <a:ln xmlns:a="http://schemas.openxmlformats.org/drawingml/2006/main" w="0">
+            <a:noFill/>
+            <a:prstDash val="solid"/>
+          </a:ln>
+        </p:spPr>
+        <p:txBody>
+          <a:bodyPr xmlns:a="http://schemas.openxmlformats.org/drawingml/2006/main"/>
+          <a:lstStyle xmlns:a="http://schemas.openxmlformats.org/drawingml/2006/main"/>
+          <a:p xmlns:a="http://schemas.openxmlformats.org/drawingml/2006/main">
+            <a:pPr algn="l">
+              <a:defRPr sz="900" b="1" i="0">
+                <a:solidFill>
+                  <a:srgbClr val="0B1F33"/>
+                </a:solidFill>
+              </a:defRPr>
+            </a:pPr>
+            <a:r>
+              <a:rPr sz="900" b="1" i="0">
+                <a:solidFill>
+                  <a:srgbClr val="0B1F33"/>
+                </a:solidFill>
+              </a:rPr>
+              <a:t>escalation queue</a:t>
+            </a:r>
+          </a:p>
+          <a:p xmlns:a="http://schemas.openxmlformats.org/drawingml/2006/main">
+            <a:pPr algn="l">
+              <a:defRPr sz="900" b="1" i="0">
+                <a:solidFill>
+                  <a:srgbClr val="0B1F33"/>
+                </a:solidFill>
+              </a:defRPr>
+            </a:pPr>
+            <a:r>
+              <a:rPr sz="900" b="1" i="0">
+                <a:solidFill>
+                  <a:srgbClr val="0B1F33"/>
+                </a:solidFill>
+              </a:rPr>
+              <a:t>ambiguous / urgent / clinical</a:t>
             </a:r>
           </a:p>
         </p:txBody>
       </p:sp>
       <p:cxnSp>
         <p:nvCxnSpPr>
-          <p:cNvPr id="77" name=""/>
+          <p:cNvPr id="133" name=""/>
           <p:cNvCxnSpPr>
-            <a:stCxn xmlns:a="http://schemas.openxmlformats.org/drawingml/2006/main" id="6" idx="3"/>
-            <a:endCxn xmlns:a="http://schemas.openxmlformats.org/drawingml/2006/main" id="9" idx="1"/>
+            <a:stCxn xmlns:a="http://schemas.openxmlformats.org/drawingml/2006/main" id="10" idx="2"/>
+            <a:endCxn xmlns:a="http://schemas.openxmlformats.org/drawingml/2006/main" id="13" idx="0"/>
           </p:cNvCxnSpPr>
           <p:nvPr/>
         </p:nvCxnSpPr>
         <p:spPr>
           <a:xfrm xmlns:a="http://schemas.openxmlformats.org/drawingml/2006/main">
-            <a:off x="1885950" y="3633788"/>
-            <a:ext cx="361950" cy="0"/>
+            <a:off x="1333500" y="2266950"/>
+            <a:ext cx="0" cy="209550"/>
           </a:xfrm>
           <a:prstGeom xmlns:a="http://schemas.openxmlformats.org/drawingml/2006/main" prst="straightConnector1">
             <a:avLst/>
+          </a:prstGeom>
+          <a:ln xmlns:a="http://schemas.openxmlformats.org/drawingml/2006/main" w="19050">
+            <a:solidFill>
+              <a:srgbClr val="7CE7D5"/>
+            </a:solidFill>
+            <a:prstDash val="solid"/>
+            <a:headEnd type="arrow" w="sm" len="sm"/>
+          </a:ln>
+        </p:spPr>
+      </p:cxnSp>
+      <p:cxnSp>
+        <p:nvCxnSpPr>
+          <p:cNvPr id="134" name=""/>
+          <p:cNvCxnSpPr>
+            <a:stCxn xmlns:a="http://schemas.openxmlformats.org/drawingml/2006/main" id="13" idx="3"/>
+            <a:endCxn xmlns:a="http://schemas.openxmlformats.org/drawingml/2006/main" id="19" idx="1"/>
+          </p:cNvCxnSpPr>
+          <p:nvPr/>
+        </p:nvCxnSpPr>
+        <p:spPr>
+          <a:xfrm xmlns:a="http://schemas.openxmlformats.org/drawingml/2006/main" flipV="1">
+            <a:off x="2286000" y="2047875"/>
+            <a:ext cx="285750" cy="800100"/>
+          </a:xfrm>
+          <a:prstGeom xmlns:a="http://schemas.openxmlformats.org/drawingml/2006/main" prst="bentConnector3">
+            <a:avLst>
+              <a:gd name="adj1" fmla="val 50000"/>
+            </a:avLst>
+          </a:prstGeom>
+          <a:ln xmlns:a="http://schemas.openxmlformats.org/drawingml/2006/main" w="19050">
+            <a:solidFill>
+              <a:srgbClr val="7CE7D5"/>
+            </a:solidFill>
+            <a:prstDash val="solid"/>
+            <a:headEnd type="arrow" w="sm" len="sm"/>
+          </a:ln>
+        </p:spPr>
+      </p:cxnSp>
+      <p:cxnSp>
+        <p:nvCxnSpPr>
+          <p:cNvPr id="135" name=""/>
+          <p:cNvCxnSpPr>
+            <a:stCxn xmlns:a="http://schemas.openxmlformats.org/drawingml/2006/main" id="16" idx="0"/>
+            <a:endCxn xmlns:a="http://schemas.openxmlformats.org/drawingml/2006/main" id="13" idx="2"/>
+          </p:cNvCxnSpPr>
+          <p:nvPr/>
+        </p:nvCxnSpPr>
+        <p:spPr>
+          <a:xfrm xmlns:a="http://schemas.openxmlformats.org/drawingml/2006/main" flipV="1">
+            <a:off x="1333500" y="3219450"/>
+            <a:ext cx="0" cy="209550"/>
+          </a:xfrm>
+          <a:prstGeom xmlns:a="http://schemas.openxmlformats.org/drawingml/2006/main" prst="straightConnector1">
+            <a:avLst/>
+          </a:prstGeom>
+          <a:ln xmlns:a="http://schemas.openxmlformats.org/drawingml/2006/main" w="19050">
+            <a:solidFill>
+              <a:srgbClr val="5F6D80"/>
+            </a:solidFill>
+            <a:prstDash val="solid"/>
+            <a:headEnd type="arrow" w="sm" len="sm"/>
+          </a:ln>
+        </p:spPr>
+      </p:cxnSp>
+      <p:cxnSp>
+        <p:nvCxnSpPr>
+          <p:cNvPr id="136" name=""/>
+          <p:cNvCxnSpPr>
+            <a:stCxn xmlns:a="http://schemas.openxmlformats.org/drawingml/2006/main" id="19" idx="2"/>
+            <a:endCxn xmlns:a="http://schemas.openxmlformats.org/drawingml/2006/main" id="22" idx="0"/>
+          </p:cNvCxnSpPr>
+          <p:nvPr/>
+        </p:nvCxnSpPr>
+        <p:spPr>
+          <a:xfrm xmlns:a="http://schemas.openxmlformats.org/drawingml/2006/main">
+            <a:off x="3571875" y="2571750"/>
+            <a:ext cx="0" cy="238125"/>
+          </a:xfrm>
+          <a:prstGeom xmlns:a="http://schemas.openxmlformats.org/drawingml/2006/main" prst="straightConnector1">
+            <a:avLst/>
+          </a:prstGeom>
+          <a:ln xmlns:a="http://schemas.openxmlformats.org/drawingml/2006/main" w="19050">
+            <a:solidFill>
+              <a:srgbClr val="F0A0A0"/>
+            </a:solidFill>
+            <a:prstDash val="solid"/>
+            <a:headEnd type="arrow" w="sm" len="sm"/>
+          </a:ln>
+        </p:spPr>
+      </p:cxnSp>
+      <p:cxnSp>
+        <p:nvCxnSpPr>
+          <p:cNvPr id="137" name=""/>
+          <p:cNvCxnSpPr>
+            <a:stCxn xmlns:a="http://schemas.openxmlformats.org/drawingml/2006/main" id="19" idx="3"/>
+            <a:endCxn xmlns:a="http://schemas.openxmlformats.org/drawingml/2006/main" id="28" idx="1"/>
+          </p:cNvCxnSpPr>
+          <p:nvPr/>
+        </p:nvCxnSpPr>
+        <p:spPr>
+          <a:xfrm xmlns:a="http://schemas.openxmlformats.org/drawingml/2006/main" flipV="1">
+            <a:off x="4572000" y="2000250"/>
+            <a:ext cx="285750" cy="47625"/>
+          </a:xfrm>
+          <a:prstGeom xmlns:a="http://schemas.openxmlformats.org/drawingml/2006/main" prst="bentConnector3">
+            <a:avLst>
+              <a:gd name="adj1" fmla="val 50000"/>
+            </a:avLst>
+          </a:prstGeom>
+          <a:ln xmlns:a="http://schemas.openxmlformats.org/drawingml/2006/main" w="19050">
+            <a:solidFill>
+              <a:srgbClr val="7CE7D5"/>
+            </a:solidFill>
+            <a:prstDash val="solid"/>
+            <a:headEnd type="arrow" w="sm" len="sm"/>
+          </a:ln>
+        </p:spPr>
+      </p:cxnSp>
+      <p:cxnSp>
+        <p:nvCxnSpPr>
+          <p:cNvPr id="138" name=""/>
+          <p:cNvCxnSpPr>
+            <a:stCxn xmlns:a="http://schemas.openxmlformats.org/drawingml/2006/main" id="22" idx="2"/>
+            <a:endCxn xmlns:a="http://schemas.openxmlformats.org/drawingml/2006/main" id="25" idx="0"/>
+          </p:cNvCxnSpPr>
+          <p:nvPr/>
+        </p:nvCxnSpPr>
+        <p:spPr>
+          <a:xfrm xmlns:a="http://schemas.openxmlformats.org/drawingml/2006/main">
+            <a:off x="3571875" y="3714750"/>
+            <a:ext cx="0" cy="238125"/>
+          </a:xfrm>
+          <a:prstGeom xmlns:a="http://schemas.openxmlformats.org/drawingml/2006/main" prst="straightConnector1">
+            <a:avLst/>
+          </a:prstGeom>
+          <a:ln xmlns:a="http://schemas.openxmlformats.org/drawingml/2006/main" w="19050">
+            <a:solidFill>
+              <a:srgbClr val="F0A0A0"/>
+            </a:solidFill>
+            <a:prstDash val="solid"/>
+            <a:headEnd type="arrow" w="sm" len="sm"/>
+          </a:ln>
+        </p:spPr>
+      </p:cxnSp>
+      <p:cxnSp>
+        <p:nvCxnSpPr>
+          <p:cNvPr id="139" name=""/>
+          <p:cNvCxnSpPr>
+            <a:stCxn xmlns:a="http://schemas.openxmlformats.org/drawingml/2006/main" id="28" idx="2"/>
+            <a:endCxn xmlns:a="http://schemas.openxmlformats.org/drawingml/2006/main" id="31" idx="0"/>
+          </p:cNvCxnSpPr>
+          <p:nvPr/>
+        </p:nvCxnSpPr>
+        <p:spPr>
+          <a:xfrm xmlns:a="http://schemas.openxmlformats.org/drawingml/2006/main">
+            <a:off x="5953125" y="2476500"/>
+            <a:ext cx="0" cy="209550"/>
+          </a:xfrm>
+          <a:prstGeom xmlns:a="http://schemas.openxmlformats.org/drawingml/2006/main" prst="straightConnector1">
+            <a:avLst/>
+          </a:prstGeom>
+          <a:ln xmlns:a="http://schemas.openxmlformats.org/drawingml/2006/main" w="19050">
+            <a:solidFill>
+              <a:srgbClr val="9FB6C9"/>
+            </a:solidFill>
+            <a:prstDash val="solid"/>
+            <a:headEnd type="arrow" w="sm" len="sm"/>
+          </a:ln>
+        </p:spPr>
+      </p:cxnSp>
+      <p:cxnSp>
+        <p:nvCxnSpPr>
+          <p:cNvPr id="140" name=""/>
+          <p:cNvCxnSpPr>
+            <a:stCxn xmlns:a="http://schemas.openxmlformats.org/drawingml/2006/main" id="31" idx="2"/>
+            <a:endCxn xmlns:a="http://schemas.openxmlformats.org/drawingml/2006/main" id="34" idx="0"/>
+          </p:cNvCxnSpPr>
+          <p:nvPr/>
+        </p:nvCxnSpPr>
+        <p:spPr>
+          <a:xfrm xmlns:a="http://schemas.openxmlformats.org/drawingml/2006/main">
+            <a:off x="5953125" y="3543300"/>
+            <a:ext cx="0" cy="190500"/>
+          </a:xfrm>
+          <a:prstGeom xmlns:a="http://schemas.openxmlformats.org/drawingml/2006/main" prst="straightConnector1">
+            <a:avLst/>
+          </a:prstGeom>
+          <a:ln xmlns:a="http://schemas.openxmlformats.org/drawingml/2006/main" w="19050">
+            <a:solidFill>
+              <a:srgbClr val="7CE7D5"/>
+            </a:solidFill>
+            <a:prstDash val="solid"/>
+            <a:headEnd type="arrow" w="sm" len="sm"/>
+          </a:ln>
+        </p:spPr>
+      </p:cxnSp>
+      <p:cxnSp>
+        <p:nvCxnSpPr>
+          <p:cNvPr id="141" name=""/>
+          <p:cNvCxnSpPr>
+            <a:stCxn xmlns:a="http://schemas.openxmlformats.org/drawingml/2006/main" id="34" idx="3"/>
+            <a:endCxn xmlns:a="http://schemas.openxmlformats.org/drawingml/2006/main" id="37" idx="1"/>
+          </p:cNvCxnSpPr>
+          <p:nvPr/>
+        </p:nvCxnSpPr>
+        <p:spPr>
+          <a:xfrm xmlns:a="http://schemas.openxmlformats.org/drawingml/2006/main" flipV="1">
+            <a:off x="7048500" y="1976438"/>
+            <a:ext cx="285750" cy="2319338"/>
+          </a:xfrm>
+          <a:prstGeom xmlns:a="http://schemas.openxmlformats.org/drawingml/2006/main" prst="bentConnector3">
+            <a:avLst>
+              <a:gd name="adj1" fmla="val 50000"/>
+            </a:avLst>
+          </a:prstGeom>
+          <a:ln xmlns:a="http://schemas.openxmlformats.org/drawingml/2006/main" w="19050">
+            <a:solidFill>
+              <a:srgbClr val="9FB6C9"/>
+            </a:solidFill>
+            <a:prstDash val="solid"/>
+            <a:headEnd type="arrow" w="sm" len="sm"/>
+          </a:ln>
+        </p:spPr>
+      </p:cxnSp>
+      <p:cxnSp>
+        <p:nvCxnSpPr>
+          <p:cNvPr id="142" name=""/>
+          <p:cNvCxnSpPr>
+            <a:stCxn xmlns:a="http://schemas.openxmlformats.org/drawingml/2006/main" id="34" idx="3"/>
+            <a:endCxn xmlns:a="http://schemas.openxmlformats.org/drawingml/2006/main" id="40" idx="1"/>
+          </p:cNvCxnSpPr>
+          <p:nvPr/>
+        </p:nvCxnSpPr>
+        <p:spPr>
+          <a:xfrm xmlns:a="http://schemas.openxmlformats.org/drawingml/2006/main" flipV="1">
+            <a:off x="7048500" y="3071813"/>
+            <a:ext cx="285750" cy="1223963"/>
+          </a:xfrm>
+          <a:prstGeom xmlns:a="http://schemas.openxmlformats.org/drawingml/2006/main" prst="bentConnector3">
+            <a:avLst>
+              <a:gd name="adj1" fmla="val 50000"/>
+            </a:avLst>
+          </a:prstGeom>
+          <a:ln xmlns:a="http://schemas.openxmlformats.org/drawingml/2006/main" w="19050">
+            <a:solidFill>
+              <a:srgbClr val="9FB6C9"/>
+            </a:solidFill>
+            <a:prstDash val="solid"/>
+            <a:headEnd type="arrow" w="sm" len="sm"/>
+          </a:ln>
+        </p:spPr>
+      </p:cxnSp>
+      <p:cxnSp>
+        <p:nvCxnSpPr>
+          <p:cNvPr id="143" name=""/>
+          <p:cNvCxnSpPr>
+            <a:stCxn xmlns:a="http://schemas.openxmlformats.org/drawingml/2006/main" id="34" idx="3"/>
+            <a:endCxn xmlns:a="http://schemas.openxmlformats.org/drawingml/2006/main" id="43" idx="1"/>
+          </p:cNvCxnSpPr>
+          <p:nvPr/>
+        </p:nvCxnSpPr>
+        <p:spPr>
+          <a:xfrm xmlns:a="http://schemas.openxmlformats.org/drawingml/2006/main" flipV="1">
+            <a:off x="7048500" y="4286250"/>
+            <a:ext cx="285750" cy="9525"/>
+          </a:xfrm>
+          <a:prstGeom xmlns:a="http://schemas.openxmlformats.org/drawingml/2006/main" prst="bentConnector3">
+            <a:avLst>
+              <a:gd name="adj1" fmla="val 50000"/>
+            </a:avLst>
+          </a:prstGeom>
+          <a:ln xmlns:a="http://schemas.openxmlformats.org/drawingml/2006/main" w="19050">
+            <a:solidFill>
+              <a:srgbClr val="E6A037"/>
+            </a:solidFill>
+            <a:prstDash val="solid"/>
+            <a:headEnd type="arrow" w="sm" len="sm"/>
+          </a:ln>
+        </p:spPr>
+      </p:cxnSp>
+      <p:cxnSp>
+        <p:nvCxnSpPr>
+          <p:cNvPr id="144" name=""/>
+          <p:cNvCxnSpPr>
+            <a:stCxn xmlns:a="http://schemas.openxmlformats.org/drawingml/2006/main" id="43" idx="3"/>
+            <a:endCxn xmlns:a="http://schemas.openxmlformats.org/drawingml/2006/main" id="46" idx="1"/>
+          </p:cNvCxnSpPr>
+          <p:nvPr/>
+        </p:nvCxnSpPr>
+        <p:spPr>
+          <a:xfrm xmlns:a="http://schemas.openxmlformats.org/drawingml/2006/main" flipV="1">
+            <a:off x="9525000" y="1952625"/>
+            <a:ext cx="285750" cy="2333625"/>
+          </a:xfrm>
+          <a:prstGeom xmlns:a="http://schemas.openxmlformats.org/drawingml/2006/main" prst="bentConnector3">
+            <a:avLst>
+              <a:gd name="adj1" fmla="val 50000"/>
+            </a:avLst>
+          </a:prstGeom>
+          <a:ln xmlns:a="http://schemas.openxmlformats.org/drawingml/2006/main" w="19050">
+            <a:solidFill>
+              <a:srgbClr val="E6A037"/>
+            </a:solidFill>
+            <a:prstDash val="solid"/>
+            <a:headEnd type="arrow" w="sm" len="sm"/>
+          </a:ln>
+        </p:spPr>
+      </p:cxnSp>
+      <p:cxnSp>
+        <p:nvCxnSpPr>
+          <p:cNvPr id="145" name=""/>
+          <p:cNvCxnSpPr>
+            <a:stCxn xmlns:a="http://schemas.openxmlformats.org/drawingml/2006/main" id="43" idx="3"/>
+            <a:endCxn xmlns:a="http://schemas.openxmlformats.org/drawingml/2006/main" id="49" idx="1"/>
+          </p:cNvCxnSpPr>
+          <p:nvPr/>
+        </p:nvCxnSpPr>
+        <p:spPr>
+          <a:xfrm xmlns:a="http://schemas.openxmlformats.org/drawingml/2006/main" flipV="1">
+            <a:off x="9525000" y="3048000"/>
+            <a:ext cx="285750" cy="1238250"/>
+          </a:xfrm>
+          <a:prstGeom xmlns:a="http://schemas.openxmlformats.org/drawingml/2006/main" prst="bentConnector3">
+            <a:avLst>
+              <a:gd name="adj1" fmla="val 50000"/>
+            </a:avLst>
           </a:prstGeom>
           <a:ln xmlns:a="http://schemas.openxmlformats.org/drawingml/2006/main" w="19050">
             <a:solidFill>
@@ -13168,43 +15097,17 @@
       </p:cxnSp>
       <p:cxnSp>
         <p:nvCxnSpPr>
-          <p:cNvPr id="78" name=""/>
+          <p:cNvPr id="146" name=""/>
           <p:cNvCxnSpPr>
-            <a:stCxn xmlns:a="http://schemas.openxmlformats.org/drawingml/2006/main" id="9" idx="3"/>
-            <a:endCxn xmlns:a="http://schemas.openxmlformats.org/drawingml/2006/main" id="12" idx="1"/>
+            <a:stCxn xmlns:a="http://schemas.openxmlformats.org/drawingml/2006/main" id="34" idx="3"/>
+            <a:endCxn xmlns:a="http://schemas.openxmlformats.org/drawingml/2006/main" id="52" idx="1"/>
           </p:cNvCxnSpPr>
           <p:nvPr/>
         </p:nvCxnSpPr>
         <p:spPr>
-          <a:xfrm xmlns:a="http://schemas.openxmlformats.org/drawingml/2006/main">
-            <a:off x="3771900" y="3633788"/>
-            <a:ext cx="371475" cy="0"/>
-          </a:xfrm>
-          <a:prstGeom xmlns:a="http://schemas.openxmlformats.org/drawingml/2006/main" prst="straightConnector1">
-            <a:avLst/>
-          </a:prstGeom>
-          <a:ln xmlns:a="http://schemas.openxmlformats.org/drawingml/2006/main" w="19050">
-            <a:solidFill>
-              <a:srgbClr val="5F6D80"/>
-            </a:solidFill>
-            <a:prstDash val="solid"/>
-            <a:headEnd type="arrow" w="sm" len="sm"/>
-          </a:ln>
-        </p:spPr>
-      </p:cxnSp>
-      <p:cxnSp>
-        <p:nvCxnSpPr>
-          <p:cNvPr id="79" name=""/>
-          <p:cNvCxnSpPr>
-            <a:stCxn xmlns:a="http://schemas.openxmlformats.org/drawingml/2006/main" id="12" idx="3"/>
-            <a:endCxn xmlns:a="http://schemas.openxmlformats.org/drawingml/2006/main" id="15" idx="1"/>
-          </p:cNvCxnSpPr>
-          <p:nvPr/>
-        </p:nvCxnSpPr>
-        <p:spPr>
           <a:xfrm xmlns:a="http://schemas.openxmlformats.org/drawingml/2006/main" flipV="1">
-            <a:off x="5572125" y="3629025"/>
-            <a:ext cx="390525" cy="4763"/>
+            <a:off x="7048500" y="4143375"/>
+            <a:ext cx="2762250" cy="152400"/>
           </a:xfrm>
           <a:prstGeom xmlns:a="http://schemas.openxmlformats.org/drawingml/2006/main" prst="bentConnector3">
             <a:avLst>
@@ -13213,7 +15116,7 @@
           </a:prstGeom>
           <a:ln xmlns:a="http://schemas.openxmlformats.org/drawingml/2006/main" w="19050">
             <a:solidFill>
-              <a:srgbClr val="0E9F8E"/>
+              <a:srgbClr val="7CE7D5"/>
             </a:solidFill>
             <a:prstDash val="solid"/>
             <a:headEnd type="arrow" w="sm" len="sm"/>
@@ -13222,43 +15125,17 @@
       </p:cxnSp>
       <p:cxnSp>
         <p:nvCxnSpPr>
-          <p:cNvPr id="80" name=""/>
+          <p:cNvPr id="147" name=""/>
           <p:cNvCxnSpPr>
-            <a:stCxn xmlns:a="http://schemas.openxmlformats.org/drawingml/2006/main" id="15" idx="3"/>
-            <a:endCxn xmlns:a="http://schemas.openxmlformats.org/drawingml/2006/main" id="18" idx="1"/>
+            <a:stCxn xmlns:a="http://schemas.openxmlformats.org/drawingml/2006/main" id="25" idx="3"/>
+            <a:endCxn xmlns:a="http://schemas.openxmlformats.org/drawingml/2006/main" id="55" idx="1"/>
           </p:cNvCxnSpPr>
           <p:nvPr/>
         </p:nvCxnSpPr>
         <p:spPr>
           <a:xfrm xmlns:a="http://schemas.openxmlformats.org/drawingml/2006/main">
-            <a:off x="7724775" y="3629025"/>
-            <a:ext cx="390525" cy="0"/>
-          </a:xfrm>
-          <a:prstGeom xmlns:a="http://schemas.openxmlformats.org/drawingml/2006/main" prst="straightConnector1">
-            <a:avLst/>
-          </a:prstGeom>
-          <a:ln xmlns:a="http://schemas.openxmlformats.org/drawingml/2006/main" w="19050">
-            <a:solidFill>
-              <a:srgbClr val="0E9F8E"/>
-            </a:solidFill>
-            <a:prstDash val="solid"/>
-            <a:headEnd type="arrow" w="sm" len="sm"/>
-          </a:ln>
-        </p:spPr>
-      </p:cxnSp>
-      <p:cxnSp>
-        <p:nvCxnSpPr>
-          <p:cNvPr id="81" name=""/>
-          <p:cNvCxnSpPr>
-            <a:stCxn xmlns:a="http://schemas.openxmlformats.org/drawingml/2006/main" id="18" idx="3"/>
-            <a:endCxn xmlns:a="http://schemas.openxmlformats.org/drawingml/2006/main" id="21" idx="1"/>
-          </p:cNvCxnSpPr>
-          <p:nvPr/>
-        </p:nvCxnSpPr>
-        <p:spPr>
-          <a:xfrm xmlns:a="http://schemas.openxmlformats.org/drawingml/2006/main" flipV="1">
-            <a:off x="9734550" y="2971800"/>
-            <a:ext cx="381000" cy="657225"/>
+            <a:off x="4572000" y="4405313"/>
+            <a:ext cx="5238750" cy="776288"/>
           </a:xfrm>
           <a:prstGeom xmlns:a="http://schemas.openxmlformats.org/drawingml/2006/main" prst="bentConnector3">
             <a:avLst>
@@ -13267,240 +15144,131 @@
           </a:prstGeom>
           <a:ln xmlns:a="http://schemas.openxmlformats.org/drawingml/2006/main" w="19050">
             <a:solidFill>
-              <a:srgbClr val="E6A037"/>
+              <a:srgbClr val="F0A0A0"/>
             </a:solidFill>
             <a:prstDash val="solid"/>
             <a:headEnd type="arrow" w="sm" len="sm"/>
           </a:ln>
         </p:spPr>
       </p:cxnSp>
-      <p:cxnSp>
-        <p:nvCxnSpPr>
-          <p:cNvPr id="82" name=""/>
-          <p:cNvCxnSpPr>
-            <a:stCxn xmlns:a="http://schemas.openxmlformats.org/drawingml/2006/main" id="18" idx="3"/>
-            <a:endCxn xmlns:a="http://schemas.openxmlformats.org/drawingml/2006/main" id="24" idx="1"/>
-          </p:cNvCxnSpPr>
-          <p:nvPr/>
-        </p:nvCxnSpPr>
-        <p:spPr>
-          <a:xfrm xmlns:a="http://schemas.openxmlformats.org/drawingml/2006/main">
-            <a:off x="9734550" y="3629025"/>
-            <a:ext cx="381000" cy="542925"/>
-          </a:xfrm>
-          <a:prstGeom xmlns:a="http://schemas.openxmlformats.org/drawingml/2006/main" prst="bentConnector3">
-            <a:avLst>
-              <a:gd name="adj1" fmla="val 50000"/>
-            </a:avLst>
-          </a:prstGeom>
-          <a:ln xmlns:a="http://schemas.openxmlformats.org/drawingml/2006/main" w="19050">
-            <a:solidFill>
-              <a:srgbClr val="3D8DFF"/>
-            </a:solidFill>
-            <a:prstDash val="solid"/>
-            <a:headEnd type="arrow" w="sm" len="sm"/>
-          </a:ln>
-        </p:spPr>
-      </p:cxnSp>
-      <p:cxnSp>
-        <p:nvCxnSpPr>
-          <p:cNvPr id="83" name=""/>
-          <p:cNvCxnSpPr>
-            <a:stCxn xmlns:a="http://schemas.openxmlformats.org/drawingml/2006/main" id="15" idx="2"/>
-            <a:endCxn xmlns:a="http://schemas.openxmlformats.org/drawingml/2006/main" id="27" idx="0"/>
-          </p:cNvCxnSpPr>
-          <p:nvPr/>
-        </p:nvCxnSpPr>
-        <p:spPr>
-          <a:xfrm xmlns:a="http://schemas.openxmlformats.org/drawingml/2006/main">
-            <a:off x="6843713" y="4257675"/>
-            <a:ext cx="0" cy="685800"/>
-          </a:xfrm>
-          <a:prstGeom xmlns:a="http://schemas.openxmlformats.org/drawingml/2006/main" prst="straightConnector1">
-            <a:avLst/>
-          </a:prstGeom>
-          <a:ln xmlns:a="http://schemas.openxmlformats.org/drawingml/2006/main" w="19050">
-            <a:solidFill>
-              <a:srgbClr val="D35656"/>
-            </a:solidFill>
-            <a:prstDash val="solid"/>
-            <a:headEnd type="arrow" w="sm" len="sm"/>
-          </a:ln>
-        </p:spPr>
-      </p:cxnSp>
-      <p:cxnSp>
-        <p:nvCxnSpPr>
-          <p:cNvPr id="84" name=""/>
-          <p:cNvCxnSpPr>
-            <a:stCxn xmlns:a="http://schemas.openxmlformats.org/drawingml/2006/main" id="18" idx="2"/>
-            <a:endCxn xmlns:a="http://schemas.openxmlformats.org/drawingml/2006/main" id="30" idx="0"/>
-          </p:cNvCxnSpPr>
-          <p:nvPr/>
-        </p:nvCxnSpPr>
-        <p:spPr>
-          <a:xfrm xmlns:a="http://schemas.openxmlformats.org/drawingml/2006/main">
-            <a:off x="8924925" y="4257675"/>
-            <a:ext cx="0" cy="685800"/>
-          </a:xfrm>
-          <a:prstGeom xmlns:a="http://schemas.openxmlformats.org/drawingml/2006/main" prst="straightConnector1">
-            <a:avLst/>
-          </a:prstGeom>
-          <a:ln xmlns:a="http://schemas.openxmlformats.org/drawingml/2006/main" w="19050">
-            <a:solidFill>
-              <a:srgbClr val="0E9F8E"/>
-            </a:solidFill>
-            <a:prstDash val="solid"/>
-            <a:headEnd type="arrow" w="sm" len="sm"/>
-          </a:ln>
-        </p:spPr>
-      </p:cxnSp>
-      <p:cxnSp>
-        <p:nvCxnSpPr>
-          <p:cNvPr id="85" name=""/>
-          <p:cNvCxnSpPr>
-            <a:stCxn xmlns:a="http://schemas.openxmlformats.org/drawingml/2006/main" id="30" idx="1"/>
-            <a:endCxn xmlns:a="http://schemas.openxmlformats.org/drawingml/2006/main" id="6" idx="2"/>
-          </p:cNvCxnSpPr>
-          <p:nvPr/>
-        </p:nvCxnSpPr>
-        <p:spPr>
-          <a:xfrm xmlns:a="http://schemas.openxmlformats.org/drawingml/2006/main" flipH="1" flipV="1">
-            <a:off x="1171575" y="4086225"/>
-            <a:ext cx="6943725" cy="1228725"/>
-          </a:xfrm>
-          <a:prstGeom xmlns:a="http://schemas.openxmlformats.org/drawingml/2006/main" prst="bentConnector4">
-            <a:avLst>
-              <a:gd name="adj1" fmla="val 3292"/>
-              <a:gd name="adj2" fmla="val 76744"/>
-            </a:avLst>
-          </a:prstGeom>
-          <a:ln xmlns:a="http://schemas.openxmlformats.org/drawingml/2006/main" w="19050">
-            <a:solidFill>
-              <a:srgbClr val="0E9F8E"/>
-            </a:solidFill>
-            <a:prstDash val="solid"/>
-            <a:headEnd type="arrow" w="sm" len="sm"/>
-          </a:ln>
-        </p:spPr>
-      </p:cxnSp>
-      <p:sp>
-        <p:nvSpPr>
-          <p:cNvPr id="42" name="">
-            <a:extLst xmlns:a="http://schemas.openxmlformats.org/drawingml/2006/main">
-              <a:ext uri="{FF2B5EF4-FFF2-40B4-BE49-F238E27FC236}">
-                <a16:creationId xmlns:a16="http://schemas.microsoft.com/office/drawing/2014/main" id="{52E7E095-A9EE-4433-90A6-CD9D1A99D199}"/>
-              </a:ext>
-            </a:extLst>
-          </p:cNvPr>
-          <p:cNvSpPr>
-            <a:spLocks xmlns:a="http://schemas.openxmlformats.org/drawingml/2006/main" noGrp="1"/>
-          </p:cNvSpPr>
-          <p:nvPr/>
-        </p:nvSpPr>
-        <p:spPr>
-          <a:xfrm xmlns:a="http://schemas.openxmlformats.org/drawingml/2006/main">
-            <a:off x="457200" y="5934075"/>
-            <a:ext cx="9525000" cy="209550"/>
-          </a:xfrm>
-          <a:prstGeom xmlns:a="http://schemas.openxmlformats.org/drawingml/2006/main" prst="rect">
-            <a:avLst/>
-          </a:prstGeom>
-          <a:noFill xmlns:a="http://schemas.openxmlformats.org/drawingml/2006/main"/>
-          <a:ln xmlns:a="http://schemas.openxmlformats.org/drawingml/2006/main" w="0">
-            <a:noFill/>
-            <a:prstDash val="solid"/>
-          </a:ln>
-        </p:spPr>
-        <p:txBody>
-          <a:bodyPr xmlns:a="http://schemas.openxmlformats.org/drawingml/2006/main"/>
-          <a:lstStyle xmlns:a="http://schemas.openxmlformats.org/drawingml/2006/main"/>
-          <a:p xmlns:a="http://schemas.openxmlformats.org/drawingml/2006/main">
-            <a:pPr algn="l">
-              <a:defRPr sz="1200" b="1" i="0">
-                <a:solidFill>
-                  <a:srgbClr val="0B1F33"/>
-                </a:solidFill>
-              </a:defRPr>
-            </a:pPr>
-            <a:r>
-              <a:rPr sz="1200" b="1" i="0">
-                <a:solidFill>
-                  <a:srgbClr val="0B1F33"/>
-                </a:solidFill>
-              </a:rPr>
-              <a:t>Every transition is explicit. Every side effect is isolated. Every closure is verified.</a:t>
-            </a:r>
-          </a:p>
-        </p:txBody>
-      </p:sp>
-      <p:sp>
-        <p:nvSpPr>
-          <p:cNvPr id="43" name="">
-            <a:extLst xmlns:a="http://schemas.openxmlformats.org/drawingml/2006/main">
-              <a:ext uri="{FF2B5EF4-FFF2-40B4-BE49-F238E27FC236}">
-                <a16:creationId xmlns:a16="http://schemas.microsoft.com/office/drawing/2014/main" id="{9C91E9E1-4C3B-4224-9DF9-BDBDAE963599}"/>
-              </a:ext>
-            </a:extLst>
-          </p:cNvPr>
-          <p:cNvSpPr>
-            <a:spLocks xmlns:a="http://schemas.openxmlformats.org/drawingml/2006/main" noGrp="1"/>
-          </p:cNvSpPr>
-          <p:nvPr/>
-        </p:nvSpPr>
-        <p:spPr>
-          <a:xfrm xmlns:a="http://schemas.openxmlformats.org/drawingml/2006/main">
-            <a:off x="457200" y="6457950"/>
-            <a:ext cx="8572500" cy="152400"/>
-          </a:xfrm>
-          <a:prstGeom xmlns:a="http://schemas.openxmlformats.org/drawingml/2006/main" prst="rect">
-            <a:avLst/>
-          </a:prstGeom>
-          <a:noFill xmlns:a="http://schemas.openxmlformats.org/drawingml/2006/main"/>
-          <a:ln xmlns:a="http://schemas.openxmlformats.org/drawingml/2006/main" w="0">
-            <a:noFill/>
-            <a:prstDash val="solid"/>
-          </a:ln>
-        </p:spPr>
-        <p:txBody>
-          <a:bodyPr xmlns:a="http://schemas.openxmlformats.org/drawingml/2006/main"/>
-          <a:lstStyle xmlns:a="http://schemas.openxmlformats.org/drawingml/2006/main"/>
-          <a:p xmlns:a="http://schemas.openxmlformats.org/drawingml/2006/main">
-            <a:pPr algn="l">
-              <a:defRPr sz="675" b="0" i="0">
-                <a:solidFill>
-                  <a:srgbClr val="8090A1"/>
-                </a:solidFill>
-              </a:defRPr>
-            </a:pPr>
-            <a:r>
-              <a:rPr sz="675" b="0" i="0">
-                <a:solidFill>
-                  <a:srgbClr val="8090A1"/>
-                </a:solidFill>
-              </a:rPr>
-              <a:t>Provider-specific code lives in one guarded adapter; the safety model is provider-neutral.</a:t>
-            </a:r>
-          </a:p>
-        </p:txBody>
-      </p:sp>
-      <p:sp>
-        <p:nvSpPr>
-          <p:cNvPr id="44" name="">
-            <a:extLst xmlns:a="http://schemas.openxmlformats.org/drawingml/2006/main">
-              <a:ext uri="{FF2B5EF4-FFF2-40B4-BE49-F238E27FC236}">
-                <a16:creationId xmlns:a16="http://schemas.microsoft.com/office/drawing/2014/main" id="{F08560FA-36B4-4C29-B3B9-16FD7264535F}"/>
-              </a:ext>
-            </a:extLst>
-          </p:cNvPr>
-          <p:cNvSpPr>
-            <a:spLocks xmlns:a="http://schemas.openxmlformats.org/drawingml/2006/main" noGrp="1"/>
-          </p:cNvSpPr>
-          <p:nvPr/>
-        </p:nvSpPr>
-        <p:spPr>
-          <a:xfrm xmlns:a="http://schemas.openxmlformats.org/drawingml/2006/main">
-            <a:off x="8382000" y="6457950"/>
-            <a:ext cx="3352800" cy="152400"/>
+      <p:sp>
+        <p:nvSpPr>
+          <p:cNvPr id="73" name="">
+            <a:extLst xmlns:a="http://schemas.openxmlformats.org/drawingml/2006/main">
+              <a:ext uri="{FF2B5EF4-FFF2-40B4-BE49-F238E27FC236}">
+                <a16:creationId xmlns:a16="http://schemas.microsoft.com/office/drawing/2014/main" id="{CE61A8B2-9A2B-429E-BAA9-6F7E289D620B}"/>
+              </a:ext>
+            </a:extLst>
+          </p:cNvPr>
+          <p:cNvSpPr>
+            <a:spLocks xmlns:a="http://schemas.openxmlformats.org/drawingml/2006/main" noGrp="1"/>
+          </p:cNvSpPr>
+          <p:nvPr/>
+        </p:nvSpPr>
+        <p:spPr>
+          <a:xfrm xmlns:a="http://schemas.openxmlformats.org/drawingml/2006/main">
+            <a:off x="457200" y="5905500"/>
+            <a:ext cx="11239500" cy="209550"/>
+          </a:xfrm>
+          <a:prstGeom xmlns:a="http://schemas.openxmlformats.org/drawingml/2006/main" prst="rect">
+            <a:avLst/>
+          </a:prstGeom>
+          <a:noFill xmlns:a="http://schemas.openxmlformats.org/drawingml/2006/main"/>
+          <a:ln xmlns:a="http://schemas.openxmlformats.org/drawingml/2006/main" w="0">
+            <a:noFill/>
+            <a:prstDash val="solid"/>
+          </a:ln>
+        </p:spPr>
+        <p:txBody>
+          <a:bodyPr xmlns:a="http://schemas.openxmlformats.org/drawingml/2006/main"/>
+          <a:lstStyle xmlns:a="http://schemas.openxmlformats.org/drawingml/2006/main"/>
+          <a:p xmlns:a="http://schemas.openxmlformats.org/drawingml/2006/main">
+            <a:pPr algn="l">
+              <a:defRPr sz="975" b="1" i="0">
+                <a:solidFill>
+                  <a:srgbClr val="D6E8F5"/>
+                </a:solidFill>
+              </a:defRPr>
+            </a:pPr>
+            <a:r>
+              <a:rPr sz="975" b="1" i="0">
+                <a:solidFill>
+                  <a:srgbClr val="D6E8F5"/>
+                </a:solidFill>
+              </a:rPr>
+              <a:t>Blast radius of a public URL = three TeXML routes. Proof flags are never set by model text. Live outreach requires OTP allowlist.</a:t>
+            </a:r>
+          </a:p>
+        </p:txBody>
+      </p:sp>
+      <p:sp>
+        <p:nvSpPr>
+          <p:cNvPr id="74" name="">
+            <a:extLst xmlns:a="http://schemas.openxmlformats.org/drawingml/2006/main">
+              <a:ext uri="{FF2B5EF4-FFF2-40B4-BE49-F238E27FC236}">
+                <a16:creationId xmlns:a16="http://schemas.microsoft.com/office/drawing/2014/main" id="{998398E7-2CF3-45A3-AB6F-0A601691AB88}"/>
+              </a:ext>
+            </a:extLst>
+          </p:cNvPr>
+          <p:cNvSpPr>
+            <a:spLocks xmlns:a="http://schemas.openxmlformats.org/drawingml/2006/main" noGrp="1"/>
+          </p:cNvSpPr>
+          <p:nvPr/>
+        </p:nvSpPr>
+        <p:spPr>
+          <a:xfrm xmlns:a="http://schemas.openxmlformats.org/drawingml/2006/main">
+            <a:off x="457200" y="6238875"/>
+            <a:ext cx="10477500" cy="171450"/>
+          </a:xfrm>
+          <a:prstGeom xmlns:a="http://schemas.openxmlformats.org/drawingml/2006/main" prst="rect">
+            <a:avLst/>
+          </a:prstGeom>
+          <a:noFill xmlns:a="http://schemas.openxmlformats.org/drawingml/2006/main"/>
+          <a:ln xmlns:a="http://schemas.openxmlformats.org/drawingml/2006/main" w="0">
+            <a:noFill/>
+            <a:prstDash val="solid"/>
+          </a:ln>
+        </p:spPr>
+        <p:txBody>
+          <a:bodyPr xmlns:a="http://schemas.openxmlformats.org/drawingml/2006/main"/>
+          <a:lstStyle xmlns:a="http://schemas.openxmlformats.org/drawingml/2006/main"/>
+          <a:p xmlns:a="http://schemas.openxmlformats.org/drawingml/2006/main">
+            <a:pPr algn="l">
+              <a:defRPr sz="825" b="0" i="0">
+                <a:solidFill>
+                  <a:srgbClr val="8BA1B5"/>
+                </a:solidFill>
+              </a:defRPr>
+            </a:pPr>
+            <a:r>
+              <a:rPr sz="825" b="0" i="0">
+                <a:solidFill>
+                  <a:srgbClr val="8BA1B5"/>
+                </a:solidFill>
+              </a:rPr>
+              <a:t>github.com/vnmoorthy/rxrelay  ·  docs/ARCHITECTURE.md  ·  PAVO paper openreview.net/forum?id=zrneoIxlFx</a:t>
+            </a:r>
+          </a:p>
+        </p:txBody>
+      </p:sp>
+      <p:sp>
+        <p:nvSpPr>
+          <p:cNvPr id="75" name="">
+            <a:extLst xmlns:a="http://schemas.openxmlformats.org/drawingml/2006/main">
+              <a:ext uri="{FF2B5EF4-FFF2-40B4-BE49-F238E27FC236}">
+                <a16:creationId xmlns:a16="http://schemas.microsoft.com/office/drawing/2014/main" id="{17CCABDF-8CCB-4B76-8131-5745653D1F85}"/>
+              </a:ext>
+            </a:extLst>
+          </p:cNvPr>
+          <p:cNvSpPr>
+            <a:spLocks xmlns:a="http://schemas.openxmlformats.org/drawingml/2006/main" noGrp="1"/>
+          </p:cNvSpPr>
+          <p:nvPr/>
+        </p:nvSpPr>
+        <p:spPr>
+          <a:xfrm xmlns:a="http://schemas.openxmlformats.org/drawingml/2006/main">
+            <a:off x="8572500" y="6477000"/>
+            <a:ext cx="3238500" cy="152400"/>
           </a:xfrm>
           <a:prstGeom xmlns:a="http://schemas.openxmlformats.org/drawingml/2006/main" prst="rect">
             <a:avLst/>
@@ -13518,14 +15286,14 @@
             <a:pPr algn="r">
               <a:defRPr sz="675" b="0" i="0">
                 <a:solidFill>
-                  <a:srgbClr val="8090A1"/>
+                  <a:srgbClr val="8BA1B5"/>
                 </a:solidFill>
               </a:defRPr>
             </a:pPr>
             <a:r>
               <a:rPr sz="675" b="0" i="0">
                 <a:solidFill>
-                  <a:srgbClr val="8090A1"/>
+                  <a:srgbClr val="8BA1B5"/>
                 </a:solidFill>
               </a:rPr>
               <a:t>A1MOBILE VOICE AI HACKATHON · 2026</a:t>
@@ -13536,7 +15304,7 @@
     </p:spTree>
     <p:extLst>
       <p:ext uri="{BB962C8B-B14F-4D97-AF65-F5344CB8AC3E}">
-        <p14:creationId xmlns:p14="http://schemas.microsoft.com/office/powerpoint/2010/main" val="1285706924"/>
+        <p14:creationId xmlns:p14="http://schemas.microsoft.com/office/powerpoint/2010/main" val="126420433"/>
       </p:ext>
     </p:extLst>
   </p:cSld>
@@ -13567,7 +15335,7 @@
           <p:cNvPr id="32" name="">
             <a:extLst xmlns:a="http://schemas.openxmlformats.org/drawingml/2006/main">
               <a:ext uri="{FF2B5EF4-FFF2-40B4-BE49-F238E27FC236}">
-                <a16:creationId xmlns:a16="http://schemas.microsoft.com/office/drawing/2014/main" id="{1920239C-5345-44AB-94C5-61CD40AB4EF7}"/>
+                <a16:creationId xmlns:a16="http://schemas.microsoft.com/office/drawing/2014/main" id="{2372F9D5-1823-454B-AE75-7351D6300A1E}"/>
               </a:ext>
             </a:extLst>
           </p:cNvPr>
@@ -13617,7 +15385,7 @@
           <p:cNvPr id="2" name="">
             <a:extLst xmlns:a="http://schemas.openxmlformats.org/drawingml/2006/main">
               <a:ext uri="{FF2B5EF4-FFF2-40B4-BE49-F238E27FC236}">
-                <a16:creationId xmlns:a16="http://schemas.microsoft.com/office/drawing/2014/main" id="{B4D06BE2-8048-4FB2-92FD-39433BB195BD}"/>
+                <a16:creationId xmlns:a16="http://schemas.microsoft.com/office/drawing/2014/main" id="{BCDFA09F-DA03-4C56-A3C2-C18A88F9A226}"/>
               </a:ext>
             </a:extLst>
           </p:cNvPr>
@@ -13667,7 +15435,7 @@
           <p:cNvPr id="3" name="">
             <a:extLst xmlns:a="http://schemas.openxmlformats.org/drawingml/2006/main">
               <a:ext uri="{FF2B5EF4-FFF2-40B4-BE49-F238E27FC236}">
-                <a16:creationId xmlns:a16="http://schemas.microsoft.com/office/drawing/2014/main" id="{295C29FF-7FFB-4B0E-972A-6D62BD3F2635}"/>
+                <a16:creationId xmlns:a16="http://schemas.microsoft.com/office/drawing/2014/main" id="{2B15BB13-242E-496B-BFC6-714496B2C322}"/>
               </a:ext>
             </a:extLst>
           </p:cNvPr>
@@ -13700,7 +15468,7 @@
           <p:cNvPr id="4" name="title">
             <a:extLst xmlns:a="http://schemas.openxmlformats.org/drawingml/2006/main">
               <a:ext uri="{FF2B5EF4-FFF2-40B4-BE49-F238E27FC236}">
-                <a16:creationId xmlns:a16="http://schemas.microsoft.com/office/drawing/2014/main" id="{883D12EF-B4F7-4D22-822A-50A93334C6E0}"/>
+                <a16:creationId xmlns:a16="http://schemas.microsoft.com/office/drawing/2014/main" id="{B6B8213F-A167-4780-BA33-2AC8BA9F7A72}"/>
               </a:ext>
             </a:extLst>
           </p:cNvPr>
@@ -13750,7 +15518,7 @@
           <p:cNvPr id="5" name="subtitle">
             <a:extLst xmlns:a="http://schemas.openxmlformats.org/drawingml/2006/main">
               <a:ext uri="{FF2B5EF4-FFF2-40B4-BE49-F238E27FC236}">
-                <a16:creationId xmlns:a16="http://schemas.microsoft.com/office/drawing/2014/main" id="{9C66FF02-DF9E-478D-8436-EE6B1137531E}"/>
+                <a16:creationId xmlns:a16="http://schemas.microsoft.com/office/drawing/2014/main" id="{80F24D9E-3FF7-4349-99DE-E1BB55118F40}"/>
               </a:ext>
             </a:extLst>
           </p:cNvPr>
@@ -13800,7 +15568,7 @@
           <p:cNvPr id="6" name="">
             <a:extLst xmlns:a="http://schemas.openxmlformats.org/drawingml/2006/main">
               <a:ext uri="{FF2B5EF4-FFF2-40B4-BE49-F238E27FC236}">
-                <a16:creationId xmlns:a16="http://schemas.microsoft.com/office/drawing/2014/main" id="{AC8E251D-ADE1-4C18-A66E-BFDBA2DF133C}"/>
+                <a16:creationId xmlns:a16="http://schemas.microsoft.com/office/drawing/2014/main" id="{BE25F887-81E1-45E1-A9EC-54996CADA6FE}"/>
               </a:ext>
             </a:extLst>
           </p:cNvPr>
@@ -13841,7 +15609,7 @@
           <p:cNvPr id="7" name="">
             <a:extLst xmlns:a="http://schemas.openxmlformats.org/drawingml/2006/main">
               <a:ext uri="{FF2B5EF4-FFF2-40B4-BE49-F238E27FC236}">
-                <a16:creationId xmlns:a16="http://schemas.microsoft.com/office/drawing/2014/main" id="{ECFD3288-9712-440A-8566-8EF21E9F850D}"/>
+                <a16:creationId xmlns:a16="http://schemas.microsoft.com/office/drawing/2014/main" id="{21CCE2D5-A3ED-4FC6-AC3E-DABE4B5B0662}"/>
               </a:ext>
             </a:extLst>
           </p:cNvPr>
@@ -13891,7 +15659,7 @@
           <p:cNvPr id="8" name="">
             <a:extLst xmlns:a="http://schemas.openxmlformats.org/drawingml/2006/main">
               <a:ext uri="{FF2B5EF4-FFF2-40B4-BE49-F238E27FC236}">
-                <a16:creationId xmlns:a16="http://schemas.microsoft.com/office/drawing/2014/main" id="{BFDDB416-87B4-4974-813A-8E23FBD597AC}"/>
+                <a16:creationId xmlns:a16="http://schemas.microsoft.com/office/drawing/2014/main" id="{3ADD09F0-3484-4C5D-B9E2-0FE49715CE43}"/>
               </a:ext>
             </a:extLst>
           </p:cNvPr>
@@ -13924,7 +15692,7 @@
           <p:cNvPr id="9" name="">
             <a:extLst xmlns:a="http://schemas.openxmlformats.org/drawingml/2006/main">
               <a:ext uri="{FF2B5EF4-FFF2-40B4-BE49-F238E27FC236}">
-                <a16:creationId xmlns:a16="http://schemas.microsoft.com/office/drawing/2014/main" id="{43EEE36E-6D06-484D-BEA0-E35B9A8F269B}"/>
+                <a16:creationId xmlns:a16="http://schemas.microsoft.com/office/drawing/2014/main" id="{3AACFE9A-253C-46FD-9F2B-526D88DAF0F1}"/>
               </a:ext>
             </a:extLst>
           </p:cNvPr>
@@ -13974,7 +15742,7 @@
           <p:cNvPr id="10" name="">
             <a:extLst xmlns:a="http://schemas.openxmlformats.org/drawingml/2006/main">
               <a:ext uri="{FF2B5EF4-FFF2-40B4-BE49-F238E27FC236}">
-                <a16:creationId xmlns:a16="http://schemas.microsoft.com/office/drawing/2014/main" id="{AD55D295-E8C9-451B-AFD9-43EE2C7E0882}"/>
+                <a16:creationId xmlns:a16="http://schemas.microsoft.com/office/drawing/2014/main" id="{C064A290-8D3A-48AB-9A78-98EE29EC7B50}"/>
               </a:ext>
             </a:extLst>
           </p:cNvPr>
@@ -14007,7 +15775,7 @@
           <p:cNvPr id="11" name="">
             <a:extLst xmlns:a="http://schemas.openxmlformats.org/drawingml/2006/main">
               <a:ext uri="{FF2B5EF4-FFF2-40B4-BE49-F238E27FC236}">
-                <a16:creationId xmlns:a16="http://schemas.microsoft.com/office/drawing/2014/main" id="{16331FC5-25C5-42CB-AABD-554830D17A95}"/>
+                <a16:creationId xmlns:a16="http://schemas.microsoft.com/office/drawing/2014/main" id="{0CF541CF-D6C2-4763-B53C-94220243A235}"/>
               </a:ext>
             </a:extLst>
           </p:cNvPr>
@@ -14057,7 +15825,7 @@
           <p:cNvPr id="12" name="">
             <a:extLst xmlns:a="http://schemas.openxmlformats.org/drawingml/2006/main">
               <a:ext uri="{FF2B5EF4-FFF2-40B4-BE49-F238E27FC236}">
-                <a16:creationId xmlns:a16="http://schemas.microsoft.com/office/drawing/2014/main" id="{55AC37A3-F273-47BB-A44C-A0971E6CFA3F}"/>
+                <a16:creationId xmlns:a16="http://schemas.microsoft.com/office/drawing/2014/main" id="{4B82A5A7-20A9-4E3C-AB0B-C37B608EBAA0}"/>
               </a:ext>
             </a:extLst>
           </p:cNvPr>
@@ -14090,7 +15858,7 @@
           <p:cNvPr id="13" name="">
             <a:extLst xmlns:a="http://schemas.openxmlformats.org/drawingml/2006/main">
               <a:ext uri="{FF2B5EF4-FFF2-40B4-BE49-F238E27FC236}">
-                <a16:creationId xmlns:a16="http://schemas.microsoft.com/office/drawing/2014/main" id="{F1B1430F-C496-4440-9EE6-2B062A8D8170}"/>
+                <a16:creationId xmlns:a16="http://schemas.microsoft.com/office/drawing/2014/main" id="{3C8C84A8-71ED-4534-8B7F-F2B74B32C8AC}"/>
               </a:ext>
             </a:extLst>
           </p:cNvPr>
@@ -14140,7 +15908,7 @@
           <p:cNvPr id="14" name="">
             <a:extLst xmlns:a="http://schemas.openxmlformats.org/drawingml/2006/main">
               <a:ext uri="{FF2B5EF4-FFF2-40B4-BE49-F238E27FC236}">
-                <a16:creationId xmlns:a16="http://schemas.microsoft.com/office/drawing/2014/main" id="{40D7E205-1D75-4B4C-AF7F-056BE2DB1E11}"/>
+                <a16:creationId xmlns:a16="http://schemas.microsoft.com/office/drawing/2014/main" id="{1E6A793A-0C9B-4BCD-88A2-3C030909A4AE}"/>
               </a:ext>
             </a:extLst>
           </p:cNvPr>
@@ -14173,7 +15941,7 @@
           <p:cNvPr id="15" name="">
             <a:extLst xmlns:a="http://schemas.openxmlformats.org/drawingml/2006/main">
               <a:ext uri="{FF2B5EF4-FFF2-40B4-BE49-F238E27FC236}">
-                <a16:creationId xmlns:a16="http://schemas.microsoft.com/office/drawing/2014/main" id="{4CADAB8B-FE16-4A9E-8241-578CAAD9E6CD}"/>
+                <a16:creationId xmlns:a16="http://schemas.microsoft.com/office/drawing/2014/main" id="{4D6D0670-B781-43DB-838F-56DE6568A0EF}"/>
               </a:ext>
             </a:extLst>
           </p:cNvPr>
@@ -14223,7 +15991,7 @@
           <p:cNvPr id="16" name="">
             <a:extLst xmlns:a="http://schemas.openxmlformats.org/drawingml/2006/main">
               <a:ext uri="{FF2B5EF4-FFF2-40B4-BE49-F238E27FC236}">
-                <a16:creationId xmlns:a16="http://schemas.microsoft.com/office/drawing/2014/main" id="{5AAD6382-CD10-438A-BC15-BC5686E734D1}"/>
+                <a16:creationId xmlns:a16="http://schemas.microsoft.com/office/drawing/2014/main" id="{3F4CBB51-3CF6-4D5F-821A-EC703153E92B}"/>
               </a:ext>
             </a:extLst>
           </p:cNvPr>
@@ -14264,7 +16032,7 @@
           <p:cNvPr id="17" name="">
             <a:extLst xmlns:a="http://schemas.openxmlformats.org/drawingml/2006/main">
               <a:ext uri="{FF2B5EF4-FFF2-40B4-BE49-F238E27FC236}">
-                <a16:creationId xmlns:a16="http://schemas.microsoft.com/office/drawing/2014/main" id="{EDD383CC-1E8C-4A45-B204-8753999F9375}"/>
+                <a16:creationId xmlns:a16="http://schemas.microsoft.com/office/drawing/2014/main" id="{1AD88283-F170-4C6B-88A2-03655C46064A}"/>
               </a:ext>
             </a:extLst>
           </p:cNvPr>
@@ -14314,7 +16082,7 @@
           <p:cNvPr id="18" name="">
             <a:extLst xmlns:a="http://schemas.openxmlformats.org/drawingml/2006/main">
               <a:ext uri="{FF2B5EF4-FFF2-40B4-BE49-F238E27FC236}">
-                <a16:creationId xmlns:a16="http://schemas.microsoft.com/office/drawing/2014/main" id="{8D69640E-3507-4767-8594-0E9E31BF21EE}"/>
+                <a16:creationId xmlns:a16="http://schemas.microsoft.com/office/drawing/2014/main" id="{0D38900C-03F7-42CB-AA68-318BC3BC6819}"/>
               </a:ext>
             </a:extLst>
           </p:cNvPr>
@@ -14347,7 +16115,7 @@
           <p:cNvPr id="19" name="">
             <a:extLst xmlns:a="http://schemas.openxmlformats.org/drawingml/2006/main">
               <a:ext uri="{FF2B5EF4-FFF2-40B4-BE49-F238E27FC236}">
-                <a16:creationId xmlns:a16="http://schemas.microsoft.com/office/drawing/2014/main" id="{59B66B80-11D0-44A0-9EC1-D4EC1F52AB5A}"/>
+                <a16:creationId xmlns:a16="http://schemas.microsoft.com/office/drawing/2014/main" id="{1FC58675-9995-492B-9084-267E350247B5}"/>
               </a:ext>
             </a:extLst>
           </p:cNvPr>
@@ -14397,7 +16165,7 @@
           <p:cNvPr id="20" name="">
             <a:extLst xmlns:a="http://schemas.openxmlformats.org/drawingml/2006/main">
               <a:ext uri="{FF2B5EF4-FFF2-40B4-BE49-F238E27FC236}">
-                <a16:creationId xmlns:a16="http://schemas.microsoft.com/office/drawing/2014/main" id="{C444FC11-7279-4FAD-9BC1-BC1B0A2CDC5F}"/>
+                <a16:creationId xmlns:a16="http://schemas.microsoft.com/office/drawing/2014/main" id="{2FE3EF8A-4337-4C57-AC97-EB2D020F48F9}"/>
               </a:ext>
             </a:extLst>
           </p:cNvPr>
@@ -14447,7 +16215,7 @@
           <p:cNvPr id="21" name="">
             <a:extLst xmlns:a="http://schemas.openxmlformats.org/drawingml/2006/main">
               <a:ext uri="{FF2B5EF4-FFF2-40B4-BE49-F238E27FC236}">
-                <a16:creationId xmlns:a16="http://schemas.microsoft.com/office/drawing/2014/main" id="{67290B2D-5F4C-4530-A73B-BD366D2A8C5E}"/>
+                <a16:creationId xmlns:a16="http://schemas.microsoft.com/office/drawing/2014/main" id="{F605C82C-842E-4F2E-9DA0-9564A16936AD}"/>
               </a:ext>
             </a:extLst>
           </p:cNvPr>
@@ -14480,7 +16248,7 @@
           <p:cNvPr id="22" name="">
             <a:extLst xmlns:a="http://schemas.openxmlformats.org/drawingml/2006/main">
               <a:ext uri="{FF2B5EF4-FFF2-40B4-BE49-F238E27FC236}">
-                <a16:creationId xmlns:a16="http://schemas.microsoft.com/office/drawing/2014/main" id="{322CBCF5-69DD-4A4E-BD3A-93AF53E11BB4}"/>
+                <a16:creationId xmlns:a16="http://schemas.microsoft.com/office/drawing/2014/main" id="{1FD9DEA3-CC19-422E-A618-9B5828A474EB}"/>
               </a:ext>
             </a:extLst>
           </p:cNvPr>
@@ -14530,7 +16298,7 @@
           <p:cNvPr id="23" name="">
             <a:extLst xmlns:a="http://schemas.openxmlformats.org/drawingml/2006/main">
               <a:ext uri="{FF2B5EF4-FFF2-40B4-BE49-F238E27FC236}">
-                <a16:creationId xmlns:a16="http://schemas.microsoft.com/office/drawing/2014/main" id="{9A42A7D4-97F9-4BEF-8EA0-F65CAA07898F}"/>
+                <a16:creationId xmlns:a16="http://schemas.microsoft.com/office/drawing/2014/main" id="{E8817C1D-5C1A-4690-B9A8-DCE9BA755FEE}"/>
               </a:ext>
             </a:extLst>
           </p:cNvPr>
@@ -14580,7 +16348,7 @@
           <p:cNvPr id="24" name="">
             <a:extLst xmlns:a="http://schemas.openxmlformats.org/drawingml/2006/main">
               <a:ext uri="{FF2B5EF4-FFF2-40B4-BE49-F238E27FC236}">
-                <a16:creationId xmlns:a16="http://schemas.microsoft.com/office/drawing/2014/main" id="{34DA7434-35FD-4E35-86B0-5D01C409F98F}"/>
+                <a16:creationId xmlns:a16="http://schemas.microsoft.com/office/drawing/2014/main" id="{F02E8378-F7D2-4853-871A-1C88038F01DA}"/>
               </a:ext>
             </a:extLst>
           </p:cNvPr>
@@ -14613,7 +16381,7 @@
           <p:cNvPr id="25" name="">
             <a:extLst xmlns:a="http://schemas.openxmlformats.org/drawingml/2006/main">
               <a:ext uri="{FF2B5EF4-FFF2-40B4-BE49-F238E27FC236}">
-                <a16:creationId xmlns:a16="http://schemas.microsoft.com/office/drawing/2014/main" id="{5EC1745C-FF5A-4610-83D9-8B9C2141275F}"/>
+                <a16:creationId xmlns:a16="http://schemas.microsoft.com/office/drawing/2014/main" id="{D870C281-198B-4502-BBE4-FC8A5385AE1A}"/>
               </a:ext>
             </a:extLst>
           </p:cNvPr>
@@ -14663,7 +16431,7 @@
           <p:cNvPr id="26" name="">
             <a:extLst xmlns:a="http://schemas.openxmlformats.org/drawingml/2006/main">
               <a:ext uri="{FF2B5EF4-FFF2-40B4-BE49-F238E27FC236}">
-                <a16:creationId xmlns:a16="http://schemas.microsoft.com/office/drawing/2014/main" id="{356822D0-84AA-4032-BCE0-8B66E715EA5C}"/>
+                <a16:creationId xmlns:a16="http://schemas.microsoft.com/office/drawing/2014/main" id="{3EB03B26-D40A-44A5-AE29-16A389E56A70}"/>
               </a:ext>
             </a:extLst>
           </p:cNvPr>
@@ -14713,7 +16481,7 @@
           <p:cNvPr id="27" name="">
             <a:extLst xmlns:a="http://schemas.openxmlformats.org/drawingml/2006/main">
               <a:ext uri="{FF2B5EF4-FFF2-40B4-BE49-F238E27FC236}">
-                <a16:creationId xmlns:a16="http://schemas.microsoft.com/office/drawing/2014/main" id="{98148829-D122-44BA-83A4-E12097E67797}"/>
+                <a16:creationId xmlns:a16="http://schemas.microsoft.com/office/drawing/2014/main" id="{476A9D33-E4A0-4F55-BBBF-9D0379F924E0}"/>
               </a:ext>
             </a:extLst>
           </p:cNvPr>
@@ -14746,7 +16514,7 @@
           <p:cNvPr id="28" name="">
             <a:extLst xmlns:a="http://schemas.openxmlformats.org/drawingml/2006/main">
               <a:ext uri="{FF2B5EF4-FFF2-40B4-BE49-F238E27FC236}">
-                <a16:creationId xmlns:a16="http://schemas.microsoft.com/office/drawing/2014/main" id="{92E4A1D8-51B5-4074-AC40-8C71350C4104}"/>
+                <a16:creationId xmlns:a16="http://schemas.microsoft.com/office/drawing/2014/main" id="{1E3ED6CE-3906-4728-A5D0-AF015DDBC637}"/>
               </a:ext>
             </a:extLst>
           </p:cNvPr>
@@ -14796,7 +16564,7 @@
           <p:cNvPr id="29" name="">
             <a:extLst xmlns:a="http://schemas.openxmlformats.org/drawingml/2006/main">
               <a:ext uri="{FF2B5EF4-FFF2-40B4-BE49-F238E27FC236}">
-                <a16:creationId xmlns:a16="http://schemas.microsoft.com/office/drawing/2014/main" id="{BF002398-724C-4929-8C6A-EBA6656235A5}"/>
+                <a16:creationId xmlns:a16="http://schemas.microsoft.com/office/drawing/2014/main" id="{15BDACCA-7225-4F89-BCDD-D2F9F58B4AD1}"/>
               </a:ext>
             </a:extLst>
           </p:cNvPr>
@@ -14846,7 +16614,7 @@
           <p:cNvPr id="30" name="">
             <a:extLst xmlns:a="http://schemas.openxmlformats.org/drawingml/2006/main">
               <a:ext uri="{FF2B5EF4-FFF2-40B4-BE49-F238E27FC236}">
-                <a16:creationId xmlns:a16="http://schemas.microsoft.com/office/drawing/2014/main" id="{D45B6A3F-C35C-4192-928B-49BE6A0960CF}"/>
+                <a16:creationId xmlns:a16="http://schemas.microsoft.com/office/drawing/2014/main" id="{78B6A081-1DC7-410D-A41E-C45716ADE73A}"/>
               </a:ext>
             </a:extLst>
           </p:cNvPr>
@@ -14896,7 +16664,7 @@
           <p:cNvPr id="31" name="">
             <a:extLst xmlns:a="http://schemas.openxmlformats.org/drawingml/2006/main">
               <a:ext uri="{FF2B5EF4-FFF2-40B4-BE49-F238E27FC236}">
-                <a16:creationId xmlns:a16="http://schemas.microsoft.com/office/drawing/2014/main" id="{D02C2882-DD2D-49C2-B3F3-EACD1CBF0EF8}"/>
+                <a16:creationId xmlns:a16="http://schemas.microsoft.com/office/drawing/2014/main" id="{FE8ED77F-AF74-4180-9916-CE4F1C57DCFD}"/>
               </a:ext>
             </a:extLst>
           </p:cNvPr>
@@ -14944,7 +16712,7 @@
     </p:spTree>
     <p:extLst>
       <p:ext uri="{BB962C8B-B14F-4D97-AF65-F5344CB8AC3E}">
-        <p14:creationId xmlns:p14="http://schemas.microsoft.com/office/powerpoint/2010/main" val="626662797"/>
+        <p14:creationId xmlns:p14="http://schemas.microsoft.com/office/powerpoint/2010/main" val="1415381687"/>
       </p:ext>
     </p:extLst>
   </p:cSld>

--- a/deck/output/RxRelay_Hackathon_Pitch.pptx
+++ b/deck/output/RxRelay_Hackathon_Pitch.pptx
@@ -2,7 +2,7 @@
 <file path=ppt/presentation.xml><?xml version="1.0" encoding="utf-8"?>
 <p:presentation xmlns:a="http://schemas.openxmlformats.org/drawingml/2006/main" xmlns:r="http://schemas.openxmlformats.org/officeDocument/2006/relationships" xmlns:p="http://schemas.openxmlformats.org/presentationml/2006/main" saveSubsetFonts="1">
   <p:sldMasterIdLst>
-    <p:sldMasterId id="2147483648" r:id="rId13"/>
+    <p:sldMasterId id="2147483648" r:id="rId14"/>
   </p:sldMasterIdLst>
   <p:sldIdLst>
     <p:sldId id="256" r:id="rId1"/>
@@ -17,6 +17,7 @@
     <p:sldId id="265" r:id="rId10"/>
     <p:sldId id="266" r:id="rId11"/>
     <p:sldId id="267" r:id="rId12"/>
+    <p:sldId id="268" r:id="rId13"/>
   </p:sldIdLst>
   <p:sldSz cx="9144000" cy="5143500" type="screen16x9"/>
   <p:notesSz cx="6858000" cy="9144000"/>
@@ -203,7 +204,7 @@
                 </a:solidFill>
                 <a:latin typeface="Calibri"/>
               </a:rPr>
-              <a:t>Catalyst fit: evidence over demo theater, a1 as load-bearing infra, open PAVO research lineage.</a:t>
+              <a:t>Company slide: do not claim we capture $93B. TAM is voice AI in healthcare; $93B is the pain pool that justifies budget. Beachhead is specialty access desks that already buy telephony.</a:t>
             </a:r>
           </a:p>
         </p:txBody>
@@ -257,7 +258,61 @@
                 </a:solidFill>
                 <a:latin typeface="Calibri"/>
               </a:rPr>
-              <a:t>End on conviction. Invite judges to live board and safety stop. Next: OTP SMS + production tunnel.</a:t>
+              <a:t>Catalyst fit: evidence over demo theater, a1 as load-bearing infra, open PAVO research lineage.</a:t>
+            </a:r>
+          </a:p>
+        </p:txBody>
+      </p:sp>
+    </p:spTree>
+  </p:cSld>
+</p:notes>
+</file>
+
+<file path=ppt/notesSlides/notesSlide13.xml><?xml version="1.0" encoding="utf-8"?>
+<p:notes xmlns:a="http://schemas.openxmlformats.org/drawingml/2006/main" xmlns:r="http://schemas.openxmlformats.org/officeDocument/2006/relationships" xmlns:p="http://schemas.openxmlformats.org/presentationml/2006/main">
+  <p:cSld>
+    <p:spTree>
+      <p:nvGrpSpPr>
+        <p:cNvPr id="1" name=""/>
+        <p:cNvGrpSpPr/>
+        <p:nvPr/>
+      </p:nvGrpSpPr>
+      <p:grpSpPr>
+        <a:xfrm>
+          <a:off x="0" y="0"/>
+          <a:ext cx="6858000" cy="9144000"/>
+          <a:chOff x="0" y="0"/>
+          <a:chExt cx="6858000" cy="9144000"/>
+        </a:xfrm>
+      </p:grpSpPr>
+      <p:sp>
+        <p:nvSpPr>
+          <p:cNvPr id="2" name="Notes"/>
+          <p:cNvSpPr txBox="1"/>
+          <p:nvPr/>
+        </p:nvSpPr>
+        <p:spPr>
+          <a:xfrm>
+            <a:off x="457200" y="457200"/>
+            <a:ext cx="5943600" cy="8229600"/>
+          </a:xfrm>
+          <a:prstGeom prst="rect">
+            <a:avLst/>
+          </a:prstGeom>
+        </p:spPr>
+        <p:txBody>
+          <a:bodyPr wrap="square" rtlCol="0"/>
+          <a:lstStyle/>
+          <a:p>
+            <a:pPr algn="l"/>
+            <a:r>
+              <a:rPr lang="en-US" sz="1400">
+                <a:solidFill>
+                  <a:srgbClr val="04131F"/>
+                </a:solidFill>
+                <a:latin typeface="Calibri"/>
+              </a:rPr>
+              <a:t>End on conviction. Invite judges to live board and safety stop. Next: OTP SMS + production tunnel + specialty access pilots.</a:t>
             </a:r>
           </a:p>
         </p:txBody>
@@ -1402,7 +1457,7 @@
   <p:bg>
     <p:bgPr>
       <a:solidFill>
-        <a:srgbClr val="F4F7F9"/>
+        <a:srgbClr val="04131F"/>
       </a:solidFill>
       <a:effectLst/>
     </p:bgPr>
@@ -1453,7 +1508,7 @@
                 </a:solidFill>
                 <a:latin typeface="Calibri"/>
               </a:rPr>
-              <a:t>WHY INVEST / CATALYST FIT</a:t>
+              <a:t>COMPANY OPPORTUNITY</a:t>
             </a:r>
           </a:p>
         </p:txBody>
@@ -1485,7 +1540,7 @@
             <a:r>
               <a:rPr lang="en-US" sz="900" b="1">
                 <a:solidFill>
-                  <a:srgbClr val="5C6B78"/>
+                  <a:srgbClr val="8EA0AE"/>
                 </a:solidFill>
                 <a:latin typeface="Calibri"/>
               </a:rPr>
@@ -1521,24 +1576,132 @@
             <a:r>
               <a:rPr lang="en-US" sz="3600" b="1">
                 <a:solidFill>
-                  <a:srgbClr val="04131F"/>
-                </a:solidFill>
-                <a:latin typeface="Calibri"/>
-              </a:rPr>
-              <a:t>Evidence culture. Load-bearing network. Open research.</a:t>
-            </a:r>
-          </a:p>
-        </p:txBody>
-      </p:sp>
-      <p:sp>
-        <p:nvSpPr>
-          <p:cNvPr id="5" name="Bullet"/>
-          <p:cNvSpPr txBox="1"/>
-          <p:nvPr/>
-        </p:nvSpPr>
-        <p:spPr>
-          <a:xfrm>
-            <a:off x="537200" y="1500000"/>
+                  <a:srgbClr val="FFFFFF"/>
+                </a:solidFill>
+                <a:latin typeface="Calibri"/>
+              </a:rPr>
+              <a:t>A real company wedge: medication-access coordination.</a:t>
+            </a:r>
+          </a:p>
+        </p:txBody>
+      </p:sp>
+      <p:sp>
+        <p:nvSpPr>
+          <p:cNvPr id="5" name="Body"/>
+          <p:cNvSpPr txBox="1"/>
+          <p:nvPr/>
+        </p:nvSpPr>
+        <p:spPr>
+          <a:xfrm>
+            <a:off x="457200" y="1500000"/>
+            <a:ext cx="8229600" cy="360000"/>
+          </a:xfrm>
+          <a:prstGeom prst="rect">
+            <a:avLst/>
+          </a:prstGeom>
+          <a:noFill/>
+          <a:ln>
+            <a:noFill/>
+          </a:ln>
+        </p:spPr>
+        <p:txBody>
+          <a:bodyPr wrap="square" rtlCol="0"/>
+          <a:lstStyle/>
+          <a:p>
+            <a:pPr algn="l"/>
+            <a:r>
+              <a:rPr lang="en-US" sz="1800">
+                <a:solidFill>
+                  <a:srgbClr val="8EA0AE"/>
+                </a:solidFill>
+                <a:latin typeface="Calibri"/>
+              </a:rPr>
+              <a:t>TAM: AI voice agents in healthcare ~$0.5–2.1B (2025; definition-dependent).</a:t>
+            </a:r>
+          </a:p>
+        </p:txBody>
+      </p:sp>
+      <p:sp>
+        <p:nvSpPr>
+          <p:cNvPr id="6" name="Body"/>
+          <p:cNvSpPr txBox="1"/>
+          <p:nvPr/>
+        </p:nvSpPr>
+        <p:spPr>
+          <a:xfrm>
+            <a:off x="457200" y="1880000"/>
+            <a:ext cx="8229600" cy="360000"/>
+          </a:xfrm>
+          <a:prstGeom prst="rect">
+            <a:avLst/>
+          </a:prstGeom>
+          <a:noFill/>
+          <a:ln>
+            <a:noFill/>
+          </a:ln>
+        </p:spPr>
+        <p:txBody>
+          <a:bodyPr wrap="square" rtlCol="0"/>
+          <a:lstStyle/>
+          <a:p>
+            <a:pPr algn="l"/>
+            <a:r>
+              <a:rPr lang="en-US" sz="1800">
+                <a:solidFill>
+                  <a:srgbClr val="8EA0AE"/>
+                </a:solidFill>
+                <a:latin typeface="Calibri"/>
+              </a:rPr>
+              <a:t>Pain pool / SAM signal: ~$93B navigating utilization management (Health Affairs); CAQH ~$89B admin transactions.</a:t>
+            </a:r>
+          </a:p>
+        </p:txBody>
+      </p:sp>
+      <p:sp>
+        <p:nvSpPr>
+          <p:cNvPr id="7" name="Body"/>
+          <p:cNvSpPr txBox="1"/>
+          <p:nvPr/>
+        </p:nvSpPr>
+        <p:spPr>
+          <a:xfrm>
+            <a:off x="457200" y="2260000"/>
+            <a:ext cx="8229600" cy="360000"/>
+          </a:xfrm>
+          <a:prstGeom prst="rect">
+            <a:avLst/>
+          </a:prstGeom>
+          <a:noFill/>
+          <a:ln>
+            <a:noFill/>
+          </a:ln>
+        </p:spPr>
+        <p:txBody>
+          <a:bodyPr wrap="square" rtlCol="0"/>
+          <a:lstStyle/>
+          <a:p>
+            <a:pPr algn="l"/>
+            <a:r>
+              <a:rPr lang="en-US" sz="1800">
+                <a:solidFill>
+                  <a:srgbClr val="8EA0AE"/>
+                </a:solidFill>
+                <a:latin typeface="Calibri"/>
+              </a:rPr>
+              <a:t>SOM beachhead: specialty pharmacies, patient hubs, digital pharmacies — priced per resolved case, not per chat.</a:t>
+            </a:r>
+          </a:p>
+        </p:txBody>
+      </p:sp>
+      <p:sp>
+        <p:nvSpPr>
+          <p:cNvPr id="8" name="Bullet"/>
+          <p:cNvSpPr txBox="1"/>
+          <p:nvPr/>
+        </p:nvSpPr>
+        <p:spPr>
+          <a:xfrm>
+            <a:off x="537200" y="2640000"/>
             <a:ext cx="8149600" cy="320000"/>
           </a:xfrm>
           <a:prstGeom prst="rect">
@@ -1557,24 +1720,24 @@
             <a:r>
               <a:rPr lang="en-US" sz="1500">
                 <a:solidFill>
-                  <a:srgbClr val="04131F"/>
-                </a:solidFill>
-                <a:latin typeface="Calibri"/>
-              </a:rPr>
-              <a:t>• Evidence culture — proof gates, signed receipts, Groundtruth / MCP Observatory discipline</a:t>
-            </a:r>
-          </a:p>
-        </p:txBody>
-      </p:sp>
-      <p:sp>
-        <p:nvSpPr>
-          <p:cNvPr id="6" name="Bullet"/>
-          <p:cNvSpPr txBox="1"/>
-          <p:nvPr/>
-        </p:nvSpPr>
-        <p:spPr>
-          <a:xfrm>
-            <a:off x="537200" y="1840000"/>
+                  <a:srgbClr val="FFFFFF"/>
+                </a:solidFill>
+                <a:latin typeface="Calibri"/>
+              </a:rPr>
+              <a:t>• Charge for resolved access cases — not words spoken</a:t>
+            </a:r>
+          </a:p>
+        </p:txBody>
+      </p:sp>
+      <p:sp>
+        <p:nvSpPr>
+          <p:cNvPr id="9" name="Bullet"/>
+          <p:cNvSpPr txBox="1"/>
+          <p:nvPr/>
+        </p:nvSpPr>
+        <p:spPr>
+          <a:xfrm>
+            <a:off x="537200" y="2980000"/>
             <a:ext cx="8149600" cy="320000"/>
           </a:xfrm>
           <a:prstGeom prst="rect">
@@ -1593,24 +1756,24 @@
             <a:r>
               <a:rPr lang="en-US" sz="1500">
                 <a:solidFill>
-                  <a:srgbClr val="04131F"/>
-                </a:solidFill>
-                <a:latin typeface="Calibri"/>
-              </a:rPr>
-              <a:t>• a1 network — TeXML voice, OTP SMS, number verify — real telco primitives</a:t>
-            </a:r>
-          </a:p>
-        </p:txBody>
-      </p:sp>
-      <p:sp>
-        <p:nvSpPr>
-          <p:cNvPr id="7" name="Bullet"/>
-          <p:cNvSpPr txBox="1"/>
-          <p:nvPr/>
-        </p:nvSpPr>
-        <p:spPr>
-          <a:xfrm>
-            <a:off x="537200" y="2180000"/>
+                  <a:srgbClr val="FFFFFF"/>
+                </a:solidFill>
+                <a:latin typeface="Calibri"/>
+              </a:rPr>
+              <a:t>• Wedge: evidence-gated coordination where PA / status loops already burn staff</a:t>
+            </a:r>
+          </a:p>
+        </p:txBody>
+      </p:sp>
+      <p:sp>
+        <p:nvSpPr>
+          <p:cNvPr id="10" name="Bullet"/>
+          <p:cNvSpPr txBox="1"/>
+          <p:nvPr/>
+        </p:nvSpPr>
+        <p:spPr>
+          <a:xfrm>
+            <a:off x="537200" y="3320000"/>
             <a:ext cx="8149600" cy="320000"/>
           </a:xfrm>
           <a:prstGeom prst="rect">
@@ -1629,18 +1792,18 @@
             <a:r>
               <a:rPr lang="en-US" sz="1500">
                 <a:solidFill>
-                  <a:srgbClr val="04131F"/>
-                </a:solidFill>
-                <a:latin typeface="Calibri"/>
-              </a:rPr>
-              <a:t>• Open research PAVO — paper + pavo-bench benchmark alongside product</a:t>
-            </a:r>
-          </a:p>
-        </p:txBody>
-      </p:sp>
-      <p:sp>
-        <p:nvSpPr>
-          <p:cNvPr id="8" name="Footer"/>
+                  <a:srgbClr val="FFFFFF"/>
+                </a:solidFill>
+                <a:latin typeface="Calibri"/>
+              </a:rPr>
+              <a:t>• Sources: Towards Healthcare · Healthcare Foresights · Health Affairs · CAQH Index 2023 (directional)</a:t>
+            </a:r>
+          </a:p>
+        </p:txBody>
+      </p:sp>
+      <p:sp>
+        <p:nvSpPr>
+          <p:cNvPr id="11" name="Footer"/>
           <p:cNvSpPr txBox="1"/>
           <p:nvPr/>
         </p:nvSpPr>
@@ -1665,11 +1828,11 @@
             <a:r>
               <a:rPr lang="en-US" sz="900">
                 <a:solidFill>
-                  <a:srgbClr val="5C6B78"/>
-                </a:solidFill>
-                <a:latin typeface="Calibri"/>
-              </a:rPr>
-              <a:t>Real problem · real voice UX · real safety · it actually runs.</a:t>
+                  <a:srgbClr val="8EA0AE"/>
+                </a:solidFill>
+                <a:latin typeface="Calibri"/>
+              </a:rPr>
+              <a:t>Own the proof-gated access workflow.</a:t>
             </a:r>
           </a:p>
         </p:txBody>
@@ -1687,7 +1850,7 @@
   <p:bg>
     <p:bgPr>
       <a:solidFill>
-        <a:srgbClr val="04131F"/>
+        <a:srgbClr val="F4F7F9"/>
       </a:solidFill>
       <a:effectLst/>
     </p:bgPr>
@@ -1738,7 +1901,7 @@
                 </a:solidFill>
                 <a:latin typeface="Calibri"/>
               </a:rPr>
-              <a:t>ASK</a:t>
+              <a:t>WHY INVEST / CATALYST FIT</a:t>
             </a:r>
           </a:p>
         </p:txBody>
@@ -1770,7 +1933,7 @@
             <a:r>
               <a:rPr lang="en-US" sz="900" b="1">
                 <a:solidFill>
-                  <a:srgbClr val="8EA0AE"/>
+                  <a:srgbClr val="5C6B78"/>
                 </a:solidFill>
                 <a:latin typeface="Calibri"/>
               </a:rPr>
@@ -1806,6 +1969,291 @@
             <a:r>
               <a:rPr lang="en-US" sz="3600" b="1">
                 <a:solidFill>
+                  <a:srgbClr val="04131F"/>
+                </a:solidFill>
+                <a:latin typeface="Calibri"/>
+              </a:rPr>
+              <a:t>Evidence culture. Load-bearing network. Open research.</a:t>
+            </a:r>
+          </a:p>
+        </p:txBody>
+      </p:sp>
+      <p:sp>
+        <p:nvSpPr>
+          <p:cNvPr id="5" name="Bullet"/>
+          <p:cNvSpPr txBox="1"/>
+          <p:nvPr/>
+        </p:nvSpPr>
+        <p:spPr>
+          <a:xfrm>
+            <a:off x="537200" y="1500000"/>
+            <a:ext cx="8149600" cy="320000"/>
+          </a:xfrm>
+          <a:prstGeom prst="rect">
+            <a:avLst/>
+          </a:prstGeom>
+          <a:noFill/>
+          <a:ln>
+            <a:noFill/>
+          </a:ln>
+        </p:spPr>
+        <p:txBody>
+          <a:bodyPr wrap="square" rtlCol="0"/>
+          <a:lstStyle/>
+          <a:p>
+            <a:pPr algn="l"/>
+            <a:r>
+              <a:rPr lang="en-US" sz="1500">
+                <a:solidFill>
+                  <a:srgbClr val="04131F"/>
+                </a:solidFill>
+                <a:latin typeface="Calibri"/>
+              </a:rPr>
+              <a:t>• Evidence culture — proof gates, signed receipts, Groundtruth / MCP Observatory discipline</a:t>
+            </a:r>
+          </a:p>
+        </p:txBody>
+      </p:sp>
+      <p:sp>
+        <p:nvSpPr>
+          <p:cNvPr id="6" name="Bullet"/>
+          <p:cNvSpPr txBox="1"/>
+          <p:nvPr/>
+        </p:nvSpPr>
+        <p:spPr>
+          <a:xfrm>
+            <a:off x="537200" y="1840000"/>
+            <a:ext cx="8149600" cy="320000"/>
+          </a:xfrm>
+          <a:prstGeom prst="rect">
+            <a:avLst/>
+          </a:prstGeom>
+          <a:noFill/>
+          <a:ln>
+            <a:noFill/>
+          </a:ln>
+        </p:spPr>
+        <p:txBody>
+          <a:bodyPr wrap="square" rtlCol="0"/>
+          <a:lstStyle/>
+          <a:p>
+            <a:pPr algn="l"/>
+            <a:r>
+              <a:rPr lang="en-US" sz="1500">
+                <a:solidFill>
+                  <a:srgbClr val="04131F"/>
+                </a:solidFill>
+                <a:latin typeface="Calibri"/>
+              </a:rPr>
+              <a:t>• a1 network — TeXML voice, OTP SMS, number verify — real telco primitives</a:t>
+            </a:r>
+          </a:p>
+        </p:txBody>
+      </p:sp>
+      <p:sp>
+        <p:nvSpPr>
+          <p:cNvPr id="7" name="Bullet"/>
+          <p:cNvSpPr txBox="1"/>
+          <p:nvPr/>
+        </p:nvSpPr>
+        <p:spPr>
+          <a:xfrm>
+            <a:off x="537200" y="2180000"/>
+            <a:ext cx="8149600" cy="320000"/>
+          </a:xfrm>
+          <a:prstGeom prst="rect">
+            <a:avLst/>
+          </a:prstGeom>
+          <a:noFill/>
+          <a:ln>
+            <a:noFill/>
+          </a:ln>
+        </p:spPr>
+        <p:txBody>
+          <a:bodyPr wrap="square" rtlCol="0"/>
+          <a:lstStyle/>
+          <a:p>
+            <a:pPr algn="l"/>
+            <a:r>
+              <a:rPr lang="en-US" sz="1500">
+                <a:solidFill>
+                  <a:srgbClr val="04131F"/>
+                </a:solidFill>
+                <a:latin typeface="Calibri"/>
+              </a:rPr>
+              <a:t>• Open research PAVO — paper + pavo-bench benchmark alongside product</a:t>
+            </a:r>
+          </a:p>
+        </p:txBody>
+      </p:sp>
+      <p:sp>
+        <p:nvSpPr>
+          <p:cNvPr id="8" name="Footer"/>
+          <p:cNvSpPr txBox="1"/>
+          <p:nvPr/>
+        </p:nvSpPr>
+        <p:spPr>
+          <a:xfrm>
+            <a:off x="457200" y="4723500"/>
+            <a:ext cx="8229600" cy="260000"/>
+          </a:xfrm>
+          <a:prstGeom prst="rect">
+            <a:avLst/>
+          </a:prstGeom>
+          <a:noFill/>
+          <a:ln>
+            <a:noFill/>
+          </a:ln>
+        </p:spPr>
+        <p:txBody>
+          <a:bodyPr wrap="square" rtlCol="0"/>
+          <a:lstStyle/>
+          <a:p>
+            <a:pPr algn="l"/>
+            <a:r>
+              <a:rPr lang="en-US" sz="900">
+                <a:solidFill>
+                  <a:srgbClr val="5C6B78"/>
+                </a:solidFill>
+                <a:latin typeface="Calibri"/>
+              </a:rPr>
+              <a:t>Real problem · real voice UX · real safety · it actually runs.</a:t>
+            </a:r>
+          </a:p>
+        </p:txBody>
+      </p:sp>
+    </p:spTree>
+  </p:cSld>
+  <p:clrMapOvr>
+    <a:masterClrMapping/>
+  </p:clrMapOvr>
+</p:sld>
+</file>
+
+<file path=ppt/slides/slide13.xml><?xml version="1.0" encoding="utf-8"?>
+<p:sld xmlns:a="http://schemas.openxmlformats.org/drawingml/2006/main" xmlns:r="http://schemas.openxmlformats.org/officeDocument/2006/relationships" xmlns:p="http://schemas.openxmlformats.org/presentationml/2006/main">
+  <p:bg>
+    <p:bgPr>
+      <a:solidFill>
+        <a:srgbClr val="04131F"/>
+      </a:solidFill>
+      <a:effectLst/>
+    </p:bgPr>
+  </p:bg>
+  <p:cSld name="Slide 13">
+    <p:spTree>
+      <p:nvGrpSpPr>
+        <p:cNvPr id="1" name=""/>
+        <p:cNvGrpSpPr/>
+        <p:nvPr/>
+      </p:nvGrpSpPr>
+      <p:grpSpPr>
+        <a:xfrm>
+          <a:off x="0" y="0"/>
+          <a:ext cx="9144000" cy="5143500"/>
+          <a:chOff x="0" y="0"/>
+          <a:chExt cx="9144000" cy="5143500"/>
+        </a:xfrm>
+      </p:grpSpPr>
+      <p:sp>
+        <p:nvSpPr>
+          <p:cNvPr id="2" name="Kicker"/>
+          <p:cNvSpPr txBox="1"/>
+          <p:nvPr/>
+        </p:nvSpPr>
+        <p:spPr>
+          <a:xfrm>
+            <a:off x="457200" y="180000"/>
+            <a:ext cx="8229600" cy="220000"/>
+          </a:xfrm>
+          <a:prstGeom prst="rect">
+            <a:avLst/>
+          </a:prstGeom>
+          <a:noFill/>
+          <a:ln>
+            <a:noFill/>
+          </a:ln>
+        </p:spPr>
+        <p:txBody>
+          <a:bodyPr wrap="square" rtlCol="0"/>
+          <a:lstStyle/>
+          <a:p>
+            <a:pPr algn="l"/>
+            <a:r>
+              <a:rPr lang="en-US" sz="900" b="1">
+                <a:solidFill>
+                  <a:srgbClr val="39D6C0"/>
+                </a:solidFill>
+                <a:latin typeface="Calibri"/>
+              </a:rPr>
+              <a:t>ASK</a:t>
+            </a:r>
+          </a:p>
+        </p:txBody>
+      </p:sp>
+      <p:sp>
+        <p:nvSpPr>
+          <p:cNvPr id="3" name="SlideNum"/>
+          <p:cNvSpPr txBox="1"/>
+          <p:nvPr/>
+        </p:nvSpPr>
+        <p:spPr>
+          <a:xfrm>
+            <a:off x="7486800" y="180000"/>
+            <a:ext cx="1200000" cy="220000"/>
+          </a:xfrm>
+          <a:prstGeom prst="rect">
+            <a:avLst/>
+          </a:prstGeom>
+          <a:noFill/>
+          <a:ln>
+            <a:noFill/>
+          </a:ln>
+        </p:spPr>
+        <p:txBody>
+          <a:bodyPr wrap="square" rtlCol="0"/>
+          <a:lstStyle/>
+          <a:p>
+            <a:pPr algn="r"/>
+            <a:r>
+              <a:rPr lang="en-US" sz="900" b="1">
+                <a:solidFill>
+                  <a:srgbClr val="8EA0AE"/>
+                </a:solidFill>
+                <a:latin typeface="Calibri"/>
+              </a:rPr>
+              <a:t>RXRELAY  /  13</a:t>
+            </a:r>
+          </a:p>
+        </p:txBody>
+      </p:sp>
+      <p:sp>
+        <p:nvSpPr>
+          <p:cNvPr id="4" name="Title"/>
+          <p:cNvSpPr txBox="1"/>
+          <p:nvPr/>
+        </p:nvSpPr>
+        <p:spPr>
+          <a:xfrm>
+            <a:off x="457200" y="520000"/>
+            <a:ext cx="8229600" cy="900000"/>
+          </a:xfrm>
+          <a:prstGeom prst="rect">
+            <a:avLst/>
+          </a:prstGeom>
+          <a:noFill/>
+          <a:ln>
+            <a:noFill/>
+          </a:ln>
+        </p:spPr>
+        <p:txBody>
+          <a:bodyPr wrap="square" rtlCol="0"/>
+          <a:lstStyle/>
+          <a:p>
+            <a:pPr algn="l"/>
+            <a:r>
+              <a:rPr lang="en-US" sz="3600" b="1">
+                <a:solidFill>
                   <a:srgbClr val="FFFFFF"/>
                 </a:solidFill>
                 <a:latin typeface="Calibri"/>
@@ -1954,7 +2402,7 @@
                 </a:solidFill>
                 <a:latin typeface="Calibri"/>
               </a:rPr>
-              <a:t>• Next: live OTP SMS + production tunnel</a:t>
+              <a:t>• Next: live OTP SMS + production tunnel · beachhead = specialty access</a:t>
             </a:r>
           </a:p>
         </p:txBody>

--- a/deck/output/RxRelay_Hackathon_Pitch.pptx
+++ b/deck/output/RxRelay_Hackathon_Pitch.pptx
@@ -96,7 +96,7 @@
                 </a:solidFill>
                 <a:latin typeface="Calibri"/>
               </a:rPr>
-              <a:t>Open with the outcome, not 'an AI agent.' One consented request, followed until evidence exists. Pause on 'Proof, not promises.'</a:t>
+              <a:t>Open on the outcome, not 'an AI agent.' Pause on Proof, not promises. Maya is the voice; the product is the proof gate.</a:t>
             </a:r>
           </a:p>
         </p:txBody>
@@ -150,7 +150,7 @@
                 </a:solidFill>
                 <a:latin typeface="Calibri"/>
               </a:rPr>
-              <a:t>Offer live path: reset sandbox, walk full flow, call demo line, show unsafe branch stays red.</a:t>
+              <a:t>Do not claim we capture $93B. TAM is voice AI; $93B justifies budget. Beachhead already buys telephony.</a:t>
             </a:r>
           </a:p>
         </p:txBody>
@@ -204,7 +204,7 @@
                 </a:solidFill>
                 <a:latin typeface="Calibri"/>
               </a:rPr>
-              <a:t>Company slide: do not claim we capture $93B. TAM is voice AI in healthcare; $93B is the pain pool that justifies budget. Beachhead is specialty access desks that already buy telephony.</a:t>
+              <a:t>Pricing aligns with the proof gate. Wedge into desks with call volume and compliance anxiety.</a:t>
             </a:r>
           </a:p>
         </p:txBody>
@@ -258,7 +258,7 @@
                 </a:solidFill>
                 <a:latin typeface="Calibri"/>
               </a:rPr>
-              <a:t>Catalyst fit: evidence over demo theater, a1 as load-bearing infra, open PAVO research lineage.</a:t>
+              <a:t>Completeness is intentional — live outbound fails closed as safety, not a gap.</a:t>
             </a:r>
           </a:p>
         </p:txBody>
@@ -312,7 +312,7 @@
                 </a:solidFill>
                 <a:latin typeface="Calibri"/>
               </a:rPr>
-              <a:t>End on conviction. Invite judges to live board and safety stop. Next: OTP SMS + production tunnel + specialty access pilots.</a:t>
+              <a:t>Invite judges to live board and safety stop. Call Maya.</a:t>
             </a:r>
           </a:p>
         </p:txBody>
@@ -366,7 +366,7 @@
                 </a:solidFill>
                 <a:latin typeface="Calibri"/>
               </a:rPr>
-              <a:t>Community voices make the burden concrete — people call 10, even 20 pharmacies because coordination failed, not because they wanted an agent.</a:t>
+              <a:t>People call 10–20 pharmacies because coordination failed — not because they wanted an agent.</a:t>
             </a:r>
           </a:p>
         </p:txBody>
@@ -420,7 +420,7 @@
                 </a:solidFill>
                 <a:latin typeface="Calibri"/>
               </a:rPr>
-              <a:t>Land the insight: a smoother bot is not the answer. Operational memory plus an honest completion gate.</a:t>
+              <a:t>A smoother bot is not the answer. Narration that looks like completion is the whole risk.</a:t>
             </a:r>
           </a:p>
         </p:txBody>
@@ -474,7 +474,7 @@
                 </a:solidFill>
                 <a:latin typeface="Calibri"/>
               </a:rPr>
-              <a:t>Walk three verbs slowly. The distinctive thing is the proof condition in step three.</a:t>
+              <a:t>Three verbs. Distinctive thing is the proof condition. Maya sounds human — short turns, no menus.</a:t>
             </a:r>
           </a:p>
         </p:txBody>
@@ -528,7 +528,7 @@
                 </a:solidFill>
                 <a:latin typeface="Calibri"/>
               </a:rPr>
-              <a:t>Every green check is a deterministic state transition, not an LLM confidence score. Run the dashboard live.</a:t>
+              <a:t>Every green check is a deterministic state transition. Run the dashboard live.</a:t>
             </a:r>
           </a:p>
         </p:txBody>
@@ -582,7 +582,7 @@
                 </a:solidFill>
                 <a:latin typeface="Calibri"/>
               </a:rPr>
-              <a:t>Be honest: verified tier uses TeXML speech + DTMF and a strong model. The coupling cliff is real — joint capture and reasoning matter.</a:t>
+              <a:t>Reset sandbox, walk full flow, call demo line, show unsafe branch stays red.</a:t>
             </a:r>
           </a:p>
         </p:txBody>
@@ -636,7 +636,7 @@
                 </a:solidFill>
                 <a:latin typeface="Calibri"/>
               </a:rPr>
-              <a:t>Walk each surface: proof board, counterpart portal, signed receipts, human queue, SSE.</a:t>
+              <a:t>Verified tier = TeXML speech + DTMF + stronger model — not multi-vendor ASR theater.</a:t>
             </a:r>
           </a:p>
         </p:txBody>
@@ -690,7 +690,7 @@
                 </a:solidFill>
                 <a:latin typeface="Calibri"/>
               </a:rPr>
-              <a:t>Walk left→right. Red safe-stop path never touches live outreach. Live requires OTP allowlist.</a:t>
+              <a:t>Safe stop is success when automation would be wrong. Receipts are the moat.</a:t>
             </a:r>
           </a:p>
         </p:txBody>
@@ -744,7 +744,7 @@
                 </a:solidFill>
                 <a:latin typeface="Calibri"/>
               </a:rPr>
-              <a:t>Product position, not disclaimer. A safe stop is success when automation would be wrong.</a:t>
+              <a:t>Public blast radius = three TeXML routes. Proof flags never set by model text.</a:t>
             </a:r>
           </a:p>
         </p:txBody>
@@ -938,7 +938,7 @@
                 </a:solidFill>
                 <a:latin typeface="Calibri"/>
               </a:rPr>
-              <a:t>RxRelay</a:t>
+              <a:t>Proof, not promises.</a:t>
             </a:r>
           </a:p>
         </p:txBody>
@@ -968,49 +968,49 @@
           <a:p>
             <a:pPr algn="l"/>
             <a:r>
-              <a:rPr lang="en-US" sz="1800" i="1">
-                <a:solidFill>
-                  <a:srgbClr val="39D6C0"/>
-                </a:solidFill>
-                <a:latin typeface="Calibri"/>
-              </a:rPr>
-              <a:t>Proof, not promises.</a:t>
-            </a:r>
-          </a:p>
-        </p:txBody>
-      </p:sp>
-      <p:sp>
-        <p:nvSpPr>
-          <p:cNvPr id="6" name="Body"/>
-          <p:cNvSpPr txBox="1"/>
-          <p:nvPr/>
-        </p:nvSpPr>
-        <p:spPr>
-          <a:xfrm>
-            <a:off x="457200" y="1880000"/>
-            <a:ext cx="8229600" cy="360000"/>
-          </a:xfrm>
-          <a:prstGeom prst="rect">
-            <a:avLst/>
-          </a:prstGeom>
-          <a:noFill/>
-          <a:ln>
-            <a:noFill/>
-          </a:ln>
-        </p:spPr>
-        <p:txBody>
-          <a:bodyPr wrap="square" rtlCol="0"/>
-          <a:lstStyle/>
-          <a:p>
-            <a:pPr algn="l"/>
-            <a:r>
               <a:rPr lang="en-US" sz="1800">
                 <a:solidFill>
                   <a:srgbClr val="8EA0AE"/>
                 </a:solidFill>
                 <a:latin typeface="Calibri"/>
               </a:rPr>
-              <a:t>A consent-first voice coordinator for prescription access — refuses resolution without evidence.</a:t>
+              <a:t>Maya is a consent-first voice coordinator for prescription access — she follows pharmacy, clinic, and insurer handoffs, and refuses resolution without evidence.</a:t>
+            </a:r>
+          </a:p>
+        </p:txBody>
+      </p:sp>
+      <p:sp>
+        <p:nvSpPr>
+          <p:cNvPr id="6" name="Bullet"/>
+          <p:cNvSpPr txBox="1"/>
+          <p:nvPr/>
+        </p:nvSpPr>
+        <p:spPr>
+          <a:xfrm>
+            <a:off x="537200" y="1880000"/>
+            <a:ext cx="8149600" cy="320000"/>
+          </a:xfrm>
+          <a:prstGeom prst="rect">
+            <a:avLst/>
+          </a:prstGeom>
+          <a:noFill/>
+          <a:ln>
+            <a:noFill/>
+          </a:ln>
+        </p:spPr>
+        <p:txBody>
+          <a:bodyPr wrap="square" rtlCol="0"/>
+          <a:lstStyle/>
+          <a:p>
+            <a:pPr algn="l"/>
+            <a:r>
+              <a:rPr lang="en-US" sz="1500">
+                <a:solidFill>
+                  <a:srgbClr val="FFFFFF"/>
+                </a:solidFill>
+                <a:latin typeface="Calibri"/>
+              </a:rPr>
+              <a:t>• PAVO routing</a:t>
             </a:r>
           </a:p>
         </p:txBody>
@@ -1023,7 +1023,7 @@
         </p:nvSpPr>
         <p:spPr>
           <a:xfrm>
-            <a:off x="537200" y="2260000"/>
+            <a:off x="537200" y="2220000"/>
             <a:ext cx="8149600" cy="320000"/>
           </a:xfrm>
           <a:prstGeom prst="rect">
@@ -1046,7 +1046,7 @@
                 </a:solidFill>
                 <a:latin typeface="Calibri"/>
               </a:rPr>
-              <a:t>• PAVO routing</a:t>
+              <a:t>• Evidence-gated</a:t>
             </a:r>
           </a:p>
         </p:txBody>
@@ -1059,7 +1059,7 @@
         </p:nvSpPr>
         <p:spPr>
           <a:xfrm>
-            <a:off x="537200" y="2600000"/>
+            <a:off x="537200" y="2560000"/>
             <a:ext cx="8149600" cy="320000"/>
           </a:xfrm>
           <a:prstGeom prst="rect">
@@ -1082,42 +1082,6 @@
                 </a:solidFill>
                 <a:latin typeface="Calibri"/>
               </a:rPr>
-              <a:t>• Evidence-gated</a:t>
-            </a:r>
-          </a:p>
-        </p:txBody>
-      </p:sp>
-      <p:sp>
-        <p:nvSpPr>
-          <p:cNvPr id="9" name="Bullet"/>
-          <p:cNvSpPr txBox="1"/>
-          <p:nvPr/>
-        </p:nvSpPr>
-        <p:spPr>
-          <a:xfrm>
-            <a:off x="537200" y="2940000"/>
-            <a:ext cx="8149600" cy="320000"/>
-          </a:xfrm>
-          <a:prstGeom prst="rect">
-            <a:avLst/>
-          </a:prstGeom>
-          <a:noFill/>
-          <a:ln>
-            <a:noFill/>
-          </a:ln>
-        </p:spPr>
-        <p:txBody>
-          <a:bodyPr wrap="square" rtlCol="0"/>
-          <a:lstStyle/>
-          <a:p>
-            <a:pPr algn="l"/>
-            <a:r>
-              <a:rPr lang="en-US" sz="1500">
-                <a:solidFill>
-                  <a:srgbClr val="FFFFFF"/>
-                </a:solidFill>
-                <a:latin typeface="Calibri"/>
-              </a:rPr>
               <a:t>• Consent-first</a:t>
             </a:r>
           </a:p>
@@ -1125,7 +1089,7 @@
       </p:sp>
       <p:sp>
         <p:nvSpPr>
-          <p:cNvPr id="10" name="Footer"/>
+          <p:cNvPr id="9" name="Footer"/>
           <p:cNvSpPr txBox="1"/>
           <p:nvPr/>
         </p:nvSpPr>
@@ -1223,7 +1187,7 @@
                 </a:solidFill>
                 <a:latin typeface="Calibri"/>
               </a:rPr>
-              <a:t>DEMO PATH</a:t>
+              <a:t>MARKET</a:t>
             </a:r>
           </a:p>
         </p:txBody>
@@ -1295,20 +1259,128 @@
                 </a:solidFill>
                 <a:latin typeface="Calibri"/>
               </a:rPr>
-              <a:t>Sandbox E2E + live call flow.</a:t>
-            </a:r>
-          </a:p>
-        </p:txBody>
-      </p:sp>
-      <p:sp>
-        <p:nvSpPr>
-          <p:cNvPr id="5" name="Bullet"/>
-          <p:cNvSpPr txBox="1"/>
-          <p:nvPr/>
-        </p:nvSpPr>
-        <p:spPr>
-          <a:xfrm>
-            <a:off x="537200" y="1500000"/>
+              <a:t>Own the evidence-gated access workflow.</a:t>
+            </a:r>
+          </a:p>
+        </p:txBody>
+      </p:sp>
+      <p:sp>
+        <p:nvSpPr>
+          <p:cNvPr id="5" name="Body"/>
+          <p:cNvSpPr txBox="1"/>
+          <p:nvPr/>
+        </p:nvSpPr>
+        <p:spPr>
+          <a:xfrm>
+            <a:off x="457200" y="1500000"/>
+            <a:ext cx="8229600" cy="360000"/>
+          </a:xfrm>
+          <a:prstGeom prst="rect">
+            <a:avLst/>
+          </a:prstGeom>
+          <a:noFill/>
+          <a:ln>
+            <a:noFill/>
+          </a:ln>
+        </p:spPr>
+        <p:txBody>
+          <a:bodyPr wrap="square" rtlCol="0"/>
+          <a:lstStyle/>
+          <a:p>
+            <a:pPr algn="l"/>
+            <a:r>
+              <a:rPr lang="en-US" sz="1800">
+                <a:solidFill>
+                  <a:srgbClr val="8EA0AE"/>
+                </a:solidFill>
+                <a:latin typeface="Calibri"/>
+              </a:rPr>
+              <a:t>TAM: AI voice agents in healthcare ~$0.5–2.1B (2025).</a:t>
+            </a:r>
+          </a:p>
+        </p:txBody>
+      </p:sp>
+      <p:sp>
+        <p:nvSpPr>
+          <p:cNvPr id="6" name="Body"/>
+          <p:cNvSpPr txBox="1"/>
+          <p:nvPr/>
+        </p:nvSpPr>
+        <p:spPr>
+          <a:xfrm>
+            <a:off x="457200" y="1880000"/>
+            <a:ext cx="8229600" cy="360000"/>
+          </a:xfrm>
+          <a:prstGeom prst="rect">
+            <a:avLst/>
+          </a:prstGeom>
+          <a:noFill/>
+          <a:ln>
+            <a:noFill/>
+          </a:ln>
+        </p:spPr>
+        <p:txBody>
+          <a:bodyPr wrap="square" rtlCol="0"/>
+          <a:lstStyle/>
+          <a:p>
+            <a:pPr algn="l"/>
+            <a:r>
+              <a:rPr lang="en-US" sz="1800">
+                <a:solidFill>
+                  <a:srgbClr val="8EA0AE"/>
+                </a:solidFill>
+                <a:latin typeface="Calibri"/>
+              </a:rPr>
+              <a:t>SAM / pain pool: ~$93B navigating utilization management (Health Affairs); CAQH ~$89B.</a:t>
+            </a:r>
+          </a:p>
+        </p:txBody>
+      </p:sp>
+      <p:sp>
+        <p:nvSpPr>
+          <p:cNvPr id="7" name="Body"/>
+          <p:cNvSpPr txBox="1"/>
+          <p:nvPr/>
+        </p:nvSpPr>
+        <p:spPr>
+          <a:xfrm>
+            <a:off x="457200" y="2260000"/>
+            <a:ext cx="8229600" cy="360000"/>
+          </a:xfrm>
+          <a:prstGeom prst="rect">
+            <a:avLst/>
+          </a:prstGeom>
+          <a:noFill/>
+          <a:ln>
+            <a:noFill/>
+          </a:ln>
+        </p:spPr>
+        <p:txBody>
+          <a:bodyPr wrap="square" rtlCol="0"/>
+          <a:lstStyle/>
+          <a:p>
+            <a:pPr algn="l"/>
+            <a:r>
+              <a:rPr lang="en-US" sz="1800">
+                <a:solidFill>
+                  <a:srgbClr val="8EA0AE"/>
+                </a:solidFill>
+                <a:latin typeface="Calibri"/>
+              </a:rPr>
+              <a:t>SOM: specialty access hubs — priced per resolved case.</a:t>
+            </a:r>
+          </a:p>
+        </p:txBody>
+      </p:sp>
+      <p:sp>
+        <p:nvSpPr>
+          <p:cNvPr id="8" name="Bullet"/>
+          <p:cNvSpPr txBox="1"/>
+          <p:nvPr/>
+        </p:nvSpPr>
+        <p:spPr>
+          <a:xfrm>
+            <a:off x="537200" y="2640000"/>
             <a:ext cx="8149600" cy="320000"/>
           </a:xfrm>
           <a:prstGeom prst="rect">
@@ -1331,20 +1403,20 @@
                 </a:solidFill>
                 <a:latin typeface="Calibri"/>
               </a:rPr>
-              <a:t>• Dashboard: npm run dev → proof board → counterpart actions → 4/4 gate → SSE</a:t>
-            </a:r>
-          </a:p>
-        </p:txBody>
-      </p:sp>
-      <p:sp>
-        <p:nvSpPr>
-          <p:cNvPr id="6" name="Bullet"/>
-          <p:cNvSpPr txBox="1"/>
-          <p:nvPr/>
-        </p:nvSpPr>
-        <p:spPr>
-          <a:xfrm>
-            <a:off x="537200" y="1840000"/>
+              <a:t>• Sell resolved access cases — not words spoken</a:t>
+            </a:r>
+          </a:p>
+        </p:txBody>
+      </p:sp>
+      <p:sp>
+        <p:nvSpPr>
+          <p:cNvPr id="9" name="Bullet"/>
+          <p:cNvSpPr txBox="1"/>
+          <p:nvPr/>
+        </p:nvSpPr>
+        <p:spPr>
+          <a:xfrm>
+            <a:off x="537200" y="2980000"/>
             <a:ext cx="8149600" cy="320000"/>
           </a:xfrm>
           <a:prstGeom prst="rect">
@@ -1367,20 +1439,20 @@
                 </a:solidFill>
                 <a:latin typeface="Calibri"/>
               </a:rPr>
-              <a:t>• Voice: npm run voice → tunnel :3001 → TeXML → consent → PAVO → case transitions</a:t>
-            </a:r>
-          </a:p>
-        </p:txBody>
-      </p:sp>
-      <p:sp>
-        <p:nvSpPr>
-          <p:cNvPr id="7" name="Bullet"/>
-          <p:cNvSpPr txBox="1"/>
-          <p:nvPr/>
-        </p:nvSpPr>
-        <p:spPr>
-          <a:xfrm>
-            <a:off x="537200" y="2180000"/>
+              <a:t>• Beachhead: specialty pharmacies · patient hubs · digital pharmacies · health-system Rx access</a:t>
+            </a:r>
+          </a:p>
+        </p:txBody>
+      </p:sp>
+      <p:sp>
+        <p:nvSpPr>
+          <p:cNvPr id="10" name="Bullet"/>
+          <p:cNvSpPr txBox="1"/>
+          <p:nvPr/>
+        </p:nvSpPr>
+        <p:spPr>
+          <a:xfrm>
+            <a:off x="537200" y="3320000"/>
             <a:ext cx="8149600" cy="320000"/>
           </a:xfrm>
           <a:prstGeom prst="rect">
@@ -1403,14 +1475,14 @@
                 </a:solidFill>
                 <a:latin typeface="Calibri"/>
               </a:rPr>
-              <a:t>• Safe branch → green · unsafe branch → human queue · call the claimed number</a:t>
-            </a:r>
-          </a:p>
-        </p:txBody>
-      </p:sp>
-      <p:sp>
-        <p:nvSpPr>
-          <p:cNvPr id="8" name="Footer"/>
+              <a:t>• Sources: Towards Healthcare · Healthcare Foresights · Health Affairs · CAQH Index 2023 (directional)</a:t>
+            </a:r>
+          </a:p>
+        </p:txBody>
+      </p:sp>
+      <p:sp>
+        <p:nvSpPr>
+          <p:cNvPr id="11" name="Footer"/>
           <p:cNvSpPr txBox="1"/>
           <p:nvPr/>
         </p:nvSpPr>
@@ -1439,7 +1511,7 @@
                 </a:solidFill>
                 <a:latin typeface="Calibri"/>
               </a:rPr>
-              <a:t>Judged flow is deterministic, visible, and safe end-to-end.</a:t>
+              <a:t>Sell resolved access cases — not words spoken.</a:t>
             </a:r>
           </a:p>
         </p:txBody>
@@ -1457,7 +1529,7 @@
   <p:bg>
     <p:bgPr>
       <a:solidFill>
-        <a:srgbClr val="04131F"/>
+        <a:srgbClr val="F4F7F9"/>
       </a:solidFill>
       <a:effectLst/>
     </p:bgPr>
@@ -1508,7 +1580,7 @@
                 </a:solidFill>
                 <a:latin typeface="Calibri"/>
               </a:rPr>
-              <a:t>COMPANY OPPORTUNITY</a:t>
+              <a:t>BUSINESS</a:t>
             </a:r>
           </a:p>
         </p:txBody>
@@ -1540,7 +1612,7 @@
             <a:r>
               <a:rPr lang="en-US" sz="900" b="1">
                 <a:solidFill>
-                  <a:srgbClr val="8EA0AE"/>
+                  <a:srgbClr val="5C6B78"/>
                 </a:solidFill>
                 <a:latin typeface="Calibri"/>
               </a:rPr>
@@ -1576,132 +1648,24 @@
             <a:r>
               <a:rPr lang="en-US" sz="3600" b="1">
                 <a:solidFill>
-                  <a:srgbClr val="FFFFFF"/>
-                </a:solidFill>
-                <a:latin typeface="Calibri"/>
-              </a:rPr>
-              <a:t>A real company wedge: medication-access coordination.</a:t>
-            </a:r>
-          </a:p>
-        </p:txBody>
-      </p:sp>
-      <p:sp>
-        <p:nvSpPr>
-          <p:cNvPr id="5" name="Body"/>
-          <p:cNvSpPr txBox="1"/>
-          <p:nvPr/>
-        </p:nvSpPr>
-        <p:spPr>
-          <a:xfrm>
-            <a:off x="457200" y="1500000"/>
-            <a:ext cx="8229600" cy="360000"/>
-          </a:xfrm>
-          <a:prstGeom prst="rect">
-            <a:avLst/>
-          </a:prstGeom>
-          <a:noFill/>
-          <a:ln>
-            <a:noFill/>
-          </a:ln>
-        </p:spPr>
-        <p:txBody>
-          <a:bodyPr wrap="square" rtlCol="0"/>
-          <a:lstStyle/>
-          <a:p>
-            <a:pPr algn="l"/>
-            <a:r>
-              <a:rPr lang="en-US" sz="1800">
-                <a:solidFill>
-                  <a:srgbClr val="8EA0AE"/>
-                </a:solidFill>
-                <a:latin typeface="Calibri"/>
-              </a:rPr>
-              <a:t>TAM: AI voice agents in healthcare ~$0.5–2.1B (2025; definition-dependent).</a:t>
-            </a:r>
-          </a:p>
-        </p:txBody>
-      </p:sp>
-      <p:sp>
-        <p:nvSpPr>
-          <p:cNvPr id="6" name="Body"/>
-          <p:cNvSpPr txBox="1"/>
-          <p:nvPr/>
-        </p:nvSpPr>
-        <p:spPr>
-          <a:xfrm>
-            <a:off x="457200" y="1880000"/>
-            <a:ext cx="8229600" cy="360000"/>
-          </a:xfrm>
-          <a:prstGeom prst="rect">
-            <a:avLst/>
-          </a:prstGeom>
-          <a:noFill/>
-          <a:ln>
-            <a:noFill/>
-          </a:ln>
-        </p:spPr>
-        <p:txBody>
-          <a:bodyPr wrap="square" rtlCol="0"/>
-          <a:lstStyle/>
-          <a:p>
-            <a:pPr algn="l"/>
-            <a:r>
-              <a:rPr lang="en-US" sz="1800">
-                <a:solidFill>
-                  <a:srgbClr val="8EA0AE"/>
-                </a:solidFill>
-                <a:latin typeface="Calibri"/>
-              </a:rPr>
-              <a:t>Pain pool / SAM signal: ~$93B navigating utilization management (Health Affairs); CAQH ~$89B admin transactions.</a:t>
-            </a:r>
-          </a:p>
-        </p:txBody>
-      </p:sp>
-      <p:sp>
-        <p:nvSpPr>
-          <p:cNvPr id="7" name="Body"/>
-          <p:cNvSpPr txBox="1"/>
-          <p:nvPr/>
-        </p:nvSpPr>
-        <p:spPr>
-          <a:xfrm>
-            <a:off x="457200" y="2260000"/>
-            <a:ext cx="8229600" cy="360000"/>
-          </a:xfrm>
-          <a:prstGeom prst="rect">
-            <a:avLst/>
-          </a:prstGeom>
-          <a:noFill/>
-          <a:ln>
-            <a:noFill/>
-          </a:ln>
-        </p:spPr>
-        <p:txBody>
-          <a:bodyPr wrap="square" rtlCol="0"/>
-          <a:lstStyle/>
-          <a:p>
-            <a:pPr algn="l"/>
-            <a:r>
-              <a:rPr lang="en-US" sz="1800">
-                <a:solidFill>
-                  <a:srgbClr val="8EA0AE"/>
-                </a:solidFill>
-                <a:latin typeface="Calibri"/>
-              </a:rPr>
-              <a:t>SOM beachhead: specialty pharmacies, patient hubs, digital pharmacies — priced per resolved case, not per chat.</a:t>
-            </a:r>
-          </a:p>
-        </p:txBody>
-      </p:sp>
-      <p:sp>
-        <p:nvSpPr>
-          <p:cNvPr id="8" name="Bullet"/>
-          <p:cNvSpPr txBox="1"/>
-          <p:nvPr/>
-        </p:nvSpPr>
-        <p:spPr>
-          <a:xfrm>
-            <a:off x="537200" y="2640000"/>
+                  <a:srgbClr val="04131F"/>
+                </a:solidFill>
+                <a:latin typeface="Calibri"/>
+              </a:rPr>
+              <a:t>Charge for verified outcomes.</a:t>
+            </a:r>
+          </a:p>
+        </p:txBody>
+      </p:sp>
+      <p:sp>
+        <p:nvSpPr>
+          <p:cNvPr id="5" name="Bullet"/>
+          <p:cNvSpPr txBox="1"/>
+          <p:nvPr/>
+        </p:nvSpPr>
+        <p:spPr>
+          <a:xfrm>
+            <a:off x="537200" y="1500000"/>
             <a:ext cx="8149600" cy="320000"/>
           </a:xfrm>
           <a:prstGeom prst="rect">
@@ -1720,24 +1684,24 @@
             <a:r>
               <a:rPr lang="en-US" sz="1500">
                 <a:solidFill>
-                  <a:srgbClr val="FFFFFF"/>
-                </a:solidFill>
-                <a:latin typeface="Calibri"/>
-              </a:rPr>
-              <a:t>• Charge for resolved access cases — not words spoken</a:t>
-            </a:r>
-          </a:p>
-        </p:txBody>
-      </p:sp>
-      <p:sp>
-        <p:nvSpPr>
-          <p:cNvPr id="9" name="Bullet"/>
-          <p:cNvSpPr txBox="1"/>
-          <p:nvPr/>
-        </p:nvSpPr>
-        <p:spPr>
-          <a:xfrm>
-            <a:off x="537200" y="2980000"/>
+                  <a:srgbClr val="04131F"/>
+                </a:solidFill>
+                <a:latin typeface="Calibri"/>
+              </a:rPr>
+              <a:t>• Who buys: specialty pharmacies, patient hubs, digital pharmacies, health-system Rx access teams</a:t>
+            </a:r>
+          </a:p>
+        </p:txBody>
+      </p:sp>
+      <p:sp>
+        <p:nvSpPr>
+          <p:cNvPr id="6" name="Bullet"/>
+          <p:cNvSpPr txBox="1"/>
+          <p:nvPr/>
+        </p:nvSpPr>
+        <p:spPr>
+          <a:xfrm>
+            <a:off x="537200" y="1840000"/>
             <a:ext cx="8149600" cy="320000"/>
           </a:xfrm>
           <a:prstGeom prst="rect">
@@ -1756,24 +1720,24 @@
             <a:r>
               <a:rPr lang="en-US" sz="1500">
                 <a:solidFill>
-                  <a:srgbClr val="FFFFFF"/>
-                </a:solidFill>
-                <a:latin typeface="Calibri"/>
-              </a:rPr>
-              <a:t>• Wedge: evidence-gated coordination where PA / status loops already burn staff</a:t>
-            </a:r>
-          </a:p>
-        </p:txBody>
-      </p:sp>
-      <p:sp>
-        <p:nvSpPr>
-          <p:cNvPr id="10" name="Bullet"/>
-          <p:cNvSpPr txBox="1"/>
-          <p:nvPr/>
-        </p:nvSpPr>
-        <p:spPr>
-          <a:xfrm>
-            <a:off x="537200" y="3320000"/>
+                  <a:srgbClr val="04131F"/>
+                </a:solidFill>
+                <a:latin typeface="Calibri"/>
+              </a:rPr>
+              <a:t>• How priced: per resolved case / seat — aligned to the 4/4 gate</a:t>
+            </a:r>
+          </a:p>
+        </p:txBody>
+      </p:sp>
+      <p:sp>
+        <p:nvSpPr>
+          <p:cNvPr id="7" name="Bullet"/>
+          <p:cNvSpPr txBox="1"/>
+          <p:nvPr/>
+        </p:nvSpPr>
+        <p:spPr>
+          <a:xfrm>
+            <a:off x="537200" y="2180000"/>
             <a:ext cx="8149600" cy="320000"/>
           </a:xfrm>
           <a:prstGeom prst="rect">
@@ -1792,18 +1756,18 @@
             <a:r>
               <a:rPr lang="en-US" sz="1500">
                 <a:solidFill>
-                  <a:srgbClr val="FFFFFF"/>
-                </a:solidFill>
-                <a:latin typeface="Calibri"/>
-              </a:rPr>
-              <a:t>• Sources: Towards Healthcare · Healthcare Foresights · Health Affairs · CAQH Index 2023 (directional)</a:t>
-            </a:r>
-          </a:p>
-        </p:txBody>
-      </p:sp>
-      <p:sp>
-        <p:nvSpPr>
-          <p:cNvPr id="11" name="Footer"/>
+                  <a:srgbClr val="04131F"/>
+                </a:solidFill>
+                <a:latin typeface="Calibri"/>
+              </a:rPr>
+              <a:t>• Why now: voice AI is shipping; compliance still needs receipts</a:t>
+            </a:r>
+          </a:p>
+        </p:txBody>
+      </p:sp>
+      <p:sp>
+        <p:nvSpPr>
+          <p:cNvPr id="8" name="Footer"/>
           <p:cNvSpPr txBox="1"/>
           <p:nvPr/>
         </p:nvSpPr>
@@ -1828,11 +1792,11 @@
             <a:r>
               <a:rPr lang="en-US" sz="900">
                 <a:solidFill>
-                  <a:srgbClr val="8EA0AE"/>
-                </a:solidFill>
-                <a:latin typeface="Calibri"/>
-              </a:rPr>
-              <a:t>Own the proof-gated access workflow.</a:t>
+                  <a:srgbClr val="5C6B78"/>
+                </a:solidFill>
+                <a:latin typeface="Calibri"/>
+              </a:rPr>
+              <a:t>The product meter matches the product ethic.</a:t>
             </a:r>
           </a:p>
         </p:txBody>
@@ -1850,7 +1814,7 @@
   <p:bg>
     <p:bgPr>
       <a:solidFill>
-        <a:srgbClr val="F4F7F9"/>
+        <a:srgbClr val="04131F"/>
       </a:solidFill>
       <a:effectLst/>
     </p:bgPr>
@@ -1901,7 +1865,7 @@
                 </a:solidFill>
                 <a:latin typeface="Calibri"/>
               </a:rPr>
-              <a:t>WHY INVEST / CATALYST FIT</a:t>
+              <a:t>WHY A1MOBILE / CATALYST</a:t>
             </a:r>
           </a:p>
         </p:txBody>
@@ -1933,7 +1897,7 @@
             <a:r>
               <a:rPr lang="en-US" sz="900" b="1">
                 <a:solidFill>
-                  <a:srgbClr val="5C6B78"/>
+                  <a:srgbClr val="8EA0AE"/>
                 </a:solidFill>
                 <a:latin typeface="Calibri"/>
               </a:rPr>
@@ -1969,11 +1933,11 @@
             <a:r>
               <a:rPr lang="en-US" sz="3600" b="1">
                 <a:solidFill>
-                  <a:srgbClr val="04131F"/>
-                </a:solidFill>
-                <a:latin typeface="Calibri"/>
-              </a:rPr>
-              <a:t>Evidence culture. Load-bearing network. Open research.</a:t>
+                  <a:srgbClr val="FFFFFF"/>
+                </a:solidFill>
+                <a:latin typeface="Calibri"/>
+              </a:rPr>
+              <a:t>Evidence culture. Your network. Open research.</a:t>
             </a:r>
           </a:p>
         </p:txBody>
@@ -2005,11 +1969,11 @@
             <a:r>
               <a:rPr lang="en-US" sz="1500">
                 <a:solidFill>
-                  <a:srgbClr val="04131F"/>
-                </a:solidFill>
-                <a:latin typeface="Calibri"/>
-              </a:rPr>
-              <a:t>• Evidence culture — proof gates, signed receipts, Groundtruth / MCP Observatory discipline</a:t>
+                  <a:srgbClr val="FFFFFF"/>
+                </a:solidFill>
+                <a:latin typeface="Calibri"/>
+              </a:rPr>
+              <a:t>• Evidence — proof gates, signed receipts, Groundtruth / Observatory discipline</a:t>
             </a:r>
           </a:p>
         </p:txBody>
@@ -2041,11 +2005,11 @@
             <a:r>
               <a:rPr lang="en-US" sz="1500">
                 <a:solidFill>
-                  <a:srgbClr val="04131F"/>
-                </a:solidFill>
-                <a:latin typeface="Calibri"/>
-              </a:rPr>
-              <a:t>• a1 network — TeXML voice, OTP SMS, number verify — real telco primitives</a:t>
+                  <a:srgbClr val="FFFFFF"/>
+                </a:solidFill>
+                <a:latin typeface="Calibri"/>
+              </a:rPr>
+              <a:t>• a1 network — TeXML voice, OTP SMS, number verify — load-bearing primitives</a:t>
             </a:r>
           </a:p>
         </p:txBody>
@@ -2077,11 +2041,11 @@
             <a:r>
               <a:rPr lang="en-US" sz="1500">
                 <a:solidFill>
-                  <a:srgbClr val="04131F"/>
-                </a:solidFill>
-                <a:latin typeface="Calibri"/>
-              </a:rPr>
-              <a:t>• Open research PAVO — paper + pavo-bench benchmark alongside product</a:t>
+                  <a:srgbClr val="FFFFFF"/>
+                </a:solidFill>
+                <a:latin typeface="Calibri"/>
+              </a:rPr>
+              <a:t>• PAVO — peer-reviewed paper + pavo-bench alongside product</a:t>
             </a:r>
           </a:p>
         </p:txBody>
@@ -2113,7 +2077,7 @@
             <a:r>
               <a:rPr lang="en-US" sz="900">
                 <a:solidFill>
-                  <a:srgbClr val="5C6B78"/>
+                  <a:srgbClr val="8EA0AE"/>
                 </a:solidFill>
                 <a:latin typeface="Calibri"/>
               </a:rPr>
@@ -2330,7 +2294,7 @@
                 </a:solidFill>
                 <a:latin typeface="Calibri"/>
               </a:rPr>
-              <a:t>• github.com/vnmoorthy/rxrelay</a:t>
+              <a:t>• vnmoorthy.github.io/rxrelay · github.com/vnmoorthy/rxrelay</a:t>
             </a:r>
           </a:p>
         </p:txBody>
@@ -2366,7 +2330,7 @@
                 </a:solidFill>
                 <a:latin typeface="Calibri"/>
               </a:rPr>
-              <a:t>• openreview.net/forum?id=zrneoIxlFx · PAVO paper</a:t>
+              <a:t>• openreview.net/forum?id=zrneoIxlFx · PAVO</a:t>
             </a:r>
           </a:p>
         </p:txBody>
@@ -2402,7 +2366,7 @@
                 </a:solidFill>
                 <a:latin typeface="Calibri"/>
               </a:rPr>
-              <a:t>• Next: live OTP SMS + production tunnel · beachhead = specialty access</a:t>
+              <a:t>• Next: live OTP SMS · production tunnel · specialty access pilots</a:t>
             </a:r>
           </a:p>
         </p:txBody>
@@ -2507,7 +2471,7 @@
                 </a:solidFill>
                 <a:latin typeface="Calibri"/>
               </a:rPr>
-              <a:t>THE HUMAN COST</a:t>
+              <a:t>PROBLEM</a:t>
             </a:r>
           </a:p>
         </p:txBody>
@@ -2615,7 +2579,7 @@
                 </a:solidFill>
                 <a:latin typeface="Calibri"/>
               </a:rPr>
-              <a:t>When a prescription stalls, the person who needs it repeats the same story across pharmacy, clinic, and insurer.</a:t>
+              <a:t>When a prescription stalls, the person who needs it repeats the same story across pharmacy, clinic, and insurer — with no shared state and no owner.</a:t>
             </a:r>
           </a:p>
         </p:txBody>
@@ -2759,7 +2723,7 @@
                 </a:solidFill>
                 <a:latin typeface="Calibri"/>
               </a:rPr>
-              <a:t>• The patient: calling again — no shared state, no owner.</a:t>
+              <a:t>• Patient: calling again.</a:t>
             </a:r>
           </a:p>
         </p:txBody>
@@ -2864,7 +2828,7 @@
                 </a:solidFill>
                 <a:latin typeface="Calibri"/>
               </a:rPr>
-              <a:t>THE MISSING LAYER</a:t>
+              <a:t>STAKES</a:t>
             </a:r>
           </a:p>
         </p:txBody>
@@ -2972,50 +2936,86 @@
                 </a:solidFill>
                 <a:latin typeface="Calibri"/>
               </a:rPr>
-              <a:t>Today: call → hold → repeat → hope. No proof the next actor acted.</a:t>
-            </a:r>
-          </a:p>
-        </p:txBody>
-      </p:sp>
-      <p:sp>
-        <p:nvSpPr>
-          <p:cNvPr id="6" name="Body"/>
-          <p:cNvSpPr txBox="1"/>
-          <p:nvPr/>
-        </p:nvSpPr>
-        <p:spPr>
-          <a:xfrm>
-            <a:off x="457200" y="1880000"/>
-            <a:ext cx="8229600" cy="360000"/>
-          </a:xfrm>
-          <a:prstGeom prst="rect">
-            <a:avLst/>
-          </a:prstGeom>
-          <a:noFill/>
-          <a:ln>
-            <a:noFill/>
-          </a:ln>
-        </p:spPr>
-        <p:txBody>
-          <a:bodyPr wrap="square" rtlCol="0"/>
-          <a:lstStyle/>
-          <a:p>
-            <a:pPr algn="l"/>
-            <a:r>
-              <a:rPr lang="en-US" sz="1800">
-                <a:solidFill>
-                  <a:srgbClr val="8EA0AE"/>
-                </a:solidFill>
-                <a:latin typeface="Calibri"/>
-              </a:rPr>
-              <a:t>With RxRelay: consent → coordinate → verify. One case owns the handoffs.</a:t>
-            </a:r>
-          </a:p>
-        </p:txBody>
-      </p:sp>
-      <p:sp>
-        <p:nvSpPr>
-          <p:cNvPr id="7" name="Footer"/>
+              <a:t>Generic agents: conversation ends ⇒ done. Access requires consent → coordinate → verify with counterpart proof.</a:t>
+            </a:r>
+          </a:p>
+        </p:txBody>
+      </p:sp>
+      <p:sp>
+        <p:nvSpPr>
+          <p:cNvPr id="6" name="Bullet"/>
+          <p:cNvSpPr txBox="1"/>
+          <p:nvPr/>
+        </p:nvSpPr>
+        <p:spPr>
+          <a:xfrm>
+            <a:off x="537200" y="1880000"/>
+            <a:ext cx="8149600" cy="320000"/>
+          </a:xfrm>
+          <a:prstGeom prst="rect">
+            <a:avLst/>
+          </a:prstGeom>
+          <a:noFill/>
+          <a:ln>
+            <a:noFill/>
+          </a:ln>
+        </p:spPr>
+        <p:txBody>
+          <a:bodyPr wrap="square" rtlCol="0"/>
+          <a:lstStyle/>
+          <a:p>
+            <a:pPr algn="l"/>
+            <a:r>
+              <a:rPr lang="en-US" sz="1500">
+                <a:solidFill>
+                  <a:srgbClr val="FFFFFF"/>
+                </a:solidFill>
+                <a:latin typeface="Calibri"/>
+              </a:rPr>
+              <a:t>• No shared case · no counterpart attestation · failed calls still sound successful</a:t>
+            </a:r>
+          </a:p>
+        </p:txBody>
+      </p:sp>
+      <p:sp>
+        <p:nvSpPr>
+          <p:cNvPr id="7" name="Bullet"/>
+          <p:cNvSpPr txBox="1"/>
+          <p:nvPr/>
+        </p:nvSpPr>
+        <p:spPr>
+          <a:xfrm>
+            <a:off x="537200" y="2220000"/>
+            <a:ext cx="8149600" cy="320000"/>
+          </a:xfrm>
+          <a:prstGeom prst="rect">
+            <a:avLst/>
+          </a:prstGeom>
+          <a:noFill/>
+          <a:ln>
+            <a:noFill/>
+          </a:ln>
+        </p:spPr>
+        <p:txBody>
+          <a:bodyPr wrap="square" rtlCol="0"/>
+          <a:lstStyle/>
+          <a:p>
+            <a:pPr algn="l"/>
+            <a:r>
+              <a:rPr lang="en-US" sz="1500">
+                <a:solidFill>
+                  <a:srgbClr val="FFFFFF"/>
+                </a:solidFill>
+                <a:latin typeface="Calibri"/>
+              </a:rPr>
+              <a:t>• One owner · recorded outcomes · patient update only after the trail is real</a:t>
+            </a:r>
+          </a:p>
+        </p:txBody>
+      </p:sp>
+      <p:sp>
+        <p:nvSpPr>
+          <p:cNvPr id="8" name="Footer"/>
           <p:cNvSpPr txBox="1"/>
           <p:nvPr/>
         </p:nvSpPr>
@@ -3044,7 +3044,7 @@
                 </a:solidFill>
                 <a:latin typeface="Calibri"/>
               </a:rPr>
-              <a:t>From conversational agent to accountable coordination system.</a:t>
+              <a:t>In medication access, a polite hallucination is still a failure.</a:t>
             </a:r>
           </a:p>
         </p:txBody>
@@ -3113,7 +3113,7 @@
                 </a:solidFill>
                 <a:latin typeface="Calibri"/>
               </a:rPr>
-              <a:t>THE PRODUCT</a:t>
+              <a:t>SOLUTION</a:t>
             </a:r>
           </a:p>
         </p:txBody>
@@ -3185,7 +3185,7 @@
                 </a:solidFill>
                 <a:latin typeface="Calibri"/>
               </a:rPr>
-              <a:t>A consent-first voice coordinator.</a:t>
+              <a:t>Maya coordinates status — not medicine.</a:t>
             </a:r>
           </a:p>
         </p:txBody>
@@ -3221,7 +3221,7 @@
                 </a:solidFill>
                 <a:latin typeface="Calibri"/>
               </a:rPr>
-              <a:t>One consented voice request becomes a case with an owner — coordinating status, not medicine.</a:t>
+              <a:t>One consented voice request becomes a case with an owner.</a:t>
             </a:r>
           </a:p>
         </p:txBody>
@@ -3257,7 +3257,7 @@
                 </a:solidFill>
                 <a:latin typeface="Calibri"/>
               </a:rPr>
-              <a:t>• 01 Ask once — narrow, explicit coordination consent</a:t>
+              <a:t>• 01 Ask once — natural speech; scoped consent including “help me with my prescription”</a:t>
             </a:r>
           </a:p>
         </p:txBody>
@@ -3329,7 +3329,7 @@
                 </a:solidFill>
                 <a:latin typeface="Calibri"/>
               </a:rPr>
-              <a:t>• 03 Prove — case open until outcome + patient update</a:t>
+              <a:t>• 03 Prove — open until counterpart outcome + patient update</a:t>
             </a:r>
           </a:p>
         </p:txBody>
@@ -3365,7 +3365,7 @@
                 </a:solidFill>
                 <a:latin typeface="Calibri"/>
               </a:rPr>
-              <a:t>The voice layer earns trust by visibly narrowing its authority.</a:t>
+              <a:t>Trust comes from narrowing authority — then proving the work.</a:t>
             </a:r>
           </a:p>
         </p:txBody>
@@ -3434,7 +3434,7 @@
                 </a:solidFill>
                 <a:latin typeface="Calibri"/>
               </a:rPr>
-              <a:t>RESOLUTION GATE</a:t>
+              <a:t>PROOF GATE</a:t>
             </a:r>
           </a:p>
         </p:txBody>
@@ -3506,7 +3506,7 @@
                 </a:solidFill>
                 <a:latin typeface="Calibri"/>
               </a:rPr>
-              <a:t>A case turns green only when all four proofs arrive.</a:t>
+              <a:t>Green only when all four proofs arrive.</a:t>
             </a:r>
           </a:p>
         </p:txBody>
@@ -3542,7 +3542,7 @@
                 </a:solidFill>
                 <a:latin typeface="Calibri"/>
               </a:rPr>
-              <a:t>Deterministic close gate — activity is not resolution.</a:t>
+              <a:t>Activity is not resolution. An LLM never decides the case is closed.</a:t>
             </a:r>
           </a:p>
         </p:txBody>
@@ -3614,7 +3614,7 @@
                 </a:solidFill>
                 <a:latin typeface="Calibri"/>
               </a:rPr>
-              <a:t>• 00:00 Consent · 00:20 Pharmacy blocker · 00:45 Clinic · 01:10 Verify · 01:22 Patient SMS</a:t>
+              <a:t>• 00:00 Consent · 00:20 Pharmacy · 00:45 Clinic · 01:10 Verify · 01:22 SMS</a:t>
             </a:r>
           </a:p>
         </p:txBody>
@@ -3650,7 +3650,7 @@
                 </a:solidFill>
                 <a:latin typeface="Calibri"/>
               </a:rPr>
-              <a:t>No evidence missing. Case can turn green.</a:t>
+              <a:t>No evidence missing → case can turn green.</a:t>
             </a:r>
           </a:p>
         </p:txBody>
@@ -3668,7 +3668,7 @@
   <p:bg>
     <p:bgPr>
       <a:solidFill>
-        <a:srgbClr val="04131F"/>
+        <a:srgbClr val="F4F7F9"/>
       </a:solidFill>
       <a:effectLst/>
     </p:bgPr>
@@ -3719,7 +3719,7 @@
                 </a:solidFill>
                 <a:latin typeface="Calibri"/>
               </a:rPr>
-              <a:t>PAVO ROUTING</a:t>
+              <a:t>DEMO</a:t>
             </a:r>
           </a:p>
         </p:txBody>
@@ -3751,7 +3751,7 @@
             <a:r>
               <a:rPr lang="en-US" sz="900" b="1">
                 <a:solidFill>
-                  <a:srgbClr val="8EA0AE"/>
+                  <a:srgbClr val="5C6B78"/>
                 </a:solidFill>
                 <a:latin typeface="Calibri"/>
               </a:rPr>
@@ -3787,47 +3787,47 @@
             <a:r>
               <a:rPr lang="en-US" sz="3600" b="1">
                 <a:solidFill>
-                  <a:srgbClr val="FFFFFF"/>
-                </a:solidFill>
-                <a:latin typeface="Calibri"/>
-              </a:rPr>
-              <a:t>The coupling cliff: joint ASR, capture, and reasoning.</a:t>
-            </a:r>
-          </a:p>
-        </p:txBody>
-      </p:sp>
-      <p:sp>
-        <p:nvSpPr>
-          <p:cNvPr id="5" name="Body"/>
-          <p:cNvSpPr txBox="1"/>
-          <p:nvPr/>
-        </p:nvSpPr>
-        <p:spPr>
-          <a:xfrm>
-            <a:off x="457200" y="1500000"/>
-            <a:ext cx="8229600" cy="360000"/>
-          </a:xfrm>
-          <a:prstGeom prst="rect">
-            <a:avLst/>
-          </a:prstGeom>
-          <a:noFill/>
-          <a:ln>
-            <a:noFill/>
-          </a:ln>
-        </p:spPr>
-        <p:txBody>
-          <a:bodyPr wrap="square" rtlCol="0"/>
-          <a:lstStyle/>
-          <a:p>
-            <a:pPr algn="l"/>
-            <a:r>
-              <a:rPr lang="en-US" sz="1800">
-                <a:solidFill>
-                  <a:srgbClr val="8EA0AE"/>
-                </a:solidFill>
-                <a:latin typeface="Calibri"/>
-              </a:rPr>
-              <a:t>A stronger LLM cannot repair a misheard authorization number.</a:t>
+                  <a:srgbClr val="04131F"/>
+                </a:solidFill>
+                <a:latin typeface="Calibri"/>
+              </a:rPr>
+              <a:t>Sandbox E2E. Live inbound when ready.</a:t>
+            </a:r>
+          </a:p>
+        </p:txBody>
+      </p:sp>
+      <p:sp>
+        <p:nvSpPr>
+          <p:cNvPr id="5" name="Bullet"/>
+          <p:cNvSpPr txBox="1"/>
+          <p:nvPr/>
+        </p:nvSpPr>
+        <p:spPr>
+          <a:xfrm>
+            <a:off x="537200" y="1500000"/>
+            <a:ext cx="8149600" cy="320000"/>
+          </a:xfrm>
+          <a:prstGeom prst="rect">
+            <a:avLst/>
+          </a:prstGeom>
+          <a:noFill/>
+          <a:ln>
+            <a:noFill/>
+          </a:ln>
+        </p:spPr>
+        <p:txBody>
+          <a:bodyPr wrap="square" rtlCol="0"/>
+          <a:lstStyle/>
+          <a:p>
+            <a:pPr algn="l"/>
+            <a:r>
+              <a:rPr lang="en-US" sz="1500">
+                <a:solidFill>
+                  <a:srgbClr val="04131F"/>
+                </a:solidFill>
+                <a:latin typeface="Calibri"/>
+              </a:rPr>
+              <a:t>• Proof board :3000 — npm run dev → 4/4 gate + SSE</a:t>
             </a:r>
           </a:p>
         </p:txBody>
@@ -3840,7 +3840,7 @@
         </p:nvSpPr>
         <p:spPr>
           <a:xfrm>
-            <a:off x="537200" y="1880000"/>
+            <a:off x="537200" y="1840000"/>
             <a:ext cx="8149600" cy="320000"/>
           </a:xfrm>
           <a:prstGeom prst="rect">
@@ -3859,11 +3859,11 @@
             <a:r>
               <a:rPr lang="en-US" sz="1500">
                 <a:solidFill>
-                  <a:srgbClr val="FFFFFF"/>
-                </a:solidFill>
-                <a:latin typeface="Calibri"/>
-              </a:rPr>
-              <a:t>• FAST — greetings / yes-no · compact reasoning</a:t>
+                  <a:srgbClr val="04131F"/>
+                </a:solidFill>
+                <a:latin typeface="Calibri"/>
+              </a:rPr>
+              <a:t>• Maya TeXML :3001 — npm run voice → tunnel → natural consent → case transitions</a:t>
             </a:r>
           </a:p>
         </p:txBody>
@@ -3876,7 +3876,7 @@
         </p:nvSpPr>
         <p:spPr>
           <a:xfrm>
-            <a:off x="537200" y="2220000"/>
+            <a:off x="537200" y="2180000"/>
             <a:ext cx="8149600" cy="320000"/>
           </a:xfrm>
           <a:prstGeom prst="rect">
@@ -3895,90 +3895,18 @@
             <a:r>
               <a:rPr lang="en-US" sz="1500">
                 <a:solidFill>
-                  <a:srgbClr val="FFFFFF"/>
-                </a:solidFill>
-                <a:latin typeface="Calibri"/>
-              </a:rPr>
-              <a:t>• BALANCED — routine coordination · reliable speech → tools</a:t>
-            </a:r>
-          </a:p>
-        </p:txBody>
-      </p:sp>
-      <p:sp>
-        <p:nvSpPr>
-          <p:cNvPr id="8" name="Bullet"/>
-          <p:cNvSpPr txBox="1"/>
-          <p:nvPr/>
-        </p:nvSpPr>
-        <p:spPr>
-          <a:xfrm>
-            <a:off x="537200" y="2560000"/>
-            <a:ext cx="8149600" cy="320000"/>
-          </a:xfrm>
-          <a:prstGeom prst="rect">
-            <a:avLst/>
-          </a:prstGeom>
-          <a:noFill/>
-          <a:ln>
-            <a:noFill/>
-          </a:ln>
-        </p:spPr>
-        <p:txBody>
-          <a:bodyPr wrap="square" rtlCol="0"/>
-          <a:lstStyle/>
-          <a:p>
-            <a:pPr algn="l"/>
-            <a:r>
-              <a:rPr lang="en-US" sz="1500">
-                <a:solidFill>
-                  <a:srgbClr val="FFFFFF"/>
-                </a:solidFill>
-                <a:latin typeface="Calibri"/>
-              </a:rPr>
-              <a:t>• VERIFIED — names, dates, prior auth · TeXML speech + DTMF, strong model (not multi-vendor ASR theater)</a:t>
-            </a:r>
-          </a:p>
-        </p:txBody>
-      </p:sp>
-      <p:sp>
-        <p:nvSpPr>
-          <p:cNvPr id="9" name="Bullet"/>
-          <p:cNvSpPr txBox="1"/>
-          <p:nvPr/>
-        </p:nvSpPr>
-        <p:spPr>
-          <a:xfrm>
-            <a:off x="537200" y="2900000"/>
-            <a:ext cx="8149600" cy="320000"/>
-          </a:xfrm>
-          <a:prstGeom prst="rect">
-            <a:avLst/>
-          </a:prstGeom>
-          <a:noFill/>
-          <a:ln>
-            <a:noFill/>
-          </a:ln>
-        </p:spPr>
-        <p:txBody>
-          <a:bodyPr wrap="square" rtlCol="0"/>
-          <a:lstStyle/>
-          <a:p>
-            <a:pPr algn="l"/>
-            <a:r>
-              <a:rPr lang="en-US" sz="1500">
-                <a:solidFill>
-                  <a:srgbClr val="FFFFFF"/>
-                </a:solidFill>
-                <a:latin typeface="Calibri"/>
-              </a:rPr>
-              <a:t>• SAFE STOP — clinical / unsafe → human queue, no action</a:t>
-            </a:r>
-          </a:p>
-        </p:txBody>
-      </p:sp>
-      <p:sp>
-        <p:nvSpPr>
-          <p:cNvPr id="10" name="Footer"/>
+                  <a:srgbClr val="04131F"/>
+                </a:solidFill>
+                <a:latin typeface="Calibri"/>
+              </a:rPr>
+              <a:t>• Safe branch → green · unsafe → human queue · call the claimed number</a:t>
+            </a:r>
+          </a:p>
+        </p:txBody>
+      </p:sp>
+      <p:sp>
+        <p:nvSpPr>
+          <p:cNvPr id="8" name="Footer"/>
           <p:cNvSpPr txBox="1"/>
           <p:nvPr/>
         </p:nvSpPr>
@@ -4003,11 +3931,11 @@
             <a:r>
               <a:rPr lang="en-US" sz="900">
                 <a:solidFill>
-                  <a:srgbClr val="8EA0AE"/>
-                </a:solidFill>
-                <a:latin typeface="Calibri"/>
-              </a:rPr>
-              <a:t>Demand-conditioned routing · confidence · noise · critical entities · action risk</a:t>
+                  <a:srgbClr val="5C6B78"/>
+                </a:solidFill>
+                <a:latin typeface="Calibri"/>
+              </a:rPr>
+              <a:t>Judged flow is deterministic, visible, and fail-closed.</a:t>
             </a:r>
           </a:p>
         </p:txBody>
@@ -4025,7 +3953,7 @@
   <p:bg>
     <p:bgPr>
       <a:solidFill>
-        <a:srgbClr val="F4F7F9"/>
+        <a:srgbClr val="04131F"/>
       </a:solidFill>
       <a:effectLst/>
     </p:bgPr>
@@ -4076,7 +4004,7 @@
                 </a:solidFill>
                 <a:latin typeface="Calibri"/>
               </a:rPr>
-              <a:t>LIVE SURFACES</a:t>
+              <a:t>PAVO</a:t>
             </a:r>
           </a:p>
         </p:txBody>
@@ -4108,7 +4036,7 @@
             <a:r>
               <a:rPr lang="en-US" sz="900" b="1">
                 <a:solidFill>
-                  <a:srgbClr val="5C6B78"/>
+                  <a:srgbClr val="8EA0AE"/>
                 </a:solidFill>
                 <a:latin typeface="Calibri"/>
               </a:rPr>
@@ -4144,24 +4072,60 @@
             <a:r>
               <a:rPr lang="en-US" sz="3600" b="1">
                 <a:solidFill>
-                  <a:srgbClr val="04131F"/>
-                </a:solidFill>
-                <a:latin typeface="Calibri"/>
-              </a:rPr>
-              <a:t>Every stakeholder sees the same evidence.</a:t>
-            </a:r>
-          </a:p>
-        </p:txBody>
-      </p:sp>
-      <p:sp>
-        <p:nvSpPr>
-          <p:cNvPr id="5" name="Bullet"/>
-          <p:cNvSpPr txBox="1"/>
-          <p:nvPr/>
-        </p:nvSpPr>
-        <p:spPr>
-          <a:xfrm>
-            <a:off x="537200" y="1500000"/>
+                  <a:srgbClr val="FFFFFF"/>
+                </a:solidFill>
+                <a:latin typeface="Calibri"/>
+              </a:rPr>
+              <a:t>Upgrade the pipeline — not just the model.</a:t>
+            </a:r>
+          </a:p>
+        </p:txBody>
+      </p:sp>
+      <p:sp>
+        <p:nvSpPr>
+          <p:cNvPr id="5" name="Body"/>
+          <p:cNvSpPr txBox="1"/>
+          <p:nvPr/>
+        </p:nvSpPr>
+        <p:spPr>
+          <a:xfrm>
+            <a:off x="457200" y="1500000"/>
+            <a:ext cx="8229600" cy="360000"/>
+          </a:xfrm>
+          <a:prstGeom prst="rect">
+            <a:avLst/>
+          </a:prstGeom>
+          <a:noFill/>
+          <a:ln>
+            <a:noFill/>
+          </a:ln>
+        </p:spPr>
+        <p:txBody>
+          <a:bodyPr wrap="square" rtlCol="0"/>
+          <a:lstStyle/>
+          <a:p>
+            <a:pPr algn="l"/>
+            <a:r>
+              <a:rPr lang="en-US" sz="1800">
+                <a:solidFill>
+                  <a:srgbClr val="8EA0AE"/>
+                </a:solidFill>
+                <a:latin typeface="Calibri"/>
+              </a:rPr>
+              <a:t>A stronger LLM cannot repair a misheard authorization number.</a:t>
+            </a:r>
+          </a:p>
+        </p:txBody>
+      </p:sp>
+      <p:sp>
+        <p:nvSpPr>
+          <p:cNvPr id="6" name="Bullet"/>
+          <p:cNvSpPr txBox="1"/>
+          <p:nvPr/>
+        </p:nvSpPr>
+        <p:spPr>
+          <a:xfrm>
+            <a:off x="537200" y="1880000"/>
             <a:ext cx="8149600" cy="320000"/>
           </a:xfrm>
           <a:prstGeom prst="rect">
@@ -4180,24 +4144,24 @@
             <a:r>
               <a:rPr lang="en-US" sz="1500">
                 <a:solidFill>
-                  <a:srgbClr val="04131F"/>
-                </a:solidFill>
-                <a:latin typeface="Calibri"/>
-              </a:rPr>
-              <a:t>• Proof board — lanes, timeline, 4/4 gate</a:t>
-            </a:r>
-          </a:p>
-        </p:txBody>
-      </p:sp>
-      <p:sp>
-        <p:nvSpPr>
-          <p:cNvPr id="6" name="Bullet"/>
-          <p:cNvSpPr txBox="1"/>
-          <p:nvPr/>
-        </p:nvSpPr>
-        <p:spPr>
-          <a:xfrm>
-            <a:off x="537200" y="1840000"/>
+                  <a:srgbClr val="FFFFFF"/>
+                </a:solidFill>
+                <a:latin typeface="Calibri"/>
+              </a:rPr>
+              <a:t>• FAST — greetings / yes-no · compact reasoning</a:t>
+            </a:r>
+          </a:p>
+        </p:txBody>
+      </p:sp>
+      <p:sp>
+        <p:nvSpPr>
+          <p:cNvPr id="7" name="Bullet"/>
+          <p:cNvSpPr txBox="1"/>
+          <p:nvPr/>
+        </p:nvSpPr>
+        <p:spPr>
+          <a:xfrm>
+            <a:off x="537200" y="2220000"/>
             <a:ext cx="8149600" cy="320000"/>
           </a:xfrm>
           <a:prstGeom prst="rect">
@@ -4216,24 +4180,24 @@
             <a:r>
               <a:rPr lang="en-US" sz="1500">
                 <a:solidFill>
-                  <a:srgbClr val="04131F"/>
-                </a:solidFill>
-                <a:latin typeface="Calibri"/>
-              </a:rPr>
-              <a:t>• Counterpart portal — structured pharmacy / clinic outcomes</a:t>
-            </a:r>
-          </a:p>
-        </p:txBody>
-      </p:sp>
-      <p:sp>
-        <p:nvSpPr>
-          <p:cNvPr id="7" name="Bullet"/>
-          <p:cNvSpPr txBox="1"/>
-          <p:nvPr/>
-        </p:nvSpPr>
-        <p:spPr>
-          <a:xfrm>
-            <a:off x="537200" y="2180000"/>
+                  <a:srgbClr val="FFFFFF"/>
+                </a:solidFill>
+                <a:latin typeface="Calibri"/>
+              </a:rPr>
+              <a:t>• BALANCED — routine coordination · speech → tools</a:t>
+            </a:r>
+          </a:p>
+        </p:txBody>
+      </p:sp>
+      <p:sp>
+        <p:nvSpPr>
+          <p:cNvPr id="8" name="Bullet"/>
+          <p:cNvSpPr txBox="1"/>
+          <p:nvPr/>
+        </p:nvSpPr>
+        <p:spPr>
+          <a:xfrm>
+            <a:off x="537200" y="2560000"/>
             <a:ext cx="8149600" cy="320000"/>
           </a:xfrm>
           <a:prstGeom prst="rect">
@@ -4252,24 +4216,24 @@
             <a:r>
               <a:rPr lang="en-US" sz="1500">
                 <a:solidFill>
-                  <a:srgbClr val="04131F"/>
-                </a:solidFill>
-                <a:latin typeface="Calibri"/>
-              </a:rPr>
-              <a:t>• Signed receipts — audit trail for consent and action</a:t>
-            </a:r>
-          </a:p>
-        </p:txBody>
-      </p:sp>
-      <p:sp>
-        <p:nvSpPr>
-          <p:cNvPr id="8" name="Bullet"/>
-          <p:cNvSpPr txBox="1"/>
-          <p:nvPr/>
-        </p:nvSpPr>
-        <p:spPr>
-          <a:xfrm>
-            <a:off x="537200" y="2520000"/>
+                  <a:srgbClr val="FFFFFF"/>
+                </a:solidFill>
+                <a:latin typeface="Calibri"/>
+              </a:rPr>
+              <a:t>• VERIFIED — names, dates, prior auth · speech + DTMF + strong model</a:t>
+            </a:r>
+          </a:p>
+        </p:txBody>
+      </p:sp>
+      <p:sp>
+        <p:nvSpPr>
+          <p:cNvPr id="9" name="Bullet"/>
+          <p:cNvSpPr txBox="1"/>
+          <p:nvPr/>
+        </p:nvSpPr>
+        <p:spPr>
+          <a:xfrm>
+            <a:off x="537200" y="2900000"/>
             <a:ext cx="8149600" cy="320000"/>
           </a:xfrm>
           <a:prstGeom prst="rect">
@@ -4288,47 +4252,11 @@
             <a:r>
               <a:rPr lang="en-US" sz="1500">
                 <a:solidFill>
-                  <a:srgbClr val="04131F"/>
-                </a:solidFill>
-                <a:latin typeface="Calibri"/>
-              </a:rPr>
-              <a:t>• Human ops queue — escalation for ambiguous / clinical</a:t>
-            </a:r>
-          </a:p>
-        </p:txBody>
-      </p:sp>
-      <p:sp>
-        <p:nvSpPr>
-          <p:cNvPr id="9" name="Bullet"/>
-          <p:cNvSpPr txBox="1"/>
-          <p:nvPr/>
-        </p:nvSpPr>
-        <p:spPr>
-          <a:xfrm>
-            <a:off x="537200" y="2860000"/>
-            <a:ext cx="8149600" cy="320000"/>
-          </a:xfrm>
-          <a:prstGeom prst="rect">
-            <a:avLst/>
-          </a:prstGeom>
-          <a:noFill/>
-          <a:ln>
-            <a:noFill/>
-          </a:ln>
-        </p:spPr>
-        <p:txBody>
-          <a:bodyPr wrap="square" rtlCol="0"/>
-          <a:lstStyle/>
-          <a:p>
-            <a:pPr algn="l"/>
-            <a:r>
-              <a:rPr lang="en-US" sz="1500">
-                <a:solidFill>
-                  <a:srgbClr val="04131F"/>
-                </a:solidFill>
-                <a:latin typeface="Calibri"/>
-              </a:rPr>
-              <a:t>• SSE stream — live case updates, no pre-baked animation</a:t>
+                  <a:srgbClr val="FFFFFF"/>
+                </a:solidFill>
+                <a:latin typeface="Calibri"/>
+              </a:rPr>
+              <a:t>• SAFE STOP — clinical / unsafe → human queue, no action</a:t>
             </a:r>
           </a:p>
         </p:txBody>
@@ -4360,11 +4288,11 @@
             <a:r>
               <a:rPr lang="en-US" sz="900">
                 <a:solidFill>
-                  <a:srgbClr val="5C6B78"/>
-                </a:solidFill>
-                <a:latin typeface="Calibri"/>
-              </a:rPr>
-              <a:t>UI actions hit the real demo state machine.</a:t>
+                  <a:srgbClr val="8EA0AE"/>
+                </a:solidFill>
+                <a:latin typeface="Calibri"/>
+              </a:rPr>
+              <a:t>Demand · confidence · noise · critical entities · action risk</a:t>
             </a:r>
           </a:p>
         </p:txBody>
@@ -4382,7 +4310,7 @@
   <p:bg>
     <p:bgPr>
       <a:solidFill>
-        <a:srgbClr val="04131F"/>
+        <a:srgbClr val="F4F7F9"/>
       </a:solidFill>
       <a:effectLst/>
     </p:bgPr>
@@ -4433,7 +4361,7 @@
                 </a:solidFill>
                 <a:latin typeface="Calibri"/>
               </a:rPr>
-              <a:t>ARCHITECTURE</a:t>
+              <a:t>MOAT</a:t>
             </a:r>
           </a:p>
         </p:txBody>
@@ -4465,7 +4393,7 @@
             <a:r>
               <a:rPr lang="en-US" sz="900" b="1">
                 <a:solidFill>
-                  <a:srgbClr val="8EA0AE"/>
+                  <a:srgbClr val="5C6B78"/>
                 </a:solidFill>
                 <a:latin typeface="Calibri"/>
               </a:rPr>
@@ -4501,47 +4429,47 @@
             <a:r>
               <a:rPr lang="en-US" sz="3600" b="1">
                 <a:solidFill>
-                  <a:srgbClr val="FFFFFF"/>
-                </a:solidFill>
-                <a:latin typeface="Calibri"/>
-              </a:rPr>
-              <a:t>Voice-server blast radius. Dashboard stays local.</a:t>
-            </a:r>
-          </a:p>
-        </p:txBody>
-      </p:sp>
-      <p:sp>
-        <p:nvSpPr>
-          <p:cNvPr id="5" name="Body"/>
-          <p:cNvSpPr txBox="1"/>
-          <p:nvPr/>
-        </p:nvSpPr>
-        <p:spPr>
-          <a:xfrm>
-            <a:off x="457200" y="1500000"/>
-            <a:ext cx="8229600" cy="360000"/>
-          </a:xfrm>
-          <a:prstGeom prst="rect">
-            <a:avLst/>
-          </a:prstGeom>
-          <a:noFill/>
-          <a:ln>
-            <a:noFill/>
-          </a:ln>
-        </p:spPr>
-        <p:txBody>
-          <a:bodyPr wrap="square" rtlCol="0"/>
-          <a:lstStyle/>
-          <a:p>
-            <a:pPr algn="l"/>
-            <a:r>
-              <a:rPr lang="en-US" sz="1800">
-                <a:solidFill>
-                  <a:srgbClr val="8EA0AE"/>
-                </a:solidFill>
-                <a:latin typeface="Calibri"/>
-              </a:rPr>
-              <a:t>LLM proposes language. Policy + evidence decide what may happen. Public tunnel never reaches dashboard.</a:t>
+                  <a:srgbClr val="04131F"/>
+                </a:solidFill>
+                <a:latin typeface="Calibri"/>
+              </a:rPr>
+              <a:t>Useful inside the boundary. Humble outside it.</a:t>
+            </a:r>
+          </a:p>
+        </p:txBody>
+      </p:sp>
+      <p:sp>
+        <p:nvSpPr>
+          <p:cNvPr id="5" name="Bullet"/>
+          <p:cNvSpPr txBox="1"/>
+          <p:nvPr/>
+        </p:nvSpPr>
+        <p:spPr>
+          <a:xfrm>
+            <a:off x="537200" y="1500000"/>
+            <a:ext cx="8149600" cy="320000"/>
+          </a:xfrm>
+          <a:prstGeom prst="rect">
+            <a:avLst/>
+          </a:prstGeom>
+          <a:noFill/>
+          <a:ln>
+            <a:noFill/>
+          </a:ln>
+        </p:spPr>
+        <p:txBody>
+          <a:bodyPr wrap="square" rtlCol="0"/>
+          <a:lstStyle/>
+          <a:p>
+            <a:pPr algn="l"/>
+            <a:r>
+              <a:rPr lang="en-US" sz="1500">
+                <a:solidFill>
+                  <a:srgbClr val="04131F"/>
+                </a:solidFill>
+                <a:latin typeface="Calibri"/>
+              </a:rPr>
+              <a:t>• CAN: scoped consent · status checks · counterpart outcomes · consented updates</a:t>
             </a:r>
           </a:p>
         </p:txBody>
@@ -4554,7 +4482,7 @@
         </p:nvSpPr>
         <p:spPr>
           <a:xfrm>
-            <a:off x="537200" y="1880000"/>
+            <a:off x="537200" y="1840000"/>
             <a:ext cx="8149600" cy="320000"/>
           </a:xfrm>
           <a:prstGeom prst="rect">
@@ -4573,11 +4501,11 @@
             <a:r>
               <a:rPr lang="en-US" sz="1500">
                 <a:solidFill>
-                  <a:srgbClr val="FFFFFF"/>
-                </a:solidFill>
-                <a:latin typeface="Calibri"/>
-              </a:rPr>
-              <a:t>• Public edge: OTP caller · Cloudflare → :3001 · a1mobile TeXML</a:t>
+                  <a:srgbClr val="04131F"/>
+                </a:solidFill>
+                <a:latin typeface="Calibri"/>
+              </a:rPr>
+              <a:t>• WILL NOT: clinical advice · Rx changes · controlled inventory · unconsented contact</a:t>
             </a:r>
           </a:p>
         </p:txBody>
@@ -4590,7 +4518,7 @@
         </p:nvSpPr>
         <p:spPr>
           <a:xfrm>
-            <a:off x="537200" y="2220000"/>
+            <a:off x="537200" y="2180000"/>
             <a:ext cx="8149600" cy="320000"/>
           </a:xfrm>
           <a:prstGeom prst="rect">
@@ -4609,126 +4537,18 @@
             <a:r>
               <a:rPr lang="en-US" sz="1500">
                 <a:solidFill>
-                  <a:srgbClr val="FFFFFF"/>
-                </a:solidFill>
-                <a:latin typeface="Calibri"/>
-              </a:rPr>
-              <a:t>• Voice process: voice-server.mjs · consent parse · safe stop</a:t>
-            </a:r>
-          </a:p>
-        </p:txBody>
-      </p:sp>
-      <p:sp>
-        <p:nvSpPr>
-          <p:cNvPr id="8" name="Bullet"/>
-          <p:cNvSpPr txBox="1"/>
-          <p:nvPr/>
-        </p:nvSpPr>
-        <p:spPr>
-          <a:xfrm>
-            <a:off x="537200" y="2560000"/>
-            <a:ext cx="8149600" cy="320000"/>
-          </a:xfrm>
-          <a:prstGeom prst="rect">
-            <a:avLst/>
-          </a:prstGeom>
-          <a:noFill/>
-          <a:ln>
-            <a:noFill/>
-          </a:ln>
-        </p:spPr>
-        <p:txBody>
-          <a:bodyPr wrap="square" rtlCol="0"/>
-          <a:lstStyle/>
-          <a:p>
-            <a:pPr algn="l"/>
-            <a:r>
-              <a:rPr lang="en-US" sz="1500">
-                <a:solidFill>
-                  <a:srgbClr val="FFFFFF"/>
-                </a:solidFill>
-                <a:latin typeface="Calibri"/>
-              </a:rPr>
-              <a:t>• Core: PAVO router · inference · CaseStore proof gate</a:t>
-            </a:r>
-          </a:p>
-        </p:txBody>
-      </p:sp>
-      <p:sp>
-        <p:nvSpPr>
-          <p:cNvPr id="9" name="Bullet"/>
-          <p:cNvSpPr txBox="1"/>
-          <p:nvPr/>
-        </p:nvSpPr>
-        <p:spPr>
-          <a:xfrm>
-            <a:off x="537200" y="2900000"/>
-            <a:ext cx="8149600" cy="320000"/>
-          </a:xfrm>
-          <a:prstGeom prst="rect">
-            <a:avLst/>
-          </a:prstGeom>
-          <a:noFill/>
-          <a:ln>
-            <a:noFill/>
-          </a:ln>
-        </p:spPr>
-        <p:txBody>
-          <a:bodyPr wrap="square" rtlCol="0"/>
-          <a:lstStyle/>
-          <a:p>
-            <a:pPr algn="l"/>
-            <a:r>
-              <a:rPr lang="en-US" sz="1500">
-                <a:solidFill>
-                  <a:srgbClr val="FFFFFF"/>
-                </a:solidFill>
-                <a:latin typeface="Calibri"/>
-              </a:rPr>
-              <a:t>• Dashboard local :3000 · MCP/API · telephony sandbox default</a:t>
-            </a:r>
-          </a:p>
-        </p:txBody>
-      </p:sp>
-      <p:sp>
-        <p:nvSpPr>
-          <p:cNvPr id="10" name="Bullet"/>
-          <p:cNvSpPr txBox="1"/>
-          <p:nvPr/>
-        </p:nvSpPr>
-        <p:spPr>
-          <a:xfrm>
-            <a:off x="537200" y="3240000"/>
-            <a:ext cx="8149600" cy="320000"/>
-          </a:xfrm>
-          <a:prstGeom prst="rect">
-            <a:avLst/>
-          </a:prstGeom>
-          <a:noFill/>
-          <a:ln>
-            <a:noFill/>
-          </a:ln>
-        </p:spPr>
-        <p:txBody>
-          <a:bodyPr wrap="square" rtlCol="0"/>
-          <a:lstStyle/>
-          <a:p>
-            <a:pPr algn="l"/>
-            <a:r>
-              <a:rPr lang="en-US" sz="1500">
-                <a:solidFill>
-                  <a:srgbClr val="FFFFFF"/>
-                </a:solidFill>
-                <a:latin typeface="Calibri"/>
-              </a:rPr>
-              <a:t>• Proof flags never set by model text alone</a:t>
-            </a:r>
-          </a:p>
-        </p:txBody>
-      </p:sp>
-      <p:sp>
-        <p:nvSpPr>
-          <p:cNvPr id="11" name="Footer"/>
+                  <a:srgbClr val="04131F"/>
+                </a:solidFill>
+                <a:latin typeface="Calibri"/>
+              </a:rPr>
+              <a:t>• DEFENSE: signed receipts · attestation portal · live outbound fails closed · proof flags never from model text</a:t>
+            </a:r>
+          </a:p>
+        </p:txBody>
+      </p:sp>
+      <p:sp>
+        <p:nvSpPr>
+          <p:cNvPr id="8" name="Footer"/>
           <p:cNvSpPr txBox="1"/>
           <p:nvPr/>
         </p:nvSpPr>
@@ -4753,11 +4573,11 @@
             <a:r>
               <a:rPr lang="en-US" sz="900">
                 <a:solidFill>
-                  <a:srgbClr val="8EA0AE"/>
-                </a:solidFill>
-                <a:latin typeface="Calibri"/>
-              </a:rPr>
-              <a:t>Blast radius of public URL = three TeXML routes.</a:t>
+                  <a:srgbClr val="5C6B78"/>
+                </a:solidFill>
+                <a:latin typeface="Calibri"/>
+              </a:rPr>
+              <a:t>The wow factor is knowing when not to act — and exporting what did.</a:t>
             </a:r>
           </a:p>
         </p:txBody>
@@ -4775,7 +4595,7 @@
   <p:bg>
     <p:bgPr>
       <a:solidFill>
-        <a:srgbClr val="F4F7F9"/>
+        <a:srgbClr val="04131F"/>
       </a:solidFill>
       <a:effectLst/>
     </p:bgPr>
@@ -4826,7 +4646,7 @@
                 </a:solidFill>
                 <a:latin typeface="Calibri"/>
               </a:rPr>
-              <a:t>TRUST BY CONSTRUCTION</a:t>
+              <a:t>ARCHITECTURE</a:t>
             </a:r>
           </a:p>
         </p:txBody>
@@ -4858,7 +4678,7 @@
             <a:r>
               <a:rPr lang="en-US" sz="900" b="1">
                 <a:solidFill>
-                  <a:srgbClr val="5C6B78"/>
+                  <a:srgbClr val="8EA0AE"/>
                 </a:solidFill>
                 <a:latin typeface="Calibri"/>
               </a:rPr>
@@ -4894,11 +4714,11 @@
             <a:r>
               <a:rPr lang="en-US" sz="3600" b="1">
                 <a:solidFill>
-                  <a:srgbClr val="04131F"/>
-                </a:solidFill>
-                <a:latin typeface="Calibri"/>
-              </a:rPr>
-              <a:t>What we refuse.</a:t>
+                  <a:srgbClr val="FFFFFF"/>
+                </a:solidFill>
+                <a:latin typeface="Calibri"/>
+              </a:rPr>
+              <a:t>Voice blast radius. Dashboard stays local.</a:t>
             </a:r>
           </a:p>
         </p:txBody>
@@ -4930,11 +4750,11 @@
             <a:r>
               <a:rPr lang="en-US" sz="1800">
                 <a:solidFill>
-                  <a:srgbClr val="5C6B78"/>
-                </a:solidFill>
-                <a:latin typeface="Calibri"/>
-              </a:rPr>
-              <a:t>Aggressively useful inside a narrow boundary — visibly humble outside it.</a:t>
+                  <a:srgbClr val="8EA0AE"/>
+                </a:solidFill>
+                <a:latin typeface="Calibri"/>
+              </a:rPr>
+              <a:t>LLM proposes language. Deterministic policy + evidence decide what may happen.</a:t>
             </a:r>
           </a:p>
         </p:txBody>
@@ -4966,11 +4786,11 @@
             <a:r>
               <a:rPr lang="en-US" sz="1500">
                 <a:solidFill>
-                  <a:srgbClr val="04131F"/>
-                </a:solidFill>
-                <a:latin typeface="Calibri"/>
-              </a:rPr>
-              <a:t>• CAN: record consent · check status · document outcomes · send consented updates</a:t>
+                  <a:srgbClr val="FFFFFF"/>
+                </a:solidFill>
+                <a:latin typeface="Calibri"/>
+              </a:rPr>
+              <a:t>• Edge: OTP caller · Cloudflare → :3001 only · a1mobile TeXML</a:t>
             </a:r>
           </a:p>
         </p:txBody>
@@ -5002,18 +4822,126 @@
             <a:r>
               <a:rPr lang="en-US" sz="1500">
                 <a:solidFill>
-                  <a:srgbClr val="04131F"/>
-                </a:solidFill>
-                <a:latin typeface="Calibri"/>
-              </a:rPr>
-              <a:t>• WILL NOT: clinical advice · Rx changes · controlled inventory · unconsented contact</a:t>
-            </a:r>
-          </a:p>
-        </p:txBody>
-      </p:sp>
-      <p:sp>
-        <p:nvSpPr>
-          <p:cNvPr id="8" name="Footer"/>
+                  <a:srgbClr val="FFFFFF"/>
+                </a:solidFill>
+                <a:latin typeface="Calibri"/>
+              </a:rPr>
+              <a:t>• Voice: Maya · voice-server · consent · safe stop · three routes</a:t>
+            </a:r>
+          </a:p>
+        </p:txBody>
+      </p:sp>
+      <p:sp>
+        <p:nvSpPr>
+          <p:cNvPr id="8" name="Bullet"/>
+          <p:cNvSpPr txBox="1"/>
+          <p:nvPr/>
+        </p:nvSpPr>
+        <p:spPr>
+          <a:xfrm>
+            <a:off x="537200" y="2560000"/>
+            <a:ext cx="8149600" cy="320000"/>
+          </a:xfrm>
+          <a:prstGeom prst="rect">
+            <a:avLst/>
+          </a:prstGeom>
+          <a:noFill/>
+          <a:ln>
+            <a:noFill/>
+          </a:ln>
+        </p:spPr>
+        <p:txBody>
+          <a:bodyPr wrap="square" rtlCol="0"/>
+          <a:lstStyle/>
+          <a:p>
+            <a:pPr algn="l"/>
+            <a:r>
+              <a:rPr lang="en-US" sz="1500">
+                <a:solidFill>
+                  <a:srgbClr val="FFFFFF"/>
+                </a:solidFill>
+                <a:latin typeface="Calibri"/>
+              </a:rPr>
+              <a:t>• Core: PAVO + CaseStore 4/4 gate · shared JSON</a:t>
+            </a:r>
+          </a:p>
+        </p:txBody>
+      </p:sp>
+      <p:sp>
+        <p:nvSpPr>
+          <p:cNvPr id="9" name="Bullet"/>
+          <p:cNvSpPr txBox="1"/>
+          <p:nvPr/>
+        </p:nvSpPr>
+        <p:spPr>
+          <a:xfrm>
+            <a:off x="537200" y="2900000"/>
+            <a:ext cx="8149600" cy="320000"/>
+          </a:xfrm>
+          <a:prstGeom prst="rect">
+            <a:avLst/>
+          </a:prstGeom>
+          <a:noFill/>
+          <a:ln>
+            <a:noFill/>
+          </a:ln>
+        </p:spPr>
+        <p:txBody>
+          <a:bodyPr wrap="square" rtlCol="0"/>
+          <a:lstStyle/>
+          <a:p>
+            <a:pPr algn="l"/>
+            <a:r>
+              <a:rPr lang="en-US" sz="1500">
+                <a:solidFill>
+                  <a:srgbClr val="FFFFFF"/>
+                </a:solidFill>
+                <a:latin typeface="Calibri"/>
+              </a:rPr>
+              <a:t>• Ops: proof board :3000 · portal · receipts · MCP</a:t>
+            </a:r>
+          </a:p>
+        </p:txBody>
+      </p:sp>
+      <p:sp>
+        <p:nvSpPr>
+          <p:cNvPr id="10" name="Bullet"/>
+          <p:cNvSpPr txBox="1"/>
+          <p:nvPr/>
+        </p:nvSpPr>
+        <p:spPr>
+          <a:xfrm>
+            <a:off x="537200" y="3240000"/>
+            <a:ext cx="8149600" cy="320000"/>
+          </a:xfrm>
+          <a:prstGeom prst="rect">
+            <a:avLst/>
+          </a:prstGeom>
+          <a:noFill/>
+          <a:ln>
+            <a:noFill/>
+          </a:ln>
+        </p:spPr>
+        <p:txBody>
+          <a:bodyPr wrap="square" rtlCol="0"/>
+          <a:lstStyle/>
+          <a:p>
+            <a:pPr algn="l"/>
+            <a:r>
+              <a:rPr lang="en-US" sz="1500">
+                <a:solidFill>
+                  <a:srgbClr val="FFFFFF"/>
+                </a:solidFill>
+                <a:latin typeface="Calibri"/>
+              </a:rPr>
+              <a:t>• Live: sandbox default · fail closed · OTP allowlist</a:t>
+            </a:r>
+          </a:p>
+        </p:txBody>
+      </p:sp>
+      <p:sp>
+        <p:nvSpPr>
+          <p:cNvPr id="11" name="Footer"/>
           <p:cNvSpPr txBox="1"/>
           <p:nvPr/>
         </p:nvSpPr>
@@ -5038,11 +4966,11 @@
             <a:r>
               <a:rPr lang="en-US" sz="900">
                 <a:solidFill>
-                  <a:srgbClr val="5C6B78"/>
-                </a:solidFill>
-                <a:latin typeface="Calibri"/>
-              </a:rPr>
-              <a:t>The wow factor is knowing when not to act.</a:t>
+                  <a:srgbClr val="8EA0AE"/>
+                </a:solidFill>
+                <a:latin typeface="Calibri"/>
+              </a:rPr>
+              <a:t>Public tunnel never reaches the dashboard.</a:t>
             </a:r>
           </a:p>
         </p:txBody>
